--- a/Présentation.pptx
+++ b/Présentation.pptx
@@ -5,7 +5,7 @@
     <p:sldMasterId id="2147483648" r:id="rId1"/>
   </p:sldMasterIdLst>
   <p:notesMasterIdLst>
-    <p:notesMasterId r:id="rId10"/>
+    <p:notesMasterId r:id="rId12"/>
   </p:notesMasterIdLst>
   <p:sldIdLst>
     <p:sldId id="259" r:id="rId2"/>
@@ -16,6 +16,8 @@
     <p:sldId id="263" r:id="rId7"/>
     <p:sldId id="262" r:id="rId8"/>
     <p:sldId id="257" r:id="rId9"/>
+    <p:sldId id="264" r:id="rId10"/>
+    <p:sldId id="265" r:id="rId11"/>
   </p:sldIdLst>
   <p:sldSz cx="12192000" cy="6858000"/>
   <p:notesSz cx="6858000" cy="9144000"/>
@@ -114,6 +116,11 @@
       </a:defRPr>
     </a:lvl9pPr>
   </p:defaultTextStyle>
+  <p:extLst>
+    <p:ext uri="{EFAFB233-063F-42B5-8137-9DF3F51BA10A}">
+      <p15:sldGuideLst xmlns:p15="http://schemas.microsoft.com/office/powerpoint/2012/main"/>
+    </p:ext>
+  </p:extLst>
 </p:presentation>
 </file>
 
@@ -199,7 +206,7 @@
           <a:p>
             <a:fld id="{707E1AE0-F169-4B04-AC31-32DDA66614B2}" type="datetimeFigureOut">
               <a:rPr lang="fr-FR" smtClean="0"/>
-              <a:t>19/08/2026</a:t>
+              <a:t>21/08/2026</a:t>
             </a:fld>
             <a:endParaRPr lang="fr-FR"/>
           </a:p>
@@ -1038,6 +1045,351 @@
 </p:notes>
 </file>
 
+<file path=ppt/notesSlides/notesSlide6.xml><?xml version="1.0" encoding="utf-8"?>
+<p:notes xmlns:a="http://schemas.openxmlformats.org/drawingml/2006/main" xmlns:r="http://schemas.openxmlformats.org/officeDocument/2006/relationships" xmlns:p="http://schemas.openxmlformats.org/presentationml/2006/main">
+  <p:cSld>
+    <p:spTree>
+      <p:nvGrpSpPr>
+        <p:cNvPr id="1" name=""/>
+        <p:cNvGrpSpPr/>
+        <p:nvPr/>
+      </p:nvGrpSpPr>
+      <p:grpSpPr>
+        <a:xfrm>
+          <a:off x="0" y="0"/>
+          <a:ext cx="0" cy="0"/>
+          <a:chOff x="0" y="0"/>
+          <a:chExt cx="0" cy="0"/>
+        </a:xfrm>
+      </p:grpSpPr>
+      <p:sp>
+        <p:nvSpPr>
+          <p:cNvPr id="2" name="Espace réservé de l'image des diapositives 1"/>
+          <p:cNvSpPr>
+            <a:spLocks noGrp="1" noRot="1" noChangeAspect="1"/>
+          </p:cNvSpPr>
+          <p:nvPr>
+            <p:ph type="sldImg"/>
+          </p:nvPr>
+        </p:nvSpPr>
+        <p:spPr/>
+      </p:sp>
+      <p:sp>
+        <p:nvSpPr>
+          <p:cNvPr id="3" name="Espace réservé des notes 2"/>
+          <p:cNvSpPr>
+            <a:spLocks noGrp="1"/>
+          </p:cNvSpPr>
+          <p:nvPr>
+            <p:ph type="body" idx="1"/>
+          </p:nvPr>
+        </p:nvSpPr>
+        <p:spPr/>
+        <p:txBody>
+          <a:bodyPr/>
+          <a:lstStyle/>
+          <a:p>
+            <a:r>
+              <a:rPr lang="fr-FR" i="1" dirty="0"/>
+              <a:t>Note : La recherche d'exemples ciblés s'appuie sur le modèle d'</a:t>
+            </a:r>
+            <a:r>
+              <a:rPr lang="fr-FR" i="1" dirty="0" err="1"/>
+              <a:t>embedding</a:t>
+            </a:r>
+            <a:r>
+              <a:rPr lang="fr-FR" i="1" dirty="0"/>
+              <a:t> </a:t>
+            </a:r>
+            <a:r>
+              <a:rPr lang="fr-FR" sz="1200" i="1" kern="1200" dirty="0">
+                <a:solidFill>
+                  <a:schemeClr val="tx1"/>
+                </a:solidFill>
+                <a:latin typeface="+mn-lt"/>
+                <a:ea typeface="+mn-ea"/>
+                <a:cs typeface="+mn-cs"/>
+              </a:rPr>
+              <a:t>sentence-</a:t>
+            </a:r>
+            <a:r>
+              <a:rPr lang="fr-FR" sz="1200" i="1" kern="1200" dirty="0" err="1">
+                <a:solidFill>
+                  <a:schemeClr val="tx1"/>
+                </a:solidFill>
+                <a:latin typeface="+mn-lt"/>
+                <a:ea typeface="+mn-ea"/>
+                <a:cs typeface="+mn-cs"/>
+              </a:rPr>
+              <a:t>transformers</a:t>
+            </a:r>
+            <a:r>
+              <a:rPr lang="fr-FR" sz="1200" i="1" kern="1200" dirty="0">
+                <a:solidFill>
+                  <a:schemeClr val="tx1"/>
+                </a:solidFill>
+                <a:latin typeface="+mn-lt"/>
+                <a:ea typeface="+mn-ea"/>
+                <a:cs typeface="+mn-cs"/>
+              </a:rPr>
+              <a:t>/all-MiniLM-L6-v2</a:t>
+            </a:r>
+            <a:r>
+              <a:rPr lang="fr-FR" i="1" dirty="0"/>
+              <a:t>.</a:t>
+            </a:r>
+            <a:endParaRPr lang="fr-FR" dirty="0"/>
+          </a:p>
+          <a:p>
+            <a:r>
+              <a:rPr lang="fr-FR" b="1" dirty="0"/>
+              <a:t>Points clés à souligner dans votre analyse</a:t>
+            </a:r>
+          </a:p>
+          <a:p>
+            <a:r>
+              <a:rPr lang="fr-FR" b="1" dirty="0"/>
+              <a:t>L'impact du Few-Shot ciblé (RAG / </a:t>
+            </a:r>
+            <a:r>
+              <a:rPr lang="fr-FR" b="1" dirty="0" err="1"/>
+              <a:t>Similarity</a:t>
+            </a:r>
+            <a:r>
+              <a:rPr lang="fr-FR" b="1" dirty="0"/>
+              <a:t> </a:t>
+            </a:r>
+            <a:r>
+              <a:rPr lang="fr-FR" b="1" dirty="0" err="1"/>
+              <a:t>Search</a:t>
+            </a:r>
+            <a:r>
+              <a:rPr lang="fr-FR" b="1" dirty="0"/>
+              <a:t>) :</a:t>
+            </a:r>
+            <a:r>
+              <a:rPr lang="fr-FR" dirty="0"/>
+              <a:t> La sélection dynamique d'exemples proches via </a:t>
+            </a:r>
+            <a:r>
+              <a:rPr lang="fr-FR" sz="1200" kern="1200" dirty="0">
+                <a:solidFill>
+                  <a:schemeClr val="tx1"/>
+                </a:solidFill>
+                <a:latin typeface="+mn-lt"/>
+                <a:ea typeface="+mn-ea"/>
+                <a:cs typeface="+mn-cs"/>
+              </a:rPr>
+              <a:t>all-MiniLM-L6-v2</a:t>
+            </a:r>
+            <a:r>
+              <a:rPr lang="fr-FR" dirty="0"/>
+              <a:t> apporte le gain de précision le plus fort (+25 % d'</a:t>
+            </a:r>
+            <a:r>
+              <a:rPr lang="fr-FR" dirty="0" err="1"/>
+              <a:t>Accuracy</a:t>
+            </a:r>
+            <a:r>
+              <a:rPr lang="fr-FR" dirty="0"/>
+              <a:t> et +22,17 % de F1 </a:t>
+            </a:r>
+            <a:r>
+              <a:rPr lang="fr-FR" dirty="0" err="1"/>
+              <a:t>Weighted</a:t>
+            </a:r>
+            <a:r>
+              <a:rPr lang="fr-FR" dirty="0"/>
+              <a:t> sur </a:t>
+            </a:r>
+            <a:r>
+              <a:rPr lang="fr-FR" sz="1200" kern="1200" dirty="0">
+                <a:solidFill>
+                  <a:schemeClr val="tx1"/>
+                </a:solidFill>
+                <a:latin typeface="+mn-lt"/>
+                <a:ea typeface="+mn-ea"/>
+                <a:cs typeface="+mn-cs"/>
+              </a:rPr>
+              <a:t>mistral-</a:t>
+            </a:r>
+            <a:r>
+              <a:rPr lang="fr-FR" sz="1200" kern="1200" dirty="0" err="1">
+                <a:solidFill>
+                  <a:schemeClr val="tx1"/>
+                </a:solidFill>
+                <a:latin typeface="+mn-lt"/>
+                <a:ea typeface="+mn-ea"/>
+                <a:cs typeface="+mn-cs"/>
+              </a:rPr>
+              <a:t>small</a:t>
+            </a:r>
+            <a:r>
+              <a:rPr lang="fr-FR" dirty="0"/>
+              <a:t>).</a:t>
+            </a:r>
+          </a:p>
+          <a:p>
+            <a:r>
+              <a:rPr lang="fr-FR" b="1" dirty="0"/>
+              <a:t>L'écart Macro vs </a:t>
+            </a:r>
+            <a:r>
+              <a:rPr lang="fr-FR" b="1" dirty="0" err="1"/>
+              <a:t>Weighted</a:t>
+            </a:r>
+            <a:r>
+              <a:rPr lang="fr-FR" b="1" dirty="0"/>
+              <a:t> (Déséquilibre de classes) :</a:t>
+            </a:r>
+            <a:r>
+              <a:rPr lang="fr-FR" dirty="0"/>
+              <a:t> Le </a:t>
+            </a:r>
+            <a:r>
+              <a:rPr lang="fr-FR" b="1" dirty="0"/>
+              <a:t>F1 </a:t>
+            </a:r>
+            <a:r>
+              <a:rPr lang="fr-FR" b="1" dirty="0" err="1"/>
+              <a:t>Weighted</a:t>
+            </a:r>
+            <a:r>
+              <a:rPr lang="fr-FR" dirty="0"/>
+              <a:t> est nettement supérieur au </a:t>
+            </a:r>
+            <a:r>
+              <a:rPr lang="fr-FR" b="1" dirty="0"/>
+              <a:t>F1 Macro</a:t>
+            </a:r>
+            <a:r>
+              <a:rPr lang="fr-FR" dirty="0"/>
+              <a:t> (ex. 69,20 % vs 40,92 % sur le test final). Cela indique que le modèle fonctionne très bien sur les classes majoritaires, mais peine sur les catégories sous-représentées.</a:t>
+            </a:r>
+          </a:p>
+          <a:p>
+            <a:r>
+              <a:rPr lang="fr-FR" b="1" dirty="0"/>
+              <a:t>Le compromis Précision / Latence (Small vs Medium) :</a:t>
+            </a:r>
+            <a:endParaRPr lang="fr-FR" dirty="0"/>
+          </a:p>
+          <a:p>
+            <a:pPr lvl="1"/>
+            <a:r>
+              <a:rPr lang="fr-FR" sz="1200" kern="1200" dirty="0">
+                <a:solidFill>
+                  <a:schemeClr val="tx1"/>
+                </a:solidFill>
+                <a:latin typeface="+mn-lt"/>
+                <a:ea typeface="+mn-ea"/>
+                <a:cs typeface="+mn-cs"/>
+              </a:rPr>
+              <a:t>mistral-medium</a:t>
+            </a:r>
+            <a:r>
+              <a:rPr lang="fr-FR" dirty="0"/>
+              <a:t> offre la meilleure performance globale (</a:t>
+            </a:r>
+            <a:r>
+              <a:rPr lang="fr-FR" b="1" dirty="0"/>
+              <a:t>85 % </a:t>
+            </a:r>
+            <a:r>
+              <a:rPr lang="fr-FR" b="1" dirty="0" err="1"/>
+              <a:t>Accuracy</a:t>
+            </a:r>
+            <a:r>
+              <a:rPr lang="fr-FR" dirty="0"/>
+              <a:t>), mais avec une latence P95 prohibitive (</a:t>
+            </a:r>
+            <a:r>
+              <a:rPr lang="fr-FR" b="1" dirty="0"/>
+              <a:t>61 secondes</a:t>
+            </a:r>
+            <a:r>
+              <a:rPr lang="fr-FR" dirty="0"/>
+              <a:t>), inadaptée à un usage temps réel.</a:t>
+            </a:r>
+          </a:p>
+          <a:p>
+            <a:pPr lvl="1"/>
+            <a:r>
+              <a:rPr lang="fr-FR" sz="1200" kern="1200" dirty="0">
+                <a:solidFill>
+                  <a:schemeClr val="tx1"/>
+                </a:solidFill>
+                <a:latin typeface="+mn-lt"/>
+                <a:ea typeface="+mn-ea"/>
+                <a:cs typeface="+mn-cs"/>
+              </a:rPr>
+              <a:t>mistral-</a:t>
+            </a:r>
+            <a:r>
+              <a:rPr lang="fr-FR" sz="1200" kern="1200" dirty="0" err="1">
+                <a:solidFill>
+                  <a:schemeClr val="tx1"/>
+                </a:solidFill>
+                <a:latin typeface="+mn-lt"/>
+                <a:ea typeface="+mn-ea"/>
+                <a:cs typeface="+mn-cs"/>
+              </a:rPr>
+              <a:t>small</a:t>
+            </a:r>
+            <a:r>
+              <a:rPr lang="fr-FR" dirty="0"/>
+              <a:t> avec RAG constitue le meilleur compromis opérationnel, maintenant un temps médian autour de </a:t>
+            </a:r>
+            <a:r>
+              <a:rPr lang="fr-FR" b="1" dirty="0"/>
+              <a:t>0,45 s</a:t>
+            </a:r>
+            <a:r>
+              <a:rPr lang="fr-FR" dirty="0"/>
+              <a:t>.</a:t>
+            </a:r>
+          </a:p>
+          <a:p>
+            <a:endParaRPr lang="fr-FR" dirty="0"/>
+          </a:p>
+        </p:txBody>
+      </p:sp>
+      <p:sp>
+        <p:nvSpPr>
+          <p:cNvPr id="4" name="Espace réservé du numéro de diapositive 3"/>
+          <p:cNvSpPr>
+            <a:spLocks noGrp="1"/>
+          </p:cNvSpPr>
+          <p:nvPr>
+            <p:ph type="sldNum" sz="quarter" idx="5"/>
+          </p:nvPr>
+        </p:nvSpPr>
+        <p:spPr/>
+        <p:txBody>
+          <a:bodyPr/>
+          <a:lstStyle/>
+          <a:p>
+            <a:fld id="{4734364E-57BD-44F2-A53B-320C3BD2F0CA}" type="slidenum">
+              <a:rPr lang="fr-FR" smtClean="0"/>
+              <a:t>10</a:t>
+            </a:fld>
+            <a:endParaRPr lang="fr-FR"/>
+          </a:p>
+        </p:txBody>
+      </p:sp>
+    </p:spTree>
+    <p:extLst>
+      <p:ext uri="{BB962C8B-B14F-4D97-AF65-F5344CB8AC3E}">
+        <p14:creationId xmlns:p14="http://schemas.microsoft.com/office/powerpoint/2010/main" val="61426973"/>
+      </p:ext>
+    </p:extLst>
+  </p:cSld>
+  <p:clrMapOvr>
+    <a:masterClrMapping/>
+  </p:clrMapOvr>
+</p:notes>
+</file>
+
 <file path=ppt/slideLayouts/slideLayout1.xml><?xml version="1.0" encoding="utf-8"?>
 <p:sldLayout xmlns:a="http://schemas.openxmlformats.org/drawingml/2006/main" xmlns:r="http://schemas.openxmlformats.org/officeDocument/2006/relationships" xmlns:p="http://schemas.openxmlformats.org/presentationml/2006/main" type="title" preserve="1">
   <p:cSld name="Diapositive de titre">
@@ -1185,7 +1537,7 @@
           <a:p>
             <a:fld id="{D61BD361-66C9-484E-B214-6DC7693ABA43}" type="datetimeFigureOut">
               <a:rPr lang="fr-FR" smtClean="0"/>
-              <a:t>19/08/2026</a:t>
+              <a:t>21/08/2026</a:t>
             </a:fld>
             <a:endParaRPr lang="fr-FR"/>
           </a:p>
@@ -1383,7 +1735,7 @@
           <a:p>
             <a:fld id="{D61BD361-66C9-484E-B214-6DC7693ABA43}" type="datetimeFigureOut">
               <a:rPr lang="fr-FR" smtClean="0"/>
-              <a:t>19/08/2026</a:t>
+              <a:t>21/08/2026</a:t>
             </a:fld>
             <a:endParaRPr lang="fr-FR"/>
           </a:p>
@@ -1591,7 +1943,7 @@
           <a:p>
             <a:fld id="{D61BD361-66C9-484E-B214-6DC7693ABA43}" type="datetimeFigureOut">
               <a:rPr lang="fr-FR" smtClean="0"/>
-              <a:t>19/08/2026</a:t>
+              <a:t>21/08/2026</a:t>
             </a:fld>
             <a:endParaRPr lang="fr-FR"/>
           </a:p>
@@ -1789,7 +2141,7 @@
           <a:p>
             <a:fld id="{D61BD361-66C9-484E-B214-6DC7693ABA43}" type="datetimeFigureOut">
               <a:rPr lang="fr-FR" smtClean="0"/>
-              <a:t>19/08/2026</a:t>
+              <a:t>21/08/2026</a:t>
             </a:fld>
             <a:endParaRPr lang="fr-FR"/>
           </a:p>
@@ -2064,7 +2416,7 @@
           <a:p>
             <a:fld id="{D61BD361-66C9-484E-B214-6DC7693ABA43}" type="datetimeFigureOut">
               <a:rPr lang="fr-FR" smtClean="0"/>
-              <a:t>19/08/2026</a:t>
+              <a:t>21/08/2026</a:t>
             </a:fld>
             <a:endParaRPr lang="fr-FR"/>
           </a:p>
@@ -2329,7 +2681,7 @@
           <a:p>
             <a:fld id="{D61BD361-66C9-484E-B214-6DC7693ABA43}" type="datetimeFigureOut">
               <a:rPr lang="fr-FR" smtClean="0"/>
-              <a:t>19/08/2026</a:t>
+              <a:t>21/08/2026</a:t>
             </a:fld>
             <a:endParaRPr lang="fr-FR"/>
           </a:p>
@@ -2741,7 +3093,7 @@
           <a:p>
             <a:fld id="{D61BD361-66C9-484E-B214-6DC7693ABA43}" type="datetimeFigureOut">
               <a:rPr lang="fr-FR" smtClean="0"/>
-              <a:t>19/08/2026</a:t>
+              <a:t>21/08/2026</a:t>
             </a:fld>
             <a:endParaRPr lang="fr-FR"/>
           </a:p>
@@ -2882,7 +3234,7 @@
           <a:p>
             <a:fld id="{D61BD361-66C9-484E-B214-6DC7693ABA43}" type="datetimeFigureOut">
               <a:rPr lang="fr-FR" smtClean="0"/>
-              <a:t>19/08/2026</a:t>
+              <a:t>21/08/2026</a:t>
             </a:fld>
             <a:endParaRPr lang="fr-FR"/>
           </a:p>
@@ -2995,7 +3347,7 @@
           <a:p>
             <a:fld id="{D61BD361-66C9-484E-B214-6DC7693ABA43}" type="datetimeFigureOut">
               <a:rPr lang="fr-FR" smtClean="0"/>
-              <a:t>19/08/2026</a:t>
+              <a:t>21/08/2026</a:t>
             </a:fld>
             <a:endParaRPr lang="fr-FR"/>
           </a:p>
@@ -3306,7 +3658,7 @@
           <a:p>
             <a:fld id="{D61BD361-66C9-484E-B214-6DC7693ABA43}" type="datetimeFigureOut">
               <a:rPr lang="fr-FR" smtClean="0"/>
-              <a:t>19/08/2026</a:t>
+              <a:t>21/08/2026</a:t>
             </a:fld>
             <a:endParaRPr lang="fr-FR"/>
           </a:p>
@@ -3594,7 +3946,7 @@
           <a:p>
             <a:fld id="{D61BD361-66C9-484E-B214-6DC7693ABA43}" type="datetimeFigureOut">
               <a:rPr lang="fr-FR" smtClean="0"/>
-              <a:t>19/08/2026</a:t>
+              <a:t>21/08/2026</a:t>
             </a:fld>
             <a:endParaRPr lang="fr-FR"/>
           </a:p>
@@ -3835,7 +4187,7 @@
           <a:p>
             <a:fld id="{D61BD361-66C9-484E-B214-6DC7693ABA43}" type="datetimeFigureOut">
               <a:rPr lang="fr-FR" smtClean="0"/>
-              <a:t>19/08/2026</a:t>
+              <a:t>21/08/2026</a:t>
             </a:fld>
             <a:endParaRPr lang="fr-FR"/>
           </a:p>
@@ -4703,6 +5055,99 @@
 </p:sld>
 </file>
 
+<file path=ppt/slides/slide10.xml><?xml version="1.0" encoding="utf-8"?>
+<p:sld xmlns:a="http://schemas.openxmlformats.org/drawingml/2006/main" xmlns:r="http://schemas.openxmlformats.org/officeDocument/2006/relationships" xmlns:p="http://schemas.openxmlformats.org/presentationml/2006/main">
+  <p:cSld>
+    <p:spTree>
+      <p:nvGrpSpPr>
+        <p:cNvPr id="1" name=""/>
+        <p:cNvGrpSpPr/>
+        <p:nvPr/>
+      </p:nvGrpSpPr>
+      <p:grpSpPr>
+        <a:xfrm>
+          <a:off x="0" y="0"/>
+          <a:ext cx="0" cy="0"/>
+          <a:chOff x="0" y="0"/>
+          <a:chExt cx="0" cy="0"/>
+        </a:xfrm>
+      </p:grpSpPr>
+      <p:sp>
+        <p:nvSpPr>
+          <p:cNvPr id="6" name="Titre 1">
+            <a:extLst>
+              <a:ext uri="{FF2B5EF4-FFF2-40B4-BE49-F238E27FC236}">
+                <a16:creationId xmlns:a16="http://schemas.microsoft.com/office/drawing/2014/main" id="{C6005B1D-AC92-C379-9562-8AB029E26A19}"/>
+              </a:ext>
+            </a:extLst>
+          </p:cNvPr>
+          <p:cNvSpPr>
+            <a:spLocks noGrp="1"/>
+          </p:cNvSpPr>
+          <p:nvPr>
+            <p:ph type="title"/>
+          </p:nvPr>
+        </p:nvSpPr>
+        <p:spPr>
+          <a:xfrm>
+            <a:off x="838200" y="365125"/>
+            <a:ext cx="10515600" cy="1325563"/>
+          </a:xfrm>
+        </p:spPr>
+        <p:txBody>
+          <a:bodyPr/>
+          <a:lstStyle/>
+          <a:p>
+            <a:r>
+              <a:rPr lang="fr-FR" dirty="0"/>
+              <a:t>Approche LLM</a:t>
+            </a:r>
+          </a:p>
+        </p:txBody>
+      </p:sp>
+      <p:pic>
+        <p:nvPicPr>
+          <p:cNvPr id="10" name="Image 9">
+            <a:extLst>
+              <a:ext uri="{FF2B5EF4-FFF2-40B4-BE49-F238E27FC236}">
+                <a16:creationId xmlns:a16="http://schemas.microsoft.com/office/drawing/2014/main" id="{069CEBDF-0F56-6E95-4704-E93E9F7FF17F}"/>
+              </a:ext>
+            </a:extLst>
+          </p:cNvPr>
+          <p:cNvPicPr>
+            <a:picLocks noChangeAspect="1"/>
+          </p:cNvPicPr>
+          <p:nvPr/>
+        </p:nvPicPr>
+        <p:blipFill>
+          <a:blip r:embed="rId3"/>
+          <a:stretch>
+            <a:fillRect/>
+          </a:stretch>
+        </p:blipFill>
+        <p:spPr>
+          <a:xfrm>
+            <a:off x="520895" y="2374129"/>
+            <a:ext cx="11150209" cy="3016952"/>
+          </a:xfrm>
+          <a:prstGeom prst="rect">
+            <a:avLst/>
+          </a:prstGeom>
+        </p:spPr>
+      </p:pic>
+    </p:spTree>
+    <p:extLst>
+      <p:ext uri="{BB962C8B-B14F-4D97-AF65-F5344CB8AC3E}">
+        <p14:creationId xmlns:p14="http://schemas.microsoft.com/office/powerpoint/2010/main" val="1951474282"/>
+      </p:ext>
+    </p:extLst>
+  </p:cSld>
+  <p:clrMapOvr>
+    <a:masterClrMapping/>
+  </p:clrMapOvr>
+</p:sld>
+</file>
+
 <file path=ppt/slides/slide2.xml><?xml version="1.0" encoding="utf-8"?>
 <p:sld xmlns:a="http://schemas.openxmlformats.org/drawingml/2006/main" xmlns:r="http://schemas.openxmlformats.org/officeDocument/2006/relationships" xmlns:p="http://schemas.openxmlformats.org/presentationml/2006/main">
   <p:cSld>
@@ -6649,6 +7094,92 @@
     <p:extLst>
       <p:ext uri="{BB962C8B-B14F-4D97-AF65-F5344CB8AC3E}">
         <p14:creationId xmlns:p14="http://schemas.microsoft.com/office/powerpoint/2010/main" val="2964250853"/>
+      </p:ext>
+    </p:extLst>
+  </p:cSld>
+  <p:clrMapOvr>
+    <a:masterClrMapping/>
+  </p:clrMapOvr>
+</p:sld>
+</file>
+
+<file path=ppt/slides/slide9.xml><?xml version="1.0" encoding="utf-8"?>
+<p:sld xmlns:a="http://schemas.openxmlformats.org/drawingml/2006/main" xmlns:r="http://schemas.openxmlformats.org/officeDocument/2006/relationships" xmlns:p="http://schemas.openxmlformats.org/presentationml/2006/main">
+  <p:cSld>
+    <p:spTree>
+      <p:nvGrpSpPr>
+        <p:cNvPr id="1" name=""/>
+        <p:cNvGrpSpPr/>
+        <p:nvPr/>
+      </p:nvGrpSpPr>
+      <p:grpSpPr>
+        <a:xfrm>
+          <a:off x="0" y="0"/>
+          <a:ext cx="0" cy="0"/>
+          <a:chOff x="0" y="0"/>
+          <a:chExt cx="0" cy="0"/>
+        </a:xfrm>
+      </p:grpSpPr>
+      <p:sp>
+        <p:nvSpPr>
+          <p:cNvPr id="2" name="Titre 1">
+            <a:extLst>
+              <a:ext uri="{FF2B5EF4-FFF2-40B4-BE49-F238E27FC236}">
+                <a16:creationId xmlns:a16="http://schemas.microsoft.com/office/drawing/2014/main" id="{E9BAAED3-07A6-D09F-B3B8-555F2C191CB4}"/>
+              </a:ext>
+            </a:extLst>
+          </p:cNvPr>
+          <p:cNvSpPr>
+            <a:spLocks noGrp="1"/>
+          </p:cNvSpPr>
+          <p:nvPr>
+            <p:ph type="title"/>
+          </p:nvPr>
+        </p:nvSpPr>
+        <p:spPr/>
+        <p:txBody>
+          <a:bodyPr/>
+          <a:lstStyle/>
+          <a:p>
+            <a:r>
+              <a:rPr lang="fr-FR" dirty="0"/>
+              <a:t>Approche LLM</a:t>
+            </a:r>
+          </a:p>
+        </p:txBody>
+      </p:sp>
+      <p:sp>
+        <p:nvSpPr>
+          <p:cNvPr id="3" name="Espace réservé du contenu 2">
+            <a:extLst>
+              <a:ext uri="{FF2B5EF4-FFF2-40B4-BE49-F238E27FC236}">
+                <a16:creationId xmlns:a16="http://schemas.microsoft.com/office/drawing/2014/main" id="{53D1299C-F00E-14BE-F98C-293219B414E2}"/>
+              </a:ext>
+            </a:extLst>
+          </p:cNvPr>
+          <p:cNvSpPr>
+            <a:spLocks noGrp="1"/>
+          </p:cNvSpPr>
+          <p:nvPr>
+            <p:ph idx="1"/>
+          </p:nvPr>
+        </p:nvSpPr>
+        <p:spPr/>
+        <p:txBody>
+          <a:bodyPr/>
+          <a:lstStyle/>
+          <a:p>
+            <a:r>
+              <a:rPr lang="fr-FR" dirty="0"/>
+              <a:t>classification par prompt, few-shot et few-shot dynamique avec FAISS</a:t>
+            </a:r>
+          </a:p>
+        </p:txBody>
+      </p:sp>
+    </p:spTree>
+    <p:extLst>
+      <p:ext uri="{BB962C8B-B14F-4D97-AF65-F5344CB8AC3E}">
+        <p14:creationId xmlns:p14="http://schemas.microsoft.com/office/powerpoint/2010/main" val="3926061439"/>
       </p:ext>
     </p:extLst>
   </p:cSld>

--- a/Présentation.pptx
+++ b/Présentation.pptx
@@ -5,19 +5,28 @@
     <p:sldMasterId id="2147483648" r:id="rId1"/>
   </p:sldMasterIdLst>
   <p:notesMasterIdLst>
-    <p:notesMasterId r:id="rId12"/>
+    <p:notesMasterId r:id="rId21"/>
   </p:notesMasterIdLst>
   <p:sldIdLst>
     <p:sldId id="259" r:id="rId2"/>
     <p:sldId id="260" r:id="rId3"/>
     <p:sldId id="258" r:id="rId4"/>
     <p:sldId id="261" r:id="rId5"/>
-    <p:sldId id="256" r:id="rId6"/>
+    <p:sldId id="269" r:id="rId6"/>
     <p:sldId id="263" r:id="rId7"/>
     <p:sldId id="262" r:id="rId8"/>
     <p:sldId id="257" r:id="rId9"/>
-    <p:sldId id="264" r:id="rId10"/>
-    <p:sldId id="265" r:id="rId11"/>
+    <p:sldId id="267" r:id="rId10"/>
+    <p:sldId id="272" r:id="rId11"/>
+    <p:sldId id="271" r:id="rId12"/>
+    <p:sldId id="274" r:id="rId13"/>
+    <p:sldId id="264" r:id="rId14"/>
+    <p:sldId id="266" r:id="rId15"/>
+    <p:sldId id="265" r:id="rId16"/>
+    <p:sldId id="268" r:id="rId17"/>
+    <p:sldId id="273" r:id="rId18"/>
+    <p:sldId id="270" r:id="rId19"/>
+    <p:sldId id="275" r:id="rId20"/>
   </p:sldIdLst>
   <p:sldSz cx="12192000" cy="6858000"/>
   <p:notesSz cx="6858000" cy="9144000"/>
@@ -206,7 +215,7 @@
           <a:p>
             <a:fld id="{707E1AE0-F169-4B04-AC31-32DDA66614B2}" type="datetimeFigureOut">
               <a:rPr lang="fr-FR" smtClean="0"/>
-              <a:t>21/08/2026</a:t>
+              <a:t>24/08/2026</a:t>
             </a:fld>
             <a:endParaRPr lang="fr-FR"/>
           </a:p>
@@ -603,7 +612,31 @@
           <a:p>
             <a:r>
               <a:rPr lang="fr-FR" dirty="0"/>
-              <a:t>les labels ont été normalisés vers la nomenclature récente afin d'obtenir une cible cohérente pour l'apprentissage.</a:t>
+              <a:t>Consumer Claim = principale variable prédictive</a:t>
+            </a:r>
+          </a:p>
+          <a:p>
+            <a:r>
+              <a:rPr lang="fr-FR" dirty="0"/>
+              <a:t>Mais :</a:t>
+            </a:r>
+          </a:p>
+          <a:p>
+            <a:r>
+              <a:rPr lang="fr-FR" dirty="0"/>
+              <a:t>valeurs manquantes</a:t>
+            </a:r>
+          </a:p>
+          <a:p>
+            <a:r>
+              <a:rPr lang="fr-FR" dirty="0"/>
+              <a:t>texte dépendant du canal de soumission</a:t>
+            </a:r>
+          </a:p>
+          <a:p>
+            <a:r>
+              <a:rPr lang="fr-FR" dirty="0"/>
+              <a:t>couverture limitée</a:t>
             </a:r>
           </a:p>
         </p:txBody>
@@ -634,7 +667,7 @@
     </p:spTree>
     <p:extLst>
       <p:ext uri="{BB962C8B-B14F-4D97-AF65-F5344CB8AC3E}">
-        <p14:creationId xmlns:p14="http://schemas.microsoft.com/office/powerpoint/2010/main" val="515014432"/>
+        <p14:creationId xmlns:p14="http://schemas.microsoft.com/office/powerpoint/2010/main" val="3886912638"/>
       </p:ext>
     </p:extLst>
   </p:cSld>
@@ -1371,7 +1404,7 @@
           <a:p>
             <a:fld id="{4734364E-57BD-44F2-A53B-320C3BD2F0CA}" type="slidenum">
               <a:rPr lang="fr-FR" smtClean="0"/>
-              <a:t>10</a:t>
+              <a:t>15</a:t>
             </a:fld>
             <a:endParaRPr lang="fr-FR"/>
           </a:p>
@@ -1381,6 +1414,481 @@
     <p:extLst>
       <p:ext uri="{BB962C8B-B14F-4D97-AF65-F5344CB8AC3E}">
         <p14:creationId xmlns:p14="http://schemas.microsoft.com/office/powerpoint/2010/main" val="61426973"/>
+      </p:ext>
+    </p:extLst>
+  </p:cSld>
+  <p:clrMapOvr>
+    <a:masterClrMapping/>
+  </p:clrMapOvr>
+</p:notes>
+</file>
+
+<file path=ppt/notesSlides/notesSlide7.xml><?xml version="1.0" encoding="utf-8"?>
+<p:notes xmlns:a="http://schemas.openxmlformats.org/drawingml/2006/main" xmlns:r="http://schemas.openxmlformats.org/officeDocument/2006/relationships" xmlns:p="http://schemas.openxmlformats.org/presentationml/2006/main">
+  <p:cSld>
+    <p:spTree>
+      <p:nvGrpSpPr>
+        <p:cNvPr id="1" name=""/>
+        <p:cNvGrpSpPr/>
+        <p:nvPr/>
+      </p:nvGrpSpPr>
+      <p:grpSpPr>
+        <a:xfrm>
+          <a:off x="0" y="0"/>
+          <a:ext cx="0" cy="0"/>
+          <a:chOff x="0" y="0"/>
+          <a:chExt cx="0" cy="0"/>
+        </a:xfrm>
+      </p:grpSpPr>
+      <p:sp>
+        <p:nvSpPr>
+          <p:cNvPr id="2" name="Espace réservé de l'image des diapositives 1"/>
+          <p:cNvSpPr>
+            <a:spLocks noGrp="1" noRot="1" noChangeAspect="1"/>
+          </p:cNvSpPr>
+          <p:nvPr>
+            <p:ph type="sldImg"/>
+          </p:nvPr>
+        </p:nvSpPr>
+        <p:spPr/>
+      </p:sp>
+      <p:sp>
+        <p:nvSpPr>
+          <p:cNvPr id="3" name="Espace réservé des notes 2"/>
+          <p:cNvSpPr>
+            <a:spLocks noGrp="1"/>
+          </p:cNvSpPr>
+          <p:nvPr>
+            <p:ph type="body" idx="1"/>
+          </p:nvPr>
+        </p:nvSpPr>
+        <p:spPr/>
+        <p:txBody>
+          <a:bodyPr/>
+          <a:lstStyle/>
+          <a:p>
+            <a:pPr marL="0" marR="0" lvl="0" indent="0" algn="l" defTabSz="914400" rtl="0" eaLnBrk="1" fontAlgn="auto" latinLnBrk="0" hangingPunct="1">
+              <a:lnSpc>
+                <a:spcPct val="100000"/>
+              </a:lnSpc>
+              <a:spcBef>
+                <a:spcPts val="0"/>
+              </a:spcBef>
+              <a:spcAft>
+                <a:spcPts val="0"/>
+              </a:spcAft>
+              <a:buClrTx/>
+              <a:buSzTx/>
+              <a:buFontTx/>
+              <a:buNone/>
+              <a:tabLst/>
+              <a:defRPr/>
+            </a:pPr>
+            <a:r>
+              <a:rPr lang="fr-FR" b="1" dirty="0" err="1"/>
+              <a:t>Accuracy_score</a:t>
+            </a:r>
+            <a:r>
+              <a:rPr lang="fr-FR" b="1" dirty="0"/>
+              <a:t>: </a:t>
+            </a:r>
+            <a:r>
+              <a:rPr lang="fr-FR" sz="1200" b="0" kern="1200" dirty="0">
+                <a:solidFill>
+                  <a:schemeClr val="tx1"/>
+                </a:solidFill>
+                <a:effectLst/>
+                <a:latin typeface="+mn-lt"/>
+                <a:ea typeface="+mn-ea"/>
+                <a:cs typeface="+mn-cs"/>
+              </a:rPr>
+              <a:t>Intéressante comme indicateur général, mais ne doit pas être la métrique principale avec un </a:t>
+            </a:r>
+            <a:r>
+              <a:rPr lang="fr-FR" sz="1200" b="0" kern="1200" dirty="0" err="1">
+                <a:solidFill>
+                  <a:schemeClr val="tx1"/>
+                </a:solidFill>
+                <a:effectLst/>
+                <a:latin typeface="+mn-lt"/>
+                <a:ea typeface="+mn-ea"/>
+                <a:cs typeface="+mn-cs"/>
+              </a:rPr>
+              <a:t>dataset</a:t>
+            </a:r>
+            <a:r>
+              <a:rPr lang="fr-FR" sz="1200" b="0" kern="1200" dirty="0">
+                <a:solidFill>
+                  <a:schemeClr val="tx1"/>
+                </a:solidFill>
+                <a:effectLst/>
+                <a:latin typeface="+mn-lt"/>
+                <a:ea typeface="+mn-ea"/>
+                <a:cs typeface="+mn-cs"/>
+              </a:rPr>
+              <a:t> fortement déséquilibré</a:t>
+            </a:r>
+          </a:p>
+          <a:p>
+            <a:pPr marL="0" marR="0" lvl="0" indent="0" algn="l" defTabSz="914400" rtl="0" eaLnBrk="1" fontAlgn="auto" latinLnBrk="0" hangingPunct="1">
+              <a:lnSpc>
+                <a:spcPct val="100000"/>
+              </a:lnSpc>
+              <a:spcBef>
+                <a:spcPts val="0"/>
+              </a:spcBef>
+              <a:spcAft>
+                <a:spcPts val="0"/>
+              </a:spcAft>
+              <a:buClrTx/>
+              <a:buSzTx/>
+              <a:buFontTx/>
+              <a:buNone/>
+              <a:tabLst/>
+              <a:defRPr/>
+            </a:pPr>
+            <a:r>
+              <a:rPr lang="fr-FR" sz="1200" b="1" kern="1200" dirty="0" err="1">
+                <a:solidFill>
+                  <a:schemeClr val="tx1"/>
+                </a:solidFill>
+                <a:effectLst/>
+                <a:latin typeface="+mn-lt"/>
+                <a:ea typeface="+mn-ea"/>
+                <a:cs typeface="+mn-cs"/>
+              </a:rPr>
+              <a:t>Precision</a:t>
+            </a:r>
+            <a:r>
+              <a:rPr lang="fr-FR" sz="1200" b="1" kern="1200" dirty="0">
+                <a:solidFill>
+                  <a:schemeClr val="tx1"/>
+                </a:solidFill>
+                <a:effectLst/>
+                <a:latin typeface="+mn-lt"/>
+                <a:ea typeface="+mn-ea"/>
+                <a:cs typeface="+mn-cs"/>
+              </a:rPr>
+              <a:t> macro: </a:t>
+            </a:r>
+            <a:r>
+              <a:rPr lang="fr-FR" sz="1200" b="0" kern="1200" dirty="0">
+                <a:solidFill>
+                  <a:schemeClr val="tx1"/>
+                </a:solidFill>
+                <a:effectLst/>
+                <a:latin typeface="+mn-lt"/>
+                <a:ea typeface="+mn-ea"/>
+                <a:cs typeface="+mn-cs"/>
+              </a:rPr>
+              <a:t>Chaque catégorie possède ici le même poids.</a:t>
+            </a:r>
+          </a:p>
+          <a:p>
+            <a:r>
+              <a:rPr lang="fr-FR" sz="1200" b="1" kern="1200" dirty="0" err="1">
+                <a:solidFill>
+                  <a:schemeClr val="tx1"/>
+                </a:solidFill>
+                <a:effectLst/>
+                <a:latin typeface="+mn-lt"/>
+                <a:ea typeface="+mn-ea"/>
+                <a:cs typeface="+mn-cs"/>
+              </a:rPr>
+              <a:t>Recall</a:t>
+            </a:r>
+            <a:r>
+              <a:rPr lang="fr-FR" sz="1200" b="1" kern="1200" dirty="0">
+                <a:solidFill>
+                  <a:schemeClr val="tx1"/>
+                </a:solidFill>
+                <a:effectLst/>
+                <a:latin typeface="+mn-lt"/>
+                <a:ea typeface="+mn-ea"/>
+                <a:cs typeface="+mn-cs"/>
+              </a:rPr>
+              <a:t> macro:</a:t>
+            </a:r>
+            <a:endParaRPr lang="fr-FR" sz="1200" b="0" kern="1200" dirty="0">
+              <a:solidFill>
+                <a:schemeClr val="tx1"/>
+              </a:solidFill>
+              <a:effectLst/>
+              <a:latin typeface="+mn-lt"/>
+              <a:ea typeface="+mn-ea"/>
+              <a:cs typeface="+mn-cs"/>
+            </a:endParaRPr>
+          </a:p>
+          <a:p>
+            <a:r>
+              <a:rPr lang="fr-FR" sz="1200" b="0" kern="1200" dirty="0">
+                <a:solidFill>
+                  <a:schemeClr val="tx1"/>
+                </a:solidFill>
+                <a:effectLst/>
+                <a:latin typeface="+mn-lt"/>
+                <a:ea typeface="+mn-ea"/>
+                <a:cs typeface="+mn-cs"/>
+              </a:rPr>
+              <a:t>Le </a:t>
+            </a:r>
+            <a:r>
+              <a:rPr lang="fr-FR" sz="1200" b="0" kern="1200" dirty="0" err="1">
+                <a:solidFill>
+                  <a:schemeClr val="tx1"/>
+                </a:solidFill>
+                <a:effectLst/>
+                <a:latin typeface="+mn-lt"/>
+                <a:ea typeface="+mn-ea"/>
+                <a:cs typeface="+mn-cs"/>
+              </a:rPr>
+              <a:t>recall</a:t>
+            </a:r>
+            <a:r>
+              <a:rPr lang="fr-FR" sz="1200" b="0" kern="1200" dirty="0">
+                <a:solidFill>
+                  <a:schemeClr val="tx1"/>
+                </a:solidFill>
+                <a:effectLst/>
+                <a:latin typeface="+mn-lt"/>
+                <a:ea typeface="+mn-ea"/>
+                <a:cs typeface="+mn-cs"/>
+              </a:rPr>
+              <a:t> est particulièrement intéressant dans notre contexte :</a:t>
+            </a:r>
+          </a:p>
+          <a:p>
+            <a:r>
+              <a:rPr lang="fr-FR" sz="1200" b="0" kern="1200" dirty="0">
+                <a:solidFill>
+                  <a:schemeClr val="tx1"/>
+                </a:solidFill>
+                <a:effectLst/>
+                <a:latin typeface="+mn-lt"/>
+                <a:ea typeface="+mn-ea"/>
+                <a:cs typeface="+mn-cs"/>
+              </a:rPr>
+              <a:t>Parmi les réclamations réellement appartenant à une catégorie, combien sont correctement orientées vers cette catégorie ?</a:t>
+            </a:r>
+          </a:p>
+          <a:p>
+            <a:r>
+              <a:rPr lang="fr-FR" sz="1200" b="1" kern="1200" dirty="0">
+                <a:solidFill>
+                  <a:schemeClr val="tx1"/>
+                </a:solidFill>
+                <a:effectLst/>
+                <a:latin typeface="+mn-lt"/>
+                <a:ea typeface="+mn-ea"/>
+                <a:cs typeface="+mn-cs"/>
+              </a:rPr>
+              <a:t>F1 macro:</a:t>
+            </a:r>
+            <a:endParaRPr lang="fr-FR" sz="1200" b="0" kern="1200" dirty="0">
+              <a:solidFill>
+                <a:schemeClr val="tx1"/>
+              </a:solidFill>
+              <a:effectLst/>
+              <a:latin typeface="+mn-lt"/>
+              <a:ea typeface="+mn-ea"/>
+              <a:cs typeface="+mn-cs"/>
+            </a:endParaRPr>
+          </a:p>
+          <a:p>
+            <a:r>
+              <a:rPr lang="fr-FR" sz="1200" b="0" kern="1200" dirty="0">
+                <a:solidFill>
+                  <a:schemeClr val="tx1"/>
+                </a:solidFill>
+                <a:effectLst/>
+                <a:latin typeface="+mn-lt"/>
+                <a:ea typeface="+mn-ea"/>
+                <a:cs typeface="+mn-cs"/>
+              </a:rPr>
+              <a:t>F1 macro comme métrique principale.</a:t>
+            </a:r>
+          </a:p>
+          <a:p>
+            <a:r>
+              <a:rPr lang="fr-FR" sz="1200" b="0" kern="1200" dirty="0">
+                <a:solidFill>
+                  <a:schemeClr val="tx1"/>
+                </a:solidFill>
+                <a:effectLst/>
+                <a:latin typeface="+mn-lt"/>
+                <a:ea typeface="+mn-ea"/>
+                <a:cs typeface="+mn-cs"/>
+              </a:rPr>
+              <a:t>Pourquoi ?</a:t>
+            </a:r>
+          </a:p>
+          <a:p>
+            <a:r>
+              <a:rPr lang="fr-FR" sz="1200" b="0" kern="1200" dirty="0">
+                <a:solidFill>
+                  <a:schemeClr val="tx1"/>
+                </a:solidFill>
+                <a:effectLst/>
+                <a:latin typeface="+mn-lt"/>
+                <a:ea typeface="+mn-ea"/>
+                <a:cs typeface="+mn-cs"/>
+              </a:rPr>
+              <a:t>Parce qu'elle donne autant d'importance à </a:t>
+            </a:r>
+            <a:r>
+              <a:rPr lang="fr-FR" sz="1200" b="0" kern="1200" dirty="0" err="1">
+                <a:solidFill>
+                  <a:schemeClr val="tx1"/>
+                </a:solidFill>
+                <a:effectLst/>
+                <a:latin typeface="+mn-lt"/>
+                <a:ea typeface="+mn-ea"/>
+                <a:cs typeface="+mn-cs"/>
+              </a:rPr>
+              <a:t>Other</a:t>
+            </a:r>
+            <a:r>
+              <a:rPr lang="fr-FR" sz="1200" b="0" kern="1200" dirty="0">
+                <a:solidFill>
+                  <a:schemeClr val="tx1"/>
+                </a:solidFill>
+                <a:effectLst/>
+                <a:latin typeface="+mn-lt"/>
+                <a:ea typeface="+mn-ea"/>
+                <a:cs typeface="+mn-cs"/>
+              </a:rPr>
+              <a:t> </a:t>
+            </a:r>
+            <a:r>
+              <a:rPr lang="fr-FR" sz="1200" b="0" kern="1200" dirty="0" err="1">
+                <a:solidFill>
+                  <a:schemeClr val="tx1"/>
+                </a:solidFill>
+                <a:effectLst/>
+                <a:latin typeface="+mn-lt"/>
+                <a:ea typeface="+mn-ea"/>
+                <a:cs typeface="+mn-cs"/>
+              </a:rPr>
+              <a:t>financial</a:t>
+            </a:r>
+            <a:r>
+              <a:rPr lang="fr-FR" sz="1200" b="0" kern="1200" dirty="0">
+                <a:solidFill>
+                  <a:schemeClr val="tx1"/>
+                </a:solidFill>
+                <a:effectLst/>
+                <a:latin typeface="+mn-lt"/>
+                <a:ea typeface="+mn-ea"/>
+                <a:cs typeface="+mn-cs"/>
+              </a:rPr>
+              <a:t> service qu'à </a:t>
+            </a:r>
+            <a:r>
+              <a:rPr lang="fr-FR" sz="1200" b="0" kern="1200" dirty="0" err="1">
+                <a:solidFill>
+                  <a:schemeClr val="tx1"/>
+                </a:solidFill>
+                <a:effectLst/>
+                <a:latin typeface="+mn-lt"/>
+                <a:ea typeface="+mn-ea"/>
+                <a:cs typeface="+mn-cs"/>
+              </a:rPr>
+              <a:t>Credit</a:t>
+            </a:r>
+            <a:r>
+              <a:rPr lang="fr-FR" sz="1200" b="0" kern="1200" dirty="0">
+                <a:solidFill>
+                  <a:schemeClr val="tx1"/>
+                </a:solidFill>
+                <a:effectLst/>
+                <a:latin typeface="+mn-lt"/>
+                <a:ea typeface="+mn-ea"/>
+                <a:cs typeface="+mn-cs"/>
+              </a:rPr>
+              <a:t> </a:t>
+            </a:r>
+            <a:r>
+              <a:rPr lang="fr-FR" sz="1200" b="0" kern="1200" dirty="0" err="1">
+                <a:solidFill>
+                  <a:schemeClr val="tx1"/>
+                </a:solidFill>
+                <a:effectLst/>
+                <a:latin typeface="+mn-lt"/>
+                <a:ea typeface="+mn-ea"/>
+                <a:cs typeface="+mn-cs"/>
+              </a:rPr>
+              <a:t>reporting</a:t>
+            </a:r>
+            <a:r>
+              <a:rPr lang="fr-FR" sz="1200" b="0" kern="1200" dirty="0">
+                <a:solidFill>
+                  <a:schemeClr val="tx1"/>
+                </a:solidFill>
+                <a:effectLst/>
+                <a:latin typeface="+mn-lt"/>
+                <a:ea typeface="+mn-ea"/>
+                <a:cs typeface="+mn-cs"/>
+              </a:rPr>
+              <a:t>. C'est cohérent avec la problématique métier : une catégorie minoritaire ne doit pas être complètement ignorée simplement parce qu'elle est peu représentée.</a:t>
+            </a:r>
+          </a:p>
+          <a:p>
+            <a:pPr marL="0" marR="0" lvl="0" indent="0" algn="l" defTabSz="914400" rtl="0" eaLnBrk="1" fontAlgn="auto" latinLnBrk="0" hangingPunct="1">
+              <a:lnSpc>
+                <a:spcPct val="100000"/>
+              </a:lnSpc>
+              <a:spcBef>
+                <a:spcPts val="0"/>
+              </a:spcBef>
+              <a:spcAft>
+                <a:spcPts val="0"/>
+              </a:spcAft>
+              <a:buClrTx/>
+              <a:buSzTx/>
+              <a:buFontTx/>
+              <a:buNone/>
+              <a:tabLst/>
+              <a:defRPr/>
+            </a:pPr>
+            <a:endParaRPr lang="fr-FR" sz="1200" b="0" kern="1200" dirty="0">
+              <a:solidFill>
+                <a:schemeClr val="tx1"/>
+              </a:solidFill>
+              <a:effectLst/>
+              <a:latin typeface="+mn-lt"/>
+              <a:ea typeface="+mn-ea"/>
+              <a:cs typeface="+mn-cs"/>
+            </a:endParaRPr>
+          </a:p>
+        </p:txBody>
+      </p:sp>
+      <p:sp>
+        <p:nvSpPr>
+          <p:cNvPr id="4" name="Espace réservé du numéro de diapositive 3"/>
+          <p:cNvSpPr>
+            <a:spLocks noGrp="1"/>
+          </p:cNvSpPr>
+          <p:nvPr>
+            <p:ph type="sldNum" sz="quarter" idx="5"/>
+          </p:nvPr>
+        </p:nvSpPr>
+        <p:spPr/>
+        <p:txBody>
+          <a:bodyPr/>
+          <a:lstStyle/>
+          <a:p>
+            <a:fld id="{4734364E-57BD-44F2-A53B-320C3BD2F0CA}" type="slidenum">
+              <a:rPr lang="fr-FR" smtClean="0"/>
+              <a:t>18</a:t>
+            </a:fld>
+            <a:endParaRPr lang="fr-FR"/>
+          </a:p>
+        </p:txBody>
+      </p:sp>
+    </p:spTree>
+    <p:extLst>
+      <p:ext uri="{BB962C8B-B14F-4D97-AF65-F5344CB8AC3E}">
+        <p14:creationId xmlns:p14="http://schemas.microsoft.com/office/powerpoint/2010/main" val="3861147310"/>
       </p:ext>
     </p:extLst>
   </p:cSld>
@@ -1537,7 +2045,7 @@
           <a:p>
             <a:fld id="{D61BD361-66C9-484E-B214-6DC7693ABA43}" type="datetimeFigureOut">
               <a:rPr lang="fr-FR" smtClean="0"/>
-              <a:t>21/08/2026</a:t>
+              <a:t>24/08/2026</a:t>
             </a:fld>
             <a:endParaRPr lang="fr-FR"/>
           </a:p>
@@ -1735,7 +2243,7 @@
           <a:p>
             <a:fld id="{D61BD361-66C9-484E-B214-6DC7693ABA43}" type="datetimeFigureOut">
               <a:rPr lang="fr-FR" smtClean="0"/>
-              <a:t>21/08/2026</a:t>
+              <a:t>24/08/2026</a:t>
             </a:fld>
             <a:endParaRPr lang="fr-FR"/>
           </a:p>
@@ -1943,7 +2451,7 @@
           <a:p>
             <a:fld id="{D61BD361-66C9-484E-B214-6DC7693ABA43}" type="datetimeFigureOut">
               <a:rPr lang="fr-FR" smtClean="0"/>
-              <a:t>21/08/2026</a:t>
+              <a:t>24/08/2026</a:t>
             </a:fld>
             <a:endParaRPr lang="fr-FR"/>
           </a:p>
@@ -2141,7 +2649,7 @@
           <a:p>
             <a:fld id="{D61BD361-66C9-484E-B214-6DC7693ABA43}" type="datetimeFigureOut">
               <a:rPr lang="fr-FR" smtClean="0"/>
-              <a:t>21/08/2026</a:t>
+              <a:t>24/08/2026</a:t>
             </a:fld>
             <a:endParaRPr lang="fr-FR"/>
           </a:p>
@@ -2416,7 +2924,7 @@
           <a:p>
             <a:fld id="{D61BD361-66C9-484E-B214-6DC7693ABA43}" type="datetimeFigureOut">
               <a:rPr lang="fr-FR" smtClean="0"/>
-              <a:t>21/08/2026</a:t>
+              <a:t>24/08/2026</a:t>
             </a:fld>
             <a:endParaRPr lang="fr-FR"/>
           </a:p>
@@ -2681,7 +3189,7 @@
           <a:p>
             <a:fld id="{D61BD361-66C9-484E-B214-6DC7693ABA43}" type="datetimeFigureOut">
               <a:rPr lang="fr-FR" smtClean="0"/>
-              <a:t>21/08/2026</a:t>
+              <a:t>24/08/2026</a:t>
             </a:fld>
             <a:endParaRPr lang="fr-FR"/>
           </a:p>
@@ -3093,7 +3601,7 @@
           <a:p>
             <a:fld id="{D61BD361-66C9-484E-B214-6DC7693ABA43}" type="datetimeFigureOut">
               <a:rPr lang="fr-FR" smtClean="0"/>
-              <a:t>21/08/2026</a:t>
+              <a:t>24/08/2026</a:t>
             </a:fld>
             <a:endParaRPr lang="fr-FR"/>
           </a:p>
@@ -3234,7 +3742,7 @@
           <a:p>
             <a:fld id="{D61BD361-66C9-484E-B214-6DC7693ABA43}" type="datetimeFigureOut">
               <a:rPr lang="fr-FR" smtClean="0"/>
-              <a:t>21/08/2026</a:t>
+              <a:t>24/08/2026</a:t>
             </a:fld>
             <a:endParaRPr lang="fr-FR"/>
           </a:p>
@@ -3347,7 +3855,7 @@
           <a:p>
             <a:fld id="{D61BD361-66C9-484E-B214-6DC7693ABA43}" type="datetimeFigureOut">
               <a:rPr lang="fr-FR" smtClean="0"/>
-              <a:t>21/08/2026</a:t>
+              <a:t>24/08/2026</a:t>
             </a:fld>
             <a:endParaRPr lang="fr-FR"/>
           </a:p>
@@ -3658,7 +4166,7 @@
           <a:p>
             <a:fld id="{D61BD361-66C9-484E-B214-6DC7693ABA43}" type="datetimeFigureOut">
               <a:rPr lang="fr-FR" smtClean="0"/>
-              <a:t>21/08/2026</a:t>
+              <a:t>24/08/2026</a:t>
             </a:fld>
             <a:endParaRPr lang="fr-FR"/>
           </a:p>
@@ -3946,7 +4454,7 @@
           <a:p>
             <a:fld id="{D61BD361-66C9-484E-B214-6DC7693ABA43}" type="datetimeFigureOut">
               <a:rPr lang="fr-FR" smtClean="0"/>
-              <a:t>21/08/2026</a:t>
+              <a:t>24/08/2026</a:t>
             </a:fld>
             <a:endParaRPr lang="fr-FR"/>
           </a:p>
@@ -4187,7 +4695,7 @@
           <a:p>
             <a:fld id="{D61BD361-66C9-484E-B214-6DC7693ABA43}" type="datetimeFigureOut">
               <a:rPr lang="fr-FR" smtClean="0"/>
-              <a:t>21/08/2026</a:t>
+              <a:t>24/08/2026</a:t>
             </a:fld>
             <a:endParaRPr lang="fr-FR"/>
           </a:p>
@@ -5074,6 +5582,1973 @@
       </p:grpSpPr>
       <p:sp>
         <p:nvSpPr>
+          <p:cNvPr id="2" name="Titre 1">
+            <a:extLst>
+              <a:ext uri="{FF2B5EF4-FFF2-40B4-BE49-F238E27FC236}">
+                <a16:creationId xmlns:a16="http://schemas.microsoft.com/office/drawing/2014/main" id="{E49042BD-93A0-DAB6-8F58-1A73789CFED7}"/>
+              </a:ext>
+            </a:extLst>
+          </p:cNvPr>
+          <p:cNvSpPr>
+            <a:spLocks noGrp="1"/>
+          </p:cNvSpPr>
+          <p:nvPr>
+            <p:ph type="title"/>
+          </p:nvPr>
+        </p:nvSpPr>
+        <p:spPr/>
+        <p:txBody>
+          <a:bodyPr/>
+          <a:lstStyle/>
+          <a:p>
+            <a:r>
+              <a:rPr lang="fr-FR" dirty="0"/>
+              <a:t>Métriques</a:t>
+            </a:r>
+          </a:p>
+        </p:txBody>
+      </p:sp>
+      <p:sp>
+        <p:nvSpPr>
+          <p:cNvPr id="3" name="Espace réservé du contenu 2">
+            <a:extLst>
+              <a:ext uri="{FF2B5EF4-FFF2-40B4-BE49-F238E27FC236}">
+                <a16:creationId xmlns:a16="http://schemas.microsoft.com/office/drawing/2014/main" id="{E7344CC8-D55D-75FD-115F-ECFAEEC0949A}"/>
+              </a:ext>
+            </a:extLst>
+          </p:cNvPr>
+          <p:cNvSpPr>
+            <a:spLocks noGrp="1"/>
+          </p:cNvSpPr>
+          <p:nvPr>
+            <p:ph idx="1"/>
+          </p:nvPr>
+        </p:nvSpPr>
+        <p:spPr/>
+        <p:txBody>
+          <a:bodyPr>
+            <a:normAutofit fontScale="92500" lnSpcReduction="20000"/>
+          </a:bodyPr>
+          <a:lstStyle/>
+          <a:p>
+            <a:r>
+              <a:rPr lang="fr-FR" dirty="0" err="1"/>
+              <a:t>Accuracy</a:t>
+            </a:r>
+            <a:r>
+              <a:rPr lang="fr-FR" dirty="0"/>
+              <a:t> : 45.00%</a:t>
+            </a:r>
+          </a:p>
+          <a:p>
+            <a:r>
+              <a:rPr lang="fr-FR" dirty="0" err="1"/>
+              <a:t>Precision</a:t>
+            </a:r>
+            <a:r>
+              <a:rPr lang="fr-FR" dirty="0"/>
+              <a:t> (macro) : 16.50%</a:t>
+            </a:r>
+          </a:p>
+          <a:p>
+            <a:r>
+              <a:rPr lang="fr-FR" dirty="0" err="1"/>
+              <a:t>Recall</a:t>
+            </a:r>
+            <a:r>
+              <a:rPr lang="fr-FR" dirty="0"/>
+              <a:t> (macro) : 20.83%</a:t>
+            </a:r>
+          </a:p>
+          <a:p>
+            <a:r>
+              <a:rPr lang="fr-FR" dirty="0"/>
+              <a:t>F1 (macro) : 17.80%</a:t>
+            </a:r>
+          </a:p>
+          <a:p>
+            <a:r>
+              <a:rPr lang="fr-FR" dirty="0" err="1"/>
+              <a:t>Precision</a:t>
+            </a:r>
+            <a:r>
+              <a:rPr lang="fr-FR" dirty="0"/>
+              <a:t> (</a:t>
+            </a:r>
+            <a:r>
+              <a:rPr lang="fr-FR" dirty="0" err="1"/>
+              <a:t>weighted</a:t>
+            </a:r>
+            <a:r>
+              <a:rPr lang="fr-FR" dirty="0"/>
+              <a:t>) : 44.50%</a:t>
+            </a:r>
+          </a:p>
+          <a:p>
+            <a:r>
+              <a:rPr lang="fr-FR" dirty="0" err="1"/>
+              <a:t>Recall</a:t>
+            </a:r>
+            <a:r>
+              <a:rPr lang="fr-FR" dirty="0"/>
+              <a:t> (</a:t>
+            </a:r>
+            <a:r>
+              <a:rPr lang="fr-FR" dirty="0" err="1"/>
+              <a:t>weighted</a:t>
+            </a:r>
+            <a:r>
+              <a:rPr lang="fr-FR" dirty="0"/>
+              <a:t>) : 45.00% F1</a:t>
+            </a:r>
+          </a:p>
+          <a:p>
+            <a:r>
+              <a:rPr lang="fr-FR" dirty="0"/>
+              <a:t>(</a:t>
+            </a:r>
+            <a:r>
+              <a:rPr lang="fr-FR" dirty="0" err="1"/>
+              <a:t>weighted</a:t>
+            </a:r>
+            <a:r>
+              <a:rPr lang="fr-FR" dirty="0"/>
+              <a:t>) : 44.24%</a:t>
+            </a:r>
+          </a:p>
+          <a:p>
+            <a:r>
+              <a:rPr lang="fr-FR" dirty="0"/>
+              <a:t>Temps moyen (s) : 0.608 s</a:t>
+            </a:r>
+          </a:p>
+          <a:p>
+            <a:r>
+              <a:rPr lang="fr-FR" dirty="0"/>
+              <a:t>Temps médian (s) : 0.403 s</a:t>
+            </a:r>
+          </a:p>
+          <a:p>
+            <a:r>
+              <a:rPr lang="fr-FR" dirty="0"/>
+              <a:t>Temps P95 (s) : 1.686 s</a:t>
+            </a:r>
+          </a:p>
+        </p:txBody>
+      </p:sp>
+    </p:spTree>
+    <p:extLst>
+      <p:ext uri="{BB962C8B-B14F-4D97-AF65-F5344CB8AC3E}">
+        <p14:creationId xmlns:p14="http://schemas.microsoft.com/office/powerpoint/2010/main" val="3243270135"/>
+      </p:ext>
+    </p:extLst>
+  </p:cSld>
+  <p:clrMapOvr>
+    <a:masterClrMapping/>
+  </p:clrMapOvr>
+</p:sld>
+</file>
+
+<file path=ppt/slides/slide11.xml><?xml version="1.0" encoding="utf-8"?>
+<p:sld xmlns:a="http://schemas.openxmlformats.org/drawingml/2006/main" xmlns:r="http://schemas.openxmlformats.org/officeDocument/2006/relationships" xmlns:p="http://schemas.openxmlformats.org/presentationml/2006/main">
+  <p:cSld>
+    <p:spTree>
+      <p:nvGrpSpPr>
+        <p:cNvPr id="1" name="">
+          <a:extLst>
+            <a:ext uri="{FF2B5EF4-FFF2-40B4-BE49-F238E27FC236}">
+              <a16:creationId xmlns:a16="http://schemas.microsoft.com/office/drawing/2014/main" id="{0311F45C-DBFB-59D2-5A3E-98F17293F929}"/>
+            </a:ext>
+          </a:extLst>
+        </p:cNvPr>
+        <p:cNvGrpSpPr/>
+        <p:nvPr/>
+      </p:nvGrpSpPr>
+      <p:grpSpPr>
+        <a:xfrm>
+          <a:off x="0" y="0"/>
+          <a:ext cx="0" cy="0"/>
+          <a:chOff x="0" y="0"/>
+          <a:chExt cx="0" cy="0"/>
+        </a:xfrm>
+      </p:grpSpPr>
+      <p:pic>
+        <p:nvPicPr>
+          <p:cNvPr id="3076" name="Picture 4" descr="LLM or large language model icon for AI website and apps 63132258 Vector  Art at Vecteezy">
+            <a:extLst>
+              <a:ext uri="{FF2B5EF4-FFF2-40B4-BE49-F238E27FC236}">
+                <a16:creationId xmlns:a16="http://schemas.microsoft.com/office/drawing/2014/main" id="{301584CD-F61F-5D13-D2BB-21FEF5A8F9A5}"/>
+              </a:ext>
+            </a:extLst>
+          </p:cNvPr>
+          <p:cNvPicPr>
+            <a:picLocks noChangeAspect="1" noChangeArrowheads="1"/>
+          </p:cNvPicPr>
+          <p:nvPr/>
+        </p:nvPicPr>
+        <p:blipFill>
+          <a:blip r:embed="rId2">
+            <a:extLst>
+              <a:ext uri="{28A0092B-C50C-407E-A947-70E740481C1C}">
+                <a14:useLocalDpi xmlns:a14="http://schemas.microsoft.com/office/drawing/2010/main" val="0"/>
+              </a:ext>
+            </a:extLst>
+          </a:blip>
+          <a:srcRect/>
+          <a:stretch>
+            <a:fillRect/>
+          </a:stretch>
+        </p:blipFill>
+        <p:spPr bwMode="auto">
+          <a:xfrm>
+            <a:off x="6874149" y="1562985"/>
+            <a:ext cx="5116830" cy="5039833"/>
+          </a:xfrm>
+          <a:prstGeom prst="rect">
+            <a:avLst/>
+          </a:prstGeom>
+          <a:noFill/>
+          <a:extLst>
+            <a:ext uri="{909E8E84-426E-40DD-AFC4-6F175D3DCCD1}">
+              <a14:hiddenFill xmlns:a14="http://schemas.microsoft.com/office/drawing/2010/main">
+                <a:solidFill>
+                  <a:srgbClr val="FFFFFF"/>
+                </a:solidFill>
+              </a14:hiddenFill>
+            </a:ext>
+          </a:extLst>
+        </p:spPr>
+      </p:pic>
+      <p:sp>
+        <p:nvSpPr>
+          <p:cNvPr id="2" name="Titre 1">
+            <a:extLst>
+              <a:ext uri="{FF2B5EF4-FFF2-40B4-BE49-F238E27FC236}">
+                <a16:creationId xmlns:a16="http://schemas.microsoft.com/office/drawing/2014/main" id="{4DDB4469-838C-09F1-F352-BA5D5DFA9279}"/>
+              </a:ext>
+            </a:extLst>
+          </p:cNvPr>
+          <p:cNvSpPr>
+            <a:spLocks noGrp="1"/>
+          </p:cNvSpPr>
+          <p:nvPr>
+            <p:ph type="title"/>
+          </p:nvPr>
+        </p:nvSpPr>
+        <p:spPr>
+          <a:xfrm>
+            <a:off x="838199" y="365125"/>
+            <a:ext cx="6966099" cy="3824103"/>
+          </a:xfrm>
+        </p:spPr>
+        <p:txBody>
+          <a:bodyPr>
+            <a:normAutofit/>
+          </a:bodyPr>
+          <a:lstStyle/>
+          <a:p>
+            <a:r>
+              <a:rPr lang="fr-FR" sz="6600" dirty="0">
+                <a:solidFill>
+                  <a:schemeClr val="accent1">
+                    <a:lumMod val="75000"/>
+                  </a:schemeClr>
+                </a:solidFill>
+                <a:latin typeface="Segoe UI Black" panose="020B0A02040204020203" pitchFamily="34" charset="0"/>
+                <a:ea typeface="Segoe UI Black" panose="020B0A02040204020203" pitchFamily="34" charset="0"/>
+              </a:rPr>
+              <a:t>Implémentation</a:t>
+            </a:r>
+            <a:br>
+              <a:rPr lang="fr-FR" sz="6600" dirty="0">
+                <a:solidFill>
+                  <a:schemeClr val="accent1">
+                    <a:lumMod val="75000"/>
+                  </a:schemeClr>
+                </a:solidFill>
+                <a:latin typeface="Segoe UI Black" panose="020B0A02040204020203" pitchFamily="34" charset="0"/>
+                <a:ea typeface="Segoe UI Black" panose="020B0A02040204020203" pitchFamily="34" charset="0"/>
+              </a:rPr>
+            </a:br>
+            <a:r>
+              <a:rPr lang="fr-FR" sz="4800" dirty="0">
+                <a:solidFill>
+                  <a:schemeClr val="accent1">
+                    <a:lumMod val="75000"/>
+                  </a:schemeClr>
+                </a:solidFill>
+                <a:latin typeface="Segoe UI Black" panose="020B0A02040204020203" pitchFamily="34" charset="0"/>
+                <a:ea typeface="Segoe UI Black" panose="020B0A02040204020203" pitchFamily="34" charset="0"/>
+              </a:rPr>
+              <a:t>L’approche </a:t>
+            </a:r>
+            <a:r>
+              <a:rPr lang="fr-FR" sz="4800" dirty="0">
+                <a:solidFill>
+                  <a:srgbClr val="00B0F0"/>
+                </a:solidFill>
+                <a:latin typeface="Segoe UI Black" panose="020B0A02040204020203" pitchFamily="34" charset="0"/>
+                <a:ea typeface="Segoe UI Black" panose="020B0A02040204020203" pitchFamily="34" charset="0"/>
+              </a:rPr>
+              <a:t>LLM</a:t>
+            </a:r>
+            <a:endParaRPr lang="fr-FR" sz="6600" dirty="0">
+              <a:solidFill>
+                <a:srgbClr val="00B0F0"/>
+              </a:solidFill>
+              <a:latin typeface="Segoe UI Black" panose="020B0A02040204020203" pitchFamily="34" charset="0"/>
+              <a:ea typeface="Segoe UI Black" panose="020B0A02040204020203" pitchFamily="34" charset="0"/>
+            </a:endParaRPr>
+          </a:p>
+        </p:txBody>
+      </p:sp>
+    </p:spTree>
+    <p:extLst>
+      <p:ext uri="{BB962C8B-B14F-4D97-AF65-F5344CB8AC3E}">
+        <p14:creationId xmlns:p14="http://schemas.microsoft.com/office/powerpoint/2010/main" val="2460374059"/>
+      </p:ext>
+    </p:extLst>
+  </p:cSld>
+  <p:clrMapOvr>
+    <a:masterClrMapping/>
+  </p:clrMapOvr>
+</p:sld>
+</file>
+
+<file path=ppt/slides/slide12.xml><?xml version="1.0" encoding="utf-8"?>
+<p:sld xmlns:a="http://schemas.openxmlformats.org/drawingml/2006/main" xmlns:r="http://schemas.openxmlformats.org/officeDocument/2006/relationships" xmlns:p="http://schemas.openxmlformats.org/presentationml/2006/main">
+  <p:cSld>
+    <p:spTree>
+      <p:nvGrpSpPr>
+        <p:cNvPr id="1" name="">
+          <a:extLst>
+            <a:ext uri="{FF2B5EF4-FFF2-40B4-BE49-F238E27FC236}">
+              <a16:creationId xmlns:a16="http://schemas.microsoft.com/office/drawing/2014/main" id="{01EE4439-9561-207C-7C8C-812EADE91C21}"/>
+            </a:ext>
+          </a:extLst>
+        </p:cNvPr>
+        <p:cNvGrpSpPr/>
+        <p:nvPr/>
+      </p:nvGrpSpPr>
+      <p:grpSpPr>
+        <a:xfrm>
+          <a:off x="0" y="0"/>
+          <a:ext cx="0" cy="0"/>
+          <a:chOff x="0" y="0"/>
+          <a:chExt cx="0" cy="0"/>
+        </a:xfrm>
+      </p:grpSpPr>
+      <p:sp>
+        <p:nvSpPr>
+          <p:cNvPr id="2" name="Titre 1">
+            <a:extLst>
+              <a:ext uri="{FF2B5EF4-FFF2-40B4-BE49-F238E27FC236}">
+                <a16:creationId xmlns:a16="http://schemas.microsoft.com/office/drawing/2014/main" id="{D0B5BAE3-F0D0-87D1-D615-23C4DD333590}"/>
+              </a:ext>
+            </a:extLst>
+          </p:cNvPr>
+          <p:cNvSpPr>
+            <a:spLocks noGrp="1"/>
+          </p:cNvSpPr>
+          <p:nvPr>
+            <p:ph type="title"/>
+          </p:nvPr>
+        </p:nvSpPr>
+        <p:spPr/>
+        <p:txBody>
+          <a:bodyPr/>
+          <a:lstStyle/>
+          <a:p>
+            <a:r>
+              <a:rPr lang="fr-FR" b="1" dirty="0"/>
+              <a:t>Approche LLM</a:t>
+            </a:r>
+            <a:endParaRPr lang="fr-FR" dirty="0"/>
+          </a:p>
+        </p:txBody>
+      </p:sp>
+      <p:sp>
+        <p:nvSpPr>
+          <p:cNvPr id="4" name="Sous-titre 2">
+            <a:extLst>
+              <a:ext uri="{FF2B5EF4-FFF2-40B4-BE49-F238E27FC236}">
+                <a16:creationId xmlns:a16="http://schemas.microsoft.com/office/drawing/2014/main" id="{433223D3-CCC3-E07E-FEC8-7FDFF43C1C0E}"/>
+              </a:ext>
+            </a:extLst>
+          </p:cNvPr>
+          <p:cNvSpPr txBox="1">
+            <a:spLocks/>
+          </p:cNvSpPr>
+          <p:nvPr/>
+        </p:nvSpPr>
+        <p:spPr>
+          <a:xfrm>
+            <a:off x="1665768" y="1794499"/>
+            <a:ext cx="1959936" cy="502134"/>
+          </a:xfrm>
+          <a:prstGeom prst="rect">
+            <a:avLst/>
+          </a:prstGeom>
+          <a:noFill/>
+        </p:spPr>
+        <p:txBody>
+          <a:bodyPr vert="horz" lIns="91440" tIns="45720" rIns="91440" bIns="45720" rtlCol="0">
+            <a:normAutofit/>
+          </a:bodyPr>
+          <a:lstStyle>
+            <a:lvl1pPr marL="0" indent="0" algn="ctr" defTabSz="914400" rtl="0" eaLnBrk="1" latinLnBrk="0" hangingPunct="1">
+              <a:lnSpc>
+                <a:spcPct val="90000"/>
+              </a:lnSpc>
+              <a:spcBef>
+                <a:spcPts val="1000"/>
+              </a:spcBef>
+              <a:buFont typeface="Arial" panose="020B0604020202020204" pitchFamily="34" charset="0"/>
+              <a:buNone/>
+              <a:defRPr sz="2400" kern="1200">
+                <a:solidFill>
+                  <a:schemeClr val="tx1"/>
+                </a:solidFill>
+                <a:latin typeface="+mn-lt"/>
+                <a:ea typeface="+mn-ea"/>
+                <a:cs typeface="+mn-cs"/>
+              </a:defRPr>
+            </a:lvl1pPr>
+            <a:lvl2pPr marL="457200" indent="0" algn="ctr" defTabSz="914400" rtl="0" eaLnBrk="1" latinLnBrk="0" hangingPunct="1">
+              <a:lnSpc>
+                <a:spcPct val="90000"/>
+              </a:lnSpc>
+              <a:spcBef>
+                <a:spcPts val="500"/>
+              </a:spcBef>
+              <a:buFont typeface="Arial" panose="020B0604020202020204" pitchFamily="34" charset="0"/>
+              <a:buNone/>
+              <a:defRPr sz="2000" kern="1200">
+                <a:solidFill>
+                  <a:schemeClr val="tx1"/>
+                </a:solidFill>
+                <a:latin typeface="+mn-lt"/>
+                <a:ea typeface="+mn-ea"/>
+                <a:cs typeface="+mn-cs"/>
+              </a:defRPr>
+            </a:lvl2pPr>
+            <a:lvl3pPr marL="914400" indent="0" algn="ctr" defTabSz="914400" rtl="0" eaLnBrk="1" latinLnBrk="0" hangingPunct="1">
+              <a:lnSpc>
+                <a:spcPct val="90000"/>
+              </a:lnSpc>
+              <a:spcBef>
+                <a:spcPts val="500"/>
+              </a:spcBef>
+              <a:buFont typeface="Arial" panose="020B0604020202020204" pitchFamily="34" charset="0"/>
+              <a:buNone/>
+              <a:defRPr sz="1800" kern="1200">
+                <a:solidFill>
+                  <a:schemeClr val="tx1"/>
+                </a:solidFill>
+                <a:latin typeface="+mn-lt"/>
+                <a:ea typeface="+mn-ea"/>
+                <a:cs typeface="+mn-cs"/>
+              </a:defRPr>
+            </a:lvl3pPr>
+            <a:lvl4pPr marL="1371600" indent="0" algn="ctr" defTabSz="914400" rtl="0" eaLnBrk="1" latinLnBrk="0" hangingPunct="1">
+              <a:lnSpc>
+                <a:spcPct val="90000"/>
+              </a:lnSpc>
+              <a:spcBef>
+                <a:spcPts val="500"/>
+              </a:spcBef>
+              <a:buFont typeface="Arial" panose="020B0604020202020204" pitchFamily="34" charset="0"/>
+              <a:buNone/>
+              <a:defRPr sz="1600" kern="1200">
+                <a:solidFill>
+                  <a:schemeClr val="tx1"/>
+                </a:solidFill>
+                <a:latin typeface="+mn-lt"/>
+                <a:ea typeface="+mn-ea"/>
+                <a:cs typeface="+mn-cs"/>
+              </a:defRPr>
+            </a:lvl4pPr>
+            <a:lvl5pPr marL="1828800" indent="0" algn="ctr" defTabSz="914400" rtl="0" eaLnBrk="1" latinLnBrk="0" hangingPunct="1">
+              <a:lnSpc>
+                <a:spcPct val="90000"/>
+              </a:lnSpc>
+              <a:spcBef>
+                <a:spcPts val="500"/>
+              </a:spcBef>
+              <a:buFont typeface="Arial" panose="020B0604020202020204" pitchFamily="34" charset="0"/>
+              <a:buNone/>
+              <a:defRPr sz="1600" kern="1200">
+                <a:solidFill>
+                  <a:schemeClr val="tx1"/>
+                </a:solidFill>
+                <a:latin typeface="+mn-lt"/>
+                <a:ea typeface="+mn-ea"/>
+                <a:cs typeface="+mn-cs"/>
+              </a:defRPr>
+            </a:lvl5pPr>
+            <a:lvl6pPr marL="2286000" indent="0" algn="ctr" defTabSz="914400" rtl="0" eaLnBrk="1" latinLnBrk="0" hangingPunct="1">
+              <a:lnSpc>
+                <a:spcPct val="90000"/>
+              </a:lnSpc>
+              <a:spcBef>
+                <a:spcPts val="500"/>
+              </a:spcBef>
+              <a:buFont typeface="Arial" panose="020B0604020202020204" pitchFamily="34" charset="0"/>
+              <a:buNone/>
+              <a:defRPr sz="1600" kern="1200">
+                <a:solidFill>
+                  <a:schemeClr val="tx1"/>
+                </a:solidFill>
+                <a:latin typeface="+mn-lt"/>
+                <a:ea typeface="+mn-ea"/>
+                <a:cs typeface="+mn-cs"/>
+              </a:defRPr>
+            </a:lvl6pPr>
+            <a:lvl7pPr marL="2743200" indent="0" algn="ctr" defTabSz="914400" rtl="0" eaLnBrk="1" latinLnBrk="0" hangingPunct="1">
+              <a:lnSpc>
+                <a:spcPct val="90000"/>
+              </a:lnSpc>
+              <a:spcBef>
+                <a:spcPts val="500"/>
+              </a:spcBef>
+              <a:buFont typeface="Arial" panose="020B0604020202020204" pitchFamily="34" charset="0"/>
+              <a:buNone/>
+              <a:defRPr sz="1600" kern="1200">
+                <a:solidFill>
+                  <a:schemeClr val="tx1"/>
+                </a:solidFill>
+                <a:latin typeface="+mn-lt"/>
+                <a:ea typeface="+mn-ea"/>
+                <a:cs typeface="+mn-cs"/>
+              </a:defRPr>
+            </a:lvl7pPr>
+            <a:lvl8pPr marL="3200400" indent="0" algn="ctr" defTabSz="914400" rtl="0" eaLnBrk="1" latinLnBrk="0" hangingPunct="1">
+              <a:lnSpc>
+                <a:spcPct val="90000"/>
+              </a:lnSpc>
+              <a:spcBef>
+                <a:spcPts val="500"/>
+              </a:spcBef>
+              <a:buFont typeface="Arial" panose="020B0604020202020204" pitchFamily="34" charset="0"/>
+              <a:buNone/>
+              <a:defRPr sz="1600" kern="1200">
+                <a:solidFill>
+                  <a:schemeClr val="tx1"/>
+                </a:solidFill>
+                <a:latin typeface="+mn-lt"/>
+                <a:ea typeface="+mn-ea"/>
+                <a:cs typeface="+mn-cs"/>
+              </a:defRPr>
+            </a:lvl8pPr>
+            <a:lvl9pPr marL="3657600" indent="0" algn="ctr" defTabSz="914400" rtl="0" eaLnBrk="1" latinLnBrk="0" hangingPunct="1">
+              <a:lnSpc>
+                <a:spcPct val="90000"/>
+              </a:lnSpc>
+              <a:spcBef>
+                <a:spcPts val="500"/>
+              </a:spcBef>
+              <a:buFont typeface="Arial" panose="020B0604020202020204" pitchFamily="34" charset="0"/>
+              <a:buNone/>
+              <a:defRPr sz="1600" kern="1200">
+                <a:solidFill>
+                  <a:schemeClr val="tx1"/>
+                </a:solidFill>
+                <a:latin typeface="+mn-lt"/>
+                <a:ea typeface="+mn-ea"/>
+                <a:cs typeface="+mn-cs"/>
+              </a:defRPr>
+            </a:lvl9pPr>
+          </a:lstStyle>
+          <a:p>
+            <a:r>
+              <a:rPr lang="fr-FR" sz="2800" b="1" dirty="0" err="1">
+                <a:solidFill>
+                  <a:sysClr val="windowText" lastClr="000000"/>
+                </a:solidFill>
+              </a:rPr>
+              <a:t>X_train</a:t>
+            </a:r>
+            <a:endParaRPr lang="fr-FR" sz="2800" b="1" dirty="0">
+              <a:solidFill>
+                <a:sysClr val="windowText" lastClr="000000"/>
+              </a:solidFill>
+            </a:endParaRPr>
+          </a:p>
+          <a:p>
+            <a:endParaRPr lang="fr-FR" sz="2800" b="1" dirty="0">
+              <a:solidFill>
+                <a:sysClr val="windowText" lastClr="000000"/>
+              </a:solidFill>
+            </a:endParaRPr>
+          </a:p>
+        </p:txBody>
+      </p:sp>
+      <p:sp>
+        <p:nvSpPr>
+          <p:cNvPr id="5" name="Flèche : droite 4">
+            <a:extLst>
+              <a:ext uri="{FF2B5EF4-FFF2-40B4-BE49-F238E27FC236}">
+                <a16:creationId xmlns:a16="http://schemas.microsoft.com/office/drawing/2014/main" id="{5DDC3051-3358-9EFB-4150-393E0A26DFA7}"/>
+              </a:ext>
+            </a:extLst>
+          </p:cNvPr>
+          <p:cNvSpPr/>
+          <p:nvPr/>
+        </p:nvSpPr>
+        <p:spPr>
+          <a:xfrm rot="5400000">
+            <a:off x="2066261" y="2594803"/>
+            <a:ext cx="1158949" cy="770232"/>
+          </a:xfrm>
+          <a:prstGeom prst="rightArrow">
+            <a:avLst/>
+          </a:prstGeom>
+        </p:spPr>
+        <p:style>
+          <a:lnRef idx="2">
+            <a:schemeClr val="accent1">
+              <a:shade val="15000"/>
+            </a:schemeClr>
+          </a:lnRef>
+          <a:fillRef idx="1">
+            <a:schemeClr val="accent1"/>
+          </a:fillRef>
+          <a:effectRef idx="0">
+            <a:schemeClr val="accent1"/>
+          </a:effectRef>
+          <a:fontRef idx="minor">
+            <a:schemeClr val="lt1"/>
+          </a:fontRef>
+        </p:style>
+        <p:txBody>
+          <a:bodyPr rtlCol="0" anchor="ctr"/>
+          <a:lstStyle/>
+          <a:p>
+            <a:pPr algn="ctr"/>
+            <a:endParaRPr lang="fr-FR"/>
+          </a:p>
+        </p:txBody>
+      </p:sp>
+      <p:sp>
+        <p:nvSpPr>
+          <p:cNvPr id="7" name="Sous-titre 2">
+            <a:extLst>
+              <a:ext uri="{FF2B5EF4-FFF2-40B4-BE49-F238E27FC236}">
+                <a16:creationId xmlns:a16="http://schemas.microsoft.com/office/drawing/2014/main" id="{86D32DCE-24AD-9413-21A8-B1BA6502B6EF}"/>
+              </a:ext>
+            </a:extLst>
+          </p:cNvPr>
+          <p:cNvSpPr txBox="1">
+            <a:spLocks/>
+          </p:cNvSpPr>
+          <p:nvPr/>
+        </p:nvSpPr>
+        <p:spPr>
+          <a:xfrm>
+            <a:off x="1665768" y="3663205"/>
+            <a:ext cx="1959936" cy="502134"/>
+          </a:xfrm>
+          <a:prstGeom prst="rect">
+            <a:avLst/>
+          </a:prstGeom>
+          <a:noFill/>
+        </p:spPr>
+        <p:txBody>
+          <a:bodyPr vert="horz" lIns="91440" tIns="45720" rIns="91440" bIns="45720" rtlCol="0">
+            <a:normAutofit/>
+          </a:bodyPr>
+          <a:lstStyle>
+            <a:lvl1pPr marL="0" indent="0" algn="ctr" defTabSz="914400" rtl="0" eaLnBrk="1" latinLnBrk="0" hangingPunct="1">
+              <a:lnSpc>
+                <a:spcPct val="90000"/>
+              </a:lnSpc>
+              <a:spcBef>
+                <a:spcPts val="1000"/>
+              </a:spcBef>
+              <a:buFont typeface="Arial" panose="020B0604020202020204" pitchFamily="34" charset="0"/>
+              <a:buNone/>
+              <a:defRPr sz="2400" kern="1200">
+                <a:solidFill>
+                  <a:schemeClr val="tx1"/>
+                </a:solidFill>
+                <a:latin typeface="+mn-lt"/>
+                <a:ea typeface="+mn-ea"/>
+                <a:cs typeface="+mn-cs"/>
+              </a:defRPr>
+            </a:lvl1pPr>
+            <a:lvl2pPr marL="457200" indent="0" algn="ctr" defTabSz="914400" rtl="0" eaLnBrk="1" latinLnBrk="0" hangingPunct="1">
+              <a:lnSpc>
+                <a:spcPct val="90000"/>
+              </a:lnSpc>
+              <a:spcBef>
+                <a:spcPts val="500"/>
+              </a:spcBef>
+              <a:buFont typeface="Arial" panose="020B0604020202020204" pitchFamily="34" charset="0"/>
+              <a:buNone/>
+              <a:defRPr sz="2000" kern="1200">
+                <a:solidFill>
+                  <a:schemeClr val="tx1"/>
+                </a:solidFill>
+                <a:latin typeface="+mn-lt"/>
+                <a:ea typeface="+mn-ea"/>
+                <a:cs typeface="+mn-cs"/>
+              </a:defRPr>
+            </a:lvl2pPr>
+            <a:lvl3pPr marL="914400" indent="0" algn="ctr" defTabSz="914400" rtl="0" eaLnBrk="1" latinLnBrk="0" hangingPunct="1">
+              <a:lnSpc>
+                <a:spcPct val="90000"/>
+              </a:lnSpc>
+              <a:spcBef>
+                <a:spcPts val="500"/>
+              </a:spcBef>
+              <a:buFont typeface="Arial" panose="020B0604020202020204" pitchFamily="34" charset="0"/>
+              <a:buNone/>
+              <a:defRPr sz="1800" kern="1200">
+                <a:solidFill>
+                  <a:schemeClr val="tx1"/>
+                </a:solidFill>
+                <a:latin typeface="+mn-lt"/>
+                <a:ea typeface="+mn-ea"/>
+                <a:cs typeface="+mn-cs"/>
+              </a:defRPr>
+            </a:lvl3pPr>
+            <a:lvl4pPr marL="1371600" indent="0" algn="ctr" defTabSz="914400" rtl="0" eaLnBrk="1" latinLnBrk="0" hangingPunct="1">
+              <a:lnSpc>
+                <a:spcPct val="90000"/>
+              </a:lnSpc>
+              <a:spcBef>
+                <a:spcPts val="500"/>
+              </a:spcBef>
+              <a:buFont typeface="Arial" panose="020B0604020202020204" pitchFamily="34" charset="0"/>
+              <a:buNone/>
+              <a:defRPr sz="1600" kern="1200">
+                <a:solidFill>
+                  <a:schemeClr val="tx1"/>
+                </a:solidFill>
+                <a:latin typeface="+mn-lt"/>
+                <a:ea typeface="+mn-ea"/>
+                <a:cs typeface="+mn-cs"/>
+              </a:defRPr>
+            </a:lvl4pPr>
+            <a:lvl5pPr marL="1828800" indent="0" algn="ctr" defTabSz="914400" rtl="0" eaLnBrk="1" latinLnBrk="0" hangingPunct="1">
+              <a:lnSpc>
+                <a:spcPct val="90000"/>
+              </a:lnSpc>
+              <a:spcBef>
+                <a:spcPts val="500"/>
+              </a:spcBef>
+              <a:buFont typeface="Arial" panose="020B0604020202020204" pitchFamily="34" charset="0"/>
+              <a:buNone/>
+              <a:defRPr sz="1600" kern="1200">
+                <a:solidFill>
+                  <a:schemeClr val="tx1"/>
+                </a:solidFill>
+                <a:latin typeface="+mn-lt"/>
+                <a:ea typeface="+mn-ea"/>
+                <a:cs typeface="+mn-cs"/>
+              </a:defRPr>
+            </a:lvl5pPr>
+            <a:lvl6pPr marL="2286000" indent="0" algn="ctr" defTabSz="914400" rtl="0" eaLnBrk="1" latinLnBrk="0" hangingPunct="1">
+              <a:lnSpc>
+                <a:spcPct val="90000"/>
+              </a:lnSpc>
+              <a:spcBef>
+                <a:spcPts val="500"/>
+              </a:spcBef>
+              <a:buFont typeface="Arial" panose="020B0604020202020204" pitchFamily="34" charset="0"/>
+              <a:buNone/>
+              <a:defRPr sz="1600" kern="1200">
+                <a:solidFill>
+                  <a:schemeClr val="tx1"/>
+                </a:solidFill>
+                <a:latin typeface="+mn-lt"/>
+                <a:ea typeface="+mn-ea"/>
+                <a:cs typeface="+mn-cs"/>
+              </a:defRPr>
+            </a:lvl6pPr>
+            <a:lvl7pPr marL="2743200" indent="0" algn="ctr" defTabSz="914400" rtl="0" eaLnBrk="1" latinLnBrk="0" hangingPunct="1">
+              <a:lnSpc>
+                <a:spcPct val="90000"/>
+              </a:lnSpc>
+              <a:spcBef>
+                <a:spcPts val="500"/>
+              </a:spcBef>
+              <a:buFont typeface="Arial" panose="020B0604020202020204" pitchFamily="34" charset="0"/>
+              <a:buNone/>
+              <a:defRPr sz="1600" kern="1200">
+                <a:solidFill>
+                  <a:schemeClr val="tx1"/>
+                </a:solidFill>
+                <a:latin typeface="+mn-lt"/>
+                <a:ea typeface="+mn-ea"/>
+                <a:cs typeface="+mn-cs"/>
+              </a:defRPr>
+            </a:lvl7pPr>
+            <a:lvl8pPr marL="3200400" indent="0" algn="ctr" defTabSz="914400" rtl="0" eaLnBrk="1" latinLnBrk="0" hangingPunct="1">
+              <a:lnSpc>
+                <a:spcPct val="90000"/>
+              </a:lnSpc>
+              <a:spcBef>
+                <a:spcPts val="500"/>
+              </a:spcBef>
+              <a:buFont typeface="Arial" panose="020B0604020202020204" pitchFamily="34" charset="0"/>
+              <a:buNone/>
+              <a:defRPr sz="1600" kern="1200">
+                <a:solidFill>
+                  <a:schemeClr val="tx1"/>
+                </a:solidFill>
+                <a:latin typeface="+mn-lt"/>
+                <a:ea typeface="+mn-ea"/>
+                <a:cs typeface="+mn-cs"/>
+              </a:defRPr>
+            </a:lvl8pPr>
+            <a:lvl9pPr marL="3657600" indent="0" algn="ctr" defTabSz="914400" rtl="0" eaLnBrk="1" latinLnBrk="0" hangingPunct="1">
+              <a:lnSpc>
+                <a:spcPct val="90000"/>
+              </a:lnSpc>
+              <a:spcBef>
+                <a:spcPts val="500"/>
+              </a:spcBef>
+              <a:buFont typeface="Arial" panose="020B0604020202020204" pitchFamily="34" charset="0"/>
+              <a:buNone/>
+              <a:defRPr sz="1600" kern="1200">
+                <a:solidFill>
+                  <a:schemeClr val="tx1"/>
+                </a:solidFill>
+                <a:latin typeface="+mn-lt"/>
+                <a:ea typeface="+mn-ea"/>
+                <a:cs typeface="+mn-cs"/>
+              </a:defRPr>
+            </a:lvl9pPr>
+          </a:lstStyle>
+          <a:p>
+            <a:r>
+              <a:rPr lang="fr-FR" sz="2800" b="1" dirty="0" err="1">
+                <a:solidFill>
+                  <a:sysClr val="windowText" lastClr="000000"/>
+                </a:solidFill>
+              </a:rPr>
+              <a:t>Faiss</a:t>
+            </a:r>
+            <a:endParaRPr lang="fr-FR" sz="2800" b="1" dirty="0">
+              <a:solidFill>
+                <a:sysClr val="windowText" lastClr="000000"/>
+              </a:solidFill>
+            </a:endParaRPr>
+          </a:p>
+        </p:txBody>
+      </p:sp>
+      <p:sp>
+        <p:nvSpPr>
+          <p:cNvPr id="8" name="Flèche : droite 7">
+            <a:extLst>
+              <a:ext uri="{FF2B5EF4-FFF2-40B4-BE49-F238E27FC236}">
+                <a16:creationId xmlns:a16="http://schemas.microsoft.com/office/drawing/2014/main" id="{D918D3A1-D7D8-9052-B814-39299D0D5A9C}"/>
+              </a:ext>
+            </a:extLst>
+          </p:cNvPr>
+          <p:cNvSpPr/>
+          <p:nvPr/>
+        </p:nvSpPr>
+        <p:spPr>
+          <a:xfrm rot="5400000">
+            <a:off x="2066261" y="4463509"/>
+            <a:ext cx="1158949" cy="770232"/>
+          </a:xfrm>
+          <a:prstGeom prst="rightArrow">
+            <a:avLst/>
+          </a:prstGeom>
+        </p:spPr>
+        <p:style>
+          <a:lnRef idx="2">
+            <a:schemeClr val="accent1">
+              <a:shade val="15000"/>
+            </a:schemeClr>
+          </a:lnRef>
+          <a:fillRef idx="1">
+            <a:schemeClr val="accent1"/>
+          </a:fillRef>
+          <a:effectRef idx="0">
+            <a:schemeClr val="accent1"/>
+          </a:effectRef>
+          <a:fontRef idx="minor">
+            <a:schemeClr val="lt1"/>
+          </a:fontRef>
+        </p:style>
+        <p:txBody>
+          <a:bodyPr rtlCol="0" anchor="ctr"/>
+          <a:lstStyle/>
+          <a:p>
+            <a:pPr algn="ctr"/>
+            <a:endParaRPr lang="fr-FR"/>
+          </a:p>
+        </p:txBody>
+      </p:sp>
+      <p:sp>
+        <p:nvSpPr>
+          <p:cNvPr id="9" name="Sous-titre 2">
+            <a:extLst>
+              <a:ext uri="{FF2B5EF4-FFF2-40B4-BE49-F238E27FC236}">
+                <a16:creationId xmlns:a16="http://schemas.microsoft.com/office/drawing/2014/main" id="{ACF8244E-FDBF-415C-FA50-7B1F216824F0}"/>
+              </a:ext>
+            </a:extLst>
+          </p:cNvPr>
+          <p:cNvSpPr txBox="1">
+            <a:spLocks/>
+          </p:cNvSpPr>
+          <p:nvPr/>
+        </p:nvSpPr>
+        <p:spPr>
+          <a:xfrm>
+            <a:off x="1665767" y="5531911"/>
+            <a:ext cx="1959936" cy="502134"/>
+          </a:xfrm>
+          <a:prstGeom prst="rect">
+            <a:avLst/>
+          </a:prstGeom>
+          <a:noFill/>
+        </p:spPr>
+        <p:txBody>
+          <a:bodyPr vert="horz" lIns="91440" tIns="45720" rIns="91440" bIns="45720" rtlCol="0">
+            <a:normAutofit/>
+          </a:bodyPr>
+          <a:lstStyle>
+            <a:lvl1pPr marL="0" indent="0" algn="ctr" defTabSz="914400" rtl="0" eaLnBrk="1" latinLnBrk="0" hangingPunct="1">
+              <a:lnSpc>
+                <a:spcPct val="90000"/>
+              </a:lnSpc>
+              <a:spcBef>
+                <a:spcPts val="1000"/>
+              </a:spcBef>
+              <a:buFont typeface="Arial" panose="020B0604020202020204" pitchFamily="34" charset="0"/>
+              <a:buNone/>
+              <a:defRPr sz="2400" kern="1200">
+                <a:solidFill>
+                  <a:schemeClr val="tx1"/>
+                </a:solidFill>
+                <a:latin typeface="+mn-lt"/>
+                <a:ea typeface="+mn-ea"/>
+                <a:cs typeface="+mn-cs"/>
+              </a:defRPr>
+            </a:lvl1pPr>
+            <a:lvl2pPr marL="457200" indent="0" algn="ctr" defTabSz="914400" rtl="0" eaLnBrk="1" latinLnBrk="0" hangingPunct="1">
+              <a:lnSpc>
+                <a:spcPct val="90000"/>
+              </a:lnSpc>
+              <a:spcBef>
+                <a:spcPts val="500"/>
+              </a:spcBef>
+              <a:buFont typeface="Arial" panose="020B0604020202020204" pitchFamily="34" charset="0"/>
+              <a:buNone/>
+              <a:defRPr sz="2000" kern="1200">
+                <a:solidFill>
+                  <a:schemeClr val="tx1"/>
+                </a:solidFill>
+                <a:latin typeface="+mn-lt"/>
+                <a:ea typeface="+mn-ea"/>
+                <a:cs typeface="+mn-cs"/>
+              </a:defRPr>
+            </a:lvl2pPr>
+            <a:lvl3pPr marL="914400" indent="0" algn="ctr" defTabSz="914400" rtl="0" eaLnBrk="1" latinLnBrk="0" hangingPunct="1">
+              <a:lnSpc>
+                <a:spcPct val="90000"/>
+              </a:lnSpc>
+              <a:spcBef>
+                <a:spcPts val="500"/>
+              </a:spcBef>
+              <a:buFont typeface="Arial" panose="020B0604020202020204" pitchFamily="34" charset="0"/>
+              <a:buNone/>
+              <a:defRPr sz="1800" kern="1200">
+                <a:solidFill>
+                  <a:schemeClr val="tx1"/>
+                </a:solidFill>
+                <a:latin typeface="+mn-lt"/>
+                <a:ea typeface="+mn-ea"/>
+                <a:cs typeface="+mn-cs"/>
+              </a:defRPr>
+            </a:lvl3pPr>
+            <a:lvl4pPr marL="1371600" indent="0" algn="ctr" defTabSz="914400" rtl="0" eaLnBrk="1" latinLnBrk="0" hangingPunct="1">
+              <a:lnSpc>
+                <a:spcPct val="90000"/>
+              </a:lnSpc>
+              <a:spcBef>
+                <a:spcPts val="500"/>
+              </a:spcBef>
+              <a:buFont typeface="Arial" panose="020B0604020202020204" pitchFamily="34" charset="0"/>
+              <a:buNone/>
+              <a:defRPr sz="1600" kern="1200">
+                <a:solidFill>
+                  <a:schemeClr val="tx1"/>
+                </a:solidFill>
+                <a:latin typeface="+mn-lt"/>
+                <a:ea typeface="+mn-ea"/>
+                <a:cs typeface="+mn-cs"/>
+              </a:defRPr>
+            </a:lvl4pPr>
+            <a:lvl5pPr marL="1828800" indent="0" algn="ctr" defTabSz="914400" rtl="0" eaLnBrk="1" latinLnBrk="0" hangingPunct="1">
+              <a:lnSpc>
+                <a:spcPct val="90000"/>
+              </a:lnSpc>
+              <a:spcBef>
+                <a:spcPts val="500"/>
+              </a:spcBef>
+              <a:buFont typeface="Arial" panose="020B0604020202020204" pitchFamily="34" charset="0"/>
+              <a:buNone/>
+              <a:defRPr sz="1600" kern="1200">
+                <a:solidFill>
+                  <a:schemeClr val="tx1"/>
+                </a:solidFill>
+                <a:latin typeface="+mn-lt"/>
+                <a:ea typeface="+mn-ea"/>
+                <a:cs typeface="+mn-cs"/>
+              </a:defRPr>
+            </a:lvl5pPr>
+            <a:lvl6pPr marL="2286000" indent="0" algn="ctr" defTabSz="914400" rtl="0" eaLnBrk="1" latinLnBrk="0" hangingPunct="1">
+              <a:lnSpc>
+                <a:spcPct val="90000"/>
+              </a:lnSpc>
+              <a:spcBef>
+                <a:spcPts val="500"/>
+              </a:spcBef>
+              <a:buFont typeface="Arial" panose="020B0604020202020204" pitchFamily="34" charset="0"/>
+              <a:buNone/>
+              <a:defRPr sz="1600" kern="1200">
+                <a:solidFill>
+                  <a:schemeClr val="tx1"/>
+                </a:solidFill>
+                <a:latin typeface="+mn-lt"/>
+                <a:ea typeface="+mn-ea"/>
+                <a:cs typeface="+mn-cs"/>
+              </a:defRPr>
+            </a:lvl6pPr>
+            <a:lvl7pPr marL="2743200" indent="0" algn="ctr" defTabSz="914400" rtl="0" eaLnBrk="1" latinLnBrk="0" hangingPunct="1">
+              <a:lnSpc>
+                <a:spcPct val="90000"/>
+              </a:lnSpc>
+              <a:spcBef>
+                <a:spcPts val="500"/>
+              </a:spcBef>
+              <a:buFont typeface="Arial" panose="020B0604020202020204" pitchFamily="34" charset="0"/>
+              <a:buNone/>
+              <a:defRPr sz="1600" kern="1200">
+                <a:solidFill>
+                  <a:schemeClr val="tx1"/>
+                </a:solidFill>
+                <a:latin typeface="+mn-lt"/>
+                <a:ea typeface="+mn-ea"/>
+                <a:cs typeface="+mn-cs"/>
+              </a:defRPr>
+            </a:lvl7pPr>
+            <a:lvl8pPr marL="3200400" indent="0" algn="ctr" defTabSz="914400" rtl="0" eaLnBrk="1" latinLnBrk="0" hangingPunct="1">
+              <a:lnSpc>
+                <a:spcPct val="90000"/>
+              </a:lnSpc>
+              <a:spcBef>
+                <a:spcPts val="500"/>
+              </a:spcBef>
+              <a:buFont typeface="Arial" panose="020B0604020202020204" pitchFamily="34" charset="0"/>
+              <a:buNone/>
+              <a:defRPr sz="1600" kern="1200">
+                <a:solidFill>
+                  <a:schemeClr val="tx1"/>
+                </a:solidFill>
+                <a:latin typeface="+mn-lt"/>
+                <a:ea typeface="+mn-ea"/>
+                <a:cs typeface="+mn-cs"/>
+              </a:defRPr>
+            </a:lvl8pPr>
+            <a:lvl9pPr marL="3657600" indent="0" algn="ctr" defTabSz="914400" rtl="0" eaLnBrk="1" latinLnBrk="0" hangingPunct="1">
+              <a:lnSpc>
+                <a:spcPct val="90000"/>
+              </a:lnSpc>
+              <a:spcBef>
+                <a:spcPts val="500"/>
+              </a:spcBef>
+              <a:buFont typeface="Arial" panose="020B0604020202020204" pitchFamily="34" charset="0"/>
+              <a:buNone/>
+              <a:defRPr sz="1600" kern="1200">
+                <a:solidFill>
+                  <a:schemeClr val="tx1"/>
+                </a:solidFill>
+                <a:latin typeface="+mn-lt"/>
+                <a:ea typeface="+mn-ea"/>
+                <a:cs typeface="+mn-cs"/>
+              </a:defRPr>
+            </a:lvl9pPr>
+          </a:lstStyle>
+          <a:p>
+            <a:r>
+              <a:rPr lang="fr-FR" sz="2800" b="1" dirty="0">
+                <a:solidFill>
+                  <a:sysClr val="windowText" lastClr="000000"/>
+                </a:solidFill>
+              </a:rPr>
+              <a:t>prompt</a:t>
+            </a:r>
+          </a:p>
+        </p:txBody>
+      </p:sp>
+      <p:sp>
+        <p:nvSpPr>
+          <p:cNvPr id="10" name="Sous-titre 2">
+            <a:extLst>
+              <a:ext uri="{FF2B5EF4-FFF2-40B4-BE49-F238E27FC236}">
+                <a16:creationId xmlns:a16="http://schemas.microsoft.com/office/drawing/2014/main" id="{5055341C-544E-C42F-C9C3-0E8F759A282E}"/>
+              </a:ext>
+            </a:extLst>
+          </p:cNvPr>
+          <p:cNvSpPr txBox="1">
+            <a:spLocks/>
+          </p:cNvSpPr>
+          <p:nvPr/>
+        </p:nvSpPr>
+        <p:spPr>
+          <a:xfrm>
+            <a:off x="4192770" y="5531911"/>
+            <a:ext cx="7747593" cy="502134"/>
+          </a:xfrm>
+          <a:prstGeom prst="rect">
+            <a:avLst/>
+          </a:prstGeom>
+          <a:noFill/>
+        </p:spPr>
+        <p:txBody>
+          <a:bodyPr vert="horz" lIns="91440" tIns="45720" rIns="91440" bIns="45720" rtlCol="0">
+            <a:normAutofit/>
+          </a:bodyPr>
+          <a:lstStyle>
+            <a:lvl1pPr marL="0" indent="0" algn="ctr" defTabSz="914400" rtl="0" eaLnBrk="1" latinLnBrk="0" hangingPunct="1">
+              <a:lnSpc>
+                <a:spcPct val="90000"/>
+              </a:lnSpc>
+              <a:spcBef>
+                <a:spcPts val="1000"/>
+              </a:spcBef>
+              <a:buFont typeface="Arial" panose="020B0604020202020204" pitchFamily="34" charset="0"/>
+              <a:buNone/>
+              <a:defRPr sz="2400" kern="1200">
+                <a:solidFill>
+                  <a:schemeClr val="tx1"/>
+                </a:solidFill>
+                <a:latin typeface="+mn-lt"/>
+                <a:ea typeface="+mn-ea"/>
+                <a:cs typeface="+mn-cs"/>
+              </a:defRPr>
+            </a:lvl1pPr>
+            <a:lvl2pPr marL="457200" indent="0" algn="ctr" defTabSz="914400" rtl="0" eaLnBrk="1" latinLnBrk="0" hangingPunct="1">
+              <a:lnSpc>
+                <a:spcPct val="90000"/>
+              </a:lnSpc>
+              <a:spcBef>
+                <a:spcPts val="500"/>
+              </a:spcBef>
+              <a:buFont typeface="Arial" panose="020B0604020202020204" pitchFamily="34" charset="0"/>
+              <a:buNone/>
+              <a:defRPr sz="2000" kern="1200">
+                <a:solidFill>
+                  <a:schemeClr val="tx1"/>
+                </a:solidFill>
+                <a:latin typeface="+mn-lt"/>
+                <a:ea typeface="+mn-ea"/>
+                <a:cs typeface="+mn-cs"/>
+              </a:defRPr>
+            </a:lvl2pPr>
+            <a:lvl3pPr marL="914400" indent="0" algn="ctr" defTabSz="914400" rtl="0" eaLnBrk="1" latinLnBrk="0" hangingPunct="1">
+              <a:lnSpc>
+                <a:spcPct val="90000"/>
+              </a:lnSpc>
+              <a:spcBef>
+                <a:spcPts val="500"/>
+              </a:spcBef>
+              <a:buFont typeface="Arial" panose="020B0604020202020204" pitchFamily="34" charset="0"/>
+              <a:buNone/>
+              <a:defRPr sz="1800" kern="1200">
+                <a:solidFill>
+                  <a:schemeClr val="tx1"/>
+                </a:solidFill>
+                <a:latin typeface="+mn-lt"/>
+                <a:ea typeface="+mn-ea"/>
+                <a:cs typeface="+mn-cs"/>
+              </a:defRPr>
+            </a:lvl3pPr>
+            <a:lvl4pPr marL="1371600" indent="0" algn="ctr" defTabSz="914400" rtl="0" eaLnBrk="1" latinLnBrk="0" hangingPunct="1">
+              <a:lnSpc>
+                <a:spcPct val="90000"/>
+              </a:lnSpc>
+              <a:spcBef>
+                <a:spcPts val="500"/>
+              </a:spcBef>
+              <a:buFont typeface="Arial" panose="020B0604020202020204" pitchFamily="34" charset="0"/>
+              <a:buNone/>
+              <a:defRPr sz="1600" kern="1200">
+                <a:solidFill>
+                  <a:schemeClr val="tx1"/>
+                </a:solidFill>
+                <a:latin typeface="+mn-lt"/>
+                <a:ea typeface="+mn-ea"/>
+                <a:cs typeface="+mn-cs"/>
+              </a:defRPr>
+            </a:lvl4pPr>
+            <a:lvl5pPr marL="1828800" indent="0" algn="ctr" defTabSz="914400" rtl="0" eaLnBrk="1" latinLnBrk="0" hangingPunct="1">
+              <a:lnSpc>
+                <a:spcPct val="90000"/>
+              </a:lnSpc>
+              <a:spcBef>
+                <a:spcPts val="500"/>
+              </a:spcBef>
+              <a:buFont typeface="Arial" panose="020B0604020202020204" pitchFamily="34" charset="0"/>
+              <a:buNone/>
+              <a:defRPr sz="1600" kern="1200">
+                <a:solidFill>
+                  <a:schemeClr val="tx1"/>
+                </a:solidFill>
+                <a:latin typeface="+mn-lt"/>
+                <a:ea typeface="+mn-ea"/>
+                <a:cs typeface="+mn-cs"/>
+              </a:defRPr>
+            </a:lvl5pPr>
+            <a:lvl6pPr marL="2286000" indent="0" algn="ctr" defTabSz="914400" rtl="0" eaLnBrk="1" latinLnBrk="0" hangingPunct="1">
+              <a:lnSpc>
+                <a:spcPct val="90000"/>
+              </a:lnSpc>
+              <a:spcBef>
+                <a:spcPts val="500"/>
+              </a:spcBef>
+              <a:buFont typeface="Arial" panose="020B0604020202020204" pitchFamily="34" charset="0"/>
+              <a:buNone/>
+              <a:defRPr sz="1600" kern="1200">
+                <a:solidFill>
+                  <a:schemeClr val="tx1"/>
+                </a:solidFill>
+                <a:latin typeface="+mn-lt"/>
+                <a:ea typeface="+mn-ea"/>
+                <a:cs typeface="+mn-cs"/>
+              </a:defRPr>
+            </a:lvl6pPr>
+            <a:lvl7pPr marL="2743200" indent="0" algn="ctr" defTabSz="914400" rtl="0" eaLnBrk="1" latinLnBrk="0" hangingPunct="1">
+              <a:lnSpc>
+                <a:spcPct val="90000"/>
+              </a:lnSpc>
+              <a:spcBef>
+                <a:spcPts val="500"/>
+              </a:spcBef>
+              <a:buFont typeface="Arial" panose="020B0604020202020204" pitchFamily="34" charset="0"/>
+              <a:buNone/>
+              <a:defRPr sz="1600" kern="1200">
+                <a:solidFill>
+                  <a:schemeClr val="tx1"/>
+                </a:solidFill>
+                <a:latin typeface="+mn-lt"/>
+                <a:ea typeface="+mn-ea"/>
+                <a:cs typeface="+mn-cs"/>
+              </a:defRPr>
+            </a:lvl7pPr>
+            <a:lvl8pPr marL="3200400" indent="0" algn="ctr" defTabSz="914400" rtl="0" eaLnBrk="1" latinLnBrk="0" hangingPunct="1">
+              <a:lnSpc>
+                <a:spcPct val="90000"/>
+              </a:lnSpc>
+              <a:spcBef>
+                <a:spcPts val="500"/>
+              </a:spcBef>
+              <a:buFont typeface="Arial" panose="020B0604020202020204" pitchFamily="34" charset="0"/>
+              <a:buNone/>
+              <a:defRPr sz="1600" kern="1200">
+                <a:solidFill>
+                  <a:schemeClr val="tx1"/>
+                </a:solidFill>
+                <a:latin typeface="+mn-lt"/>
+                <a:ea typeface="+mn-ea"/>
+                <a:cs typeface="+mn-cs"/>
+              </a:defRPr>
+            </a:lvl8pPr>
+            <a:lvl9pPr marL="3657600" indent="0" algn="ctr" defTabSz="914400" rtl="0" eaLnBrk="1" latinLnBrk="0" hangingPunct="1">
+              <a:lnSpc>
+                <a:spcPct val="90000"/>
+              </a:lnSpc>
+              <a:spcBef>
+                <a:spcPts val="500"/>
+              </a:spcBef>
+              <a:buFont typeface="Arial" panose="020B0604020202020204" pitchFamily="34" charset="0"/>
+              <a:buNone/>
+              <a:defRPr sz="1600" kern="1200">
+                <a:solidFill>
+                  <a:schemeClr val="tx1"/>
+                </a:solidFill>
+                <a:latin typeface="+mn-lt"/>
+                <a:ea typeface="+mn-ea"/>
+                <a:cs typeface="+mn-cs"/>
+              </a:defRPr>
+            </a:lvl9pPr>
+          </a:lstStyle>
+          <a:p>
+            <a:pPr algn="l"/>
+            <a:r>
+              <a:rPr lang="fr-FR" sz="2800" b="1" dirty="0">
+                <a:solidFill>
+                  <a:schemeClr val="accent4">
+                    <a:lumMod val="75000"/>
+                  </a:schemeClr>
+                </a:solidFill>
+              </a:rPr>
+              <a:t>Classification par prompt avec exemples</a:t>
+            </a:r>
+          </a:p>
+        </p:txBody>
+      </p:sp>
+      <p:sp>
+        <p:nvSpPr>
+          <p:cNvPr id="11" name="Sous-titre 2">
+            <a:extLst>
+              <a:ext uri="{FF2B5EF4-FFF2-40B4-BE49-F238E27FC236}">
+                <a16:creationId xmlns:a16="http://schemas.microsoft.com/office/drawing/2014/main" id="{FB5F0CCD-F181-7852-444C-5A6B91A7D381}"/>
+              </a:ext>
+            </a:extLst>
+          </p:cNvPr>
+          <p:cNvSpPr txBox="1">
+            <a:spLocks/>
+          </p:cNvSpPr>
+          <p:nvPr/>
+        </p:nvSpPr>
+        <p:spPr>
+          <a:xfrm>
+            <a:off x="4192770" y="3663205"/>
+            <a:ext cx="7747593" cy="502134"/>
+          </a:xfrm>
+          <a:prstGeom prst="rect">
+            <a:avLst/>
+          </a:prstGeom>
+          <a:noFill/>
+        </p:spPr>
+        <p:txBody>
+          <a:bodyPr vert="horz" lIns="91440" tIns="45720" rIns="91440" bIns="45720" rtlCol="0">
+            <a:normAutofit fontScale="70000" lnSpcReduction="20000"/>
+          </a:bodyPr>
+          <a:lstStyle>
+            <a:lvl1pPr marL="0" indent="0" algn="ctr" defTabSz="914400" rtl="0" eaLnBrk="1" latinLnBrk="0" hangingPunct="1">
+              <a:lnSpc>
+                <a:spcPct val="90000"/>
+              </a:lnSpc>
+              <a:spcBef>
+                <a:spcPts val="1000"/>
+              </a:spcBef>
+              <a:buFont typeface="Arial" panose="020B0604020202020204" pitchFamily="34" charset="0"/>
+              <a:buNone/>
+              <a:defRPr sz="2400" kern="1200">
+                <a:solidFill>
+                  <a:schemeClr val="tx1"/>
+                </a:solidFill>
+                <a:latin typeface="+mn-lt"/>
+                <a:ea typeface="+mn-ea"/>
+                <a:cs typeface="+mn-cs"/>
+              </a:defRPr>
+            </a:lvl1pPr>
+            <a:lvl2pPr marL="457200" indent="0" algn="ctr" defTabSz="914400" rtl="0" eaLnBrk="1" latinLnBrk="0" hangingPunct="1">
+              <a:lnSpc>
+                <a:spcPct val="90000"/>
+              </a:lnSpc>
+              <a:spcBef>
+                <a:spcPts val="500"/>
+              </a:spcBef>
+              <a:buFont typeface="Arial" panose="020B0604020202020204" pitchFamily="34" charset="0"/>
+              <a:buNone/>
+              <a:defRPr sz="2000" kern="1200">
+                <a:solidFill>
+                  <a:schemeClr val="tx1"/>
+                </a:solidFill>
+                <a:latin typeface="+mn-lt"/>
+                <a:ea typeface="+mn-ea"/>
+                <a:cs typeface="+mn-cs"/>
+              </a:defRPr>
+            </a:lvl2pPr>
+            <a:lvl3pPr marL="914400" indent="0" algn="ctr" defTabSz="914400" rtl="0" eaLnBrk="1" latinLnBrk="0" hangingPunct="1">
+              <a:lnSpc>
+                <a:spcPct val="90000"/>
+              </a:lnSpc>
+              <a:spcBef>
+                <a:spcPts val="500"/>
+              </a:spcBef>
+              <a:buFont typeface="Arial" panose="020B0604020202020204" pitchFamily="34" charset="0"/>
+              <a:buNone/>
+              <a:defRPr sz="1800" kern="1200">
+                <a:solidFill>
+                  <a:schemeClr val="tx1"/>
+                </a:solidFill>
+                <a:latin typeface="+mn-lt"/>
+                <a:ea typeface="+mn-ea"/>
+                <a:cs typeface="+mn-cs"/>
+              </a:defRPr>
+            </a:lvl3pPr>
+            <a:lvl4pPr marL="1371600" indent="0" algn="ctr" defTabSz="914400" rtl="0" eaLnBrk="1" latinLnBrk="0" hangingPunct="1">
+              <a:lnSpc>
+                <a:spcPct val="90000"/>
+              </a:lnSpc>
+              <a:spcBef>
+                <a:spcPts val="500"/>
+              </a:spcBef>
+              <a:buFont typeface="Arial" panose="020B0604020202020204" pitchFamily="34" charset="0"/>
+              <a:buNone/>
+              <a:defRPr sz="1600" kern="1200">
+                <a:solidFill>
+                  <a:schemeClr val="tx1"/>
+                </a:solidFill>
+                <a:latin typeface="+mn-lt"/>
+                <a:ea typeface="+mn-ea"/>
+                <a:cs typeface="+mn-cs"/>
+              </a:defRPr>
+            </a:lvl4pPr>
+            <a:lvl5pPr marL="1828800" indent="0" algn="ctr" defTabSz="914400" rtl="0" eaLnBrk="1" latinLnBrk="0" hangingPunct="1">
+              <a:lnSpc>
+                <a:spcPct val="90000"/>
+              </a:lnSpc>
+              <a:spcBef>
+                <a:spcPts val="500"/>
+              </a:spcBef>
+              <a:buFont typeface="Arial" panose="020B0604020202020204" pitchFamily="34" charset="0"/>
+              <a:buNone/>
+              <a:defRPr sz="1600" kern="1200">
+                <a:solidFill>
+                  <a:schemeClr val="tx1"/>
+                </a:solidFill>
+                <a:latin typeface="+mn-lt"/>
+                <a:ea typeface="+mn-ea"/>
+                <a:cs typeface="+mn-cs"/>
+              </a:defRPr>
+            </a:lvl5pPr>
+            <a:lvl6pPr marL="2286000" indent="0" algn="ctr" defTabSz="914400" rtl="0" eaLnBrk="1" latinLnBrk="0" hangingPunct="1">
+              <a:lnSpc>
+                <a:spcPct val="90000"/>
+              </a:lnSpc>
+              <a:spcBef>
+                <a:spcPts val="500"/>
+              </a:spcBef>
+              <a:buFont typeface="Arial" panose="020B0604020202020204" pitchFamily="34" charset="0"/>
+              <a:buNone/>
+              <a:defRPr sz="1600" kern="1200">
+                <a:solidFill>
+                  <a:schemeClr val="tx1"/>
+                </a:solidFill>
+                <a:latin typeface="+mn-lt"/>
+                <a:ea typeface="+mn-ea"/>
+                <a:cs typeface="+mn-cs"/>
+              </a:defRPr>
+            </a:lvl6pPr>
+            <a:lvl7pPr marL="2743200" indent="0" algn="ctr" defTabSz="914400" rtl="0" eaLnBrk="1" latinLnBrk="0" hangingPunct="1">
+              <a:lnSpc>
+                <a:spcPct val="90000"/>
+              </a:lnSpc>
+              <a:spcBef>
+                <a:spcPts val="500"/>
+              </a:spcBef>
+              <a:buFont typeface="Arial" panose="020B0604020202020204" pitchFamily="34" charset="0"/>
+              <a:buNone/>
+              <a:defRPr sz="1600" kern="1200">
+                <a:solidFill>
+                  <a:schemeClr val="tx1"/>
+                </a:solidFill>
+                <a:latin typeface="+mn-lt"/>
+                <a:ea typeface="+mn-ea"/>
+                <a:cs typeface="+mn-cs"/>
+              </a:defRPr>
+            </a:lvl7pPr>
+            <a:lvl8pPr marL="3200400" indent="0" algn="ctr" defTabSz="914400" rtl="0" eaLnBrk="1" latinLnBrk="0" hangingPunct="1">
+              <a:lnSpc>
+                <a:spcPct val="90000"/>
+              </a:lnSpc>
+              <a:spcBef>
+                <a:spcPts val="500"/>
+              </a:spcBef>
+              <a:buFont typeface="Arial" panose="020B0604020202020204" pitchFamily="34" charset="0"/>
+              <a:buNone/>
+              <a:defRPr sz="1600" kern="1200">
+                <a:solidFill>
+                  <a:schemeClr val="tx1"/>
+                </a:solidFill>
+                <a:latin typeface="+mn-lt"/>
+                <a:ea typeface="+mn-ea"/>
+                <a:cs typeface="+mn-cs"/>
+              </a:defRPr>
+            </a:lvl8pPr>
+            <a:lvl9pPr marL="3657600" indent="0" algn="ctr" defTabSz="914400" rtl="0" eaLnBrk="1" latinLnBrk="0" hangingPunct="1">
+              <a:lnSpc>
+                <a:spcPct val="90000"/>
+              </a:lnSpc>
+              <a:spcBef>
+                <a:spcPts val="500"/>
+              </a:spcBef>
+              <a:buFont typeface="Arial" panose="020B0604020202020204" pitchFamily="34" charset="0"/>
+              <a:buNone/>
+              <a:defRPr sz="1600" kern="1200">
+                <a:solidFill>
+                  <a:schemeClr val="tx1"/>
+                </a:solidFill>
+                <a:latin typeface="+mn-lt"/>
+                <a:ea typeface="+mn-ea"/>
+                <a:cs typeface="+mn-cs"/>
+              </a:defRPr>
+            </a:lvl9pPr>
+          </a:lstStyle>
+          <a:p>
+            <a:pPr algn="l"/>
+            <a:r>
+              <a:rPr lang="fr-FR" sz="2800" b="1" dirty="0">
+                <a:solidFill>
+                  <a:schemeClr val="accent4">
+                    <a:lumMod val="75000"/>
+                  </a:schemeClr>
+                </a:solidFill>
+              </a:rPr>
+              <a:t>Vectorise le jeu d’entrainement pour extraire des exemples pertinents</a:t>
+            </a:r>
+          </a:p>
+        </p:txBody>
+      </p:sp>
+      <p:sp>
+        <p:nvSpPr>
+          <p:cNvPr id="12" name="Sous-titre 2">
+            <a:extLst>
+              <a:ext uri="{FF2B5EF4-FFF2-40B4-BE49-F238E27FC236}">
+                <a16:creationId xmlns:a16="http://schemas.microsoft.com/office/drawing/2014/main" id="{2DF4AA5F-B1CB-5819-5E50-97D34C34E055}"/>
+              </a:ext>
+            </a:extLst>
+          </p:cNvPr>
+          <p:cNvSpPr txBox="1">
+            <a:spLocks/>
+          </p:cNvSpPr>
+          <p:nvPr/>
+        </p:nvSpPr>
+        <p:spPr>
+          <a:xfrm>
+            <a:off x="4192770" y="1794499"/>
+            <a:ext cx="7747593" cy="502134"/>
+          </a:xfrm>
+          <a:prstGeom prst="rect">
+            <a:avLst/>
+          </a:prstGeom>
+          <a:noFill/>
+        </p:spPr>
+        <p:txBody>
+          <a:bodyPr vert="horz" lIns="91440" tIns="45720" rIns="91440" bIns="45720" rtlCol="0">
+            <a:normAutofit/>
+          </a:bodyPr>
+          <a:lstStyle>
+            <a:lvl1pPr marL="0" indent="0" algn="ctr" defTabSz="914400" rtl="0" eaLnBrk="1" latinLnBrk="0" hangingPunct="1">
+              <a:lnSpc>
+                <a:spcPct val="90000"/>
+              </a:lnSpc>
+              <a:spcBef>
+                <a:spcPts val="1000"/>
+              </a:spcBef>
+              <a:buFont typeface="Arial" panose="020B0604020202020204" pitchFamily="34" charset="0"/>
+              <a:buNone/>
+              <a:defRPr sz="2400" kern="1200">
+                <a:solidFill>
+                  <a:schemeClr val="tx1"/>
+                </a:solidFill>
+                <a:latin typeface="+mn-lt"/>
+                <a:ea typeface="+mn-ea"/>
+                <a:cs typeface="+mn-cs"/>
+              </a:defRPr>
+            </a:lvl1pPr>
+            <a:lvl2pPr marL="457200" indent="0" algn="ctr" defTabSz="914400" rtl="0" eaLnBrk="1" latinLnBrk="0" hangingPunct="1">
+              <a:lnSpc>
+                <a:spcPct val="90000"/>
+              </a:lnSpc>
+              <a:spcBef>
+                <a:spcPts val="500"/>
+              </a:spcBef>
+              <a:buFont typeface="Arial" panose="020B0604020202020204" pitchFamily="34" charset="0"/>
+              <a:buNone/>
+              <a:defRPr sz="2000" kern="1200">
+                <a:solidFill>
+                  <a:schemeClr val="tx1"/>
+                </a:solidFill>
+                <a:latin typeface="+mn-lt"/>
+                <a:ea typeface="+mn-ea"/>
+                <a:cs typeface="+mn-cs"/>
+              </a:defRPr>
+            </a:lvl2pPr>
+            <a:lvl3pPr marL="914400" indent="0" algn="ctr" defTabSz="914400" rtl="0" eaLnBrk="1" latinLnBrk="0" hangingPunct="1">
+              <a:lnSpc>
+                <a:spcPct val="90000"/>
+              </a:lnSpc>
+              <a:spcBef>
+                <a:spcPts val="500"/>
+              </a:spcBef>
+              <a:buFont typeface="Arial" panose="020B0604020202020204" pitchFamily="34" charset="0"/>
+              <a:buNone/>
+              <a:defRPr sz="1800" kern="1200">
+                <a:solidFill>
+                  <a:schemeClr val="tx1"/>
+                </a:solidFill>
+                <a:latin typeface="+mn-lt"/>
+                <a:ea typeface="+mn-ea"/>
+                <a:cs typeface="+mn-cs"/>
+              </a:defRPr>
+            </a:lvl3pPr>
+            <a:lvl4pPr marL="1371600" indent="0" algn="ctr" defTabSz="914400" rtl="0" eaLnBrk="1" latinLnBrk="0" hangingPunct="1">
+              <a:lnSpc>
+                <a:spcPct val="90000"/>
+              </a:lnSpc>
+              <a:spcBef>
+                <a:spcPts val="500"/>
+              </a:spcBef>
+              <a:buFont typeface="Arial" panose="020B0604020202020204" pitchFamily="34" charset="0"/>
+              <a:buNone/>
+              <a:defRPr sz="1600" kern="1200">
+                <a:solidFill>
+                  <a:schemeClr val="tx1"/>
+                </a:solidFill>
+                <a:latin typeface="+mn-lt"/>
+                <a:ea typeface="+mn-ea"/>
+                <a:cs typeface="+mn-cs"/>
+              </a:defRPr>
+            </a:lvl4pPr>
+            <a:lvl5pPr marL="1828800" indent="0" algn="ctr" defTabSz="914400" rtl="0" eaLnBrk="1" latinLnBrk="0" hangingPunct="1">
+              <a:lnSpc>
+                <a:spcPct val="90000"/>
+              </a:lnSpc>
+              <a:spcBef>
+                <a:spcPts val="500"/>
+              </a:spcBef>
+              <a:buFont typeface="Arial" panose="020B0604020202020204" pitchFamily="34" charset="0"/>
+              <a:buNone/>
+              <a:defRPr sz="1600" kern="1200">
+                <a:solidFill>
+                  <a:schemeClr val="tx1"/>
+                </a:solidFill>
+                <a:latin typeface="+mn-lt"/>
+                <a:ea typeface="+mn-ea"/>
+                <a:cs typeface="+mn-cs"/>
+              </a:defRPr>
+            </a:lvl5pPr>
+            <a:lvl6pPr marL="2286000" indent="0" algn="ctr" defTabSz="914400" rtl="0" eaLnBrk="1" latinLnBrk="0" hangingPunct="1">
+              <a:lnSpc>
+                <a:spcPct val="90000"/>
+              </a:lnSpc>
+              <a:spcBef>
+                <a:spcPts val="500"/>
+              </a:spcBef>
+              <a:buFont typeface="Arial" panose="020B0604020202020204" pitchFamily="34" charset="0"/>
+              <a:buNone/>
+              <a:defRPr sz="1600" kern="1200">
+                <a:solidFill>
+                  <a:schemeClr val="tx1"/>
+                </a:solidFill>
+                <a:latin typeface="+mn-lt"/>
+                <a:ea typeface="+mn-ea"/>
+                <a:cs typeface="+mn-cs"/>
+              </a:defRPr>
+            </a:lvl6pPr>
+            <a:lvl7pPr marL="2743200" indent="0" algn="ctr" defTabSz="914400" rtl="0" eaLnBrk="1" latinLnBrk="0" hangingPunct="1">
+              <a:lnSpc>
+                <a:spcPct val="90000"/>
+              </a:lnSpc>
+              <a:spcBef>
+                <a:spcPts val="500"/>
+              </a:spcBef>
+              <a:buFont typeface="Arial" panose="020B0604020202020204" pitchFamily="34" charset="0"/>
+              <a:buNone/>
+              <a:defRPr sz="1600" kern="1200">
+                <a:solidFill>
+                  <a:schemeClr val="tx1"/>
+                </a:solidFill>
+                <a:latin typeface="+mn-lt"/>
+                <a:ea typeface="+mn-ea"/>
+                <a:cs typeface="+mn-cs"/>
+              </a:defRPr>
+            </a:lvl7pPr>
+            <a:lvl8pPr marL="3200400" indent="0" algn="ctr" defTabSz="914400" rtl="0" eaLnBrk="1" latinLnBrk="0" hangingPunct="1">
+              <a:lnSpc>
+                <a:spcPct val="90000"/>
+              </a:lnSpc>
+              <a:spcBef>
+                <a:spcPts val="500"/>
+              </a:spcBef>
+              <a:buFont typeface="Arial" panose="020B0604020202020204" pitchFamily="34" charset="0"/>
+              <a:buNone/>
+              <a:defRPr sz="1600" kern="1200">
+                <a:solidFill>
+                  <a:schemeClr val="tx1"/>
+                </a:solidFill>
+                <a:latin typeface="+mn-lt"/>
+                <a:ea typeface="+mn-ea"/>
+                <a:cs typeface="+mn-cs"/>
+              </a:defRPr>
+            </a:lvl8pPr>
+            <a:lvl9pPr marL="3657600" indent="0" algn="ctr" defTabSz="914400" rtl="0" eaLnBrk="1" latinLnBrk="0" hangingPunct="1">
+              <a:lnSpc>
+                <a:spcPct val="90000"/>
+              </a:lnSpc>
+              <a:spcBef>
+                <a:spcPts val="500"/>
+              </a:spcBef>
+              <a:buFont typeface="Arial" panose="020B0604020202020204" pitchFamily="34" charset="0"/>
+              <a:buNone/>
+              <a:defRPr sz="1600" kern="1200">
+                <a:solidFill>
+                  <a:schemeClr val="tx1"/>
+                </a:solidFill>
+                <a:latin typeface="+mn-lt"/>
+                <a:ea typeface="+mn-ea"/>
+                <a:cs typeface="+mn-cs"/>
+              </a:defRPr>
+            </a:lvl9pPr>
+          </a:lstStyle>
+          <a:p>
+            <a:pPr algn="l"/>
+            <a:r>
+              <a:rPr lang="fr-FR" sz="2800" b="1" dirty="0">
+                <a:solidFill>
+                  <a:schemeClr val="accent4">
+                    <a:lumMod val="75000"/>
+                  </a:schemeClr>
+                </a:solidFill>
+              </a:rPr>
+              <a:t>Jeu d’entrainement filtré (~80,000 lignes)</a:t>
+            </a:r>
+          </a:p>
+        </p:txBody>
+      </p:sp>
+    </p:spTree>
+    <p:extLst>
+      <p:ext uri="{BB962C8B-B14F-4D97-AF65-F5344CB8AC3E}">
+        <p14:creationId xmlns:p14="http://schemas.microsoft.com/office/powerpoint/2010/main" val="3310418906"/>
+      </p:ext>
+    </p:extLst>
+  </p:cSld>
+  <p:clrMapOvr>
+    <a:masterClrMapping/>
+  </p:clrMapOvr>
+</p:sld>
+</file>
+
+<file path=ppt/slides/slide13.xml><?xml version="1.0" encoding="utf-8"?>
+<p:sld xmlns:a="http://schemas.openxmlformats.org/drawingml/2006/main" xmlns:r="http://schemas.openxmlformats.org/officeDocument/2006/relationships" xmlns:p="http://schemas.openxmlformats.org/presentationml/2006/main">
+  <p:cSld>
+    <p:spTree>
+      <p:nvGrpSpPr>
+        <p:cNvPr id="1" name=""/>
+        <p:cNvGrpSpPr/>
+        <p:nvPr/>
+      </p:nvGrpSpPr>
+      <p:grpSpPr>
+        <a:xfrm>
+          <a:off x="0" y="0"/>
+          <a:ext cx="0" cy="0"/>
+          <a:chOff x="0" y="0"/>
+          <a:chExt cx="0" cy="0"/>
+        </a:xfrm>
+      </p:grpSpPr>
+      <p:sp>
+        <p:nvSpPr>
+          <p:cNvPr id="2" name="Titre 1">
+            <a:extLst>
+              <a:ext uri="{FF2B5EF4-FFF2-40B4-BE49-F238E27FC236}">
+                <a16:creationId xmlns:a16="http://schemas.microsoft.com/office/drawing/2014/main" id="{E9BAAED3-07A6-D09F-B3B8-555F2C191CB4}"/>
+              </a:ext>
+            </a:extLst>
+          </p:cNvPr>
+          <p:cNvSpPr>
+            <a:spLocks noGrp="1"/>
+          </p:cNvSpPr>
+          <p:nvPr>
+            <p:ph type="title"/>
+          </p:nvPr>
+        </p:nvSpPr>
+        <p:spPr/>
+        <p:txBody>
+          <a:bodyPr/>
+          <a:lstStyle/>
+          <a:p>
+            <a:r>
+              <a:rPr lang="fr-FR" dirty="0"/>
+              <a:t>Approche LLM</a:t>
+            </a:r>
+          </a:p>
+        </p:txBody>
+      </p:sp>
+      <p:sp>
+        <p:nvSpPr>
+          <p:cNvPr id="3" name="Espace réservé du contenu 2">
+            <a:extLst>
+              <a:ext uri="{FF2B5EF4-FFF2-40B4-BE49-F238E27FC236}">
+                <a16:creationId xmlns:a16="http://schemas.microsoft.com/office/drawing/2014/main" id="{53D1299C-F00E-14BE-F98C-293219B414E2}"/>
+              </a:ext>
+            </a:extLst>
+          </p:cNvPr>
+          <p:cNvSpPr>
+            <a:spLocks noGrp="1"/>
+          </p:cNvSpPr>
+          <p:nvPr>
+            <p:ph idx="1"/>
+          </p:nvPr>
+        </p:nvSpPr>
+        <p:spPr/>
+        <p:txBody>
+          <a:bodyPr/>
+          <a:lstStyle/>
+          <a:p>
+            <a:r>
+              <a:rPr lang="fr-FR" dirty="0"/>
+              <a:t>choix de métriques</a:t>
+            </a:r>
+          </a:p>
+        </p:txBody>
+      </p:sp>
+      <p:pic>
+        <p:nvPicPr>
+          <p:cNvPr id="7" name="Image 6">
+            <a:extLst>
+              <a:ext uri="{FF2B5EF4-FFF2-40B4-BE49-F238E27FC236}">
+                <a16:creationId xmlns:a16="http://schemas.microsoft.com/office/drawing/2014/main" id="{CEA47920-0B17-ECB7-D86A-569E8E0CF78E}"/>
+              </a:ext>
+            </a:extLst>
+          </p:cNvPr>
+          <p:cNvPicPr>
+            <a:picLocks noChangeAspect="1"/>
+          </p:cNvPicPr>
+          <p:nvPr/>
+        </p:nvPicPr>
+        <p:blipFill>
+          <a:blip r:embed="rId2"/>
+          <a:stretch>
+            <a:fillRect/>
+          </a:stretch>
+        </p:blipFill>
+        <p:spPr>
+          <a:xfrm>
+            <a:off x="4125433" y="1286305"/>
+            <a:ext cx="7755070" cy="5332662"/>
+          </a:xfrm>
+          <a:prstGeom prst="rect">
+            <a:avLst/>
+          </a:prstGeom>
+        </p:spPr>
+      </p:pic>
+    </p:spTree>
+    <p:extLst>
+      <p:ext uri="{BB962C8B-B14F-4D97-AF65-F5344CB8AC3E}">
+        <p14:creationId xmlns:p14="http://schemas.microsoft.com/office/powerpoint/2010/main" val="3926061439"/>
+      </p:ext>
+    </p:extLst>
+  </p:cSld>
+  <p:clrMapOvr>
+    <a:masterClrMapping/>
+  </p:clrMapOvr>
+</p:sld>
+</file>
+
+<file path=ppt/slides/slide14.xml><?xml version="1.0" encoding="utf-8"?>
+<p:sld xmlns:a="http://schemas.openxmlformats.org/drawingml/2006/main" xmlns:r="http://schemas.openxmlformats.org/officeDocument/2006/relationships" xmlns:p="http://schemas.openxmlformats.org/presentationml/2006/main">
+  <p:cSld>
+    <p:spTree>
+      <p:nvGrpSpPr>
+        <p:cNvPr id="1" name="">
+          <a:extLst>
+            <a:ext uri="{FF2B5EF4-FFF2-40B4-BE49-F238E27FC236}">
+              <a16:creationId xmlns:a16="http://schemas.microsoft.com/office/drawing/2014/main" id="{D2218FFC-EA89-2EBB-B60C-317654A9D2FE}"/>
+            </a:ext>
+          </a:extLst>
+        </p:cNvPr>
+        <p:cNvGrpSpPr/>
+        <p:nvPr/>
+      </p:nvGrpSpPr>
+      <p:grpSpPr>
+        <a:xfrm>
+          <a:off x="0" y="0"/>
+          <a:ext cx="0" cy="0"/>
+          <a:chOff x="0" y="0"/>
+          <a:chExt cx="0" cy="0"/>
+        </a:xfrm>
+      </p:grpSpPr>
+      <p:sp>
+        <p:nvSpPr>
+          <p:cNvPr id="2" name="Titre 1">
+            <a:extLst>
+              <a:ext uri="{FF2B5EF4-FFF2-40B4-BE49-F238E27FC236}">
+                <a16:creationId xmlns:a16="http://schemas.microsoft.com/office/drawing/2014/main" id="{CFBCE8A0-2B0A-79CE-2554-15CCA4AB6420}"/>
+              </a:ext>
+            </a:extLst>
+          </p:cNvPr>
+          <p:cNvSpPr>
+            <a:spLocks noGrp="1"/>
+          </p:cNvSpPr>
+          <p:nvPr>
+            <p:ph type="title"/>
+          </p:nvPr>
+        </p:nvSpPr>
+        <p:spPr/>
+        <p:txBody>
+          <a:bodyPr/>
+          <a:lstStyle/>
+          <a:p>
+            <a:r>
+              <a:rPr lang="fr-FR" dirty="0"/>
+              <a:t>Approche LLM</a:t>
+            </a:r>
+          </a:p>
+        </p:txBody>
+      </p:sp>
+      <p:sp>
+        <p:nvSpPr>
+          <p:cNvPr id="3" name="Espace réservé du contenu 2">
+            <a:extLst>
+              <a:ext uri="{FF2B5EF4-FFF2-40B4-BE49-F238E27FC236}">
+                <a16:creationId xmlns:a16="http://schemas.microsoft.com/office/drawing/2014/main" id="{DB0E9823-F860-FFCB-D087-E8983341C203}"/>
+              </a:ext>
+            </a:extLst>
+          </p:cNvPr>
+          <p:cNvSpPr>
+            <a:spLocks noGrp="1"/>
+          </p:cNvSpPr>
+          <p:nvPr>
+            <p:ph idx="1"/>
+          </p:nvPr>
+        </p:nvSpPr>
+        <p:spPr/>
+        <p:txBody>
+          <a:bodyPr/>
+          <a:lstStyle/>
+          <a:p>
+            <a:r>
+              <a:rPr lang="fr-FR" dirty="0"/>
+              <a:t>classification par prompt, few-shot et few-shot dynamique avec FAISS</a:t>
+            </a:r>
+          </a:p>
+        </p:txBody>
+      </p:sp>
+    </p:spTree>
+    <p:extLst>
+      <p:ext uri="{BB962C8B-B14F-4D97-AF65-F5344CB8AC3E}">
+        <p14:creationId xmlns:p14="http://schemas.microsoft.com/office/powerpoint/2010/main" val="2728294113"/>
+      </p:ext>
+    </p:extLst>
+  </p:cSld>
+  <p:clrMapOvr>
+    <a:masterClrMapping/>
+  </p:clrMapOvr>
+</p:sld>
+</file>
+
+<file path=ppt/slides/slide15.xml><?xml version="1.0" encoding="utf-8"?>
+<p:sld xmlns:a="http://schemas.openxmlformats.org/drawingml/2006/main" xmlns:r="http://schemas.openxmlformats.org/officeDocument/2006/relationships" xmlns:p="http://schemas.openxmlformats.org/presentationml/2006/main">
+  <p:cSld>
+    <p:spTree>
+      <p:nvGrpSpPr>
+        <p:cNvPr id="1" name=""/>
+        <p:cNvGrpSpPr/>
+        <p:nvPr/>
+      </p:nvGrpSpPr>
+      <p:grpSpPr>
+        <a:xfrm>
+          <a:off x="0" y="0"/>
+          <a:ext cx="0" cy="0"/>
+          <a:chOff x="0" y="0"/>
+          <a:chExt cx="0" cy="0"/>
+        </a:xfrm>
+      </p:grpSpPr>
+      <p:sp>
+        <p:nvSpPr>
           <p:cNvPr id="6" name="Titre 1">
             <a:extLst>
               <a:ext uri="{FF2B5EF4-FFF2-40B4-BE49-F238E27FC236}">
@@ -5148,6 +7623,1831 @@
 </p:sld>
 </file>
 
+<file path=ppt/slides/slide16.xml><?xml version="1.0" encoding="utf-8"?>
+<p:sld xmlns:a="http://schemas.openxmlformats.org/drawingml/2006/main" xmlns:r="http://schemas.openxmlformats.org/officeDocument/2006/relationships" xmlns:p="http://schemas.openxmlformats.org/presentationml/2006/main">
+  <p:cSld>
+    <p:spTree>
+      <p:nvGrpSpPr>
+        <p:cNvPr id="1" name="">
+          <a:extLst>
+            <a:ext uri="{FF2B5EF4-FFF2-40B4-BE49-F238E27FC236}">
+              <a16:creationId xmlns:a16="http://schemas.microsoft.com/office/drawing/2014/main" id="{380336A1-9489-38FC-CFC0-F1470FFA6942}"/>
+            </a:ext>
+          </a:extLst>
+        </p:cNvPr>
+        <p:cNvGrpSpPr/>
+        <p:nvPr/>
+      </p:nvGrpSpPr>
+      <p:grpSpPr>
+        <a:xfrm>
+          <a:off x="0" y="0"/>
+          <a:ext cx="0" cy="0"/>
+          <a:chOff x="0" y="0"/>
+          <a:chExt cx="0" cy="0"/>
+        </a:xfrm>
+      </p:grpSpPr>
+      <p:pic>
+        <p:nvPicPr>
+          <p:cNvPr id="2054" name="Picture 6" descr="Machine Learning Certified Professional (MLCP)">
+            <a:extLst>
+              <a:ext uri="{FF2B5EF4-FFF2-40B4-BE49-F238E27FC236}">
+                <a16:creationId xmlns:a16="http://schemas.microsoft.com/office/drawing/2014/main" id="{E0159E87-2505-5F28-A71E-3E9EAA5E7005}"/>
+              </a:ext>
+            </a:extLst>
+          </p:cNvPr>
+          <p:cNvPicPr>
+            <a:picLocks noChangeAspect="1" noChangeArrowheads="1"/>
+          </p:cNvPicPr>
+          <p:nvPr/>
+        </p:nvPicPr>
+        <p:blipFill rotWithShape="1">
+          <a:blip r:embed="rId2">
+            <a:extLst>
+              <a:ext uri="{28A0092B-C50C-407E-A947-70E740481C1C}">
+                <a14:useLocalDpi xmlns:a14="http://schemas.microsoft.com/office/drawing/2010/main" val="0"/>
+              </a:ext>
+            </a:extLst>
+          </a:blip>
+          <a:srcRect l="17312" r="19121"/>
+          <a:stretch>
+            <a:fillRect/>
+          </a:stretch>
+        </p:blipFill>
+        <p:spPr bwMode="auto">
+          <a:xfrm>
+            <a:off x="7804298" y="0"/>
+            <a:ext cx="4359349" cy="6858000"/>
+          </a:xfrm>
+          <a:prstGeom prst="rect">
+            <a:avLst/>
+          </a:prstGeom>
+          <a:noFill/>
+          <a:extLst>
+            <a:ext uri="{909E8E84-426E-40DD-AFC4-6F175D3DCCD1}">
+              <a14:hiddenFill xmlns:a14="http://schemas.microsoft.com/office/drawing/2010/main">
+                <a:solidFill>
+                  <a:srgbClr val="FFFFFF"/>
+                </a:solidFill>
+              </a14:hiddenFill>
+            </a:ext>
+          </a:extLst>
+        </p:spPr>
+      </p:pic>
+      <p:sp>
+        <p:nvSpPr>
+          <p:cNvPr id="2" name="Titre 1">
+            <a:extLst>
+              <a:ext uri="{FF2B5EF4-FFF2-40B4-BE49-F238E27FC236}">
+                <a16:creationId xmlns:a16="http://schemas.microsoft.com/office/drawing/2014/main" id="{E2ABA96C-0BF8-98F9-09DF-02D9BC1A25CD}"/>
+              </a:ext>
+            </a:extLst>
+          </p:cNvPr>
+          <p:cNvSpPr>
+            <a:spLocks noGrp="1"/>
+          </p:cNvSpPr>
+          <p:nvPr>
+            <p:ph type="title"/>
+          </p:nvPr>
+        </p:nvSpPr>
+        <p:spPr>
+          <a:xfrm>
+            <a:off x="838199" y="365125"/>
+            <a:ext cx="6966099" cy="3824103"/>
+          </a:xfrm>
+        </p:spPr>
+        <p:txBody>
+          <a:bodyPr>
+            <a:normAutofit/>
+          </a:bodyPr>
+          <a:lstStyle/>
+          <a:p>
+            <a:r>
+              <a:rPr lang="fr-FR" sz="6600" dirty="0">
+                <a:solidFill>
+                  <a:schemeClr val="accent1">
+                    <a:lumMod val="75000"/>
+                  </a:schemeClr>
+                </a:solidFill>
+                <a:latin typeface="Segoe UI Black" panose="020B0A02040204020203" pitchFamily="34" charset="0"/>
+                <a:ea typeface="Segoe UI Black" panose="020B0A02040204020203" pitchFamily="34" charset="0"/>
+              </a:rPr>
+              <a:t>Implémentation</a:t>
+            </a:r>
+            <a:br>
+              <a:rPr lang="fr-FR" sz="6600" dirty="0">
+                <a:solidFill>
+                  <a:schemeClr val="accent1">
+                    <a:lumMod val="75000"/>
+                  </a:schemeClr>
+                </a:solidFill>
+                <a:latin typeface="Segoe UI Black" panose="020B0A02040204020203" pitchFamily="34" charset="0"/>
+                <a:ea typeface="Segoe UI Black" panose="020B0A02040204020203" pitchFamily="34" charset="0"/>
+              </a:rPr>
+            </a:br>
+            <a:r>
+              <a:rPr lang="fr-FR" sz="4800" dirty="0">
+                <a:solidFill>
+                  <a:schemeClr val="accent1">
+                    <a:lumMod val="75000"/>
+                  </a:schemeClr>
+                </a:solidFill>
+                <a:latin typeface="Segoe UI Black" panose="020B0A02040204020203" pitchFamily="34" charset="0"/>
+                <a:ea typeface="Segoe UI Black" panose="020B0A02040204020203" pitchFamily="34" charset="0"/>
+              </a:rPr>
+              <a:t>L’approche </a:t>
+            </a:r>
+            <a:r>
+              <a:rPr lang="fr-FR" sz="4800" dirty="0">
+                <a:solidFill>
+                  <a:srgbClr val="00B0F0"/>
+                </a:solidFill>
+                <a:latin typeface="Segoe UI Black" panose="020B0A02040204020203" pitchFamily="34" charset="0"/>
+                <a:ea typeface="Segoe UI Black" panose="020B0A02040204020203" pitchFamily="34" charset="0"/>
+              </a:rPr>
+              <a:t>ML</a:t>
+            </a:r>
+            <a:endParaRPr lang="fr-FR" sz="6600" dirty="0">
+              <a:solidFill>
+                <a:srgbClr val="00B0F0"/>
+              </a:solidFill>
+              <a:latin typeface="Segoe UI Black" panose="020B0A02040204020203" pitchFamily="34" charset="0"/>
+              <a:ea typeface="Segoe UI Black" panose="020B0A02040204020203" pitchFamily="34" charset="0"/>
+            </a:endParaRPr>
+          </a:p>
+        </p:txBody>
+      </p:sp>
+    </p:spTree>
+    <p:extLst>
+      <p:ext uri="{BB962C8B-B14F-4D97-AF65-F5344CB8AC3E}">
+        <p14:creationId xmlns:p14="http://schemas.microsoft.com/office/powerpoint/2010/main" val="3969419233"/>
+      </p:ext>
+    </p:extLst>
+  </p:cSld>
+  <p:clrMapOvr>
+    <a:masterClrMapping/>
+  </p:clrMapOvr>
+</p:sld>
+</file>
+
+<file path=ppt/slides/slide17.xml><?xml version="1.0" encoding="utf-8"?>
+<p:sld xmlns:a="http://schemas.openxmlformats.org/drawingml/2006/main" xmlns:r="http://schemas.openxmlformats.org/officeDocument/2006/relationships" xmlns:p="http://schemas.openxmlformats.org/presentationml/2006/main">
+  <p:cSld>
+    <p:spTree>
+      <p:nvGrpSpPr>
+        <p:cNvPr id="1" name=""/>
+        <p:cNvGrpSpPr/>
+        <p:nvPr/>
+      </p:nvGrpSpPr>
+      <p:grpSpPr>
+        <a:xfrm>
+          <a:off x="0" y="0"/>
+          <a:ext cx="0" cy="0"/>
+          <a:chOff x="0" y="0"/>
+          <a:chExt cx="0" cy="0"/>
+        </a:xfrm>
+      </p:grpSpPr>
+      <p:sp>
+        <p:nvSpPr>
+          <p:cNvPr id="2" name="Titre 1">
+            <a:extLst>
+              <a:ext uri="{FF2B5EF4-FFF2-40B4-BE49-F238E27FC236}">
+                <a16:creationId xmlns:a16="http://schemas.microsoft.com/office/drawing/2014/main" id="{B15A7270-7718-F18D-E911-C4ABC1A6A3E0}"/>
+              </a:ext>
+            </a:extLst>
+          </p:cNvPr>
+          <p:cNvSpPr>
+            <a:spLocks noGrp="1"/>
+          </p:cNvSpPr>
+          <p:nvPr>
+            <p:ph type="title"/>
+          </p:nvPr>
+        </p:nvSpPr>
+        <p:spPr/>
+        <p:txBody>
+          <a:bodyPr/>
+          <a:lstStyle/>
+          <a:p>
+            <a:r>
+              <a:rPr lang="fr-FR" b="1" dirty="0"/>
+              <a:t>Approche ML</a:t>
+            </a:r>
+            <a:endParaRPr lang="fr-FR" dirty="0"/>
+          </a:p>
+        </p:txBody>
+      </p:sp>
+      <p:sp>
+        <p:nvSpPr>
+          <p:cNvPr id="4" name="Sous-titre 2">
+            <a:extLst>
+              <a:ext uri="{FF2B5EF4-FFF2-40B4-BE49-F238E27FC236}">
+                <a16:creationId xmlns:a16="http://schemas.microsoft.com/office/drawing/2014/main" id="{5B84969B-8B0F-DC1D-C65B-75CCE3E9DDB5}"/>
+              </a:ext>
+            </a:extLst>
+          </p:cNvPr>
+          <p:cNvSpPr txBox="1">
+            <a:spLocks/>
+          </p:cNvSpPr>
+          <p:nvPr/>
+        </p:nvSpPr>
+        <p:spPr>
+          <a:xfrm>
+            <a:off x="1665768" y="1794499"/>
+            <a:ext cx="1959936" cy="502134"/>
+          </a:xfrm>
+          <a:prstGeom prst="rect">
+            <a:avLst/>
+          </a:prstGeom>
+          <a:noFill/>
+        </p:spPr>
+        <p:txBody>
+          <a:bodyPr vert="horz" lIns="91440" tIns="45720" rIns="91440" bIns="45720" rtlCol="0">
+            <a:normAutofit/>
+          </a:bodyPr>
+          <a:lstStyle>
+            <a:lvl1pPr marL="0" indent="0" algn="ctr" defTabSz="914400" rtl="0" eaLnBrk="1" latinLnBrk="0" hangingPunct="1">
+              <a:lnSpc>
+                <a:spcPct val="90000"/>
+              </a:lnSpc>
+              <a:spcBef>
+                <a:spcPts val="1000"/>
+              </a:spcBef>
+              <a:buFont typeface="Arial" panose="020B0604020202020204" pitchFamily="34" charset="0"/>
+              <a:buNone/>
+              <a:defRPr sz="2400" kern="1200">
+                <a:solidFill>
+                  <a:schemeClr val="tx1"/>
+                </a:solidFill>
+                <a:latin typeface="+mn-lt"/>
+                <a:ea typeface="+mn-ea"/>
+                <a:cs typeface="+mn-cs"/>
+              </a:defRPr>
+            </a:lvl1pPr>
+            <a:lvl2pPr marL="457200" indent="0" algn="ctr" defTabSz="914400" rtl="0" eaLnBrk="1" latinLnBrk="0" hangingPunct="1">
+              <a:lnSpc>
+                <a:spcPct val="90000"/>
+              </a:lnSpc>
+              <a:spcBef>
+                <a:spcPts val="500"/>
+              </a:spcBef>
+              <a:buFont typeface="Arial" panose="020B0604020202020204" pitchFamily="34" charset="0"/>
+              <a:buNone/>
+              <a:defRPr sz="2000" kern="1200">
+                <a:solidFill>
+                  <a:schemeClr val="tx1"/>
+                </a:solidFill>
+                <a:latin typeface="+mn-lt"/>
+                <a:ea typeface="+mn-ea"/>
+                <a:cs typeface="+mn-cs"/>
+              </a:defRPr>
+            </a:lvl2pPr>
+            <a:lvl3pPr marL="914400" indent="0" algn="ctr" defTabSz="914400" rtl="0" eaLnBrk="1" latinLnBrk="0" hangingPunct="1">
+              <a:lnSpc>
+                <a:spcPct val="90000"/>
+              </a:lnSpc>
+              <a:spcBef>
+                <a:spcPts val="500"/>
+              </a:spcBef>
+              <a:buFont typeface="Arial" panose="020B0604020202020204" pitchFamily="34" charset="0"/>
+              <a:buNone/>
+              <a:defRPr sz="1800" kern="1200">
+                <a:solidFill>
+                  <a:schemeClr val="tx1"/>
+                </a:solidFill>
+                <a:latin typeface="+mn-lt"/>
+                <a:ea typeface="+mn-ea"/>
+                <a:cs typeface="+mn-cs"/>
+              </a:defRPr>
+            </a:lvl3pPr>
+            <a:lvl4pPr marL="1371600" indent="0" algn="ctr" defTabSz="914400" rtl="0" eaLnBrk="1" latinLnBrk="0" hangingPunct="1">
+              <a:lnSpc>
+                <a:spcPct val="90000"/>
+              </a:lnSpc>
+              <a:spcBef>
+                <a:spcPts val="500"/>
+              </a:spcBef>
+              <a:buFont typeface="Arial" panose="020B0604020202020204" pitchFamily="34" charset="0"/>
+              <a:buNone/>
+              <a:defRPr sz="1600" kern="1200">
+                <a:solidFill>
+                  <a:schemeClr val="tx1"/>
+                </a:solidFill>
+                <a:latin typeface="+mn-lt"/>
+                <a:ea typeface="+mn-ea"/>
+                <a:cs typeface="+mn-cs"/>
+              </a:defRPr>
+            </a:lvl4pPr>
+            <a:lvl5pPr marL="1828800" indent="0" algn="ctr" defTabSz="914400" rtl="0" eaLnBrk="1" latinLnBrk="0" hangingPunct="1">
+              <a:lnSpc>
+                <a:spcPct val="90000"/>
+              </a:lnSpc>
+              <a:spcBef>
+                <a:spcPts val="500"/>
+              </a:spcBef>
+              <a:buFont typeface="Arial" panose="020B0604020202020204" pitchFamily="34" charset="0"/>
+              <a:buNone/>
+              <a:defRPr sz="1600" kern="1200">
+                <a:solidFill>
+                  <a:schemeClr val="tx1"/>
+                </a:solidFill>
+                <a:latin typeface="+mn-lt"/>
+                <a:ea typeface="+mn-ea"/>
+                <a:cs typeface="+mn-cs"/>
+              </a:defRPr>
+            </a:lvl5pPr>
+            <a:lvl6pPr marL="2286000" indent="0" algn="ctr" defTabSz="914400" rtl="0" eaLnBrk="1" latinLnBrk="0" hangingPunct="1">
+              <a:lnSpc>
+                <a:spcPct val="90000"/>
+              </a:lnSpc>
+              <a:spcBef>
+                <a:spcPts val="500"/>
+              </a:spcBef>
+              <a:buFont typeface="Arial" panose="020B0604020202020204" pitchFamily="34" charset="0"/>
+              <a:buNone/>
+              <a:defRPr sz="1600" kern="1200">
+                <a:solidFill>
+                  <a:schemeClr val="tx1"/>
+                </a:solidFill>
+                <a:latin typeface="+mn-lt"/>
+                <a:ea typeface="+mn-ea"/>
+                <a:cs typeface="+mn-cs"/>
+              </a:defRPr>
+            </a:lvl6pPr>
+            <a:lvl7pPr marL="2743200" indent="0" algn="ctr" defTabSz="914400" rtl="0" eaLnBrk="1" latinLnBrk="0" hangingPunct="1">
+              <a:lnSpc>
+                <a:spcPct val="90000"/>
+              </a:lnSpc>
+              <a:spcBef>
+                <a:spcPts val="500"/>
+              </a:spcBef>
+              <a:buFont typeface="Arial" panose="020B0604020202020204" pitchFamily="34" charset="0"/>
+              <a:buNone/>
+              <a:defRPr sz="1600" kern="1200">
+                <a:solidFill>
+                  <a:schemeClr val="tx1"/>
+                </a:solidFill>
+                <a:latin typeface="+mn-lt"/>
+                <a:ea typeface="+mn-ea"/>
+                <a:cs typeface="+mn-cs"/>
+              </a:defRPr>
+            </a:lvl7pPr>
+            <a:lvl8pPr marL="3200400" indent="0" algn="ctr" defTabSz="914400" rtl="0" eaLnBrk="1" latinLnBrk="0" hangingPunct="1">
+              <a:lnSpc>
+                <a:spcPct val="90000"/>
+              </a:lnSpc>
+              <a:spcBef>
+                <a:spcPts val="500"/>
+              </a:spcBef>
+              <a:buFont typeface="Arial" panose="020B0604020202020204" pitchFamily="34" charset="0"/>
+              <a:buNone/>
+              <a:defRPr sz="1600" kern="1200">
+                <a:solidFill>
+                  <a:schemeClr val="tx1"/>
+                </a:solidFill>
+                <a:latin typeface="+mn-lt"/>
+                <a:ea typeface="+mn-ea"/>
+                <a:cs typeface="+mn-cs"/>
+              </a:defRPr>
+            </a:lvl8pPr>
+            <a:lvl9pPr marL="3657600" indent="0" algn="ctr" defTabSz="914400" rtl="0" eaLnBrk="1" latinLnBrk="0" hangingPunct="1">
+              <a:lnSpc>
+                <a:spcPct val="90000"/>
+              </a:lnSpc>
+              <a:spcBef>
+                <a:spcPts val="500"/>
+              </a:spcBef>
+              <a:buFont typeface="Arial" panose="020B0604020202020204" pitchFamily="34" charset="0"/>
+              <a:buNone/>
+              <a:defRPr sz="1600" kern="1200">
+                <a:solidFill>
+                  <a:schemeClr val="tx1"/>
+                </a:solidFill>
+                <a:latin typeface="+mn-lt"/>
+                <a:ea typeface="+mn-ea"/>
+                <a:cs typeface="+mn-cs"/>
+              </a:defRPr>
+            </a:lvl9pPr>
+          </a:lstStyle>
+          <a:p>
+            <a:r>
+              <a:rPr lang="fr-FR" sz="2800" b="1" dirty="0" err="1">
+                <a:solidFill>
+                  <a:sysClr val="windowText" lastClr="000000"/>
+                </a:solidFill>
+              </a:rPr>
+              <a:t>X_train</a:t>
+            </a:r>
+            <a:endParaRPr lang="fr-FR" sz="2800" b="1" dirty="0">
+              <a:solidFill>
+                <a:sysClr val="windowText" lastClr="000000"/>
+              </a:solidFill>
+            </a:endParaRPr>
+          </a:p>
+          <a:p>
+            <a:endParaRPr lang="fr-FR" sz="2800" b="1" dirty="0">
+              <a:solidFill>
+                <a:sysClr val="windowText" lastClr="000000"/>
+              </a:solidFill>
+            </a:endParaRPr>
+          </a:p>
+        </p:txBody>
+      </p:sp>
+      <p:sp>
+        <p:nvSpPr>
+          <p:cNvPr id="5" name="Flèche : droite 4">
+            <a:extLst>
+              <a:ext uri="{FF2B5EF4-FFF2-40B4-BE49-F238E27FC236}">
+                <a16:creationId xmlns:a16="http://schemas.microsoft.com/office/drawing/2014/main" id="{7ACFE93B-6DAF-A440-8F62-99F8C5A3BFE2}"/>
+              </a:ext>
+            </a:extLst>
+          </p:cNvPr>
+          <p:cNvSpPr/>
+          <p:nvPr/>
+        </p:nvSpPr>
+        <p:spPr>
+          <a:xfrm rot="5400000">
+            <a:off x="2066261" y="2594803"/>
+            <a:ext cx="1158949" cy="770232"/>
+          </a:xfrm>
+          <a:prstGeom prst="rightArrow">
+            <a:avLst/>
+          </a:prstGeom>
+        </p:spPr>
+        <p:style>
+          <a:lnRef idx="2">
+            <a:schemeClr val="accent1">
+              <a:shade val="15000"/>
+            </a:schemeClr>
+          </a:lnRef>
+          <a:fillRef idx="1">
+            <a:schemeClr val="accent1"/>
+          </a:fillRef>
+          <a:effectRef idx="0">
+            <a:schemeClr val="accent1"/>
+          </a:effectRef>
+          <a:fontRef idx="minor">
+            <a:schemeClr val="lt1"/>
+          </a:fontRef>
+        </p:style>
+        <p:txBody>
+          <a:bodyPr rtlCol="0" anchor="ctr"/>
+          <a:lstStyle/>
+          <a:p>
+            <a:pPr algn="ctr"/>
+            <a:endParaRPr lang="fr-FR"/>
+          </a:p>
+        </p:txBody>
+      </p:sp>
+      <p:sp>
+        <p:nvSpPr>
+          <p:cNvPr id="7" name="Sous-titre 2">
+            <a:extLst>
+              <a:ext uri="{FF2B5EF4-FFF2-40B4-BE49-F238E27FC236}">
+                <a16:creationId xmlns:a16="http://schemas.microsoft.com/office/drawing/2014/main" id="{780A6DB8-BFEF-1877-827D-A72706BB9E18}"/>
+              </a:ext>
+            </a:extLst>
+          </p:cNvPr>
+          <p:cNvSpPr txBox="1">
+            <a:spLocks/>
+          </p:cNvSpPr>
+          <p:nvPr/>
+        </p:nvSpPr>
+        <p:spPr>
+          <a:xfrm>
+            <a:off x="1665768" y="3663205"/>
+            <a:ext cx="1959936" cy="502134"/>
+          </a:xfrm>
+          <a:prstGeom prst="rect">
+            <a:avLst/>
+          </a:prstGeom>
+          <a:noFill/>
+        </p:spPr>
+        <p:txBody>
+          <a:bodyPr vert="horz" lIns="91440" tIns="45720" rIns="91440" bIns="45720" rtlCol="0">
+            <a:normAutofit/>
+          </a:bodyPr>
+          <a:lstStyle>
+            <a:lvl1pPr marL="0" indent="0" algn="ctr" defTabSz="914400" rtl="0" eaLnBrk="1" latinLnBrk="0" hangingPunct="1">
+              <a:lnSpc>
+                <a:spcPct val="90000"/>
+              </a:lnSpc>
+              <a:spcBef>
+                <a:spcPts val="1000"/>
+              </a:spcBef>
+              <a:buFont typeface="Arial" panose="020B0604020202020204" pitchFamily="34" charset="0"/>
+              <a:buNone/>
+              <a:defRPr sz="2400" kern="1200">
+                <a:solidFill>
+                  <a:schemeClr val="tx1"/>
+                </a:solidFill>
+                <a:latin typeface="+mn-lt"/>
+                <a:ea typeface="+mn-ea"/>
+                <a:cs typeface="+mn-cs"/>
+              </a:defRPr>
+            </a:lvl1pPr>
+            <a:lvl2pPr marL="457200" indent="0" algn="ctr" defTabSz="914400" rtl="0" eaLnBrk="1" latinLnBrk="0" hangingPunct="1">
+              <a:lnSpc>
+                <a:spcPct val="90000"/>
+              </a:lnSpc>
+              <a:spcBef>
+                <a:spcPts val="500"/>
+              </a:spcBef>
+              <a:buFont typeface="Arial" panose="020B0604020202020204" pitchFamily="34" charset="0"/>
+              <a:buNone/>
+              <a:defRPr sz="2000" kern="1200">
+                <a:solidFill>
+                  <a:schemeClr val="tx1"/>
+                </a:solidFill>
+                <a:latin typeface="+mn-lt"/>
+                <a:ea typeface="+mn-ea"/>
+                <a:cs typeface="+mn-cs"/>
+              </a:defRPr>
+            </a:lvl2pPr>
+            <a:lvl3pPr marL="914400" indent="0" algn="ctr" defTabSz="914400" rtl="0" eaLnBrk="1" latinLnBrk="0" hangingPunct="1">
+              <a:lnSpc>
+                <a:spcPct val="90000"/>
+              </a:lnSpc>
+              <a:spcBef>
+                <a:spcPts val="500"/>
+              </a:spcBef>
+              <a:buFont typeface="Arial" panose="020B0604020202020204" pitchFamily="34" charset="0"/>
+              <a:buNone/>
+              <a:defRPr sz="1800" kern="1200">
+                <a:solidFill>
+                  <a:schemeClr val="tx1"/>
+                </a:solidFill>
+                <a:latin typeface="+mn-lt"/>
+                <a:ea typeface="+mn-ea"/>
+                <a:cs typeface="+mn-cs"/>
+              </a:defRPr>
+            </a:lvl3pPr>
+            <a:lvl4pPr marL="1371600" indent="0" algn="ctr" defTabSz="914400" rtl="0" eaLnBrk="1" latinLnBrk="0" hangingPunct="1">
+              <a:lnSpc>
+                <a:spcPct val="90000"/>
+              </a:lnSpc>
+              <a:spcBef>
+                <a:spcPts val="500"/>
+              </a:spcBef>
+              <a:buFont typeface="Arial" panose="020B0604020202020204" pitchFamily="34" charset="0"/>
+              <a:buNone/>
+              <a:defRPr sz="1600" kern="1200">
+                <a:solidFill>
+                  <a:schemeClr val="tx1"/>
+                </a:solidFill>
+                <a:latin typeface="+mn-lt"/>
+                <a:ea typeface="+mn-ea"/>
+                <a:cs typeface="+mn-cs"/>
+              </a:defRPr>
+            </a:lvl4pPr>
+            <a:lvl5pPr marL="1828800" indent="0" algn="ctr" defTabSz="914400" rtl="0" eaLnBrk="1" latinLnBrk="0" hangingPunct="1">
+              <a:lnSpc>
+                <a:spcPct val="90000"/>
+              </a:lnSpc>
+              <a:spcBef>
+                <a:spcPts val="500"/>
+              </a:spcBef>
+              <a:buFont typeface="Arial" panose="020B0604020202020204" pitchFamily="34" charset="0"/>
+              <a:buNone/>
+              <a:defRPr sz="1600" kern="1200">
+                <a:solidFill>
+                  <a:schemeClr val="tx1"/>
+                </a:solidFill>
+                <a:latin typeface="+mn-lt"/>
+                <a:ea typeface="+mn-ea"/>
+                <a:cs typeface="+mn-cs"/>
+              </a:defRPr>
+            </a:lvl5pPr>
+            <a:lvl6pPr marL="2286000" indent="0" algn="ctr" defTabSz="914400" rtl="0" eaLnBrk="1" latinLnBrk="0" hangingPunct="1">
+              <a:lnSpc>
+                <a:spcPct val="90000"/>
+              </a:lnSpc>
+              <a:spcBef>
+                <a:spcPts val="500"/>
+              </a:spcBef>
+              <a:buFont typeface="Arial" panose="020B0604020202020204" pitchFamily="34" charset="0"/>
+              <a:buNone/>
+              <a:defRPr sz="1600" kern="1200">
+                <a:solidFill>
+                  <a:schemeClr val="tx1"/>
+                </a:solidFill>
+                <a:latin typeface="+mn-lt"/>
+                <a:ea typeface="+mn-ea"/>
+                <a:cs typeface="+mn-cs"/>
+              </a:defRPr>
+            </a:lvl6pPr>
+            <a:lvl7pPr marL="2743200" indent="0" algn="ctr" defTabSz="914400" rtl="0" eaLnBrk="1" latinLnBrk="0" hangingPunct="1">
+              <a:lnSpc>
+                <a:spcPct val="90000"/>
+              </a:lnSpc>
+              <a:spcBef>
+                <a:spcPts val="500"/>
+              </a:spcBef>
+              <a:buFont typeface="Arial" panose="020B0604020202020204" pitchFamily="34" charset="0"/>
+              <a:buNone/>
+              <a:defRPr sz="1600" kern="1200">
+                <a:solidFill>
+                  <a:schemeClr val="tx1"/>
+                </a:solidFill>
+                <a:latin typeface="+mn-lt"/>
+                <a:ea typeface="+mn-ea"/>
+                <a:cs typeface="+mn-cs"/>
+              </a:defRPr>
+            </a:lvl7pPr>
+            <a:lvl8pPr marL="3200400" indent="0" algn="ctr" defTabSz="914400" rtl="0" eaLnBrk="1" latinLnBrk="0" hangingPunct="1">
+              <a:lnSpc>
+                <a:spcPct val="90000"/>
+              </a:lnSpc>
+              <a:spcBef>
+                <a:spcPts val="500"/>
+              </a:spcBef>
+              <a:buFont typeface="Arial" panose="020B0604020202020204" pitchFamily="34" charset="0"/>
+              <a:buNone/>
+              <a:defRPr sz="1600" kern="1200">
+                <a:solidFill>
+                  <a:schemeClr val="tx1"/>
+                </a:solidFill>
+                <a:latin typeface="+mn-lt"/>
+                <a:ea typeface="+mn-ea"/>
+                <a:cs typeface="+mn-cs"/>
+              </a:defRPr>
+            </a:lvl8pPr>
+            <a:lvl9pPr marL="3657600" indent="0" algn="ctr" defTabSz="914400" rtl="0" eaLnBrk="1" latinLnBrk="0" hangingPunct="1">
+              <a:lnSpc>
+                <a:spcPct val="90000"/>
+              </a:lnSpc>
+              <a:spcBef>
+                <a:spcPts val="500"/>
+              </a:spcBef>
+              <a:buFont typeface="Arial" panose="020B0604020202020204" pitchFamily="34" charset="0"/>
+              <a:buNone/>
+              <a:defRPr sz="1600" kern="1200">
+                <a:solidFill>
+                  <a:schemeClr val="tx1"/>
+                </a:solidFill>
+                <a:latin typeface="+mn-lt"/>
+                <a:ea typeface="+mn-ea"/>
+                <a:cs typeface="+mn-cs"/>
+              </a:defRPr>
+            </a:lvl9pPr>
+          </a:lstStyle>
+          <a:p>
+            <a:r>
+              <a:rPr lang="fr-FR" sz="2800" b="1" dirty="0">
+                <a:solidFill>
+                  <a:sysClr val="windowText" lastClr="000000"/>
+                </a:solidFill>
+              </a:rPr>
+              <a:t>TF-IDF</a:t>
+            </a:r>
+          </a:p>
+        </p:txBody>
+      </p:sp>
+      <p:sp>
+        <p:nvSpPr>
+          <p:cNvPr id="8" name="Flèche : droite 7">
+            <a:extLst>
+              <a:ext uri="{FF2B5EF4-FFF2-40B4-BE49-F238E27FC236}">
+                <a16:creationId xmlns:a16="http://schemas.microsoft.com/office/drawing/2014/main" id="{A5B7F632-9D76-4616-6A1A-E838712F86BC}"/>
+              </a:ext>
+            </a:extLst>
+          </p:cNvPr>
+          <p:cNvSpPr/>
+          <p:nvPr/>
+        </p:nvSpPr>
+        <p:spPr>
+          <a:xfrm rot="5400000">
+            <a:off x="2066261" y="4463509"/>
+            <a:ext cx="1158949" cy="770232"/>
+          </a:xfrm>
+          <a:prstGeom prst="rightArrow">
+            <a:avLst/>
+          </a:prstGeom>
+        </p:spPr>
+        <p:style>
+          <a:lnRef idx="2">
+            <a:schemeClr val="accent1">
+              <a:shade val="15000"/>
+            </a:schemeClr>
+          </a:lnRef>
+          <a:fillRef idx="1">
+            <a:schemeClr val="accent1"/>
+          </a:fillRef>
+          <a:effectRef idx="0">
+            <a:schemeClr val="accent1"/>
+          </a:effectRef>
+          <a:fontRef idx="minor">
+            <a:schemeClr val="lt1"/>
+          </a:fontRef>
+        </p:style>
+        <p:txBody>
+          <a:bodyPr rtlCol="0" anchor="ctr"/>
+          <a:lstStyle/>
+          <a:p>
+            <a:pPr algn="ctr"/>
+            <a:endParaRPr lang="fr-FR"/>
+          </a:p>
+        </p:txBody>
+      </p:sp>
+      <p:sp>
+        <p:nvSpPr>
+          <p:cNvPr id="9" name="Sous-titre 2">
+            <a:extLst>
+              <a:ext uri="{FF2B5EF4-FFF2-40B4-BE49-F238E27FC236}">
+                <a16:creationId xmlns:a16="http://schemas.microsoft.com/office/drawing/2014/main" id="{6767FB5C-5BB8-3FAE-4697-04C10860C416}"/>
+              </a:ext>
+            </a:extLst>
+          </p:cNvPr>
+          <p:cNvSpPr txBox="1">
+            <a:spLocks/>
+          </p:cNvSpPr>
+          <p:nvPr/>
+        </p:nvSpPr>
+        <p:spPr>
+          <a:xfrm>
+            <a:off x="1665767" y="5531911"/>
+            <a:ext cx="1959936" cy="502134"/>
+          </a:xfrm>
+          <a:prstGeom prst="rect">
+            <a:avLst/>
+          </a:prstGeom>
+          <a:noFill/>
+        </p:spPr>
+        <p:txBody>
+          <a:bodyPr vert="horz" lIns="91440" tIns="45720" rIns="91440" bIns="45720" rtlCol="0">
+            <a:normAutofit/>
+          </a:bodyPr>
+          <a:lstStyle>
+            <a:lvl1pPr marL="0" indent="0" algn="ctr" defTabSz="914400" rtl="0" eaLnBrk="1" latinLnBrk="0" hangingPunct="1">
+              <a:lnSpc>
+                <a:spcPct val="90000"/>
+              </a:lnSpc>
+              <a:spcBef>
+                <a:spcPts val="1000"/>
+              </a:spcBef>
+              <a:buFont typeface="Arial" panose="020B0604020202020204" pitchFamily="34" charset="0"/>
+              <a:buNone/>
+              <a:defRPr sz="2400" kern="1200">
+                <a:solidFill>
+                  <a:schemeClr val="tx1"/>
+                </a:solidFill>
+                <a:latin typeface="+mn-lt"/>
+                <a:ea typeface="+mn-ea"/>
+                <a:cs typeface="+mn-cs"/>
+              </a:defRPr>
+            </a:lvl1pPr>
+            <a:lvl2pPr marL="457200" indent="0" algn="ctr" defTabSz="914400" rtl="0" eaLnBrk="1" latinLnBrk="0" hangingPunct="1">
+              <a:lnSpc>
+                <a:spcPct val="90000"/>
+              </a:lnSpc>
+              <a:spcBef>
+                <a:spcPts val="500"/>
+              </a:spcBef>
+              <a:buFont typeface="Arial" panose="020B0604020202020204" pitchFamily="34" charset="0"/>
+              <a:buNone/>
+              <a:defRPr sz="2000" kern="1200">
+                <a:solidFill>
+                  <a:schemeClr val="tx1"/>
+                </a:solidFill>
+                <a:latin typeface="+mn-lt"/>
+                <a:ea typeface="+mn-ea"/>
+                <a:cs typeface="+mn-cs"/>
+              </a:defRPr>
+            </a:lvl2pPr>
+            <a:lvl3pPr marL="914400" indent="0" algn="ctr" defTabSz="914400" rtl="0" eaLnBrk="1" latinLnBrk="0" hangingPunct="1">
+              <a:lnSpc>
+                <a:spcPct val="90000"/>
+              </a:lnSpc>
+              <a:spcBef>
+                <a:spcPts val="500"/>
+              </a:spcBef>
+              <a:buFont typeface="Arial" panose="020B0604020202020204" pitchFamily="34" charset="0"/>
+              <a:buNone/>
+              <a:defRPr sz="1800" kern="1200">
+                <a:solidFill>
+                  <a:schemeClr val="tx1"/>
+                </a:solidFill>
+                <a:latin typeface="+mn-lt"/>
+                <a:ea typeface="+mn-ea"/>
+                <a:cs typeface="+mn-cs"/>
+              </a:defRPr>
+            </a:lvl3pPr>
+            <a:lvl4pPr marL="1371600" indent="0" algn="ctr" defTabSz="914400" rtl="0" eaLnBrk="1" latinLnBrk="0" hangingPunct="1">
+              <a:lnSpc>
+                <a:spcPct val="90000"/>
+              </a:lnSpc>
+              <a:spcBef>
+                <a:spcPts val="500"/>
+              </a:spcBef>
+              <a:buFont typeface="Arial" panose="020B0604020202020204" pitchFamily="34" charset="0"/>
+              <a:buNone/>
+              <a:defRPr sz="1600" kern="1200">
+                <a:solidFill>
+                  <a:schemeClr val="tx1"/>
+                </a:solidFill>
+                <a:latin typeface="+mn-lt"/>
+                <a:ea typeface="+mn-ea"/>
+                <a:cs typeface="+mn-cs"/>
+              </a:defRPr>
+            </a:lvl4pPr>
+            <a:lvl5pPr marL="1828800" indent="0" algn="ctr" defTabSz="914400" rtl="0" eaLnBrk="1" latinLnBrk="0" hangingPunct="1">
+              <a:lnSpc>
+                <a:spcPct val="90000"/>
+              </a:lnSpc>
+              <a:spcBef>
+                <a:spcPts val="500"/>
+              </a:spcBef>
+              <a:buFont typeface="Arial" panose="020B0604020202020204" pitchFamily="34" charset="0"/>
+              <a:buNone/>
+              <a:defRPr sz="1600" kern="1200">
+                <a:solidFill>
+                  <a:schemeClr val="tx1"/>
+                </a:solidFill>
+                <a:latin typeface="+mn-lt"/>
+                <a:ea typeface="+mn-ea"/>
+                <a:cs typeface="+mn-cs"/>
+              </a:defRPr>
+            </a:lvl5pPr>
+            <a:lvl6pPr marL="2286000" indent="0" algn="ctr" defTabSz="914400" rtl="0" eaLnBrk="1" latinLnBrk="0" hangingPunct="1">
+              <a:lnSpc>
+                <a:spcPct val="90000"/>
+              </a:lnSpc>
+              <a:spcBef>
+                <a:spcPts val="500"/>
+              </a:spcBef>
+              <a:buFont typeface="Arial" panose="020B0604020202020204" pitchFamily="34" charset="0"/>
+              <a:buNone/>
+              <a:defRPr sz="1600" kern="1200">
+                <a:solidFill>
+                  <a:schemeClr val="tx1"/>
+                </a:solidFill>
+                <a:latin typeface="+mn-lt"/>
+                <a:ea typeface="+mn-ea"/>
+                <a:cs typeface="+mn-cs"/>
+              </a:defRPr>
+            </a:lvl6pPr>
+            <a:lvl7pPr marL="2743200" indent="0" algn="ctr" defTabSz="914400" rtl="0" eaLnBrk="1" latinLnBrk="0" hangingPunct="1">
+              <a:lnSpc>
+                <a:spcPct val="90000"/>
+              </a:lnSpc>
+              <a:spcBef>
+                <a:spcPts val="500"/>
+              </a:spcBef>
+              <a:buFont typeface="Arial" panose="020B0604020202020204" pitchFamily="34" charset="0"/>
+              <a:buNone/>
+              <a:defRPr sz="1600" kern="1200">
+                <a:solidFill>
+                  <a:schemeClr val="tx1"/>
+                </a:solidFill>
+                <a:latin typeface="+mn-lt"/>
+                <a:ea typeface="+mn-ea"/>
+                <a:cs typeface="+mn-cs"/>
+              </a:defRPr>
+            </a:lvl7pPr>
+            <a:lvl8pPr marL="3200400" indent="0" algn="ctr" defTabSz="914400" rtl="0" eaLnBrk="1" latinLnBrk="0" hangingPunct="1">
+              <a:lnSpc>
+                <a:spcPct val="90000"/>
+              </a:lnSpc>
+              <a:spcBef>
+                <a:spcPts val="500"/>
+              </a:spcBef>
+              <a:buFont typeface="Arial" panose="020B0604020202020204" pitchFamily="34" charset="0"/>
+              <a:buNone/>
+              <a:defRPr sz="1600" kern="1200">
+                <a:solidFill>
+                  <a:schemeClr val="tx1"/>
+                </a:solidFill>
+                <a:latin typeface="+mn-lt"/>
+                <a:ea typeface="+mn-ea"/>
+                <a:cs typeface="+mn-cs"/>
+              </a:defRPr>
+            </a:lvl8pPr>
+            <a:lvl9pPr marL="3657600" indent="0" algn="ctr" defTabSz="914400" rtl="0" eaLnBrk="1" latinLnBrk="0" hangingPunct="1">
+              <a:lnSpc>
+                <a:spcPct val="90000"/>
+              </a:lnSpc>
+              <a:spcBef>
+                <a:spcPts val="500"/>
+              </a:spcBef>
+              <a:buFont typeface="Arial" panose="020B0604020202020204" pitchFamily="34" charset="0"/>
+              <a:buNone/>
+              <a:defRPr sz="1600" kern="1200">
+                <a:solidFill>
+                  <a:schemeClr val="tx1"/>
+                </a:solidFill>
+                <a:latin typeface="+mn-lt"/>
+                <a:ea typeface="+mn-ea"/>
+                <a:cs typeface="+mn-cs"/>
+              </a:defRPr>
+            </a:lvl9pPr>
+          </a:lstStyle>
+          <a:p>
+            <a:r>
+              <a:rPr lang="fr-FR" sz="2800" b="1" dirty="0">
+                <a:solidFill>
+                  <a:sysClr val="windowText" lastClr="000000"/>
+                </a:solidFill>
+              </a:rPr>
+              <a:t>classifier</a:t>
+            </a:r>
+          </a:p>
+        </p:txBody>
+      </p:sp>
+      <p:sp>
+        <p:nvSpPr>
+          <p:cNvPr id="10" name="Sous-titre 2">
+            <a:extLst>
+              <a:ext uri="{FF2B5EF4-FFF2-40B4-BE49-F238E27FC236}">
+                <a16:creationId xmlns:a16="http://schemas.microsoft.com/office/drawing/2014/main" id="{96F891FE-397A-E407-DA4D-021BD667BF6C}"/>
+              </a:ext>
+            </a:extLst>
+          </p:cNvPr>
+          <p:cNvSpPr txBox="1">
+            <a:spLocks/>
+          </p:cNvSpPr>
+          <p:nvPr/>
+        </p:nvSpPr>
+        <p:spPr>
+          <a:xfrm>
+            <a:off x="4192770" y="5531911"/>
+            <a:ext cx="6794205" cy="502134"/>
+          </a:xfrm>
+          <a:prstGeom prst="rect">
+            <a:avLst/>
+          </a:prstGeom>
+          <a:noFill/>
+        </p:spPr>
+        <p:txBody>
+          <a:bodyPr vert="horz" lIns="91440" tIns="45720" rIns="91440" bIns="45720" rtlCol="0">
+            <a:normAutofit fontScale="92500"/>
+          </a:bodyPr>
+          <a:lstStyle>
+            <a:lvl1pPr marL="0" indent="0" algn="ctr" defTabSz="914400" rtl="0" eaLnBrk="1" latinLnBrk="0" hangingPunct="1">
+              <a:lnSpc>
+                <a:spcPct val="90000"/>
+              </a:lnSpc>
+              <a:spcBef>
+                <a:spcPts val="1000"/>
+              </a:spcBef>
+              <a:buFont typeface="Arial" panose="020B0604020202020204" pitchFamily="34" charset="0"/>
+              <a:buNone/>
+              <a:defRPr sz="2400" kern="1200">
+                <a:solidFill>
+                  <a:schemeClr val="tx1"/>
+                </a:solidFill>
+                <a:latin typeface="+mn-lt"/>
+                <a:ea typeface="+mn-ea"/>
+                <a:cs typeface="+mn-cs"/>
+              </a:defRPr>
+            </a:lvl1pPr>
+            <a:lvl2pPr marL="457200" indent="0" algn="ctr" defTabSz="914400" rtl="0" eaLnBrk="1" latinLnBrk="0" hangingPunct="1">
+              <a:lnSpc>
+                <a:spcPct val="90000"/>
+              </a:lnSpc>
+              <a:spcBef>
+                <a:spcPts val="500"/>
+              </a:spcBef>
+              <a:buFont typeface="Arial" panose="020B0604020202020204" pitchFamily="34" charset="0"/>
+              <a:buNone/>
+              <a:defRPr sz="2000" kern="1200">
+                <a:solidFill>
+                  <a:schemeClr val="tx1"/>
+                </a:solidFill>
+                <a:latin typeface="+mn-lt"/>
+                <a:ea typeface="+mn-ea"/>
+                <a:cs typeface="+mn-cs"/>
+              </a:defRPr>
+            </a:lvl2pPr>
+            <a:lvl3pPr marL="914400" indent="0" algn="ctr" defTabSz="914400" rtl="0" eaLnBrk="1" latinLnBrk="0" hangingPunct="1">
+              <a:lnSpc>
+                <a:spcPct val="90000"/>
+              </a:lnSpc>
+              <a:spcBef>
+                <a:spcPts val="500"/>
+              </a:spcBef>
+              <a:buFont typeface="Arial" panose="020B0604020202020204" pitchFamily="34" charset="0"/>
+              <a:buNone/>
+              <a:defRPr sz="1800" kern="1200">
+                <a:solidFill>
+                  <a:schemeClr val="tx1"/>
+                </a:solidFill>
+                <a:latin typeface="+mn-lt"/>
+                <a:ea typeface="+mn-ea"/>
+                <a:cs typeface="+mn-cs"/>
+              </a:defRPr>
+            </a:lvl3pPr>
+            <a:lvl4pPr marL="1371600" indent="0" algn="ctr" defTabSz="914400" rtl="0" eaLnBrk="1" latinLnBrk="0" hangingPunct="1">
+              <a:lnSpc>
+                <a:spcPct val="90000"/>
+              </a:lnSpc>
+              <a:spcBef>
+                <a:spcPts val="500"/>
+              </a:spcBef>
+              <a:buFont typeface="Arial" panose="020B0604020202020204" pitchFamily="34" charset="0"/>
+              <a:buNone/>
+              <a:defRPr sz="1600" kern="1200">
+                <a:solidFill>
+                  <a:schemeClr val="tx1"/>
+                </a:solidFill>
+                <a:latin typeface="+mn-lt"/>
+                <a:ea typeface="+mn-ea"/>
+                <a:cs typeface="+mn-cs"/>
+              </a:defRPr>
+            </a:lvl4pPr>
+            <a:lvl5pPr marL="1828800" indent="0" algn="ctr" defTabSz="914400" rtl="0" eaLnBrk="1" latinLnBrk="0" hangingPunct="1">
+              <a:lnSpc>
+                <a:spcPct val="90000"/>
+              </a:lnSpc>
+              <a:spcBef>
+                <a:spcPts val="500"/>
+              </a:spcBef>
+              <a:buFont typeface="Arial" panose="020B0604020202020204" pitchFamily="34" charset="0"/>
+              <a:buNone/>
+              <a:defRPr sz="1600" kern="1200">
+                <a:solidFill>
+                  <a:schemeClr val="tx1"/>
+                </a:solidFill>
+                <a:latin typeface="+mn-lt"/>
+                <a:ea typeface="+mn-ea"/>
+                <a:cs typeface="+mn-cs"/>
+              </a:defRPr>
+            </a:lvl5pPr>
+            <a:lvl6pPr marL="2286000" indent="0" algn="ctr" defTabSz="914400" rtl="0" eaLnBrk="1" latinLnBrk="0" hangingPunct="1">
+              <a:lnSpc>
+                <a:spcPct val="90000"/>
+              </a:lnSpc>
+              <a:spcBef>
+                <a:spcPts val="500"/>
+              </a:spcBef>
+              <a:buFont typeface="Arial" panose="020B0604020202020204" pitchFamily="34" charset="0"/>
+              <a:buNone/>
+              <a:defRPr sz="1600" kern="1200">
+                <a:solidFill>
+                  <a:schemeClr val="tx1"/>
+                </a:solidFill>
+                <a:latin typeface="+mn-lt"/>
+                <a:ea typeface="+mn-ea"/>
+                <a:cs typeface="+mn-cs"/>
+              </a:defRPr>
+            </a:lvl6pPr>
+            <a:lvl7pPr marL="2743200" indent="0" algn="ctr" defTabSz="914400" rtl="0" eaLnBrk="1" latinLnBrk="0" hangingPunct="1">
+              <a:lnSpc>
+                <a:spcPct val="90000"/>
+              </a:lnSpc>
+              <a:spcBef>
+                <a:spcPts val="500"/>
+              </a:spcBef>
+              <a:buFont typeface="Arial" panose="020B0604020202020204" pitchFamily="34" charset="0"/>
+              <a:buNone/>
+              <a:defRPr sz="1600" kern="1200">
+                <a:solidFill>
+                  <a:schemeClr val="tx1"/>
+                </a:solidFill>
+                <a:latin typeface="+mn-lt"/>
+                <a:ea typeface="+mn-ea"/>
+                <a:cs typeface="+mn-cs"/>
+              </a:defRPr>
+            </a:lvl7pPr>
+            <a:lvl8pPr marL="3200400" indent="0" algn="ctr" defTabSz="914400" rtl="0" eaLnBrk="1" latinLnBrk="0" hangingPunct="1">
+              <a:lnSpc>
+                <a:spcPct val="90000"/>
+              </a:lnSpc>
+              <a:spcBef>
+                <a:spcPts val="500"/>
+              </a:spcBef>
+              <a:buFont typeface="Arial" panose="020B0604020202020204" pitchFamily="34" charset="0"/>
+              <a:buNone/>
+              <a:defRPr sz="1600" kern="1200">
+                <a:solidFill>
+                  <a:schemeClr val="tx1"/>
+                </a:solidFill>
+                <a:latin typeface="+mn-lt"/>
+                <a:ea typeface="+mn-ea"/>
+                <a:cs typeface="+mn-cs"/>
+              </a:defRPr>
+            </a:lvl8pPr>
+            <a:lvl9pPr marL="3657600" indent="0" algn="ctr" defTabSz="914400" rtl="0" eaLnBrk="1" latinLnBrk="0" hangingPunct="1">
+              <a:lnSpc>
+                <a:spcPct val="90000"/>
+              </a:lnSpc>
+              <a:spcBef>
+                <a:spcPts val="500"/>
+              </a:spcBef>
+              <a:buFont typeface="Arial" panose="020B0604020202020204" pitchFamily="34" charset="0"/>
+              <a:buNone/>
+              <a:defRPr sz="1600" kern="1200">
+                <a:solidFill>
+                  <a:schemeClr val="tx1"/>
+                </a:solidFill>
+                <a:latin typeface="+mn-lt"/>
+                <a:ea typeface="+mn-ea"/>
+                <a:cs typeface="+mn-cs"/>
+              </a:defRPr>
+            </a:lvl9pPr>
+          </a:lstStyle>
+          <a:p>
+            <a:pPr algn="l"/>
+            <a:r>
+              <a:rPr lang="fr-FR" sz="2800" b="1" dirty="0" err="1">
+                <a:solidFill>
+                  <a:schemeClr val="accent4">
+                    <a:lumMod val="75000"/>
+                  </a:schemeClr>
+                </a:solidFill>
+              </a:rPr>
+              <a:t>Logistic</a:t>
+            </a:r>
+            <a:r>
+              <a:rPr lang="fr-FR" sz="2800" b="1" dirty="0">
+                <a:solidFill>
+                  <a:schemeClr val="accent4">
+                    <a:lumMod val="75000"/>
+                  </a:schemeClr>
+                </a:solidFill>
+              </a:rPr>
+              <a:t> </a:t>
+            </a:r>
+            <a:r>
+              <a:rPr lang="fr-FR" sz="2800" b="1" dirty="0" err="1">
+                <a:solidFill>
+                  <a:schemeClr val="accent4">
+                    <a:lumMod val="75000"/>
+                  </a:schemeClr>
+                </a:solidFill>
+              </a:rPr>
+              <a:t>Regression</a:t>
+            </a:r>
+            <a:r>
+              <a:rPr lang="fr-FR" sz="2800" b="1" dirty="0">
+                <a:solidFill>
+                  <a:schemeClr val="accent4">
+                    <a:lumMod val="75000"/>
+                  </a:schemeClr>
+                </a:solidFill>
+              </a:rPr>
+              <a:t>, </a:t>
+            </a:r>
+            <a:r>
+              <a:rPr lang="fr-FR" sz="2800" b="1" dirty="0" err="1">
+                <a:solidFill>
+                  <a:schemeClr val="accent4">
+                    <a:lumMod val="75000"/>
+                  </a:schemeClr>
+                </a:solidFill>
+              </a:rPr>
+              <a:t>Linear</a:t>
+            </a:r>
+            <a:r>
+              <a:rPr lang="fr-FR" sz="2800" b="1" dirty="0">
+                <a:solidFill>
+                  <a:schemeClr val="accent4">
+                    <a:lumMod val="75000"/>
+                  </a:schemeClr>
+                </a:solidFill>
+              </a:rPr>
+              <a:t> SVC, </a:t>
+            </a:r>
+            <a:r>
+              <a:rPr lang="fr-FR" sz="2800" b="1" dirty="0" err="1">
+                <a:solidFill>
+                  <a:schemeClr val="accent4">
+                    <a:lumMod val="75000"/>
+                  </a:schemeClr>
+                </a:solidFill>
+              </a:rPr>
+              <a:t>Complement</a:t>
+            </a:r>
+            <a:r>
+              <a:rPr lang="fr-FR" sz="2800" b="1" dirty="0">
+                <a:solidFill>
+                  <a:schemeClr val="accent4">
+                    <a:lumMod val="75000"/>
+                  </a:schemeClr>
+                </a:solidFill>
+              </a:rPr>
+              <a:t> NB</a:t>
+            </a:r>
+          </a:p>
+        </p:txBody>
+      </p:sp>
+      <p:sp>
+        <p:nvSpPr>
+          <p:cNvPr id="11" name="Sous-titre 2">
+            <a:extLst>
+              <a:ext uri="{FF2B5EF4-FFF2-40B4-BE49-F238E27FC236}">
+                <a16:creationId xmlns:a16="http://schemas.microsoft.com/office/drawing/2014/main" id="{443BFE38-1CCD-1F9C-EBEC-17C8738C7DA2}"/>
+              </a:ext>
+            </a:extLst>
+          </p:cNvPr>
+          <p:cNvSpPr txBox="1">
+            <a:spLocks/>
+          </p:cNvSpPr>
+          <p:nvPr/>
+        </p:nvSpPr>
+        <p:spPr>
+          <a:xfrm>
+            <a:off x="4192770" y="3663205"/>
+            <a:ext cx="6794205" cy="502134"/>
+          </a:xfrm>
+          <a:prstGeom prst="rect">
+            <a:avLst/>
+          </a:prstGeom>
+          <a:noFill/>
+        </p:spPr>
+        <p:txBody>
+          <a:bodyPr vert="horz" lIns="91440" tIns="45720" rIns="91440" bIns="45720" rtlCol="0">
+            <a:normAutofit/>
+          </a:bodyPr>
+          <a:lstStyle>
+            <a:lvl1pPr marL="0" indent="0" algn="ctr" defTabSz="914400" rtl="0" eaLnBrk="1" latinLnBrk="0" hangingPunct="1">
+              <a:lnSpc>
+                <a:spcPct val="90000"/>
+              </a:lnSpc>
+              <a:spcBef>
+                <a:spcPts val="1000"/>
+              </a:spcBef>
+              <a:buFont typeface="Arial" panose="020B0604020202020204" pitchFamily="34" charset="0"/>
+              <a:buNone/>
+              <a:defRPr sz="2400" kern="1200">
+                <a:solidFill>
+                  <a:schemeClr val="tx1"/>
+                </a:solidFill>
+                <a:latin typeface="+mn-lt"/>
+                <a:ea typeface="+mn-ea"/>
+                <a:cs typeface="+mn-cs"/>
+              </a:defRPr>
+            </a:lvl1pPr>
+            <a:lvl2pPr marL="457200" indent="0" algn="ctr" defTabSz="914400" rtl="0" eaLnBrk="1" latinLnBrk="0" hangingPunct="1">
+              <a:lnSpc>
+                <a:spcPct val="90000"/>
+              </a:lnSpc>
+              <a:spcBef>
+                <a:spcPts val="500"/>
+              </a:spcBef>
+              <a:buFont typeface="Arial" panose="020B0604020202020204" pitchFamily="34" charset="0"/>
+              <a:buNone/>
+              <a:defRPr sz="2000" kern="1200">
+                <a:solidFill>
+                  <a:schemeClr val="tx1"/>
+                </a:solidFill>
+                <a:latin typeface="+mn-lt"/>
+                <a:ea typeface="+mn-ea"/>
+                <a:cs typeface="+mn-cs"/>
+              </a:defRPr>
+            </a:lvl2pPr>
+            <a:lvl3pPr marL="914400" indent="0" algn="ctr" defTabSz="914400" rtl="0" eaLnBrk="1" latinLnBrk="0" hangingPunct="1">
+              <a:lnSpc>
+                <a:spcPct val="90000"/>
+              </a:lnSpc>
+              <a:spcBef>
+                <a:spcPts val="500"/>
+              </a:spcBef>
+              <a:buFont typeface="Arial" panose="020B0604020202020204" pitchFamily="34" charset="0"/>
+              <a:buNone/>
+              <a:defRPr sz="1800" kern="1200">
+                <a:solidFill>
+                  <a:schemeClr val="tx1"/>
+                </a:solidFill>
+                <a:latin typeface="+mn-lt"/>
+                <a:ea typeface="+mn-ea"/>
+                <a:cs typeface="+mn-cs"/>
+              </a:defRPr>
+            </a:lvl3pPr>
+            <a:lvl4pPr marL="1371600" indent="0" algn="ctr" defTabSz="914400" rtl="0" eaLnBrk="1" latinLnBrk="0" hangingPunct="1">
+              <a:lnSpc>
+                <a:spcPct val="90000"/>
+              </a:lnSpc>
+              <a:spcBef>
+                <a:spcPts val="500"/>
+              </a:spcBef>
+              <a:buFont typeface="Arial" panose="020B0604020202020204" pitchFamily="34" charset="0"/>
+              <a:buNone/>
+              <a:defRPr sz="1600" kern="1200">
+                <a:solidFill>
+                  <a:schemeClr val="tx1"/>
+                </a:solidFill>
+                <a:latin typeface="+mn-lt"/>
+                <a:ea typeface="+mn-ea"/>
+                <a:cs typeface="+mn-cs"/>
+              </a:defRPr>
+            </a:lvl4pPr>
+            <a:lvl5pPr marL="1828800" indent="0" algn="ctr" defTabSz="914400" rtl="0" eaLnBrk="1" latinLnBrk="0" hangingPunct="1">
+              <a:lnSpc>
+                <a:spcPct val="90000"/>
+              </a:lnSpc>
+              <a:spcBef>
+                <a:spcPts val="500"/>
+              </a:spcBef>
+              <a:buFont typeface="Arial" panose="020B0604020202020204" pitchFamily="34" charset="0"/>
+              <a:buNone/>
+              <a:defRPr sz="1600" kern="1200">
+                <a:solidFill>
+                  <a:schemeClr val="tx1"/>
+                </a:solidFill>
+                <a:latin typeface="+mn-lt"/>
+                <a:ea typeface="+mn-ea"/>
+                <a:cs typeface="+mn-cs"/>
+              </a:defRPr>
+            </a:lvl5pPr>
+            <a:lvl6pPr marL="2286000" indent="0" algn="ctr" defTabSz="914400" rtl="0" eaLnBrk="1" latinLnBrk="0" hangingPunct="1">
+              <a:lnSpc>
+                <a:spcPct val="90000"/>
+              </a:lnSpc>
+              <a:spcBef>
+                <a:spcPts val="500"/>
+              </a:spcBef>
+              <a:buFont typeface="Arial" panose="020B0604020202020204" pitchFamily="34" charset="0"/>
+              <a:buNone/>
+              <a:defRPr sz="1600" kern="1200">
+                <a:solidFill>
+                  <a:schemeClr val="tx1"/>
+                </a:solidFill>
+                <a:latin typeface="+mn-lt"/>
+                <a:ea typeface="+mn-ea"/>
+                <a:cs typeface="+mn-cs"/>
+              </a:defRPr>
+            </a:lvl6pPr>
+            <a:lvl7pPr marL="2743200" indent="0" algn="ctr" defTabSz="914400" rtl="0" eaLnBrk="1" latinLnBrk="0" hangingPunct="1">
+              <a:lnSpc>
+                <a:spcPct val="90000"/>
+              </a:lnSpc>
+              <a:spcBef>
+                <a:spcPts val="500"/>
+              </a:spcBef>
+              <a:buFont typeface="Arial" panose="020B0604020202020204" pitchFamily="34" charset="0"/>
+              <a:buNone/>
+              <a:defRPr sz="1600" kern="1200">
+                <a:solidFill>
+                  <a:schemeClr val="tx1"/>
+                </a:solidFill>
+                <a:latin typeface="+mn-lt"/>
+                <a:ea typeface="+mn-ea"/>
+                <a:cs typeface="+mn-cs"/>
+              </a:defRPr>
+            </a:lvl7pPr>
+            <a:lvl8pPr marL="3200400" indent="0" algn="ctr" defTabSz="914400" rtl="0" eaLnBrk="1" latinLnBrk="0" hangingPunct="1">
+              <a:lnSpc>
+                <a:spcPct val="90000"/>
+              </a:lnSpc>
+              <a:spcBef>
+                <a:spcPts val="500"/>
+              </a:spcBef>
+              <a:buFont typeface="Arial" panose="020B0604020202020204" pitchFamily="34" charset="0"/>
+              <a:buNone/>
+              <a:defRPr sz="1600" kern="1200">
+                <a:solidFill>
+                  <a:schemeClr val="tx1"/>
+                </a:solidFill>
+                <a:latin typeface="+mn-lt"/>
+                <a:ea typeface="+mn-ea"/>
+                <a:cs typeface="+mn-cs"/>
+              </a:defRPr>
+            </a:lvl8pPr>
+            <a:lvl9pPr marL="3657600" indent="0" algn="ctr" defTabSz="914400" rtl="0" eaLnBrk="1" latinLnBrk="0" hangingPunct="1">
+              <a:lnSpc>
+                <a:spcPct val="90000"/>
+              </a:lnSpc>
+              <a:spcBef>
+                <a:spcPts val="500"/>
+              </a:spcBef>
+              <a:buFont typeface="Arial" panose="020B0604020202020204" pitchFamily="34" charset="0"/>
+              <a:buNone/>
+              <a:defRPr sz="1600" kern="1200">
+                <a:solidFill>
+                  <a:schemeClr val="tx1"/>
+                </a:solidFill>
+                <a:latin typeface="+mn-lt"/>
+                <a:ea typeface="+mn-ea"/>
+                <a:cs typeface="+mn-cs"/>
+              </a:defRPr>
+            </a:lvl9pPr>
+          </a:lstStyle>
+          <a:p>
+            <a:pPr algn="l"/>
+            <a:r>
+              <a:rPr lang="fr-FR" sz="2800" b="1" dirty="0">
+                <a:solidFill>
+                  <a:schemeClr val="accent4">
+                    <a:lumMod val="75000"/>
+                  </a:schemeClr>
+                </a:solidFill>
+              </a:rPr>
+              <a:t>Vectorise les variables d’entrées</a:t>
+            </a:r>
+          </a:p>
+        </p:txBody>
+      </p:sp>
+      <p:sp>
+        <p:nvSpPr>
+          <p:cNvPr id="12" name="Sous-titre 2">
+            <a:extLst>
+              <a:ext uri="{FF2B5EF4-FFF2-40B4-BE49-F238E27FC236}">
+                <a16:creationId xmlns:a16="http://schemas.microsoft.com/office/drawing/2014/main" id="{BE15534B-4F9E-9B48-9466-3CFF6DE00E03}"/>
+              </a:ext>
+            </a:extLst>
+          </p:cNvPr>
+          <p:cNvSpPr txBox="1">
+            <a:spLocks/>
+          </p:cNvSpPr>
+          <p:nvPr/>
+        </p:nvSpPr>
+        <p:spPr>
+          <a:xfrm>
+            <a:off x="4192770" y="1794499"/>
+            <a:ext cx="6794205" cy="502134"/>
+          </a:xfrm>
+          <a:prstGeom prst="rect">
+            <a:avLst/>
+          </a:prstGeom>
+          <a:noFill/>
+        </p:spPr>
+        <p:txBody>
+          <a:bodyPr vert="horz" lIns="91440" tIns="45720" rIns="91440" bIns="45720" rtlCol="0">
+            <a:normAutofit/>
+          </a:bodyPr>
+          <a:lstStyle>
+            <a:lvl1pPr marL="0" indent="0" algn="ctr" defTabSz="914400" rtl="0" eaLnBrk="1" latinLnBrk="0" hangingPunct="1">
+              <a:lnSpc>
+                <a:spcPct val="90000"/>
+              </a:lnSpc>
+              <a:spcBef>
+                <a:spcPts val="1000"/>
+              </a:spcBef>
+              <a:buFont typeface="Arial" panose="020B0604020202020204" pitchFamily="34" charset="0"/>
+              <a:buNone/>
+              <a:defRPr sz="2400" kern="1200">
+                <a:solidFill>
+                  <a:schemeClr val="tx1"/>
+                </a:solidFill>
+                <a:latin typeface="+mn-lt"/>
+                <a:ea typeface="+mn-ea"/>
+                <a:cs typeface="+mn-cs"/>
+              </a:defRPr>
+            </a:lvl1pPr>
+            <a:lvl2pPr marL="457200" indent="0" algn="ctr" defTabSz="914400" rtl="0" eaLnBrk="1" latinLnBrk="0" hangingPunct="1">
+              <a:lnSpc>
+                <a:spcPct val="90000"/>
+              </a:lnSpc>
+              <a:spcBef>
+                <a:spcPts val="500"/>
+              </a:spcBef>
+              <a:buFont typeface="Arial" panose="020B0604020202020204" pitchFamily="34" charset="0"/>
+              <a:buNone/>
+              <a:defRPr sz="2000" kern="1200">
+                <a:solidFill>
+                  <a:schemeClr val="tx1"/>
+                </a:solidFill>
+                <a:latin typeface="+mn-lt"/>
+                <a:ea typeface="+mn-ea"/>
+                <a:cs typeface="+mn-cs"/>
+              </a:defRPr>
+            </a:lvl2pPr>
+            <a:lvl3pPr marL="914400" indent="0" algn="ctr" defTabSz="914400" rtl="0" eaLnBrk="1" latinLnBrk="0" hangingPunct="1">
+              <a:lnSpc>
+                <a:spcPct val="90000"/>
+              </a:lnSpc>
+              <a:spcBef>
+                <a:spcPts val="500"/>
+              </a:spcBef>
+              <a:buFont typeface="Arial" panose="020B0604020202020204" pitchFamily="34" charset="0"/>
+              <a:buNone/>
+              <a:defRPr sz="1800" kern="1200">
+                <a:solidFill>
+                  <a:schemeClr val="tx1"/>
+                </a:solidFill>
+                <a:latin typeface="+mn-lt"/>
+                <a:ea typeface="+mn-ea"/>
+                <a:cs typeface="+mn-cs"/>
+              </a:defRPr>
+            </a:lvl3pPr>
+            <a:lvl4pPr marL="1371600" indent="0" algn="ctr" defTabSz="914400" rtl="0" eaLnBrk="1" latinLnBrk="0" hangingPunct="1">
+              <a:lnSpc>
+                <a:spcPct val="90000"/>
+              </a:lnSpc>
+              <a:spcBef>
+                <a:spcPts val="500"/>
+              </a:spcBef>
+              <a:buFont typeface="Arial" panose="020B0604020202020204" pitchFamily="34" charset="0"/>
+              <a:buNone/>
+              <a:defRPr sz="1600" kern="1200">
+                <a:solidFill>
+                  <a:schemeClr val="tx1"/>
+                </a:solidFill>
+                <a:latin typeface="+mn-lt"/>
+                <a:ea typeface="+mn-ea"/>
+                <a:cs typeface="+mn-cs"/>
+              </a:defRPr>
+            </a:lvl4pPr>
+            <a:lvl5pPr marL="1828800" indent="0" algn="ctr" defTabSz="914400" rtl="0" eaLnBrk="1" latinLnBrk="0" hangingPunct="1">
+              <a:lnSpc>
+                <a:spcPct val="90000"/>
+              </a:lnSpc>
+              <a:spcBef>
+                <a:spcPts val="500"/>
+              </a:spcBef>
+              <a:buFont typeface="Arial" panose="020B0604020202020204" pitchFamily="34" charset="0"/>
+              <a:buNone/>
+              <a:defRPr sz="1600" kern="1200">
+                <a:solidFill>
+                  <a:schemeClr val="tx1"/>
+                </a:solidFill>
+                <a:latin typeface="+mn-lt"/>
+                <a:ea typeface="+mn-ea"/>
+                <a:cs typeface="+mn-cs"/>
+              </a:defRPr>
+            </a:lvl5pPr>
+            <a:lvl6pPr marL="2286000" indent="0" algn="ctr" defTabSz="914400" rtl="0" eaLnBrk="1" latinLnBrk="0" hangingPunct="1">
+              <a:lnSpc>
+                <a:spcPct val="90000"/>
+              </a:lnSpc>
+              <a:spcBef>
+                <a:spcPts val="500"/>
+              </a:spcBef>
+              <a:buFont typeface="Arial" panose="020B0604020202020204" pitchFamily="34" charset="0"/>
+              <a:buNone/>
+              <a:defRPr sz="1600" kern="1200">
+                <a:solidFill>
+                  <a:schemeClr val="tx1"/>
+                </a:solidFill>
+                <a:latin typeface="+mn-lt"/>
+                <a:ea typeface="+mn-ea"/>
+                <a:cs typeface="+mn-cs"/>
+              </a:defRPr>
+            </a:lvl6pPr>
+            <a:lvl7pPr marL="2743200" indent="0" algn="ctr" defTabSz="914400" rtl="0" eaLnBrk="1" latinLnBrk="0" hangingPunct="1">
+              <a:lnSpc>
+                <a:spcPct val="90000"/>
+              </a:lnSpc>
+              <a:spcBef>
+                <a:spcPts val="500"/>
+              </a:spcBef>
+              <a:buFont typeface="Arial" panose="020B0604020202020204" pitchFamily="34" charset="0"/>
+              <a:buNone/>
+              <a:defRPr sz="1600" kern="1200">
+                <a:solidFill>
+                  <a:schemeClr val="tx1"/>
+                </a:solidFill>
+                <a:latin typeface="+mn-lt"/>
+                <a:ea typeface="+mn-ea"/>
+                <a:cs typeface="+mn-cs"/>
+              </a:defRPr>
+            </a:lvl7pPr>
+            <a:lvl8pPr marL="3200400" indent="0" algn="ctr" defTabSz="914400" rtl="0" eaLnBrk="1" latinLnBrk="0" hangingPunct="1">
+              <a:lnSpc>
+                <a:spcPct val="90000"/>
+              </a:lnSpc>
+              <a:spcBef>
+                <a:spcPts val="500"/>
+              </a:spcBef>
+              <a:buFont typeface="Arial" panose="020B0604020202020204" pitchFamily="34" charset="0"/>
+              <a:buNone/>
+              <a:defRPr sz="1600" kern="1200">
+                <a:solidFill>
+                  <a:schemeClr val="tx1"/>
+                </a:solidFill>
+                <a:latin typeface="+mn-lt"/>
+                <a:ea typeface="+mn-ea"/>
+                <a:cs typeface="+mn-cs"/>
+              </a:defRPr>
+            </a:lvl8pPr>
+            <a:lvl9pPr marL="3657600" indent="0" algn="ctr" defTabSz="914400" rtl="0" eaLnBrk="1" latinLnBrk="0" hangingPunct="1">
+              <a:lnSpc>
+                <a:spcPct val="90000"/>
+              </a:lnSpc>
+              <a:spcBef>
+                <a:spcPts val="500"/>
+              </a:spcBef>
+              <a:buFont typeface="Arial" panose="020B0604020202020204" pitchFamily="34" charset="0"/>
+              <a:buNone/>
+              <a:defRPr sz="1600" kern="1200">
+                <a:solidFill>
+                  <a:schemeClr val="tx1"/>
+                </a:solidFill>
+                <a:latin typeface="+mn-lt"/>
+                <a:ea typeface="+mn-ea"/>
+                <a:cs typeface="+mn-cs"/>
+              </a:defRPr>
+            </a:lvl9pPr>
+          </a:lstStyle>
+          <a:p>
+            <a:pPr algn="l"/>
+            <a:r>
+              <a:rPr lang="fr-FR" sz="2800" b="1" dirty="0">
+                <a:solidFill>
+                  <a:schemeClr val="accent4">
+                    <a:lumMod val="75000"/>
+                  </a:schemeClr>
+                </a:solidFill>
+              </a:rPr>
+              <a:t>Jeu d’entrainement filtré (~80,000 lignes)</a:t>
+            </a:r>
+          </a:p>
+        </p:txBody>
+      </p:sp>
+    </p:spTree>
+    <p:extLst>
+      <p:ext uri="{BB962C8B-B14F-4D97-AF65-F5344CB8AC3E}">
+        <p14:creationId xmlns:p14="http://schemas.microsoft.com/office/powerpoint/2010/main" val="3440520153"/>
+      </p:ext>
+    </p:extLst>
+  </p:cSld>
+  <p:clrMapOvr>
+    <a:masterClrMapping/>
+  </p:clrMapOvr>
+</p:sld>
+</file>
+
+<file path=ppt/slides/slide18.xml><?xml version="1.0" encoding="utf-8"?>
+<p:sld xmlns:a="http://schemas.openxmlformats.org/drawingml/2006/main" xmlns:r="http://schemas.openxmlformats.org/officeDocument/2006/relationships" xmlns:p="http://schemas.openxmlformats.org/presentationml/2006/main">
+  <p:cSld>
+    <p:spTree>
+      <p:nvGrpSpPr>
+        <p:cNvPr id="1" name=""/>
+        <p:cNvGrpSpPr/>
+        <p:nvPr/>
+      </p:nvGrpSpPr>
+      <p:grpSpPr>
+        <a:xfrm>
+          <a:off x="0" y="0"/>
+          <a:ext cx="0" cy="0"/>
+          <a:chOff x="0" y="0"/>
+          <a:chExt cx="0" cy="0"/>
+        </a:xfrm>
+      </p:grpSpPr>
+      <p:sp>
+        <p:nvSpPr>
+          <p:cNvPr id="2" name="Titre 1">
+            <a:extLst>
+              <a:ext uri="{FF2B5EF4-FFF2-40B4-BE49-F238E27FC236}">
+                <a16:creationId xmlns:a16="http://schemas.microsoft.com/office/drawing/2014/main" id="{0F6FF110-9CA5-9068-EFE8-ABB9F02AE7C9}"/>
+              </a:ext>
+            </a:extLst>
+          </p:cNvPr>
+          <p:cNvSpPr>
+            <a:spLocks noGrp="1"/>
+          </p:cNvSpPr>
+          <p:nvPr>
+            <p:ph type="title"/>
+          </p:nvPr>
+        </p:nvSpPr>
+        <p:spPr/>
+        <p:txBody>
+          <a:bodyPr/>
+          <a:lstStyle/>
+          <a:p>
+            <a:r>
+              <a:rPr lang="fr-FR" b="1" dirty="0"/>
+              <a:t>3 approches ML</a:t>
+            </a:r>
+            <a:endParaRPr lang="fr-FR" dirty="0"/>
+          </a:p>
+        </p:txBody>
+      </p:sp>
+      <p:sp>
+        <p:nvSpPr>
+          <p:cNvPr id="3" name="Espace réservé du contenu 2">
+            <a:extLst>
+              <a:ext uri="{FF2B5EF4-FFF2-40B4-BE49-F238E27FC236}">
+                <a16:creationId xmlns:a16="http://schemas.microsoft.com/office/drawing/2014/main" id="{5DA09931-DE41-34A4-DD60-0A02DCF135DE}"/>
+              </a:ext>
+            </a:extLst>
+          </p:cNvPr>
+          <p:cNvSpPr>
+            <a:spLocks noGrp="1"/>
+          </p:cNvSpPr>
+          <p:nvPr>
+            <p:ph idx="1"/>
+          </p:nvPr>
+        </p:nvSpPr>
+        <p:spPr/>
+        <p:txBody>
+          <a:bodyPr/>
+          <a:lstStyle/>
+          <a:p>
+            <a:r>
+              <a:rPr lang="fr-FR" b="1" dirty="0"/>
+              <a:t>Modèle 1 : TF-IDF + </a:t>
+            </a:r>
+            <a:r>
+              <a:rPr lang="fr-FR" b="1" dirty="0" err="1"/>
+              <a:t>Logistic</a:t>
+            </a:r>
+            <a:r>
+              <a:rPr lang="fr-FR" b="1" dirty="0"/>
+              <a:t> </a:t>
+            </a:r>
+            <a:r>
+              <a:rPr lang="fr-FR" b="1" dirty="0" err="1"/>
+              <a:t>Regression</a:t>
+            </a:r>
+            <a:endParaRPr lang="fr-FR" b="1" dirty="0"/>
+          </a:p>
+          <a:p>
+            <a:r>
+              <a:rPr lang="fr-FR" b="1" dirty="0"/>
+              <a:t>Modèle 2 : TF-IDF + </a:t>
+            </a:r>
+            <a:r>
+              <a:rPr lang="fr-FR" b="1" dirty="0" err="1"/>
+              <a:t>Linear</a:t>
+            </a:r>
+            <a:r>
+              <a:rPr lang="fr-FR" b="1" dirty="0"/>
+              <a:t> SVM</a:t>
+            </a:r>
+          </a:p>
+          <a:p>
+            <a:r>
+              <a:rPr lang="fr-FR" b="1" dirty="0"/>
+              <a:t>Modèle 3 : TF-IDF + </a:t>
+            </a:r>
+            <a:r>
+              <a:rPr lang="fr-FR" b="1" dirty="0" err="1"/>
+              <a:t>Naive</a:t>
+            </a:r>
+            <a:r>
+              <a:rPr lang="fr-FR" b="1" dirty="0"/>
+              <a:t> Bayes</a:t>
+            </a:r>
+          </a:p>
+        </p:txBody>
+      </p:sp>
+    </p:spTree>
+    <p:extLst>
+      <p:ext uri="{BB962C8B-B14F-4D97-AF65-F5344CB8AC3E}">
+        <p14:creationId xmlns:p14="http://schemas.microsoft.com/office/powerpoint/2010/main" val="3081774306"/>
+      </p:ext>
+    </p:extLst>
+  </p:cSld>
+  <p:clrMapOvr>
+    <a:masterClrMapping/>
+  </p:clrMapOvr>
+</p:sld>
+</file>
+
+<file path=ppt/slides/slide19.xml><?xml version="1.0" encoding="utf-8"?>
+<p:sld xmlns:a="http://schemas.openxmlformats.org/drawingml/2006/main" xmlns:r="http://schemas.openxmlformats.org/officeDocument/2006/relationships" xmlns:p="http://schemas.openxmlformats.org/presentationml/2006/main">
+  <p:cSld>
+    <p:spTree>
+      <p:nvGrpSpPr>
+        <p:cNvPr id="1" name="">
+          <a:extLst>
+            <a:ext uri="{FF2B5EF4-FFF2-40B4-BE49-F238E27FC236}">
+              <a16:creationId xmlns:a16="http://schemas.microsoft.com/office/drawing/2014/main" id="{8D033E11-437C-FA87-91A8-4949ACBB84E8}"/>
+            </a:ext>
+          </a:extLst>
+        </p:cNvPr>
+        <p:cNvGrpSpPr/>
+        <p:nvPr/>
+      </p:nvGrpSpPr>
+      <p:grpSpPr>
+        <a:xfrm>
+          <a:off x="0" y="0"/>
+          <a:ext cx="0" cy="0"/>
+          <a:chOff x="0" y="0"/>
+          <a:chExt cx="0" cy="0"/>
+        </a:xfrm>
+      </p:grpSpPr>
+      <p:sp>
+        <p:nvSpPr>
+          <p:cNvPr id="2" name="Titre 1">
+            <a:extLst>
+              <a:ext uri="{FF2B5EF4-FFF2-40B4-BE49-F238E27FC236}">
+                <a16:creationId xmlns:a16="http://schemas.microsoft.com/office/drawing/2014/main" id="{39FE63B3-5258-5E2E-47E0-CF0EE894FBEC}"/>
+              </a:ext>
+            </a:extLst>
+          </p:cNvPr>
+          <p:cNvSpPr>
+            <a:spLocks noGrp="1"/>
+          </p:cNvSpPr>
+          <p:nvPr>
+            <p:ph type="title"/>
+          </p:nvPr>
+        </p:nvSpPr>
+        <p:spPr/>
+        <p:txBody>
+          <a:bodyPr/>
+          <a:lstStyle/>
+          <a:p>
+            <a:r>
+              <a:rPr lang="fr-FR" b="1" dirty="0"/>
+              <a:t>Approche ML</a:t>
+            </a:r>
+            <a:endParaRPr lang="fr-FR" dirty="0"/>
+          </a:p>
+        </p:txBody>
+      </p:sp>
+    </p:spTree>
+    <p:extLst>
+      <p:ext uri="{BB962C8B-B14F-4D97-AF65-F5344CB8AC3E}">
+        <p14:creationId xmlns:p14="http://schemas.microsoft.com/office/powerpoint/2010/main" val="4073940181"/>
+      </p:ext>
+    </p:extLst>
+  </p:cSld>
+  <p:clrMapOvr>
+    <a:masterClrMapping/>
+  </p:clrMapOvr>
+</p:sld>
+</file>
+
 <file path=ppt/slides/slide2.xml><?xml version="1.0" encoding="utf-8"?>
 <p:sld xmlns:a="http://schemas.openxmlformats.org/drawingml/2006/main" xmlns:r="http://schemas.openxmlformats.org/officeDocument/2006/relationships" xmlns:p="http://schemas.openxmlformats.org/presentationml/2006/main">
   <p:cSld>
@@ -5214,7 +9514,10 @@
           <a:bodyPr/>
           <a:lstStyle/>
           <a:p>
-            <a:endParaRPr lang="fr-FR" dirty="0"/>
+            <a:r>
+              <a:rPr lang="fr-FR" dirty="0"/>
+              <a:t>Objectif : automatiser le routage des réclamations vers le bon service.</a:t>
+            </a:r>
           </a:p>
         </p:txBody>
       </p:sp>
@@ -5630,7 +9933,7 @@
           <p:cNvPr id="2" name="Titre 1">
             <a:extLst>
               <a:ext uri="{FF2B5EF4-FFF2-40B4-BE49-F238E27FC236}">
-                <a16:creationId xmlns:a16="http://schemas.microsoft.com/office/drawing/2014/main" id="{91504444-0740-D874-1160-ACB50AB8B8B1}"/>
+                <a16:creationId xmlns:a16="http://schemas.microsoft.com/office/drawing/2014/main" id="{D400C72A-6975-F8C3-D588-A84C967A9FBB}"/>
               </a:ext>
             </a:extLst>
           </p:cNvPr>
@@ -5638,237 +9941,423 @@
             <a:spLocks noGrp="1"/>
           </p:cNvSpPr>
           <p:nvPr>
-            <p:ph type="ctrTitle"/>
+            <p:ph type="title"/>
           </p:nvPr>
         </p:nvSpPr>
-        <p:spPr>
-          <a:xfrm>
-            <a:off x="1524000" y="365679"/>
-            <a:ext cx="9144000" cy="961618"/>
-          </a:xfrm>
-        </p:spPr>
+        <p:spPr/>
         <p:txBody>
           <a:bodyPr/>
           <a:lstStyle/>
           <a:p>
             <a:r>
-              <a:rPr lang="fr-FR" u="sng" dirty="0"/>
-              <a:t>Réclamation</a:t>
-            </a:r>
-          </a:p>
-        </p:txBody>
-      </p:sp>
-      <p:sp>
-        <p:nvSpPr>
-          <p:cNvPr id="5" name="Sous-titre 2">
-            <a:extLst>
-              <a:ext uri="{FF2B5EF4-FFF2-40B4-BE49-F238E27FC236}">
-                <a16:creationId xmlns:a16="http://schemas.microsoft.com/office/drawing/2014/main" id="{3DEBCEB3-25B6-65EB-311A-51DA06F1CC39}"/>
-              </a:ext>
-            </a:extLst>
-          </p:cNvPr>
-          <p:cNvSpPr txBox="1">
-            <a:spLocks/>
-          </p:cNvSpPr>
-          <p:nvPr/>
-        </p:nvSpPr>
-        <p:spPr>
+              <a:rPr lang="fr-FR" dirty="0" err="1"/>
+              <a:t>Dataset</a:t>
+            </a:r>
+            <a:endParaRPr lang="fr-FR" dirty="0"/>
+          </a:p>
+        </p:txBody>
+      </p:sp>
+      <p:sp>
+        <p:nvSpPr>
+          <p:cNvPr id="4" name="Rectangle 1">
+            <a:extLst>
+              <a:ext uri="{FF2B5EF4-FFF2-40B4-BE49-F238E27FC236}">
+                <a16:creationId xmlns:a16="http://schemas.microsoft.com/office/drawing/2014/main" id="{B7B955B9-9041-8CB5-3353-7D1868BE7FEB}"/>
+              </a:ext>
+            </a:extLst>
+          </p:cNvPr>
+          <p:cNvSpPr>
+            <a:spLocks noGrp="1" noChangeArrowheads="1"/>
+          </p:cNvSpPr>
+          <p:nvPr>
+            <p:ph idx="1"/>
+          </p:nvPr>
+        </p:nvSpPr>
+        <p:spPr bwMode="auto">
           <a:xfrm>
-            <a:off x="2697125" y="2400554"/>
-            <a:ext cx="6797750" cy="2958256"/>
+            <a:off x="838200" y="2493189"/>
+            <a:ext cx="13191432" cy="3016210"/>
           </a:xfrm>
           <a:prstGeom prst="rect">
             <a:avLst/>
           </a:prstGeom>
           <a:noFill/>
+          <a:ln>
+            <a:noFill/>
+          </a:ln>
+          <a:effectLst/>
+          <a:extLst>
+            <a:ext uri="{909E8E84-426E-40DD-AFC4-6F175D3DCCD1}">
+              <a14:hiddenFill xmlns:a14="http://schemas.microsoft.com/office/drawing/2010/main">
+                <a:solidFill>
+                  <a:schemeClr val="accent1"/>
+                </a:solidFill>
+              </a14:hiddenFill>
+            </a:ext>
+            <a:ext uri="{91240B29-F687-4F45-9708-019B960494DF}">
+              <a14:hiddenLine xmlns:a14="http://schemas.microsoft.com/office/drawing/2010/main" w="9525">
+                <a:solidFill>
+                  <a:schemeClr val="tx1"/>
+                </a:solidFill>
+                <a:miter lim="800000"/>
+                <a:headEnd/>
+                <a:tailEnd/>
+              </a14:hiddenLine>
+            </a:ext>
+            <a:ext uri="{AF507438-7753-43E0-B8FC-AC1667EBCBE1}">
+              <a14:hiddenEffects xmlns:a14="http://schemas.microsoft.com/office/drawing/2010/main">
+                <a:effectLst>
+                  <a:outerShdw dist="35921" dir="2700000" algn="ctr" rotWithShape="0">
+                    <a:schemeClr val="bg2"/>
+                  </a:outerShdw>
+                </a:effectLst>
+              </a14:hiddenEffects>
+            </a:ext>
+          </a:extLst>
         </p:spPr>
         <p:txBody>
-          <a:bodyPr vert="horz" lIns="91440" tIns="45720" rIns="91440" bIns="45720" rtlCol="0">
-            <a:normAutofit/>
+          <a:bodyPr vert="horz" wrap="none" lIns="91440" tIns="45720" rIns="91440" bIns="45720" numCol="1" anchor="ctr" anchorCtr="0" compatLnSpc="1">
+            <a:prstTxWarp prst="textNoShape">
+              <a:avLst/>
+            </a:prstTxWarp>
+            <a:spAutoFit/>
           </a:bodyPr>
-          <a:lstStyle>
-            <a:lvl1pPr marL="0" indent="0" algn="ctr" defTabSz="914400" rtl="0" eaLnBrk="1" latinLnBrk="0" hangingPunct="1">
-              <a:lnSpc>
-                <a:spcPct val="90000"/>
-              </a:lnSpc>
-              <a:spcBef>
-                <a:spcPts val="1000"/>
-              </a:spcBef>
-              <a:buFont typeface="Arial" panose="020B0604020202020204" pitchFamily="34" charset="0"/>
-              <a:buNone/>
-              <a:defRPr sz="2400" kern="1200">
-                <a:solidFill>
-                  <a:schemeClr val="tx1"/>
-                </a:solidFill>
-                <a:latin typeface="+mn-lt"/>
-                <a:ea typeface="+mn-ea"/>
-                <a:cs typeface="+mn-cs"/>
-              </a:defRPr>
-            </a:lvl1pPr>
-            <a:lvl2pPr marL="457200" indent="0" algn="ctr" defTabSz="914400" rtl="0" eaLnBrk="1" latinLnBrk="0" hangingPunct="1">
-              <a:lnSpc>
-                <a:spcPct val="90000"/>
-              </a:lnSpc>
-              <a:spcBef>
-                <a:spcPts val="500"/>
-              </a:spcBef>
-              <a:buFont typeface="Arial" panose="020B0604020202020204" pitchFamily="34" charset="0"/>
-              <a:buNone/>
-              <a:defRPr sz="2000" kern="1200">
-                <a:solidFill>
-                  <a:schemeClr val="tx1"/>
-                </a:solidFill>
-                <a:latin typeface="+mn-lt"/>
-                <a:ea typeface="+mn-ea"/>
-                <a:cs typeface="+mn-cs"/>
-              </a:defRPr>
-            </a:lvl2pPr>
-            <a:lvl3pPr marL="914400" indent="0" algn="ctr" defTabSz="914400" rtl="0" eaLnBrk="1" latinLnBrk="0" hangingPunct="1">
-              <a:lnSpc>
-                <a:spcPct val="90000"/>
-              </a:lnSpc>
-              <a:spcBef>
-                <a:spcPts val="500"/>
-              </a:spcBef>
-              <a:buFont typeface="Arial" panose="020B0604020202020204" pitchFamily="34" charset="0"/>
-              <a:buNone/>
-              <a:defRPr sz="1800" kern="1200">
-                <a:solidFill>
-                  <a:schemeClr val="tx1"/>
-                </a:solidFill>
-                <a:latin typeface="+mn-lt"/>
-                <a:ea typeface="+mn-ea"/>
-                <a:cs typeface="+mn-cs"/>
-              </a:defRPr>
-            </a:lvl3pPr>
-            <a:lvl4pPr marL="1371600" indent="0" algn="ctr" defTabSz="914400" rtl="0" eaLnBrk="1" latinLnBrk="0" hangingPunct="1">
-              <a:lnSpc>
-                <a:spcPct val="90000"/>
-              </a:lnSpc>
-              <a:spcBef>
-                <a:spcPts val="500"/>
-              </a:spcBef>
-              <a:buFont typeface="Arial" panose="020B0604020202020204" pitchFamily="34" charset="0"/>
-              <a:buNone/>
-              <a:defRPr sz="1600" kern="1200">
-                <a:solidFill>
-                  <a:schemeClr val="tx1"/>
-                </a:solidFill>
-                <a:latin typeface="+mn-lt"/>
-                <a:ea typeface="+mn-ea"/>
-                <a:cs typeface="+mn-cs"/>
-              </a:defRPr>
-            </a:lvl4pPr>
-            <a:lvl5pPr marL="1828800" indent="0" algn="ctr" defTabSz="914400" rtl="0" eaLnBrk="1" latinLnBrk="0" hangingPunct="1">
-              <a:lnSpc>
-                <a:spcPct val="90000"/>
-              </a:lnSpc>
-              <a:spcBef>
-                <a:spcPts val="500"/>
-              </a:spcBef>
-              <a:buFont typeface="Arial" panose="020B0604020202020204" pitchFamily="34" charset="0"/>
-              <a:buNone/>
-              <a:defRPr sz="1600" kern="1200">
-                <a:solidFill>
-                  <a:schemeClr val="tx1"/>
-                </a:solidFill>
-                <a:latin typeface="+mn-lt"/>
-                <a:ea typeface="+mn-ea"/>
-                <a:cs typeface="+mn-cs"/>
-              </a:defRPr>
-            </a:lvl5pPr>
-            <a:lvl6pPr marL="2286000" indent="0" algn="ctr" defTabSz="914400" rtl="0" eaLnBrk="1" latinLnBrk="0" hangingPunct="1">
-              <a:lnSpc>
-                <a:spcPct val="90000"/>
-              </a:lnSpc>
-              <a:spcBef>
-                <a:spcPts val="500"/>
-              </a:spcBef>
-              <a:buFont typeface="Arial" panose="020B0604020202020204" pitchFamily="34" charset="0"/>
-              <a:buNone/>
-              <a:defRPr sz="1600" kern="1200">
-                <a:solidFill>
-                  <a:schemeClr val="tx1"/>
-                </a:solidFill>
-                <a:latin typeface="+mn-lt"/>
-                <a:ea typeface="+mn-ea"/>
-                <a:cs typeface="+mn-cs"/>
-              </a:defRPr>
-            </a:lvl6pPr>
-            <a:lvl7pPr marL="2743200" indent="0" algn="ctr" defTabSz="914400" rtl="0" eaLnBrk="1" latinLnBrk="0" hangingPunct="1">
-              <a:lnSpc>
-                <a:spcPct val="90000"/>
-              </a:lnSpc>
-              <a:spcBef>
-                <a:spcPts val="500"/>
-              </a:spcBef>
-              <a:buFont typeface="Arial" panose="020B0604020202020204" pitchFamily="34" charset="0"/>
-              <a:buNone/>
-              <a:defRPr sz="1600" kern="1200">
-                <a:solidFill>
-                  <a:schemeClr val="tx1"/>
-                </a:solidFill>
-                <a:latin typeface="+mn-lt"/>
-                <a:ea typeface="+mn-ea"/>
-                <a:cs typeface="+mn-cs"/>
-              </a:defRPr>
-            </a:lvl7pPr>
-            <a:lvl8pPr marL="3200400" indent="0" algn="ctr" defTabSz="914400" rtl="0" eaLnBrk="1" latinLnBrk="0" hangingPunct="1">
-              <a:lnSpc>
-                <a:spcPct val="90000"/>
-              </a:lnSpc>
-              <a:spcBef>
-                <a:spcPts val="500"/>
-              </a:spcBef>
-              <a:buFont typeface="Arial" panose="020B0604020202020204" pitchFamily="34" charset="0"/>
-              <a:buNone/>
-              <a:defRPr sz="1600" kern="1200">
-                <a:solidFill>
-                  <a:schemeClr val="tx1"/>
-                </a:solidFill>
-                <a:latin typeface="+mn-lt"/>
-                <a:ea typeface="+mn-ea"/>
-                <a:cs typeface="+mn-cs"/>
-              </a:defRPr>
-            </a:lvl8pPr>
-            <a:lvl9pPr marL="3657600" indent="0" algn="ctr" defTabSz="914400" rtl="0" eaLnBrk="1" latinLnBrk="0" hangingPunct="1">
-              <a:lnSpc>
-                <a:spcPct val="90000"/>
-              </a:lnSpc>
-              <a:spcBef>
-                <a:spcPts val="500"/>
-              </a:spcBef>
-              <a:buFont typeface="Arial" panose="020B0604020202020204" pitchFamily="34" charset="0"/>
-              <a:buNone/>
-              <a:defRPr sz="1600" kern="1200">
-                <a:solidFill>
-                  <a:schemeClr val="tx1"/>
-                </a:solidFill>
-                <a:latin typeface="+mn-lt"/>
-                <a:ea typeface="+mn-ea"/>
-                <a:cs typeface="+mn-cs"/>
-              </a:defRPr>
-            </a:lvl9pPr>
-          </a:lstStyle>
-          <a:p>
-            <a:r>
-              <a:rPr lang="fr-FR" sz="4800" dirty="0"/>
-              <a:t>La réclamation est la principale variable de prédiction pour identifier l’étiquette à assigner</a:t>
-            </a:r>
-          </a:p>
-          <a:p>
-            <a:endParaRPr lang="fr-FR" sz="4800" b="1" dirty="0">
+          <a:lstStyle/>
+          <a:p>
+            <a:pPr marL="0" lvl="0" indent="0" eaLnBrk="0" fontAlgn="base" hangingPunct="0">
+              <a:lnSpc>
+                <a:spcPct val="100000"/>
+              </a:lnSpc>
+              <a:spcBef>
+                <a:spcPct val="0"/>
+              </a:spcBef>
+              <a:spcAft>
+                <a:spcPct val="0"/>
+              </a:spcAft>
+              <a:buNone/>
+            </a:pPr>
+            <a:r>
+              <a:rPr lang="fr-FR" dirty="0"/>
+              <a:t>1.282,355 entrées, 15 colonnes</a:t>
+            </a:r>
+          </a:p>
+          <a:p>
+            <a:pPr marL="0" lvl="0" indent="0" eaLnBrk="0" fontAlgn="base" hangingPunct="0">
+              <a:lnSpc>
+                <a:spcPct val="100000"/>
+              </a:lnSpc>
+              <a:spcBef>
+                <a:spcPct val="0"/>
+              </a:spcBef>
+              <a:spcAft>
+                <a:spcPct val="0"/>
+              </a:spcAft>
+              <a:buNone/>
+            </a:pPr>
+            <a:endParaRPr kumimoji="0" lang="fr-FR" altLang="fr-FR" sz="1800" b="0" i="0" u="none" strike="noStrike" cap="none" normalizeH="0" baseline="0" dirty="0">
+              <a:ln>
+                <a:noFill/>
+              </a:ln>
               <a:solidFill>
-                <a:sysClr val="windowText" lastClr="000000"/>
+                <a:schemeClr val="tx1"/>
               </a:solidFill>
+              <a:effectLst/>
+              <a:latin typeface="Arial" panose="020B0604020202020204" pitchFamily="34" charset="0"/>
             </a:endParaRPr>
+          </a:p>
+          <a:p>
+            <a:pPr marL="0" lvl="0" indent="0" eaLnBrk="0" fontAlgn="base" hangingPunct="0">
+              <a:lnSpc>
+                <a:spcPct val="100000"/>
+              </a:lnSpc>
+              <a:spcBef>
+                <a:spcPct val="0"/>
+              </a:spcBef>
+              <a:spcAft>
+                <a:spcPct val="0"/>
+              </a:spcAft>
+              <a:buFontTx/>
+              <a:buChar char="•"/>
+            </a:pPr>
+            <a:r>
+              <a:rPr lang="fr-FR" altLang="fr-FR" sz="1800" dirty="0">
+                <a:latin typeface="Arial" panose="020B0604020202020204" pitchFamily="34" charset="0"/>
+              </a:rPr>
+              <a:t>combien de réclamations ? </a:t>
+            </a:r>
+            <a:r>
+              <a:rPr lang="fr-FR" sz="1800" b="1" dirty="0"/>
+              <a:t>1.282,355</a:t>
+            </a:r>
+            <a:endParaRPr lang="fr-FR" altLang="fr-FR" sz="1800" b="1" dirty="0">
+              <a:latin typeface="Arial" panose="020B0604020202020204" pitchFamily="34" charset="0"/>
+            </a:endParaRPr>
+          </a:p>
+          <a:p>
+            <a:pPr marL="0" marR="0" lvl="0" indent="0" algn="l" defTabSz="914400" rtl="0" eaLnBrk="0" fontAlgn="base" latinLnBrk="0" hangingPunct="0">
+              <a:lnSpc>
+                <a:spcPct val="100000"/>
+              </a:lnSpc>
+              <a:spcBef>
+                <a:spcPct val="0"/>
+              </a:spcBef>
+              <a:spcAft>
+                <a:spcPct val="0"/>
+              </a:spcAft>
+              <a:buClrTx/>
+              <a:buSzTx/>
+              <a:buFontTx/>
+              <a:buChar char="•"/>
+              <a:tabLst/>
+            </a:pPr>
+            <a:r>
+              <a:rPr lang="fr-FR" altLang="fr-FR" sz="1800" dirty="0">
+                <a:latin typeface="Arial" panose="020B0604020202020204" pitchFamily="34" charset="0"/>
+              </a:rPr>
+              <a:t>combien de catégories ? </a:t>
+            </a:r>
+            <a:r>
+              <a:rPr lang="fr-FR" altLang="fr-FR" sz="1800" b="1" dirty="0">
+                <a:latin typeface="Arial" panose="020B0604020202020204" pitchFamily="34" charset="0"/>
+              </a:rPr>
+              <a:t>18 dont certaines ambigüe (10 une fois normalisé)</a:t>
+            </a:r>
+          </a:p>
+          <a:p>
+            <a:pPr marL="0" lvl="0" indent="0" eaLnBrk="0" fontAlgn="base" hangingPunct="0">
+              <a:lnSpc>
+                <a:spcPct val="100000"/>
+              </a:lnSpc>
+              <a:spcBef>
+                <a:spcPct val="0"/>
+              </a:spcBef>
+              <a:spcAft>
+                <a:spcPct val="0"/>
+              </a:spcAft>
+              <a:buFontTx/>
+              <a:buChar char="•"/>
+            </a:pPr>
+            <a:r>
+              <a:rPr lang="fr-FR" altLang="fr-FR" sz="1800" dirty="0">
+                <a:latin typeface="Arial" panose="020B0604020202020204" pitchFamily="34" charset="0"/>
+              </a:rPr>
+              <a:t>quelle est la répartition des catégories ? </a:t>
+            </a:r>
+            <a:r>
+              <a:rPr lang="fr-FR" sz="1800" b="1" dirty="0">
+                <a:latin typeface="Arial" panose="020B0604020202020204" pitchFamily="34" charset="0"/>
+              </a:rPr>
+              <a:t>un déséquilibre très important des classes.</a:t>
+            </a:r>
+            <a:r>
+              <a:rPr lang="fr-FR" altLang="fr-FR" sz="1800" b="1" dirty="0">
+                <a:latin typeface="Arial" panose="020B0604020202020204" pitchFamily="34" charset="0"/>
+              </a:rPr>
+              <a:t> </a:t>
+            </a:r>
+          </a:p>
+          <a:p>
+            <a:pPr marL="0" lvl="0" indent="0" eaLnBrk="0" fontAlgn="base" hangingPunct="0">
+              <a:lnSpc>
+                <a:spcPct val="100000"/>
+              </a:lnSpc>
+              <a:spcBef>
+                <a:spcPct val="0"/>
+              </a:spcBef>
+              <a:spcAft>
+                <a:spcPct val="0"/>
+              </a:spcAft>
+              <a:buFontTx/>
+              <a:buChar char="•"/>
+            </a:pPr>
+            <a:r>
+              <a:rPr lang="fr-FR" altLang="fr-FR" sz="1800" dirty="0">
+                <a:latin typeface="Arial" panose="020B0604020202020204" pitchFamily="34" charset="0"/>
+              </a:rPr>
+              <a:t>quelle proportion de Consumer Claim est manquante ? </a:t>
+            </a:r>
+            <a:r>
+              <a:rPr lang="fr-FR" altLang="fr-FR" sz="1800" b="1" dirty="0">
+                <a:latin typeface="Arial" panose="020B0604020202020204" pitchFamily="34" charset="0"/>
+              </a:rPr>
+              <a:t>898,791 (70%) </a:t>
+            </a:r>
+            <a:r>
+              <a:rPr lang="fr-FR" sz="1800" dirty="0"/>
+              <a:t>présence importante de valeurs manquantes</a:t>
+            </a:r>
+            <a:endParaRPr lang="fr-FR" altLang="fr-FR" sz="1800" b="1" dirty="0">
+              <a:latin typeface="Arial" panose="020B0604020202020204" pitchFamily="34" charset="0"/>
+            </a:endParaRPr>
+          </a:p>
+          <a:p>
+            <a:pPr marL="0" lvl="0" indent="0" eaLnBrk="0" fontAlgn="base" hangingPunct="0">
+              <a:lnSpc>
+                <a:spcPct val="100000"/>
+              </a:lnSpc>
+              <a:spcBef>
+                <a:spcPct val="0"/>
+              </a:spcBef>
+              <a:spcAft>
+                <a:spcPct val="0"/>
+              </a:spcAft>
+              <a:buFontTx/>
+              <a:buChar char="•"/>
+            </a:pPr>
+            <a:r>
+              <a:rPr lang="fr-FR" altLang="fr-FR" sz="1800" dirty="0">
+                <a:latin typeface="Arial" panose="020B0604020202020204" pitchFamily="34" charset="0"/>
+              </a:rPr>
+              <a:t>les valeurs manquantes dépendent-elles de </a:t>
+            </a:r>
+            <a:r>
+              <a:rPr lang="fr-FR" altLang="fr-FR" sz="1800" dirty="0" err="1">
+                <a:latin typeface="Arial" panose="020B0604020202020204" pitchFamily="34" charset="0"/>
+              </a:rPr>
+              <a:t>Submitted</a:t>
+            </a:r>
+            <a:r>
+              <a:rPr lang="fr-FR" altLang="fr-FR" sz="1800" dirty="0">
+                <a:latin typeface="Arial" panose="020B0604020202020204" pitchFamily="34" charset="0"/>
+              </a:rPr>
+              <a:t> via ? </a:t>
+            </a:r>
+            <a:r>
+              <a:rPr lang="fr-FR" altLang="fr-FR" sz="1800" b="1" dirty="0">
+                <a:latin typeface="Arial" panose="020B0604020202020204" pitchFamily="34" charset="0"/>
+              </a:rPr>
+              <a:t>Oui, 40% des </a:t>
+            </a:r>
+            <a:r>
+              <a:rPr lang="fr-FR" altLang="fr-FR" sz="1800" b="1" dirty="0" err="1">
+                <a:latin typeface="Arial" panose="020B0604020202020204" pitchFamily="34" charset="0"/>
+              </a:rPr>
+              <a:t>Submitted</a:t>
+            </a:r>
+            <a:r>
+              <a:rPr lang="fr-FR" altLang="fr-FR" sz="1800" b="1" dirty="0">
+                <a:latin typeface="Arial" panose="020B0604020202020204" pitchFamily="34" charset="0"/>
+              </a:rPr>
+              <a:t> via Web renseigne un texte</a:t>
+            </a:r>
+          </a:p>
+          <a:p>
+            <a:pPr marL="0" lvl="0" indent="0" eaLnBrk="0" fontAlgn="base" hangingPunct="0">
+              <a:lnSpc>
+                <a:spcPct val="100000"/>
+              </a:lnSpc>
+              <a:spcBef>
+                <a:spcPct val="0"/>
+              </a:spcBef>
+              <a:spcAft>
+                <a:spcPct val="0"/>
+              </a:spcAft>
+              <a:buFontTx/>
+              <a:buChar char="•"/>
+            </a:pPr>
+            <a:r>
+              <a:rPr lang="fr-FR" altLang="fr-FR" sz="1800" dirty="0">
+                <a:latin typeface="Arial" panose="020B0604020202020204" pitchFamily="34" charset="0"/>
+              </a:rPr>
+              <a:t>les valeurs manquantes dépendent-elles de Consumer consent </a:t>
+            </a:r>
+            <a:r>
+              <a:rPr lang="fr-FR" altLang="fr-FR" sz="1800" dirty="0" err="1">
+                <a:latin typeface="Arial" panose="020B0604020202020204" pitchFamily="34" charset="0"/>
+              </a:rPr>
+              <a:t>provided</a:t>
+            </a:r>
+            <a:r>
+              <a:rPr lang="fr-FR" altLang="fr-FR" sz="1800" dirty="0">
+                <a:latin typeface="Arial" panose="020B0604020202020204" pitchFamily="34" charset="0"/>
+              </a:rPr>
+              <a:t>? </a:t>
+            </a:r>
+            <a:r>
+              <a:rPr lang="fr-FR" altLang="fr-FR" sz="1800" b="1" dirty="0">
+                <a:latin typeface="Arial" panose="020B0604020202020204" pitchFamily="34" charset="0"/>
+              </a:rPr>
+              <a:t>Oui, </a:t>
+            </a:r>
+            <a:r>
+              <a:rPr lang="fr-FR" sz="1800" b="1" dirty="0">
+                <a:latin typeface="Arial" panose="020B0604020202020204" pitchFamily="34" charset="0"/>
+              </a:rPr>
+              <a:t>Consent </a:t>
+            </a:r>
+            <a:r>
+              <a:rPr lang="fr-FR" sz="1800" b="1" dirty="0" err="1">
+                <a:latin typeface="Arial" panose="020B0604020202020204" pitchFamily="34" charset="0"/>
+              </a:rPr>
+              <a:t>provided</a:t>
+            </a:r>
+            <a:r>
+              <a:rPr lang="fr-FR" sz="1800" b="1" dirty="0">
+                <a:latin typeface="Arial" panose="020B0604020202020204" pitchFamily="34" charset="0"/>
+              </a:rPr>
+              <a:t> regroupe 99% des textes</a:t>
+            </a:r>
+            <a:r>
+              <a:rPr lang="fr-FR" altLang="fr-FR" sz="1800" b="1" dirty="0">
+                <a:latin typeface="Arial" panose="020B0604020202020204" pitchFamily="34" charset="0"/>
+              </a:rPr>
+              <a:t> </a:t>
+            </a:r>
+          </a:p>
+          <a:p>
+            <a:pPr marL="0" marR="0" lvl="0" indent="0" algn="l" defTabSz="914400" rtl="0" eaLnBrk="0" fontAlgn="base" latinLnBrk="0" hangingPunct="0">
+              <a:lnSpc>
+                <a:spcPct val="100000"/>
+              </a:lnSpc>
+              <a:spcBef>
+                <a:spcPct val="0"/>
+              </a:spcBef>
+              <a:spcAft>
+                <a:spcPct val="0"/>
+              </a:spcAft>
+              <a:buClrTx/>
+              <a:buSzTx/>
+              <a:buFontTx/>
+              <a:buChar char="•"/>
+              <a:tabLst/>
+            </a:pPr>
+            <a:r>
+              <a:rPr lang="fr-FR" altLang="fr-FR" sz="1800" dirty="0">
+                <a:latin typeface="Arial" panose="020B0604020202020204" pitchFamily="34" charset="0"/>
+              </a:rPr>
+              <a:t>quelle longueur ont les réclamations ? </a:t>
+            </a:r>
+          </a:p>
+          <a:p>
+            <a:pPr marL="0" marR="0" lvl="0" indent="0" algn="l" defTabSz="914400" rtl="0" eaLnBrk="0" fontAlgn="base" latinLnBrk="0" hangingPunct="0">
+              <a:lnSpc>
+                <a:spcPct val="100000"/>
+              </a:lnSpc>
+              <a:spcBef>
+                <a:spcPct val="0"/>
+              </a:spcBef>
+              <a:spcAft>
+                <a:spcPct val="0"/>
+              </a:spcAft>
+              <a:buClrTx/>
+              <a:buSzTx/>
+              <a:buFontTx/>
+              <a:buChar char="•"/>
+              <a:tabLst/>
+            </a:pPr>
+            <a:r>
+              <a:rPr lang="fr-FR" altLang="fr-FR" sz="1800" dirty="0">
+                <a:latin typeface="Arial" panose="020B0604020202020204" pitchFamily="34" charset="0"/>
+              </a:rPr>
+              <a:t>existe-t-il des doublons ? </a:t>
+            </a:r>
           </a:p>
         </p:txBody>
       </p:sp>
     </p:spTree>
     <p:extLst>
       <p:ext uri="{BB962C8B-B14F-4D97-AF65-F5344CB8AC3E}">
-        <p14:creationId xmlns:p14="http://schemas.microsoft.com/office/powerpoint/2010/main" val="308141536"/>
+        <p14:creationId xmlns:p14="http://schemas.microsoft.com/office/powerpoint/2010/main" val="1848606062"/>
       </p:ext>
     </p:extLst>
   </p:cSld>
@@ -5917,14 +10406,19 @@
             <p:ph idx="1"/>
           </p:nvPr>
         </p:nvSpPr>
-        <p:spPr/>
+        <p:spPr>
+          <a:xfrm>
+            <a:off x="838200" y="2787243"/>
+            <a:ext cx="10515600" cy="3389719"/>
+          </a:xfrm>
+        </p:spPr>
         <p:txBody>
           <a:bodyPr/>
           <a:lstStyle/>
           <a:p>
             <a:r>
               <a:rPr lang="fr-FR" dirty="0"/>
-              <a:t>Forte proportion de valeurs manquantes dans la variable </a:t>
+              <a:t>Valeurs manquantes dans la variable </a:t>
             </a:r>
             <a:r>
               <a:rPr lang="fr-FR" i="1" dirty="0">
@@ -5940,7 +10434,7 @@
           <a:p>
             <a:r>
               <a:rPr lang="fr-FR" dirty="0"/>
-              <a:t>Chaque ligne correspond bien à une réclamation identifiée et traitée</a:t>
+              <a:t>Chaque ligne correspond à une réclamation identifiée et traitée</a:t>
             </a:r>
             <a:endParaRPr lang="fr-FR" i="1" dirty="0">
               <a:solidFill>
@@ -5977,7 +10471,7 @@
           <a:p>
             <a:r>
               <a:rPr lang="fr-FR" dirty="0"/>
-              <a:t>Seule les réclamation </a:t>
+              <a:t>Seules les réclamations </a:t>
             </a:r>
             <a:r>
               <a:rPr lang="fr-FR" b="1" dirty="0"/>
@@ -5985,7 +10479,7 @@
             </a:r>
             <a:r>
               <a:rPr lang="fr-FR" dirty="0"/>
-              <a:t>du consommateur contient un texte</a:t>
+              <a:t>contiennent un texte</a:t>
             </a:r>
           </a:p>
           <a:p>
@@ -6044,8 +10538,58 @@
           </a:lstStyle>
           <a:p>
             <a:r>
+              <a:rPr lang="fr-FR" dirty="0" err="1"/>
+              <a:t>Feature</a:t>
+            </a:r>
+            <a:r>
               <a:rPr lang="fr-FR" dirty="0"/>
-              <a:t>Réclamation</a:t>
+              <a:t>(s)</a:t>
+            </a:r>
+          </a:p>
+        </p:txBody>
+      </p:sp>
+      <p:sp>
+        <p:nvSpPr>
+          <p:cNvPr id="4" name="ZoneTexte 3">
+            <a:extLst>
+              <a:ext uri="{FF2B5EF4-FFF2-40B4-BE49-F238E27FC236}">
+                <a16:creationId xmlns:a16="http://schemas.microsoft.com/office/drawing/2014/main" id="{0443F918-F80D-EC94-B2A5-A74BEF1CF7E4}"/>
+              </a:ext>
+            </a:extLst>
+          </p:cNvPr>
+          <p:cNvSpPr txBox="1"/>
+          <p:nvPr/>
+        </p:nvSpPr>
+        <p:spPr>
+          <a:xfrm>
+            <a:off x="3047114" y="1614803"/>
+            <a:ext cx="6097772" cy="646331"/>
+          </a:xfrm>
+          <a:prstGeom prst="rect">
+            <a:avLst/>
+          </a:prstGeom>
+          <a:noFill/>
+        </p:spPr>
+        <p:txBody>
+          <a:bodyPr wrap="square">
+            <a:spAutoFit/>
+          </a:bodyPr>
+          <a:lstStyle/>
+          <a:p>
+            <a:pPr algn="ctr"/>
+            <a:r>
+              <a:rPr lang="fr-FR" i="1" dirty="0">
+                <a:solidFill>
+                  <a:schemeClr val="accent2">
+                    <a:lumMod val="75000"/>
+                  </a:schemeClr>
+                </a:solidFill>
+              </a:rPr>
+              <a:t>Consumer Claim </a:t>
+            </a:r>
+            <a:r>
+              <a:rPr lang="fr-FR" sz="1800" dirty="0"/>
+              <a:t>est la principale variable de prédiction pour identifier l’étiquette à assigner</a:t>
             </a:r>
           </a:p>
         </p:txBody>
@@ -6151,7 +10695,7 @@
           <a:p>
             <a:r>
               <a:rPr lang="fr-FR" u="sng" dirty="0"/>
-              <a:t>Catégories Etiquettes</a:t>
+              <a:t>Cible (catégorie)</a:t>
             </a:r>
           </a:p>
         </p:txBody>
@@ -7085,7 +11629,7 @@
           <a:p>
             <a:r>
               <a:rPr lang="fr-FR" dirty="0"/>
-              <a:t>Catégories Etiquettes</a:t>
+              <a:t>Cible (catégorie)</a:t>
             </a:r>
           </a:p>
         </p:txBody>
@@ -7108,7 +11652,13 @@
   <p:cSld>
     <p:spTree>
       <p:nvGrpSpPr>
-        <p:cNvPr id="1" name=""/>
+        <p:cNvPr id="1" name="">
+          <a:extLst>
+            <a:ext uri="{FF2B5EF4-FFF2-40B4-BE49-F238E27FC236}">
+              <a16:creationId xmlns:a16="http://schemas.microsoft.com/office/drawing/2014/main" id="{94FBC2C2-4E49-C851-E469-6931F2B3B401}"/>
+            </a:ext>
+          </a:extLst>
+        </p:cNvPr>
         <p:cNvGrpSpPr/>
         <p:nvPr/>
       </p:nvGrpSpPr>
@@ -7125,7 +11675,7 @@
           <p:cNvPr id="2" name="Titre 1">
             <a:extLst>
               <a:ext uri="{FF2B5EF4-FFF2-40B4-BE49-F238E27FC236}">
-                <a16:creationId xmlns:a16="http://schemas.microsoft.com/office/drawing/2014/main" id="{E9BAAED3-07A6-D09F-B3B8-555F2C191CB4}"/>
+                <a16:creationId xmlns:a16="http://schemas.microsoft.com/office/drawing/2014/main" id="{EA71DDA4-0747-AD4E-47D4-FF5F68CCF3E2}"/>
               </a:ext>
             </a:extLst>
           </p:cNvPr>
@@ -7136,50 +11686,112 @@
             <p:ph type="title"/>
           </p:nvPr>
         </p:nvSpPr>
-        <p:spPr/>
-        <p:txBody>
-          <a:bodyPr/>
+        <p:spPr>
+          <a:xfrm>
+            <a:off x="838199" y="365125"/>
+            <a:ext cx="6966099" cy="3824103"/>
+          </a:xfrm>
+        </p:spPr>
+        <p:txBody>
+          <a:bodyPr>
+            <a:normAutofit/>
+          </a:bodyPr>
           <a:lstStyle/>
           <a:p>
             <a:r>
-              <a:rPr lang="fr-FR" dirty="0"/>
-              <a:t>Approche LLM</a:t>
-            </a:r>
-          </a:p>
-        </p:txBody>
-      </p:sp>
-      <p:sp>
-        <p:nvSpPr>
-          <p:cNvPr id="3" name="Espace réservé du contenu 2">
-            <a:extLst>
-              <a:ext uri="{FF2B5EF4-FFF2-40B4-BE49-F238E27FC236}">
-                <a16:creationId xmlns:a16="http://schemas.microsoft.com/office/drawing/2014/main" id="{53D1299C-F00E-14BE-F98C-293219B414E2}"/>
-              </a:ext>
-            </a:extLst>
-          </p:cNvPr>
-          <p:cNvSpPr>
-            <a:spLocks noGrp="1"/>
-          </p:cNvSpPr>
-          <p:nvPr>
-            <p:ph idx="1"/>
-          </p:nvPr>
-        </p:nvSpPr>
-        <p:spPr/>
-        <p:txBody>
-          <a:bodyPr/>
-          <a:lstStyle/>
-          <a:p>
-            <a:r>
-              <a:rPr lang="fr-FR" dirty="0"/>
-              <a:t>classification par prompt, few-shot et few-shot dynamique avec FAISS</a:t>
-            </a:r>
-          </a:p>
-        </p:txBody>
-      </p:sp>
+              <a:rPr lang="fr-FR" sz="6600" dirty="0">
+                <a:solidFill>
+                  <a:schemeClr val="accent1">
+                    <a:lumMod val="75000"/>
+                  </a:schemeClr>
+                </a:solidFill>
+                <a:latin typeface="Segoe UI Black" panose="020B0A02040204020203" pitchFamily="34" charset="0"/>
+                <a:ea typeface="Segoe UI Black" panose="020B0A02040204020203" pitchFamily="34" charset="0"/>
+              </a:rPr>
+              <a:t>Les métriques</a:t>
+            </a:r>
+            <a:br>
+              <a:rPr lang="fr-FR" sz="6600" dirty="0">
+                <a:solidFill>
+                  <a:schemeClr val="accent1">
+                    <a:lumMod val="75000"/>
+                  </a:schemeClr>
+                </a:solidFill>
+                <a:latin typeface="Segoe UI Black" panose="020B0A02040204020203" pitchFamily="34" charset="0"/>
+                <a:ea typeface="Segoe UI Black" panose="020B0A02040204020203" pitchFamily="34" charset="0"/>
+              </a:rPr>
+            </a:br>
+            <a:r>
+              <a:rPr lang="fr-FR" sz="4800" dirty="0">
+                <a:solidFill>
+                  <a:srgbClr val="00B0F0"/>
+                </a:solidFill>
+                <a:latin typeface="Segoe UI Black" panose="020B0A02040204020203" pitchFamily="34" charset="0"/>
+                <a:ea typeface="Segoe UI Black" panose="020B0A02040204020203" pitchFamily="34" charset="0"/>
+              </a:rPr>
+              <a:t>SCORES</a:t>
+            </a:r>
+            <a:endParaRPr lang="fr-FR" sz="6600" dirty="0">
+              <a:solidFill>
+                <a:srgbClr val="00B0F0"/>
+              </a:solidFill>
+              <a:latin typeface="Segoe UI Black" panose="020B0A02040204020203" pitchFamily="34" charset="0"/>
+              <a:ea typeface="Segoe UI Black" panose="020B0A02040204020203" pitchFamily="34" charset="0"/>
+            </a:endParaRPr>
+          </a:p>
+        </p:txBody>
+      </p:sp>
+      <p:pic>
+        <p:nvPicPr>
+          <p:cNvPr id="3080" name="Picture 8" descr="Succès métrique icône pour la toile, application, infographie, etc 45630880  Art vectoriel chez Vecteezy">
+            <a:extLst>
+              <a:ext uri="{FF2B5EF4-FFF2-40B4-BE49-F238E27FC236}">
+                <a16:creationId xmlns:a16="http://schemas.microsoft.com/office/drawing/2014/main" id="{79090343-9D4D-703D-F46C-00A3D261CD10}"/>
+              </a:ext>
+            </a:extLst>
+          </p:cNvPr>
+          <p:cNvPicPr>
+            <a:picLocks noChangeAspect="1" noChangeArrowheads="1"/>
+          </p:cNvPicPr>
+          <p:nvPr/>
+        </p:nvPicPr>
+        <p:blipFill>
+          <a:blip r:embed="rId2">
+            <a:extLst>
+              <a:ext uri="{28A0092B-C50C-407E-A947-70E740481C1C}">
+                <a14:useLocalDpi xmlns:a14="http://schemas.microsoft.com/office/drawing/2010/main" val="0"/>
+              </a:ext>
+            </a:extLst>
+          </a:blip>
+          <a:srcRect/>
+          <a:stretch>
+            <a:fillRect/>
+          </a:stretch>
+        </p:blipFill>
+        <p:spPr bwMode="auto">
+          <a:xfrm>
+            <a:off x="7387855" y="1956391"/>
+            <a:ext cx="4465674" cy="4465674"/>
+          </a:xfrm>
+          <a:prstGeom prst="rect">
+            <a:avLst/>
+          </a:prstGeom>
+          <a:noFill/>
+          <a:extLst>
+            <a:ext uri="{909E8E84-426E-40DD-AFC4-6F175D3DCCD1}">
+              <a14:hiddenFill xmlns:a14="http://schemas.microsoft.com/office/drawing/2010/main">
+                <a:solidFill>
+                  <a:srgbClr val="FFFFFF"/>
+                </a:solidFill>
+              </a14:hiddenFill>
+            </a:ext>
+          </a:extLst>
+        </p:spPr>
+      </p:pic>
     </p:spTree>
     <p:extLst>
       <p:ext uri="{BB962C8B-B14F-4D97-AF65-F5344CB8AC3E}">
-        <p14:creationId xmlns:p14="http://schemas.microsoft.com/office/powerpoint/2010/main" val="3926061439"/>
+        <p14:creationId xmlns:p14="http://schemas.microsoft.com/office/powerpoint/2010/main" val="1454009124"/>
       </p:ext>
     </p:extLst>
   </p:cSld>

--- a/Présentation.pptx
+++ b/Présentation.pptx
@@ -9435,6 +9435,36 @@
           </a:p>
         </p:txBody>
       </p:sp>
+      <p:pic>
+        <p:nvPicPr>
+          <p:cNvPr id="4" name="Image 3">
+            <a:extLst>
+              <a:ext uri="{FF2B5EF4-FFF2-40B4-BE49-F238E27FC236}">
+                <a16:creationId xmlns:a16="http://schemas.microsoft.com/office/drawing/2014/main" id="{7A8D9EB4-F010-558D-B6B7-E96AA51A3424}"/>
+              </a:ext>
+            </a:extLst>
+          </p:cNvPr>
+          <p:cNvPicPr>
+            <a:picLocks noChangeAspect="1"/>
+          </p:cNvPicPr>
+          <p:nvPr/>
+        </p:nvPicPr>
+        <p:blipFill>
+          <a:blip r:embed="rId2"/>
+          <a:stretch>
+            <a:fillRect/>
+          </a:stretch>
+        </p:blipFill>
+        <p:spPr>
+          <a:xfrm>
+            <a:off x="749787" y="2232839"/>
+            <a:ext cx="10944256" cy="1798848"/>
+          </a:xfrm>
+          <a:prstGeom prst="rect">
+            <a:avLst/>
+          </a:prstGeom>
+        </p:spPr>
+      </p:pic>
     </p:spTree>
     <p:extLst>
       <p:ext uri="{BB962C8B-B14F-4D97-AF65-F5344CB8AC3E}">

--- a/Présentation.pptx
+++ b/Présentation.pptx
@@ -5,41 +5,39 @@
     <p:sldMasterId id="2147483648" r:id="rId1"/>
   </p:sldMasterIdLst>
   <p:notesMasterIdLst>
-    <p:notesMasterId r:id="rId34"/>
+    <p:notesMasterId r:id="rId32"/>
   </p:notesMasterIdLst>
   <p:sldIdLst>
     <p:sldId id="259" r:id="rId2"/>
     <p:sldId id="260" r:id="rId3"/>
     <p:sldId id="258" r:id="rId4"/>
-    <p:sldId id="261" r:id="rId5"/>
-    <p:sldId id="263" r:id="rId6"/>
-    <p:sldId id="257" r:id="rId7"/>
-    <p:sldId id="262" r:id="rId8"/>
-    <p:sldId id="278" r:id="rId9"/>
-    <p:sldId id="269" r:id="rId10"/>
-    <p:sldId id="280" r:id="rId11"/>
-    <p:sldId id="267" r:id="rId12"/>
-    <p:sldId id="272" r:id="rId13"/>
-    <p:sldId id="271" r:id="rId14"/>
-    <p:sldId id="274" r:id="rId15"/>
-    <p:sldId id="266" r:id="rId16"/>
-    <p:sldId id="265" r:id="rId17"/>
-    <p:sldId id="289" r:id="rId18"/>
-    <p:sldId id="268" r:id="rId19"/>
-    <p:sldId id="273" r:id="rId20"/>
-    <p:sldId id="270" r:id="rId21"/>
-    <p:sldId id="275" r:id="rId22"/>
-    <p:sldId id="279" r:id="rId23"/>
-    <p:sldId id="277" r:id="rId24"/>
-    <p:sldId id="276" r:id="rId25"/>
-    <p:sldId id="283" r:id="rId26"/>
-    <p:sldId id="284" r:id="rId27"/>
-    <p:sldId id="281" r:id="rId28"/>
-    <p:sldId id="282" r:id="rId29"/>
-    <p:sldId id="285" r:id="rId30"/>
-    <p:sldId id="286" r:id="rId31"/>
-    <p:sldId id="287" r:id="rId32"/>
-    <p:sldId id="288" r:id="rId33"/>
+    <p:sldId id="263" r:id="rId5"/>
+    <p:sldId id="257" r:id="rId6"/>
+    <p:sldId id="262" r:id="rId7"/>
+    <p:sldId id="278" r:id="rId8"/>
+    <p:sldId id="269" r:id="rId9"/>
+    <p:sldId id="280" r:id="rId10"/>
+    <p:sldId id="267" r:id="rId11"/>
+    <p:sldId id="272" r:id="rId12"/>
+    <p:sldId id="271" r:id="rId13"/>
+    <p:sldId id="274" r:id="rId14"/>
+    <p:sldId id="265" r:id="rId15"/>
+    <p:sldId id="289" r:id="rId16"/>
+    <p:sldId id="268" r:id="rId17"/>
+    <p:sldId id="273" r:id="rId18"/>
+    <p:sldId id="275" r:id="rId19"/>
+    <p:sldId id="279" r:id="rId20"/>
+    <p:sldId id="277" r:id="rId21"/>
+    <p:sldId id="283" r:id="rId22"/>
+    <p:sldId id="284" r:id="rId23"/>
+    <p:sldId id="281" r:id="rId24"/>
+    <p:sldId id="282" r:id="rId25"/>
+    <p:sldId id="285" r:id="rId26"/>
+    <p:sldId id="286" r:id="rId27"/>
+    <p:sldId id="287" r:id="rId28"/>
+    <p:sldId id="288" r:id="rId29"/>
+    <p:sldId id="276" r:id="rId30"/>
+    <p:sldId id="290" r:id="rId31"/>
   </p:sldIdLst>
   <p:sldSz cx="12192000" cy="6858000"/>
   <p:notesSz cx="6858000" cy="9144000"/>
@@ -500,7 +498,13 @@
   <p:cSld>
     <p:spTree>
       <p:nvGrpSpPr>
-        <p:cNvPr id="1" name=""/>
+        <p:cNvPr id="1" name="">
+          <a:extLst>
+            <a:ext uri="{FF2B5EF4-FFF2-40B4-BE49-F238E27FC236}">
+              <a16:creationId xmlns:a16="http://schemas.microsoft.com/office/drawing/2014/main" id="{18FE96AE-B874-9034-D75B-3302F54B9CC4}"/>
+            </a:ext>
+          </a:extLst>
+        </p:cNvPr>
         <p:cNvGrpSpPr/>
         <p:nvPr/>
       </p:nvGrpSpPr>
@@ -514,7 +518,13 @@
       </p:grpSpPr>
       <p:sp>
         <p:nvSpPr>
-          <p:cNvPr id="2" name="Espace réservé de l'image des diapositives 1"/>
+          <p:cNvPr id="2" name="Espace réservé de l'image des diapositives 1">
+            <a:extLst>
+              <a:ext uri="{FF2B5EF4-FFF2-40B4-BE49-F238E27FC236}">
+                <a16:creationId xmlns:a16="http://schemas.microsoft.com/office/drawing/2014/main" id="{AE83F4D3-FA79-A676-4F0E-65E641B5B51E}"/>
+              </a:ext>
+            </a:extLst>
+          </p:cNvPr>
           <p:cNvSpPr>
             <a:spLocks noGrp="1" noRot="1" noChangeAspect="1"/>
           </p:cNvSpPr>
@@ -526,7 +536,13 @@
       </p:sp>
       <p:sp>
         <p:nvSpPr>
-          <p:cNvPr id="3" name="Espace réservé des notes 2"/>
+          <p:cNvPr id="3" name="Espace réservé des notes 2">
+            <a:extLst>
+              <a:ext uri="{FF2B5EF4-FFF2-40B4-BE49-F238E27FC236}">
+                <a16:creationId xmlns:a16="http://schemas.microsoft.com/office/drawing/2014/main" id="{8E08A445-B6C8-5EF0-1626-9DC3F137F453}"/>
+              </a:ext>
+            </a:extLst>
+          </p:cNvPr>
           <p:cNvSpPr>
             <a:spLocks noGrp="1"/>
           </p:cNvSpPr>
@@ -539,13 +555,99 @@
           <a:bodyPr/>
           <a:lstStyle/>
           <a:p>
+            <a:pPr marL="0" marR="0" lvl="0" indent="0" algn="l" defTabSz="914400" rtl="0" eaLnBrk="1" fontAlgn="auto" latinLnBrk="0" hangingPunct="1">
+              <a:lnSpc>
+                <a:spcPct val="100000"/>
+              </a:lnSpc>
+              <a:spcBef>
+                <a:spcPts val="0"/>
+              </a:spcBef>
+              <a:spcAft>
+                <a:spcPts val="0"/>
+              </a:spcAft>
+              <a:buClrTx/>
+              <a:buSzTx/>
+              <a:buFontTx/>
+              <a:buNone/>
+              <a:tabLst/>
+              <a:defRPr/>
+            </a:pPr>
+            <a:r>
+              <a:rPr lang="fr-FR" dirty="0"/>
+              <a:t>Exception de « </a:t>
+            </a:r>
+            <a:r>
+              <a:rPr lang="fr-FR" sz="1200" kern="1200" dirty="0">
+                <a:solidFill>
+                  <a:schemeClr val="tx1"/>
+                </a:solidFill>
+                <a:effectLst/>
+                <a:latin typeface="+mn-lt"/>
+                <a:ea typeface="+mn-ea"/>
+                <a:cs typeface="+mn-cs"/>
+              </a:rPr>
+              <a:t>Prêt à la consommation » </a:t>
+            </a:r>
+            <a:r>
+              <a:rPr lang="fr-FR" dirty="0"/>
+              <a:t>dont le sens métier doit être définit par rapport à « </a:t>
+            </a:r>
+            <a:r>
+              <a:rPr lang="fr-FR" sz="1200" kern="1200" dirty="0">
+                <a:solidFill>
+                  <a:schemeClr val="tx1"/>
+                </a:solidFill>
+                <a:effectLst/>
+                <a:latin typeface="+mn-lt"/>
+                <a:ea typeface="+mn-ea"/>
+                <a:cs typeface="+mn-cs"/>
+              </a:rPr>
+              <a:t>prêt sur salaire, prêt sur gage ou prêt personne »</a:t>
+            </a:r>
+          </a:p>
+          <a:p>
+            <a:pPr marL="0" marR="0" lvl="0" indent="0" algn="l" defTabSz="914400" rtl="0" eaLnBrk="1" fontAlgn="auto" latinLnBrk="0" hangingPunct="1">
+              <a:lnSpc>
+                <a:spcPct val="100000"/>
+              </a:lnSpc>
+              <a:spcBef>
+                <a:spcPts val="0"/>
+              </a:spcBef>
+              <a:spcAft>
+                <a:spcPts val="0"/>
+              </a:spcAft>
+              <a:buClrTx/>
+              <a:buSzTx/>
+              <a:buFontTx/>
+              <a:buNone/>
+              <a:tabLst/>
+              <a:defRPr/>
+            </a:pPr>
+            <a:r>
+              <a:rPr lang="fr-FR" sz="1200" kern="1200" dirty="0">
+                <a:solidFill>
+                  <a:schemeClr val="tx1"/>
+                </a:solidFill>
+                <a:effectLst/>
+                <a:latin typeface="+mn-lt"/>
+                <a:ea typeface="+mn-ea"/>
+                <a:cs typeface="+mn-cs"/>
+              </a:rPr>
+              <a:t>Les autres variables tel que la société, l’adresse, l’état du dossier ou la méthode de transmission ne donnent pas assez d’informations à elles seules pour prédire une catégorie</a:t>
+            </a:r>
             <a:endParaRPr lang="fr-FR" dirty="0"/>
           </a:p>
         </p:txBody>
       </p:sp>
       <p:sp>
         <p:nvSpPr>
-          <p:cNvPr id="4" name="Espace réservé du numéro de diapositive 3"/>
+          <p:cNvPr id="4" name="Espace réservé du numéro de diapositive 3">
+            <a:extLst>
+              <a:ext uri="{FF2B5EF4-FFF2-40B4-BE49-F238E27FC236}">
+                <a16:creationId xmlns:a16="http://schemas.microsoft.com/office/drawing/2014/main" id="{44B5003E-E9A2-CD10-2CF9-A29F15581906}"/>
+              </a:ext>
+            </a:extLst>
+          </p:cNvPr>
           <p:cNvSpPr>
             <a:spLocks noGrp="1"/>
           </p:cNvSpPr>
@@ -569,7 +671,7 @@
     </p:spTree>
     <p:extLst>
       <p:ext uri="{BB962C8B-B14F-4D97-AF65-F5344CB8AC3E}">
-        <p14:creationId xmlns:p14="http://schemas.microsoft.com/office/powerpoint/2010/main" val="254671439"/>
+        <p14:creationId xmlns:p14="http://schemas.microsoft.com/office/powerpoint/2010/main" val="2717823023"/>
       </p:ext>
     </p:extLst>
   </p:cSld>
@@ -623,398 +725,23 @@
           <a:bodyPr/>
           <a:lstStyle/>
           <a:p>
-            <a:pPr marL="0" marR="0" lvl="0" indent="0" algn="l" defTabSz="914400" rtl="0" eaLnBrk="1" fontAlgn="auto" latinLnBrk="0" hangingPunct="1">
-              <a:lnSpc>
-                <a:spcPct val="100000"/>
-              </a:lnSpc>
-              <a:spcBef>
-                <a:spcPts val="0"/>
-              </a:spcBef>
-              <a:spcAft>
-                <a:spcPts val="0"/>
-              </a:spcAft>
-              <a:buClrTx/>
-              <a:buSzTx/>
-              <a:buFontTx/>
-              <a:buNone/>
-              <a:tabLst/>
-              <a:defRPr/>
-            </a:pPr>
-            <a:r>
-              <a:rPr lang="fr-FR" b="1" dirty="0" err="1"/>
-              <a:t>Accuracy_score</a:t>
-            </a:r>
-            <a:r>
-              <a:rPr lang="fr-FR" b="1" dirty="0"/>
-              <a:t>: </a:t>
-            </a:r>
-            <a:r>
-              <a:rPr lang="fr-FR" sz="1200" b="0" kern="1200" dirty="0">
-                <a:solidFill>
-                  <a:schemeClr val="tx1"/>
-                </a:solidFill>
-                <a:effectLst/>
-                <a:latin typeface="+mn-lt"/>
-                <a:ea typeface="+mn-ea"/>
-                <a:cs typeface="+mn-cs"/>
-              </a:rPr>
-              <a:t>Intéressante comme indicateur général, mais ne doit pas être la métrique principale avec un </a:t>
-            </a:r>
-            <a:r>
-              <a:rPr lang="fr-FR" sz="1200" b="0" kern="1200" dirty="0" err="1">
-                <a:solidFill>
-                  <a:schemeClr val="tx1"/>
-                </a:solidFill>
-                <a:effectLst/>
-                <a:latin typeface="+mn-lt"/>
-                <a:ea typeface="+mn-ea"/>
-                <a:cs typeface="+mn-cs"/>
-              </a:rPr>
-              <a:t>dataset</a:t>
-            </a:r>
-            <a:r>
-              <a:rPr lang="fr-FR" sz="1200" b="0" kern="1200" dirty="0">
-                <a:solidFill>
-                  <a:schemeClr val="tx1"/>
-                </a:solidFill>
-                <a:effectLst/>
-                <a:latin typeface="+mn-lt"/>
-                <a:ea typeface="+mn-ea"/>
-                <a:cs typeface="+mn-cs"/>
-              </a:rPr>
-              <a:t> fortement déséquilibré</a:t>
-            </a:r>
-          </a:p>
-          <a:p>
-            <a:pPr marL="0" marR="0" lvl="0" indent="0" algn="l" defTabSz="914400" rtl="0" eaLnBrk="1" fontAlgn="auto" latinLnBrk="0" hangingPunct="1">
-              <a:lnSpc>
-                <a:spcPct val="100000"/>
-              </a:lnSpc>
-              <a:spcBef>
-                <a:spcPts val="0"/>
-              </a:spcBef>
-              <a:spcAft>
-                <a:spcPts val="0"/>
-              </a:spcAft>
-              <a:buClrTx/>
-              <a:buSzTx/>
-              <a:buFontTx/>
-              <a:buNone/>
-              <a:tabLst/>
-              <a:defRPr/>
-            </a:pPr>
-            <a:r>
-              <a:rPr lang="fr-FR" sz="1200" b="1" kern="1200" dirty="0" err="1">
-                <a:solidFill>
-                  <a:schemeClr val="tx1"/>
-                </a:solidFill>
-                <a:effectLst/>
-                <a:latin typeface="+mn-lt"/>
-                <a:ea typeface="+mn-ea"/>
-                <a:cs typeface="+mn-cs"/>
-              </a:rPr>
-              <a:t>Precision</a:t>
-            </a:r>
-            <a:r>
-              <a:rPr lang="fr-FR" sz="1200" b="1" kern="1200" dirty="0">
-                <a:solidFill>
-                  <a:schemeClr val="tx1"/>
-                </a:solidFill>
-                <a:effectLst/>
-                <a:latin typeface="+mn-lt"/>
-                <a:ea typeface="+mn-ea"/>
-                <a:cs typeface="+mn-cs"/>
-              </a:rPr>
-              <a:t> macro: </a:t>
-            </a:r>
-            <a:r>
-              <a:rPr lang="fr-FR" sz="1200" b="0" kern="1200" dirty="0">
-                <a:solidFill>
-                  <a:schemeClr val="tx1"/>
-                </a:solidFill>
-                <a:effectLst/>
-                <a:latin typeface="+mn-lt"/>
-                <a:ea typeface="+mn-ea"/>
-                <a:cs typeface="+mn-cs"/>
-              </a:rPr>
-              <a:t>Chaque catégorie possède ici le même poids.</a:t>
-            </a:r>
-          </a:p>
-          <a:p>
-            <a:r>
-              <a:rPr lang="fr-FR" sz="1200" b="1" kern="1200" dirty="0" err="1">
-                <a:solidFill>
-                  <a:schemeClr val="tx1"/>
-                </a:solidFill>
-                <a:effectLst/>
-                <a:latin typeface="+mn-lt"/>
-                <a:ea typeface="+mn-ea"/>
-                <a:cs typeface="+mn-cs"/>
-              </a:rPr>
-              <a:t>Recall</a:t>
-            </a:r>
-            <a:r>
-              <a:rPr lang="fr-FR" sz="1200" b="1" kern="1200" dirty="0">
-                <a:solidFill>
-                  <a:schemeClr val="tx1"/>
-                </a:solidFill>
-                <a:effectLst/>
-                <a:latin typeface="+mn-lt"/>
-                <a:ea typeface="+mn-ea"/>
-                <a:cs typeface="+mn-cs"/>
-              </a:rPr>
-              <a:t> macro:</a:t>
-            </a:r>
-            <a:endParaRPr lang="fr-FR" sz="1200" b="0" kern="1200" dirty="0">
-              <a:solidFill>
-                <a:schemeClr val="tx1"/>
-              </a:solidFill>
-              <a:effectLst/>
-              <a:latin typeface="+mn-lt"/>
-              <a:ea typeface="+mn-ea"/>
-              <a:cs typeface="+mn-cs"/>
-            </a:endParaRPr>
-          </a:p>
-          <a:p>
-            <a:r>
-              <a:rPr lang="fr-FR" sz="1200" b="0" kern="1200" dirty="0">
-                <a:solidFill>
-                  <a:schemeClr val="tx1"/>
-                </a:solidFill>
-                <a:effectLst/>
-                <a:latin typeface="+mn-lt"/>
-                <a:ea typeface="+mn-ea"/>
-                <a:cs typeface="+mn-cs"/>
-              </a:rPr>
-              <a:t>Le </a:t>
-            </a:r>
-            <a:r>
-              <a:rPr lang="fr-FR" sz="1200" b="0" kern="1200" dirty="0" err="1">
-                <a:solidFill>
-                  <a:schemeClr val="tx1"/>
-                </a:solidFill>
-                <a:effectLst/>
-                <a:latin typeface="+mn-lt"/>
-                <a:ea typeface="+mn-ea"/>
-                <a:cs typeface="+mn-cs"/>
-              </a:rPr>
-              <a:t>recall</a:t>
-            </a:r>
-            <a:r>
-              <a:rPr lang="fr-FR" sz="1200" b="0" kern="1200" dirty="0">
-                <a:solidFill>
-                  <a:schemeClr val="tx1"/>
-                </a:solidFill>
-                <a:effectLst/>
-                <a:latin typeface="+mn-lt"/>
-                <a:ea typeface="+mn-ea"/>
-                <a:cs typeface="+mn-cs"/>
-              </a:rPr>
-              <a:t> est particulièrement intéressant dans notre contexte :</a:t>
-            </a:r>
-          </a:p>
-          <a:p>
-            <a:r>
-              <a:rPr lang="fr-FR" sz="1200" b="0" kern="1200" dirty="0">
-                <a:solidFill>
-                  <a:schemeClr val="tx1"/>
-                </a:solidFill>
-                <a:effectLst/>
-                <a:latin typeface="+mn-lt"/>
-                <a:ea typeface="+mn-ea"/>
-                <a:cs typeface="+mn-cs"/>
-              </a:rPr>
-              <a:t>Parmi les réclamations réellement appartenant à une catégorie, combien sont correctement orientées vers cette catégorie ?</a:t>
-            </a:r>
-          </a:p>
-          <a:p>
-            <a:r>
-              <a:rPr lang="fr-FR" sz="1200" b="1" kern="1200" dirty="0">
-                <a:solidFill>
-                  <a:schemeClr val="tx1"/>
-                </a:solidFill>
-                <a:effectLst/>
-                <a:latin typeface="+mn-lt"/>
-                <a:ea typeface="+mn-ea"/>
-                <a:cs typeface="+mn-cs"/>
-              </a:rPr>
-              <a:t>F1 macro:</a:t>
-            </a:r>
-            <a:endParaRPr lang="fr-FR" sz="1200" b="0" kern="1200" dirty="0">
-              <a:solidFill>
-                <a:schemeClr val="tx1"/>
-              </a:solidFill>
-              <a:effectLst/>
-              <a:latin typeface="+mn-lt"/>
-              <a:ea typeface="+mn-ea"/>
-              <a:cs typeface="+mn-cs"/>
-            </a:endParaRPr>
-          </a:p>
-          <a:p>
-            <a:r>
-              <a:rPr lang="fr-FR" sz="1200" b="0" kern="1200" dirty="0">
-                <a:solidFill>
-                  <a:schemeClr val="tx1"/>
-                </a:solidFill>
-                <a:effectLst/>
-                <a:latin typeface="+mn-lt"/>
-                <a:ea typeface="+mn-ea"/>
-                <a:cs typeface="+mn-cs"/>
-              </a:rPr>
-              <a:t>F1 macro comme métrique principale.</a:t>
-            </a:r>
-          </a:p>
-          <a:p>
-            <a:r>
-              <a:rPr lang="fr-FR" sz="1200" b="0" kern="1200" dirty="0">
-                <a:solidFill>
-                  <a:schemeClr val="tx1"/>
-                </a:solidFill>
-                <a:effectLst/>
-                <a:latin typeface="+mn-lt"/>
-                <a:ea typeface="+mn-ea"/>
-                <a:cs typeface="+mn-cs"/>
-              </a:rPr>
-              <a:t>Pourquoi ?</a:t>
-            </a:r>
-          </a:p>
-          <a:p>
-            <a:r>
-              <a:rPr lang="fr-FR" sz="1200" b="0" kern="1200" dirty="0">
-                <a:solidFill>
-                  <a:schemeClr val="tx1"/>
-                </a:solidFill>
-                <a:effectLst/>
-                <a:latin typeface="+mn-lt"/>
-                <a:ea typeface="+mn-ea"/>
-                <a:cs typeface="+mn-cs"/>
-              </a:rPr>
-              <a:t>Parce qu'elle donne autant d'importance à </a:t>
-            </a:r>
-            <a:r>
-              <a:rPr lang="fr-FR" sz="1200" b="0" kern="1200" dirty="0" err="1">
-                <a:solidFill>
-                  <a:schemeClr val="tx1"/>
-                </a:solidFill>
-                <a:effectLst/>
-                <a:latin typeface="+mn-lt"/>
-                <a:ea typeface="+mn-ea"/>
-                <a:cs typeface="+mn-cs"/>
-              </a:rPr>
-              <a:t>Other</a:t>
-            </a:r>
-            <a:r>
-              <a:rPr lang="fr-FR" sz="1200" b="0" kern="1200" dirty="0">
-                <a:solidFill>
-                  <a:schemeClr val="tx1"/>
-                </a:solidFill>
-                <a:effectLst/>
-                <a:latin typeface="+mn-lt"/>
-                <a:ea typeface="+mn-ea"/>
-                <a:cs typeface="+mn-cs"/>
-              </a:rPr>
-              <a:t> </a:t>
-            </a:r>
-            <a:r>
-              <a:rPr lang="fr-FR" sz="1200" b="0" kern="1200" dirty="0" err="1">
-                <a:solidFill>
-                  <a:schemeClr val="tx1"/>
-                </a:solidFill>
-                <a:effectLst/>
-                <a:latin typeface="+mn-lt"/>
-                <a:ea typeface="+mn-ea"/>
-                <a:cs typeface="+mn-cs"/>
-              </a:rPr>
-              <a:t>financial</a:t>
-            </a:r>
-            <a:r>
-              <a:rPr lang="fr-FR" sz="1200" b="0" kern="1200" dirty="0">
-                <a:solidFill>
-                  <a:schemeClr val="tx1"/>
-                </a:solidFill>
-                <a:effectLst/>
-                <a:latin typeface="+mn-lt"/>
-                <a:ea typeface="+mn-ea"/>
-                <a:cs typeface="+mn-cs"/>
-              </a:rPr>
-              <a:t> service qu'à </a:t>
-            </a:r>
-            <a:r>
-              <a:rPr lang="fr-FR" sz="1200" b="0" kern="1200" dirty="0" err="1">
-                <a:solidFill>
-                  <a:schemeClr val="tx1"/>
-                </a:solidFill>
-                <a:effectLst/>
-                <a:latin typeface="+mn-lt"/>
-                <a:ea typeface="+mn-ea"/>
-                <a:cs typeface="+mn-cs"/>
-              </a:rPr>
-              <a:t>Credit</a:t>
-            </a:r>
-            <a:r>
-              <a:rPr lang="fr-FR" sz="1200" b="0" kern="1200" dirty="0">
-                <a:solidFill>
-                  <a:schemeClr val="tx1"/>
-                </a:solidFill>
-                <a:effectLst/>
-                <a:latin typeface="+mn-lt"/>
-                <a:ea typeface="+mn-ea"/>
-                <a:cs typeface="+mn-cs"/>
-              </a:rPr>
-              <a:t> </a:t>
-            </a:r>
-            <a:r>
-              <a:rPr lang="fr-FR" sz="1200" b="0" kern="1200" dirty="0" err="1">
-                <a:solidFill>
-                  <a:schemeClr val="tx1"/>
-                </a:solidFill>
-                <a:effectLst/>
-                <a:latin typeface="+mn-lt"/>
-                <a:ea typeface="+mn-ea"/>
-                <a:cs typeface="+mn-cs"/>
-              </a:rPr>
-              <a:t>reporting</a:t>
-            </a:r>
-            <a:r>
-              <a:rPr lang="fr-FR" sz="1200" b="0" kern="1200" dirty="0">
-                <a:solidFill>
-                  <a:schemeClr val="tx1"/>
-                </a:solidFill>
-                <a:effectLst/>
-                <a:latin typeface="+mn-lt"/>
-                <a:ea typeface="+mn-ea"/>
-                <a:cs typeface="+mn-cs"/>
-              </a:rPr>
-              <a:t>. C'est cohérent avec la problématique métier : une catégorie minoritaire ne doit pas être complètement ignorée simplement parce qu'elle est peu représentée.</a:t>
-            </a:r>
-          </a:p>
-          <a:p>
-            <a:pPr marL="0" marR="0" lvl="0" indent="0" algn="l" defTabSz="914400" rtl="0" eaLnBrk="1" fontAlgn="auto" latinLnBrk="0" hangingPunct="1">
-              <a:lnSpc>
-                <a:spcPct val="100000"/>
-              </a:lnSpc>
-              <a:spcBef>
-                <a:spcPts val="0"/>
-              </a:spcBef>
-              <a:spcAft>
-                <a:spcPts val="0"/>
-              </a:spcAft>
-              <a:buClrTx/>
-              <a:buSzTx/>
-              <a:buFontTx/>
-              <a:buNone/>
-              <a:tabLst/>
-              <a:defRPr/>
-            </a:pPr>
-            <a:endParaRPr lang="fr-FR" sz="1200" b="0" kern="1200" dirty="0">
-              <a:solidFill>
-                <a:schemeClr val="tx1"/>
-              </a:solidFill>
-              <a:effectLst/>
-              <a:latin typeface="+mn-lt"/>
-              <a:ea typeface="+mn-ea"/>
-              <a:cs typeface="+mn-cs"/>
-            </a:endParaRPr>
+            <a:endParaRPr lang="fr-FR" dirty="0"/>
+          </a:p>
+          <a:p>
+            <a:r>
+              <a:rPr lang="fr-FR" dirty="0" err="1"/>
+              <a:t>weighted</a:t>
+            </a:r>
+            <a:r>
+              <a:rPr lang="fr-FR" dirty="0"/>
+              <a:t> → le modèle est très performant sur les grosses catégories</a:t>
+            </a:r>
+          </a:p>
+          <a:p>
+            <a:r>
+              <a:rPr lang="fr-FR" dirty="0"/>
+              <a:t>macro → certaines petites catégories sont beaucoup moins bien classifiées</a:t>
+            </a:r>
           </a:p>
         </p:txBody>
       </p:sp>
@@ -1035,7 +762,7 @@
           <a:p>
             <a:fld id="{4734364E-57BD-44F2-A53B-320C3BD2F0CA}" type="slidenum">
               <a:rPr lang="fr-FR" smtClean="0"/>
-              <a:t>20</a:t>
+              <a:t>18</a:t>
             </a:fld>
             <a:endParaRPr lang="fr-FR"/>
           </a:p>
@@ -1044,7 +771,7 @@
     </p:spTree>
     <p:extLst>
       <p:ext uri="{BB962C8B-B14F-4D97-AF65-F5344CB8AC3E}">
-        <p14:creationId xmlns:p14="http://schemas.microsoft.com/office/powerpoint/2010/main" val="3861147310"/>
+        <p14:creationId xmlns:p14="http://schemas.microsoft.com/office/powerpoint/2010/main" val="3222274215"/>
       </p:ext>
     </p:extLst>
   </p:cSld>
@@ -1098,59 +825,317 @@
           <a:bodyPr/>
           <a:lstStyle/>
           <a:p>
-            <a:pPr marL="0" marR="0" lvl="0" indent="0" algn="l" defTabSz="914400" rtl="0" eaLnBrk="1" fontAlgn="auto" latinLnBrk="0" hangingPunct="1">
-              <a:lnSpc>
-                <a:spcPct val="100000"/>
-              </a:lnSpc>
-              <a:spcBef>
-                <a:spcPts val="0"/>
-              </a:spcBef>
-              <a:spcAft>
-                <a:spcPts val="0"/>
-              </a:spcAft>
-              <a:buClrTx/>
-              <a:buSzTx/>
-              <a:buFontTx/>
-              <a:buNone/>
-              <a:tabLst/>
-              <a:defRPr/>
-            </a:pPr>
-            <a:r>
-              <a:rPr lang="fr-FR" sz="1200" b="0" kern="1200" dirty="0">
-                <a:solidFill>
-                  <a:schemeClr val="tx1"/>
-                </a:solidFill>
-                <a:effectLst/>
+            <a:r>
+              <a:rPr lang="fr-FR" b="1" dirty="0"/>
+              <a:t>Première conclusion : le modèle fonctionne bien sur les catégories principales</a:t>
+            </a:r>
+          </a:p>
+          <a:p>
+            <a:r>
+              <a:rPr lang="fr-FR" dirty="0"/>
+              <a:t>Les résultats sont globalement bons pour les catégories fortement représentées :</a:t>
+            </a:r>
+          </a:p>
+          <a:p>
+            <a:endParaRPr lang="fr-FR" dirty="0"/>
+          </a:p>
+          <a:p>
+            <a:endParaRPr lang="fr-FR" dirty="0"/>
+          </a:p>
+          <a:p>
+            <a:r>
+              <a:rPr lang="fr-FR" dirty="0"/>
+              <a:t>Les trois principales zones de difficulté sont :</a:t>
+            </a:r>
+          </a:p>
+          <a:p>
+            <a:r>
+              <a:rPr lang="fr-FR" sz="1200" b="1" kern="1200" dirty="0" err="1">
+                <a:solidFill>
+                  <a:schemeClr val="tx1"/>
+                </a:solidFill>
                 <a:latin typeface="+mn-lt"/>
                 <a:ea typeface="+mn-ea"/>
                 <a:cs typeface="+mn-cs"/>
               </a:rPr>
-              <a:t>L'</a:t>
-            </a:r>
-            <a:r>
-              <a:rPr lang="fr-FR" sz="1200" b="0" kern="1200" dirty="0" err="1">
-                <a:solidFill>
-                  <a:schemeClr val="tx1"/>
-                </a:solidFill>
-                <a:effectLst/>
+              <a:t>Credit</a:t>
+            </a:r>
+            <a:r>
+              <a:rPr lang="fr-FR" sz="1200" b="1" kern="1200" dirty="0">
+                <a:solidFill>
+                  <a:schemeClr val="tx1"/>
+                </a:solidFill>
                 <a:latin typeface="+mn-lt"/>
                 <a:ea typeface="+mn-ea"/>
                 <a:cs typeface="+mn-cs"/>
               </a:rPr>
-              <a:t>accuracy</a:t>
-            </a:r>
-            <a:r>
-              <a:rPr lang="fr-FR" sz="1200" b="0" kern="1200" dirty="0">
-                <a:solidFill>
-                  <a:schemeClr val="tx1"/>
-                </a:solidFill>
-                <a:effectLst/>
+              <a:t> </a:t>
+            </a:r>
+            <a:r>
+              <a:rPr lang="fr-FR" sz="1200" b="1" kern="1200" dirty="0" err="1">
+                <a:solidFill>
+                  <a:schemeClr val="tx1"/>
+                </a:solidFill>
                 <a:latin typeface="+mn-lt"/>
                 <a:ea typeface="+mn-ea"/>
                 <a:cs typeface="+mn-cs"/>
               </a:rPr>
-              <a:t> globale de 86 % ne permet pas de savoir si le modèle sait correctement traiter les petites catégories.</a:t>
-            </a:r>
+              <a:t>reporting</a:t>
+            </a:r>
+            <a:r>
+              <a:rPr lang="fr-FR" b="1" dirty="0"/>
+              <a:t> ↔ </a:t>
+            </a:r>
+            <a:r>
+              <a:rPr lang="fr-FR" sz="1200" b="1" kern="1200" dirty="0" err="1">
+                <a:solidFill>
+                  <a:schemeClr val="tx1"/>
+                </a:solidFill>
+                <a:latin typeface="+mn-lt"/>
+                <a:ea typeface="+mn-ea"/>
+                <a:cs typeface="+mn-cs"/>
+              </a:rPr>
+              <a:t>Debt</a:t>
+            </a:r>
+            <a:r>
+              <a:rPr lang="fr-FR" sz="1200" b="1" kern="1200" dirty="0">
+                <a:solidFill>
+                  <a:schemeClr val="tx1"/>
+                </a:solidFill>
+                <a:latin typeface="+mn-lt"/>
+                <a:ea typeface="+mn-ea"/>
+                <a:cs typeface="+mn-cs"/>
+              </a:rPr>
+              <a:t> collection</a:t>
+            </a:r>
+            <a:r>
+              <a:rPr lang="fr-FR" b="1" dirty="0"/>
+              <a:t> </a:t>
+            </a:r>
+          </a:p>
+          <a:p>
+            <a:r>
+              <a:rPr lang="fr-FR" sz="1200" b="1" kern="1200" dirty="0" err="1">
+                <a:solidFill>
+                  <a:schemeClr val="tx1"/>
+                </a:solidFill>
+                <a:latin typeface="+mn-lt"/>
+                <a:ea typeface="+mn-ea"/>
+                <a:cs typeface="+mn-cs"/>
+              </a:rPr>
+              <a:t>Vehicle</a:t>
+            </a:r>
+            <a:r>
+              <a:rPr lang="fr-FR" sz="1200" b="1" kern="1200" dirty="0">
+                <a:solidFill>
+                  <a:schemeClr val="tx1"/>
+                </a:solidFill>
+                <a:latin typeface="+mn-lt"/>
+                <a:ea typeface="+mn-ea"/>
+                <a:cs typeface="+mn-cs"/>
+              </a:rPr>
+              <a:t> </a:t>
+            </a:r>
+            <a:r>
+              <a:rPr lang="fr-FR" sz="1200" b="1" kern="1200" dirty="0" err="1">
+                <a:solidFill>
+                  <a:schemeClr val="tx1"/>
+                </a:solidFill>
+                <a:latin typeface="+mn-lt"/>
+                <a:ea typeface="+mn-ea"/>
+                <a:cs typeface="+mn-cs"/>
+              </a:rPr>
+              <a:t>loan</a:t>
+            </a:r>
+            <a:r>
+              <a:rPr lang="fr-FR" b="1" dirty="0"/>
+              <a:t> ↔ </a:t>
+            </a:r>
+            <a:r>
+              <a:rPr lang="fr-FR" sz="1200" b="1" kern="1200" dirty="0" err="1">
+                <a:solidFill>
+                  <a:schemeClr val="tx1"/>
+                </a:solidFill>
+                <a:latin typeface="+mn-lt"/>
+                <a:ea typeface="+mn-ea"/>
+                <a:cs typeface="+mn-cs"/>
+              </a:rPr>
+              <a:t>Payday</a:t>
+            </a:r>
+            <a:r>
+              <a:rPr lang="fr-FR" sz="1200" b="1" kern="1200" dirty="0">
+                <a:solidFill>
+                  <a:schemeClr val="tx1"/>
+                </a:solidFill>
+                <a:latin typeface="+mn-lt"/>
+                <a:ea typeface="+mn-ea"/>
+                <a:cs typeface="+mn-cs"/>
+              </a:rPr>
+              <a:t>/</a:t>
+            </a:r>
+            <a:r>
+              <a:rPr lang="fr-FR" sz="1200" b="1" kern="1200" dirty="0" err="1">
+                <a:solidFill>
+                  <a:schemeClr val="tx1"/>
+                </a:solidFill>
+                <a:latin typeface="+mn-lt"/>
+                <a:ea typeface="+mn-ea"/>
+                <a:cs typeface="+mn-cs"/>
+              </a:rPr>
+              <a:t>personal</a:t>
+            </a:r>
+            <a:r>
+              <a:rPr lang="fr-FR" sz="1200" b="1" kern="1200" dirty="0">
+                <a:solidFill>
+                  <a:schemeClr val="tx1"/>
+                </a:solidFill>
+                <a:latin typeface="+mn-lt"/>
+                <a:ea typeface="+mn-ea"/>
+                <a:cs typeface="+mn-cs"/>
+              </a:rPr>
+              <a:t> </a:t>
+            </a:r>
+            <a:r>
+              <a:rPr lang="fr-FR" sz="1200" b="1" kern="1200" dirty="0" err="1">
+                <a:solidFill>
+                  <a:schemeClr val="tx1"/>
+                </a:solidFill>
+                <a:latin typeface="+mn-lt"/>
+                <a:ea typeface="+mn-ea"/>
+                <a:cs typeface="+mn-cs"/>
+              </a:rPr>
+              <a:t>loan</a:t>
+            </a:r>
+            <a:r>
+              <a:rPr lang="fr-FR" b="1" dirty="0"/>
+              <a:t> </a:t>
+            </a:r>
+          </a:p>
+          <a:p>
+            <a:r>
+              <a:rPr lang="fr-FR" sz="1200" b="1" kern="1200" dirty="0" err="1">
+                <a:solidFill>
+                  <a:schemeClr val="tx1"/>
+                </a:solidFill>
+                <a:latin typeface="+mn-lt"/>
+                <a:ea typeface="+mn-ea"/>
+                <a:cs typeface="+mn-cs"/>
+              </a:rPr>
+              <a:t>Credit</a:t>
+            </a:r>
+            <a:r>
+              <a:rPr lang="fr-FR" sz="1200" b="1" kern="1200" dirty="0">
+                <a:solidFill>
+                  <a:schemeClr val="tx1"/>
+                </a:solidFill>
+                <a:latin typeface="+mn-lt"/>
+                <a:ea typeface="+mn-ea"/>
+                <a:cs typeface="+mn-cs"/>
+              </a:rPr>
+              <a:t> </a:t>
+            </a:r>
+            <a:r>
+              <a:rPr lang="fr-FR" sz="1200" b="1" kern="1200" dirty="0" err="1">
+                <a:solidFill>
+                  <a:schemeClr val="tx1"/>
+                </a:solidFill>
+                <a:latin typeface="+mn-lt"/>
+                <a:ea typeface="+mn-ea"/>
+                <a:cs typeface="+mn-cs"/>
+              </a:rPr>
+              <a:t>card</a:t>
+            </a:r>
+            <a:r>
+              <a:rPr lang="fr-FR" b="1" dirty="0"/>
+              <a:t> ↔ </a:t>
+            </a:r>
+            <a:r>
+              <a:rPr lang="fr-FR" sz="1200" b="1" kern="1200" dirty="0">
+                <a:solidFill>
+                  <a:schemeClr val="tx1"/>
+                </a:solidFill>
+                <a:latin typeface="+mn-lt"/>
+                <a:ea typeface="+mn-ea"/>
+                <a:cs typeface="+mn-cs"/>
+              </a:rPr>
+              <a:t>Checking/</a:t>
+            </a:r>
+            <a:r>
+              <a:rPr lang="fr-FR" sz="1200" b="1" kern="1200" dirty="0" err="1">
+                <a:solidFill>
+                  <a:schemeClr val="tx1"/>
+                </a:solidFill>
+                <a:latin typeface="+mn-lt"/>
+                <a:ea typeface="+mn-ea"/>
+                <a:cs typeface="+mn-cs"/>
+              </a:rPr>
+              <a:t>savings</a:t>
+            </a:r>
+            <a:r>
+              <a:rPr lang="fr-FR" b="1" dirty="0"/>
+              <a:t> </a:t>
+            </a:r>
+          </a:p>
+          <a:p>
+            <a:r>
+              <a:rPr lang="fr-FR" dirty="0"/>
+              <a:t>Et </a:t>
+            </a:r>
+            <a:r>
+              <a:rPr lang="fr-FR" sz="1200" b="1" kern="1200" dirty="0" err="1">
+                <a:solidFill>
+                  <a:schemeClr val="tx1"/>
+                </a:solidFill>
+                <a:latin typeface="+mn-lt"/>
+                <a:ea typeface="+mn-ea"/>
+                <a:cs typeface="+mn-cs"/>
+              </a:rPr>
+              <a:t>Other</a:t>
+            </a:r>
+            <a:r>
+              <a:rPr lang="fr-FR" sz="1200" b="1" kern="1200" dirty="0">
+                <a:solidFill>
+                  <a:schemeClr val="tx1"/>
+                </a:solidFill>
+                <a:latin typeface="+mn-lt"/>
+                <a:ea typeface="+mn-ea"/>
+                <a:cs typeface="+mn-cs"/>
+              </a:rPr>
+              <a:t> </a:t>
+            </a:r>
+            <a:r>
+              <a:rPr lang="fr-FR" sz="1200" b="1" kern="1200" dirty="0" err="1">
+                <a:solidFill>
+                  <a:schemeClr val="tx1"/>
+                </a:solidFill>
+                <a:latin typeface="+mn-lt"/>
+                <a:ea typeface="+mn-ea"/>
+                <a:cs typeface="+mn-cs"/>
+              </a:rPr>
+              <a:t>financial</a:t>
+            </a:r>
+            <a:r>
+              <a:rPr lang="fr-FR" sz="1200" b="1" kern="1200" dirty="0">
+                <a:solidFill>
+                  <a:schemeClr val="tx1"/>
+                </a:solidFill>
+                <a:latin typeface="+mn-lt"/>
+                <a:ea typeface="+mn-ea"/>
+                <a:cs typeface="+mn-cs"/>
+              </a:rPr>
+              <a:t> service</a:t>
+            </a:r>
+            <a:r>
+              <a:rPr lang="fr-FR" b="1" dirty="0"/>
+              <a:t> </a:t>
+            </a:r>
+            <a:r>
+              <a:rPr lang="fr-FR" dirty="0"/>
+              <a:t>constitue un problème particulier à traiter séparément.</a:t>
+            </a:r>
+          </a:p>
+          <a:p>
+            <a:endParaRPr lang="fr-FR" dirty="0"/>
           </a:p>
           <a:p>
             <a:endParaRPr lang="fr-FR" dirty="0"/>
@@ -1174,7 +1159,7 @@
           <a:p>
             <a:fld id="{4734364E-57BD-44F2-A53B-320C3BD2F0CA}" type="slidenum">
               <a:rPr lang="fr-FR" smtClean="0"/>
-              <a:t>22</a:t>
+              <a:t>19</a:t>
             </a:fld>
             <a:endParaRPr lang="fr-FR"/>
           </a:p>
@@ -1282,7 +1267,7 @@
           <a:p>
             <a:fld id="{4734364E-57BD-44F2-A53B-320C3BD2F0CA}" type="slidenum">
               <a:rPr lang="fr-FR" smtClean="0"/>
-              <a:t>26</a:t>
+              <a:t>22</a:t>
             </a:fld>
             <a:endParaRPr lang="fr-FR"/>
           </a:p>
@@ -1366,7 +1351,7 @@
           <a:p>
             <a:fld id="{4734364E-57BD-44F2-A53B-320C3BD2F0CA}" type="slidenum">
               <a:rPr lang="fr-FR" smtClean="0"/>
-              <a:t>28</a:t>
+              <a:t>24</a:t>
             </a:fld>
             <a:endParaRPr lang="fr-FR"/>
           </a:p>
@@ -1453,7 +1438,7 @@
           <a:p>
             <a:fld id="{4734364E-57BD-44F2-A53B-320C3BD2F0CA}" type="slidenum">
               <a:rPr lang="fr-FR" smtClean="0"/>
-              <a:t>31</a:t>
+              <a:t>27</a:t>
             </a:fld>
             <a:endParaRPr lang="fr-FR"/>
           </a:p>
@@ -1537,7 +1522,7 @@
           <a:p>
             <a:fld id="{4734364E-57BD-44F2-A53B-320C3BD2F0CA}" type="slidenum">
               <a:rPr lang="fr-FR" smtClean="0"/>
-              <a:t>32</a:t>
+              <a:t>28</a:t>
             </a:fld>
             <a:endParaRPr lang="fr-FR"/>
           </a:p>
@@ -1557,163 +1542,6 @@
 </file>
 
 <file path=ppt/notesSlides/notesSlide2.xml><?xml version="1.0" encoding="utf-8"?>
-<p:notes xmlns:a="http://schemas.openxmlformats.org/drawingml/2006/main" xmlns:r="http://schemas.openxmlformats.org/officeDocument/2006/relationships" xmlns:p="http://schemas.openxmlformats.org/presentationml/2006/main">
-  <p:cSld>
-    <p:spTree>
-      <p:nvGrpSpPr>
-        <p:cNvPr id="1" name="">
-          <a:extLst>
-            <a:ext uri="{FF2B5EF4-FFF2-40B4-BE49-F238E27FC236}">
-              <a16:creationId xmlns:a16="http://schemas.microsoft.com/office/drawing/2014/main" id="{18FE96AE-B874-9034-D75B-3302F54B9CC4}"/>
-            </a:ext>
-          </a:extLst>
-        </p:cNvPr>
-        <p:cNvGrpSpPr/>
-        <p:nvPr/>
-      </p:nvGrpSpPr>
-      <p:grpSpPr>
-        <a:xfrm>
-          <a:off x="0" y="0"/>
-          <a:ext cx="0" cy="0"/>
-          <a:chOff x="0" y="0"/>
-          <a:chExt cx="0" cy="0"/>
-        </a:xfrm>
-      </p:grpSpPr>
-      <p:sp>
-        <p:nvSpPr>
-          <p:cNvPr id="2" name="Espace réservé de l'image des diapositives 1">
-            <a:extLst>
-              <a:ext uri="{FF2B5EF4-FFF2-40B4-BE49-F238E27FC236}">
-                <a16:creationId xmlns:a16="http://schemas.microsoft.com/office/drawing/2014/main" id="{AE83F4D3-FA79-A676-4F0E-65E641B5B51E}"/>
-              </a:ext>
-            </a:extLst>
-          </p:cNvPr>
-          <p:cNvSpPr>
-            <a:spLocks noGrp="1" noRot="1" noChangeAspect="1"/>
-          </p:cNvSpPr>
-          <p:nvPr>
-            <p:ph type="sldImg"/>
-          </p:nvPr>
-        </p:nvSpPr>
-        <p:spPr/>
-      </p:sp>
-      <p:sp>
-        <p:nvSpPr>
-          <p:cNvPr id="3" name="Espace réservé des notes 2">
-            <a:extLst>
-              <a:ext uri="{FF2B5EF4-FFF2-40B4-BE49-F238E27FC236}">
-                <a16:creationId xmlns:a16="http://schemas.microsoft.com/office/drawing/2014/main" id="{8E08A445-B6C8-5EF0-1626-9DC3F137F453}"/>
-              </a:ext>
-            </a:extLst>
-          </p:cNvPr>
-          <p:cNvSpPr>
-            <a:spLocks noGrp="1"/>
-          </p:cNvSpPr>
-          <p:nvPr>
-            <p:ph type="body" idx="1"/>
-          </p:nvPr>
-        </p:nvSpPr>
-        <p:spPr/>
-        <p:txBody>
-          <a:bodyPr/>
-          <a:lstStyle/>
-          <a:p>
-            <a:pPr marL="0" marR="0" lvl="0" indent="0" algn="l" defTabSz="914400" rtl="0" eaLnBrk="1" fontAlgn="auto" latinLnBrk="0" hangingPunct="1">
-              <a:lnSpc>
-                <a:spcPct val="100000"/>
-              </a:lnSpc>
-              <a:spcBef>
-                <a:spcPts val="0"/>
-              </a:spcBef>
-              <a:spcAft>
-                <a:spcPts val="0"/>
-              </a:spcAft>
-              <a:buClrTx/>
-              <a:buSzTx/>
-              <a:buFontTx/>
-              <a:buNone/>
-              <a:tabLst/>
-              <a:defRPr/>
-            </a:pPr>
-            <a:r>
-              <a:rPr lang="fr-FR" dirty="0"/>
-              <a:t>Exception de « </a:t>
-            </a:r>
-            <a:r>
-              <a:rPr lang="fr-FR" sz="1200" kern="1200" dirty="0">
-                <a:solidFill>
-                  <a:schemeClr val="tx1"/>
-                </a:solidFill>
-                <a:effectLst/>
-                <a:latin typeface="+mn-lt"/>
-                <a:ea typeface="+mn-ea"/>
-                <a:cs typeface="+mn-cs"/>
-              </a:rPr>
-              <a:t>Prêt à la consommation » </a:t>
-            </a:r>
-            <a:r>
-              <a:rPr lang="fr-FR" dirty="0"/>
-              <a:t>dont le sens métier doit être définit par rapport à « </a:t>
-            </a:r>
-            <a:r>
-              <a:rPr lang="fr-FR" sz="1200" kern="1200" dirty="0">
-                <a:solidFill>
-                  <a:schemeClr val="tx1"/>
-                </a:solidFill>
-                <a:effectLst/>
-                <a:latin typeface="+mn-lt"/>
-                <a:ea typeface="+mn-ea"/>
-                <a:cs typeface="+mn-cs"/>
-              </a:rPr>
-              <a:t>prêt sur salaire, prêt sur gage ou prêt personne »</a:t>
-            </a:r>
-            <a:endParaRPr lang="fr-FR" dirty="0"/>
-          </a:p>
-        </p:txBody>
-      </p:sp>
-      <p:sp>
-        <p:nvSpPr>
-          <p:cNvPr id="4" name="Espace réservé du numéro de diapositive 3">
-            <a:extLst>
-              <a:ext uri="{FF2B5EF4-FFF2-40B4-BE49-F238E27FC236}">
-                <a16:creationId xmlns:a16="http://schemas.microsoft.com/office/drawing/2014/main" id="{44B5003E-E9A2-CD10-2CF9-A29F15581906}"/>
-              </a:ext>
-            </a:extLst>
-          </p:cNvPr>
-          <p:cNvSpPr>
-            <a:spLocks noGrp="1"/>
-          </p:cNvSpPr>
-          <p:nvPr>
-            <p:ph type="sldNum" sz="quarter" idx="5"/>
-          </p:nvPr>
-        </p:nvSpPr>
-        <p:spPr/>
-        <p:txBody>
-          <a:bodyPr/>
-          <a:lstStyle/>
-          <a:p>
-            <a:fld id="{4734364E-57BD-44F2-A53B-320C3BD2F0CA}" type="slidenum">
-              <a:rPr lang="fr-FR" smtClean="0"/>
-              <a:t>5</a:t>
-            </a:fld>
-            <a:endParaRPr lang="fr-FR"/>
-          </a:p>
-        </p:txBody>
-      </p:sp>
-    </p:spTree>
-    <p:extLst>
-      <p:ext uri="{BB962C8B-B14F-4D97-AF65-F5344CB8AC3E}">
-        <p14:creationId xmlns:p14="http://schemas.microsoft.com/office/powerpoint/2010/main" val="2717823023"/>
-      </p:ext>
-    </p:extLst>
-  </p:cSld>
-  <p:clrMapOvr>
-    <a:masterClrMapping/>
-  </p:clrMapOvr>
-</p:notes>
-</file>
-
-<file path=ppt/notesSlides/notesSlide3.xml><?xml version="1.0" encoding="utf-8"?>
 <p:notes xmlns:a="http://schemas.openxmlformats.org/drawingml/2006/main" xmlns:r="http://schemas.openxmlformats.org/officeDocument/2006/relationships" xmlns:p="http://schemas.openxmlformats.org/presentationml/2006/main">
   <p:cSld>
     <p:spTree>
@@ -1827,7 +1655,7 @@
           <a:p>
             <a:fld id="{4734364E-57BD-44F2-A53B-320C3BD2F0CA}" type="slidenum">
               <a:rPr lang="fr-FR" smtClean="0"/>
-              <a:t>6</a:t>
+              <a:t>5</a:t>
             </a:fld>
             <a:endParaRPr lang="fr-FR"/>
           </a:p>
@@ -1846,7 +1674,7 @@
 </p:notes>
 </file>
 
-<file path=ppt/notesSlides/notesSlide4.xml><?xml version="1.0" encoding="utf-8"?>
+<file path=ppt/notesSlides/notesSlide3.xml><?xml version="1.0" encoding="utf-8"?>
 <p:notes xmlns:a="http://schemas.openxmlformats.org/drawingml/2006/main" xmlns:r="http://schemas.openxmlformats.org/officeDocument/2006/relationships" xmlns:p="http://schemas.openxmlformats.org/presentationml/2006/main">
   <p:cSld>
     <p:spTree>
@@ -1938,7 +1766,7 @@
           <a:p>
             <a:fld id="{4734364E-57BD-44F2-A53B-320C3BD2F0CA}" type="slidenum">
               <a:rPr lang="fr-FR" smtClean="0"/>
-              <a:t>7</a:t>
+              <a:t>6</a:t>
             </a:fld>
             <a:endParaRPr lang="fr-FR"/>
           </a:p>
@@ -1948,6 +1776,99 @@
     <p:extLst>
       <p:ext uri="{BB962C8B-B14F-4D97-AF65-F5344CB8AC3E}">
         <p14:creationId xmlns:p14="http://schemas.microsoft.com/office/powerpoint/2010/main" val="3181558058"/>
+      </p:ext>
+    </p:extLst>
+  </p:cSld>
+  <p:clrMapOvr>
+    <a:masterClrMapping/>
+  </p:clrMapOvr>
+</p:notes>
+</file>
+
+<file path=ppt/notesSlides/notesSlide4.xml><?xml version="1.0" encoding="utf-8"?>
+<p:notes xmlns:a="http://schemas.openxmlformats.org/drawingml/2006/main" xmlns:r="http://schemas.openxmlformats.org/officeDocument/2006/relationships" xmlns:p="http://schemas.openxmlformats.org/presentationml/2006/main">
+  <p:cSld>
+    <p:spTree>
+      <p:nvGrpSpPr>
+        <p:cNvPr id="1" name=""/>
+        <p:cNvGrpSpPr/>
+        <p:nvPr/>
+      </p:nvGrpSpPr>
+      <p:grpSpPr>
+        <a:xfrm>
+          <a:off x="0" y="0"/>
+          <a:ext cx="0" cy="0"/>
+          <a:chOff x="0" y="0"/>
+          <a:chExt cx="0" cy="0"/>
+        </a:xfrm>
+      </p:grpSpPr>
+      <p:sp>
+        <p:nvSpPr>
+          <p:cNvPr id="2" name="Espace réservé de l'image des diapositives 1"/>
+          <p:cNvSpPr>
+            <a:spLocks noGrp="1" noRot="1" noChangeAspect="1"/>
+          </p:cNvSpPr>
+          <p:nvPr>
+            <p:ph type="sldImg"/>
+          </p:nvPr>
+        </p:nvSpPr>
+        <p:spPr/>
+      </p:sp>
+      <p:sp>
+        <p:nvSpPr>
+          <p:cNvPr id="3" name="Espace réservé des notes 2"/>
+          <p:cNvSpPr>
+            <a:spLocks noGrp="1"/>
+          </p:cNvSpPr>
+          <p:nvPr>
+            <p:ph type="body" idx="1"/>
+          </p:nvPr>
+        </p:nvSpPr>
+        <p:spPr/>
+        <p:txBody>
+          <a:bodyPr/>
+          <a:lstStyle/>
+          <a:p>
+            <a:r>
+              <a:rPr lang="fr-FR" dirty="0"/>
+              <a:t>Le nombre de textes associés à plusieurs catégories est donc seulement : 164 = 152 + 11 + 1</a:t>
+            </a:r>
+          </a:p>
+          <a:p>
+            <a:r>
+              <a:rPr lang="fr-FR" dirty="0"/>
+              <a:t>L’apprentissage ne sera pas biaisé</a:t>
+            </a:r>
+          </a:p>
+        </p:txBody>
+      </p:sp>
+      <p:sp>
+        <p:nvSpPr>
+          <p:cNvPr id="4" name="Espace réservé du numéro de diapositive 3"/>
+          <p:cNvSpPr>
+            <a:spLocks noGrp="1"/>
+          </p:cNvSpPr>
+          <p:nvPr>
+            <p:ph type="sldNum" sz="quarter" idx="5"/>
+          </p:nvPr>
+        </p:nvSpPr>
+        <p:spPr/>
+        <p:txBody>
+          <a:bodyPr/>
+          <a:lstStyle/>
+          <a:p>
+            <a:fld id="{4734364E-57BD-44F2-A53B-320C3BD2F0CA}" type="slidenum">
+              <a:rPr lang="fr-FR" smtClean="0"/>
+              <a:t>7</a:t>
+            </a:fld>
+            <a:endParaRPr lang="fr-FR"/>
+          </a:p>
+        </p:txBody>
+      </p:sp>
+    </p:spTree>
+    <p:extLst>
+      <p:ext uri="{BB962C8B-B14F-4D97-AF65-F5344CB8AC3E}">
+        <p14:creationId xmlns:p14="http://schemas.microsoft.com/office/powerpoint/2010/main" val="3103654926"/>
       </p:ext>
     </p:extLst>
   </p:cSld>
@@ -2003,13 +1924,31 @@
           <a:p>
             <a:r>
               <a:rPr lang="fr-FR" dirty="0"/>
-              <a:t>Le nombre de textes associés à plusieurs catégories est donc seulement : 152 + 11 + 1</a:t>
+              <a:t>Consumer Claim = principale variable prédictive</a:t>
             </a:r>
           </a:p>
           <a:p>
             <a:r>
               <a:rPr lang="fr-FR" dirty="0"/>
-              <a:t>L’apprentissage ne sera pas biaisé</a:t>
+              <a:t>Mais :</a:t>
+            </a:r>
+          </a:p>
+          <a:p>
+            <a:r>
+              <a:rPr lang="fr-FR" dirty="0"/>
+              <a:t>valeurs manquantes</a:t>
+            </a:r>
+          </a:p>
+          <a:p>
+            <a:r>
+              <a:rPr lang="fr-FR" dirty="0"/>
+              <a:t>texte dépendant du canal de soumission</a:t>
+            </a:r>
+          </a:p>
+          <a:p>
+            <a:r>
+              <a:rPr lang="fr-FR" dirty="0"/>
+              <a:t>couverture limitée</a:t>
             </a:r>
           </a:p>
         </p:txBody>
@@ -2040,7 +1979,7 @@
     </p:spTree>
     <p:extLst>
       <p:ext uri="{BB962C8B-B14F-4D97-AF65-F5344CB8AC3E}">
-        <p14:creationId xmlns:p14="http://schemas.microsoft.com/office/powerpoint/2010/main" val="3103654926"/>
+        <p14:creationId xmlns:p14="http://schemas.microsoft.com/office/powerpoint/2010/main" val="3886912638"/>
       </p:ext>
     </p:extLst>
   </p:cSld>
@@ -2095,32 +2034,20 @@
           <a:lstStyle/>
           <a:p>
             <a:r>
+              <a:rPr lang="fr-FR" dirty="0" err="1"/>
+              <a:t>Stratify</a:t>
+            </a:r>
+            <a:r>
               <a:rPr lang="fr-FR" dirty="0"/>
-              <a:t>Consumer Claim = principale variable prédictive</a:t>
-            </a:r>
-          </a:p>
-          <a:p>
+              <a:t> est particulièrement utile dans le </a:t>
+            </a:r>
+            <a:r>
+              <a:rPr lang="fr-FR" dirty="0" err="1"/>
+              <a:t>dataset</a:t>
+            </a:r>
             <a:r>
               <a:rPr lang="fr-FR" dirty="0"/>
-              <a:t>Mais :</a:t>
-            </a:r>
-          </a:p>
-          <a:p>
-            <a:r>
-              <a:rPr lang="fr-FR" dirty="0"/>
-              <a:t>valeurs manquantes</a:t>
-            </a:r>
-          </a:p>
-          <a:p>
-            <a:r>
-              <a:rPr lang="fr-FR" dirty="0"/>
-              <a:t>texte dépendant du canal de soumission</a:t>
-            </a:r>
-          </a:p>
-          <a:p>
-            <a:r>
-              <a:rPr lang="fr-FR" dirty="0"/>
-              <a:t>couverture limitée</a:t>
+              <a:t> parce que certaines catégories sont beaucoup moins représentées que d'autres.</a:t>
             </a:r>
           </a:p>
         </p:txBody>
@@ -2151,7 +2078,7 @@
     </p:spTree>
     <p:extLst>
       <p:ext uri="{BB962C8B-B14F-4D97-AF65-F5344CB8AC3E}">
-        <p14:creationId xmlns:p14="http://schemas.microsoft.com/office/powerpoint/2010/main" val="3886912638"/>
+        <p14:creationId xmlns:p14="http://schemas.microsoft.com/office/powerpoint/2010/main" val="2826321745"/>
       </p:ext>
     </p:extLst>
   </p:cSld>
@@ -2206,21 +2133,88 @@
           <a:lstStyle/>
           <a:p>
             <a:r>
-              <a:rPr lang="fr-FR" dirty="0" err="1"/>
-              <a:t>Stratify</a:t>
+              <a:rPr lang="fr-FR" b="1" dirty="0"/>
+              <a:t>Temps moyen </a:t>
             </a:r>
             <a:r>
               <a:rPr lang="fr-FR" dirty="0"/>
-              <a:t> est particulièrement utile dans le </a:t>
-            </a:r>
-            <a:r>
-              <a:rPr lang="fr-FR" dirty="0" err="1"/>
-              <a:t>dataset</a:t>
-            </a:r>
+              <a:t>« Combien de temps prend une requête en moyenne ? »</a:t>
+            </a:r>
+            <a:endParaRPr lang="fr-FR" b="1" dirty="0"/>
+          </a:p>
+          <a:p>
             <a:r>
               <a:rPr lang="fr-FR" dirty="0"/>
-              <a:t> parce que certaines catégories sont beaucoup moins représentées que d'autres.</a:t>
-            </a:r>
+              <a:t>C'est la moyenne de tous les temps</a:t>
+            </a:r>
+          </a:p>
+          <a:p>
+            <a:r>
+              <a:rPr lang="fr-FR" b="1" dirty="0"/>
+              <a:t>Temps médian </a:t>
+            </a:r>
+            <a:r>
+              <a:rPr lang="fr-FR" dirty="0"/>
+              <a:t>« Quel est le temps d'une requête typique ? »</a:t>
+            </a:r>
+            <a:endParaRPr lang="fr-FR" b="1" dirty="0"/>
+          </a:p>
+          <a:p>
+            <a:r>
+              <a:rPr lang="fr-FR" dirty="0"/>
+              <a:t>La médiane correspond au </a:t>
+            </a:r>
+            <a:r>
+              <a:rPr lang="fr-FR" b="1" dirty="0"/>
+              <a:t>50e percentile (P50)</a:t>
+            </a:r>
+            <a:r>
+              <a:rPr lang="fr-FR" dirty="0"/>
+              <a:t>.</a:t>
+            </a:r>
+          </a:p>
+          <a:p>
+            <a:r>
+              <a:rPr lang="it-IT" b="1" dirty="0"/>
+              <a:t>P95 </a:t>
+            </a:r>
+            <a:r>
+              <a:rPr lang="fr-FR" dirty="0"/>
+              <a:t>« Quel temps de traitement ne dépasse pas 95 % des requêtes ? »</a:t>
+            </a:r>
+            <a:endParaRPr lang="it-IT" b="1" dirty="0"/>
+          </a:p>
+          <a:p>
+            <a:r>
+              <a:rPr lang="it-IT" dirty="0"/>
+              <a:t>Le P95 signifie </a:t>
+            </a:r>
+            <a:r>
+              <a:rPr lang="it-IT" b="1" dirty="0"/>
+              <a:t>95e percentile</a:t>
+            </a:r>
+            <a:r>
+              <a:rPr lang="it-IT" dirty="0"/>
+              <a:t>.</a:t>
+            </a:r>
+          </a:p>
+          <a:p>
+            <a:endParaRPr lang="fr-FR" dirty="0"/>
+          </a:p>
+          <a:p>
+            <a:r>
+              <a:rPr lang="fr-FR" b="1" dirty="0"/>
+              <a:t>macro</a:t>
+            </a:r>
+          </a:p>
+          <a:p>
+            <a:r>
+              <a:rPr lang="fr-FR" dirty="0"/>
+              <a:t>« Quelle est la précision moyenne si toutes les catégories ont la même importance ? »</a:t>
+            </a:r>
+          </a:p>
+          <a:p>
+            <a:endParaRPr lang="fr-FR" dirty="0"/>
           </a:p>
         </p:txBody>
       </p:sp>
@@ -2241,7 +2235,7 @@
           <a:p>
             <a:fld id="{4734364E-57BD-44F2-A53B-320C3BD2F0CA}" type="slidenum">
               <a:rPr lang="fr-FR" smtClean="0"/>
-              <a:t>10</a:t>
+              <a:t>11</a:t>
             </a:fld>
             <a:endParaRPr lang="fr-FR"/>
           </a:p>
@@ -2250,7 +2244,7 @@
     </p:spTree>
     <p:extLst>
       <p:ext uri="{BB962C8B-B14F-4D97-AF65-F5344CB8AC3E}">
-        <p14:creationId xmlns:p14="http://schemas.microsoft.com/office/powerpoint/2010/main" val="2826321745"/>
+        <p14:creationId xmlns:p14="http://schemas.microsoft.com/office/powerpoint/2010/main" val="3820106522"/>
       </p:ext>
     </p:extLst>
   </p:cSld>
@@ -2586,7 +2580,7 @@
           <a:p>
             <a:fld id="{4734364E-57BD-44F2-A53B-320C3BD2F0CA}" type="slidenum">
               <a:rPr lang="fr-FR" smtClean="0"/>
-              <a:t>16</a:t>
+              <a:t>14</a:t>
             </a:fld>
             <a:endParaRPr lang="fr-FR"/>
           </a:p>
@@ -2749,7 +2743,7 @@
           <a:p>
             <a:fld id="{4734364E-57BD-44F2-A53B-320C3BD2F0CA}" type="slidenum">
               <a:rPr lang="fr-FR" smtClean="0"/>
-              <a:t>17</a:t>
+              <a:t>15</a:t>
             </a:fld>
             <a:endParaRPr lang="fr-FR"/>
           </a:p>
@@ -6438,202 +6432,6 @@
   <p:cSld>
     <p:spTree>
       <p:nvGrpSpPr>
-        <p:cNvPr id="1" name=""/>
-        <p:cNvGrpSpPr/>
-        <p:nvPr/>
-      </p:nvGrpSpPr>
-      <p:grpSpPr>
-        <a:xfrm>
-          <a:off x="0" y="0"/>
-          <a:ext cx="0" cy="0"/>
-          <a:chOff x="0" y="0"/>
-          <a:chExt cx="0" cy="0"/>
-        </a:xfrm>
-      </p:grpSpPr>
-      <p:sp>
-        <p:nvSpPr>
-          <p:cNvPr id="2" name="Titre 1">
-            <a:extLst>
-              <a:ext uri="{FF2B5EF4-FFF2-40B4-BE49-F238E27FC236}">
-                <a16:creationId xmlns:a16="http://schemas.microsoft.com/office/drawing/2014/main" id="{7E387BAE-1479-8FE5-7C51-ACB6677BCFD6}"/>
-              </a:ext>
-            </a:extLst>
-          </p:cNvPr>
-          <p:cNvSpPr>
-            <a:spLocks noGrp="1"/>
-          </p:cNvSpPr>
-          <p:nvPr>
-            <p:ph type="title"/>
-          </p:nvPr>
-        </p:nvSpPr>
-        <p:spPr/>
-        <p:txBody>
-          <a:bodyPr/>
-          <a:lstStyle/>
-          <a:p>
-            <a:r>
-              <a:rPr lang="fr-FR" dirty="0"/>
-              <a:t>Split train / test</a:t>
-            </a:r>
-          </a:p>
-        </p:txBody>
-      </p:sp>
-      <p:sp>
-        <p:nvSpPr>
-          <p:cNvPr id="5" name="ZoneTexte 4">
-            <a:extLst>
-              <a:ext uri="{FF2B5EF4-FFF2-40B4-BE49-F238E27FC236}">
-                <a16:creationId xmlns:a16="http://schemas.microsoft.com/office/drawing/2014/main" id="{079386C9-9156-2BDB-6415-CF3DD948EB0C}"/>
-              </a:ext>
-            </a:extLst>
-          </p:cNvPr>
-          <p:cNvSpPr txBox="1"/>
-          <p:nvPr/>
-        </p:nvSpPr>
-        <p:spPr>
-          <a:xfrm>
-            <a:off x="5257800" y="2109584"/>
-            <a:ext cx="6096000" cy="3970318"/>
-          </a:xfrm>
-          <a:prstGeom prst="rect">
-            <a:avLst/>
-          </a:prstGeom>
-          <a:noFill/>
-        </p:spPr>
-        <p:txBody>
-          <a:bodyPr wrap="square">
-            <a:spAutoFit/>
-          </a:bodyPr>
-          <a:lstStyle/>
-          <a:p>
-            <a:pPr marL="457200" indent="-457200">
-              <a:buFont typeface="Arial" panose="020B0604020202020204" pitchFamily="34" charset="0"/>
-              <a:buChar char="•"/>
-            </a:pPr>
-            <a:r>
-              <a:rPr lang="fr-FR" sz="2800" b="1" dirty="0"/>
-              <a:t>20 % des données pour le test</a:t>
-            </a:r>
-          </a:p>
-          <a:p>
-            <a:pPr lvl="2"/>
-            <a:r>
-              <a:rPr lang="fr-FR" sz="2800" dirty="0"/>
-              <a:t>=&gt; 76 700 réclamations</a:t>
-            </a:r>
-          </a:p>
-          <a:p>
-            <a:pPr marL="457200" indent="-457200">
-              <a:buFont typeface="Arial" panose="020B0604020202020204" pitchFamily="34" charset="0"/>
-              <a:buChar char="•"/>
-            </a:pPr>
-            <a:r>
-              <a:rPr lang="fr-FR" sz="2800" b="1" dirty="0"/>
-              <a:t>80 % restants pour l'entraînement</a:t>
-            </a:r>
-          </a:p>
-          <a:p>
-            <a:pPr marL="1200150" lvl="2" indent="-285750">
-              <a:buFont typeface="Symbol" panose="05050102010706020507" pitchFamily="18" charset="2"/>
-              <a:buChar char="Þ"/>
-            </a:pPr>
-            <a:r>
-              <a:rPr lang="fr-FR" sz="2800" dirty="0"/>
-              <a:t>306 800 réclamations</a:t>
-            </a:r>
-          </a:p>
-          <a:p>
-            <a:pPr marL="457200" indent="-457200">
-              <a:buFont typeface="Arial" panose="020B0604020202020204" pitchFamily="34" charset="0"/>
-              <a:buChar char="•"/>
-            </a:pPr>
-            <a:r>
-              <a:rPr lang="fr-FR" sz="2800" b="1" dirty="0"/>
-              <a:t>Tirage aléatoire avec </a:t>
-            </a:r>
-            <a:r>
-              <a:rPr lang="fr-FR" sz="2800" b="1" dirty="0" err="1"/>
-              <a:t>seed</a:t>
-            </a:r>
-            <a:r>
-              <a:rPr lang="fr-FR" sz="2800" b="1" dirty="0"/>
-              <a:t> pour reproduire l'expérience</a:t>
-            </a:r>
-          </a:p>
-          <a:p>
-            <a:pPr marL="457200" indent="-457200">
-              <a:buFont typeface="Arial" panose="020B0604020202020204" pitchFamily="34" charset="0"/>
-              <a:buChar char="•"/>
-            </a:pPr>
-            <a:r>
-              <a:rPr lang="fr-FR" sz="2800" b="1" dirty="0"/>
-              <a:t>Conserver</a:t>
-            </a:r>
-            <a:r>
-              <a:rPr lang="fr-FR" sz="2800" dirty="0"/>
-              <a:t> </a:t>
-            </a:r>
-            <a:r>
-              <a:rPr lang="fr-FR" sz="2800" b="1" dirty="0"/>
-              <a:t>les mêmes proportions de chaque catégorie dans le train et dans le test</a:t>
-            </a:r>
-          </a:p>
-        </p:txBody>
-      </p:sp>
-      <p:pic>
-        <p:nvPicPr>
-          <p:cNvPr id="7" name="Image 6">
-            <a:extLst>
-              <a:ext uri="{FF2B5EF4-FFF2-40B4-BE49-F238E27FC236}">
-                <a16:creationId xmlns:a16="http://schemas.microsoft.com/office/drawing/2014/main" id="{091D3656-2410-C07C-A500-B61473E9B9FC}"/>
-              </a:ext>
-            </a:extLst>
-          </p:cNvPr>
-          <p:cNvPicPr>
-            <a:picLocks noChangeAspect="1"/>
-          </p:cNvPicPr>
-          <p:nvPr/>
-        </p:nvPicPr>
-        <p:blipFill>
-          <a:blip r:embed="rId3">
-            <a:extLst>
-              <a:ext uri="{28A0092B-C50C-407E-A947-70E740481C1C}">
-                <a14:useLocalDpi xmlns:a14="http://schemas.microsoft.com/office/drawing/2010/main" val="0"/>
-              </a:ext>
-            </a:extLst>
-          </a:blip>
-          <a:stretch>
-            <a:fillRect/>
-          </a:stretch>
-        </p:blipFill>
-        <p:spPr>
-          <a:xfrm>
-            <a:off x="546100" y="1918280"/>
-            <a:ext cx="4419600" cy="4352925"/>
-          </a:xfrm>
-          <a:prstGeom prst="rect">
-            <a:avLst/>
-          </a:prstGeom>
-        </p:spPr>
-      </p:pic>
-    </p:spTree>
-    <p:extLst>
-      <p:ext uri="{BB962C8B-B14F-4D97-AF65-F5344CB8AC3E}">
-        <p14:creationId xmlns:p14="http://schemas.microsoft.com/office/powerpoint/2010/main" val="2948858361"/>
-      </p:ext>
-    </p:extLst>
-  </p:cSld>
-  <p:clrMapOvr>
-    <a:masterClrMapping/>
-  </p:clrMapOvr>
-</p:sld>
-</file>
-
-<file path=ppt/slides/slide11.xml><?xml version="1.0" encoding="utf-8"?>
-<p:sld xmlns:a="http://schemas.openxmlformats.org/drawingml/2006/main" xmlns:r="http://schemas.openxmlformats.org/officeDocument/2006/relationships" xmlns:p="http://schemas.openxmlformats.org/presentationml/2006/main">
-  <p:cSld>
-    <p:spTree>
-      <p:nvGrpSpPr>
         <p:cNvPr id="1" name="">
           <a:extLst>
             <a:ext uri="{FF2B5EF4-FFF2-40B4-BE49-F238E27FC236}">
@@ -6783,7 +6581,7 @@
 </p:sld>
 </file>
 
-<file path=ppt/slides/slide12.xml><?xml version="1.0" encoding="utf-8"?>
+<file path=ppt/slides/slide11.xml><?xml version="1.0" encoding="utf-8"?>
 <p:sld xmlns:a="http://schemas.openxmlformats.org/drawingml/2006/main" xmlns:r="http://schemas.openxmlformats.org/officeDocument/2006/relationships" xmlns:p="http://schemas.openxmlformats.org/presentationml/2006/main">
   <p:cSld>
     <p:spTree>
@@ -6975,7 +6773,7 @@
         </p:nvSpPr>
         <p:spPr>
           <a:xfrm>
-            <a:off x="2461777" y="3079751"/>
+            <a:off x="2621268" y="3079751"/>
             <a:ext cx="2065375" cy="369332"/>
           </a:xfrm>
           <a:prstGeom prst="rect">
@@ -7011,7 +6809,7 @@
         </p:nvSpPr>
         <p:spPr>
           <a:xfrm>
-            <a:off x="2218576" y="1881188"/>
+            <a:off x="2378067" y="1881188"/>
             <a:ext cx="2308576" cy="369332"/>
           </a:xfrm>
           <a:prstGeom prst="rect">
@@ -7119,6 +6917,49 @@
           </a:fontRef>
         </p:style>
       </p:cxnSp>
+      <p:cxnSp>
+        <p:nvCxnSpPr>
+          <p:cNvPr id="6" name="Connecteur droit 5">
+            <a:extLst>
+              <a:ext uri="{FF2B5EF4-FFF2-40B4-BE49-F238E27FC236}">
+                <a16:creationId xmlns:a16="http://schemas.microsoft.com/office/drawing/2014/main" id="{CD43FFF0-DB62-3B32-8CA7-C8AC3D3C5AEC}"/>
+              </a:ext>
+            </a:extLst>
+          </p:cNvPr>
+          <p:cNvCxnSpPr/>
+          <p:nvPr/>
+        </p:nvCxnSpPr>
+        <p:spPr>
+          <a:xfrm>
+            <a:off x="2070100" y="4710519"/>
+            <a:ext cx="7810500" cy="0"/>
+          </a:xfrm>
+          <a:prstGeom prst="line">
+            <a:avLst/>
+          </a:prstGeom>
+          <a:ln w="53975">
+            <a:solidFill>
+              <a:schemeClr val="bg2">
+                <a:lumMod val="90000"/>
+              </a:schemeClr>
+            </a:solidFill>
+          </a:ln>
+        </p:spPr>
+        <p:style>
+          <a:lnRef idx="1">
+            <a:schemeClr val="accent1"/>
+          </a:lnRef>
+          <a:fillRef idx="0">
+            <a:schemeClr val="accent1"/>
+          </a:fillRef>
+          <a:effectRef idx="0">
+            <a:schemeClr val="accent1"/>
+          </a:effectRef>
+          <a:fontRef idx="minor">
+            <a:schemeClr val="tx1"/>
+          </a:fontRef>
+        </p:style>
+      </p:cxnSp>
     </p:spTree>
     <p:extLst>
       <p:ext uri="{BB962C8B-B14F-4D97-AF65-F5344CB8AC3E}">
@@ -7132,7 +6973,7 @@
 </p:sld>
 </file>
 
-<file path=ppt/slides/slide13.xml><?xml version="1.0" encoding="utf-8"?>
+<file path=ppt/slides/slide12.xml><?xml version="1.0" encoding="utf-8"?>
 <p:sld xmlns:a="http://schemas.openxmlformats.org/drawingml/2006/main" xmlns:r="http://schemas.openxmlformats.org/officeDocument/2006/relationships" xmlns:p="http://schemas.openxmlformats.org/presentationml/2006/main">
   <p:cSld>
     <p:spTree>
@@ -7298,7 +7139,7 @@
 </p:sld>
 </file>
 
-<file path=ppt/slides/slide14.xml><?xml version="1.0" encoding="utf-8"?>
+<file path=ppt/slides/slide13.xml><?xml version="1.0" encoding="utf-8"?>
 <p:sld xmlns:a="http://schemas.openxmlformats.org/drawingml/2006/main" xmlns:r="http://schemas.openxmlformats.org/officeDocument/2006/relationships" xmlns:p="http://schemas.openxmlformats.org/presentationml/2006/main">
   <p:cSld>
     <p:spTree>
@@ -9162,99 +9003,7 @@
 </p:sld>
 </file>
 
-<file path=ppt/slides/slide15.xml><?xml version="1.0" encoding="utf-8"?>
-<p:sld xmlns:a="http://schemas.openxmlformats.org/drawingml/2006/main" xmlns:r="http://schemas.openxmlformats.org/officeDocument/2006/relationships" xmlns:p="http://schemas.openxmlformats.org/presentationml/2006/main">
-  <p:cSld>
-    <p:spTree>
-      <p:nvGrpSpPr>
-        <p:cNvPr id="1" name="">
-          <a:extLst>
-            <a:ext uri="{FF2B5EF4-FFF2-40B4-BE49-F238E27FC236}">
-              <a16:creationId xmlns:a16="http://schemas.microsoft.com/office/drawing/2014/main" id="{D2218FFC-EA89-2EBB-B60C-317654A9D2FE}"/>
-            </a:ext>
-          </a:extLst>
-        </p:cNvPr>
-        <p:cNvGrpSpPr/>
-        <p:nvPr/>
-      </p:nvGrpSpPr>
-      <p:grpSpPr>
-        <a:xfrm>
-          <a:off x="0" y="0"/>
-          <a:ext cx="0" cy="0"/>
-          <a:chOff x="0" y="0"/>
-          <a:chExt cx="0" cy="0"/>
-        </a:xfrm>
-      </p:grpSpPr>
-      <p:sp>
-        <p:nvSpPr>
-          <p:cNvPr id="2" name="Titre 1">
-            <a:extLst>
-              <a:ext uri="{FF2B5EF4-FFF2-40B4-BE49-F238E27FC236}">
-                <a16:creationId xmlns:a16="http://schemas.microsoft.com/office/drawing/2014/main" id="{CFBCE8A0-2B0A-79CE-2554-15CCA4AB6420}"/>
-              </a:ext>
-            </a:extLst>
-          </p:cNvPr>
-          <p:cNvSpPr>
-            <a:spLocks noGrp="1"/>
-          </p:cNvSpPr>
-          <p:nvPr>
-            <p:ph type="title"/>
-          </p:nvPr>
-        </p:nvSpPr>
-        <p:spPr/>
-        <p:txBody>
-          <a:bodyPr/>
-          <a:lstStyle/>
-          <a:p>
-            <a:r>
-              <a:rPr lang="fr-FR" dirty="0"/>
-              <a:t>Approche LLM</a:t>
-            </a:r>
-          </a:p>
-        </p:txBody>
-      </p:sp>
-      <p:sp>
-        <p:nvSpPr>
-          <p:cNvPr id="3" name="Espace réservé du contenu 2">
-            <a:extLst>
-              <a:ext uri="{FF2B5EF4-FFF2-40B4-BE49-F238E27FC236}">
-                <a16:creationId xmlns:a16="http://schemas.microsoft.com/office/drawing/2014/main" id="{DB0E9823-F860-FFCB-D087-E8983341C203}"/>
-              </a:ext>
-            </a:extLst>
-          </p:cNvPr>
-          <p:cNvSpPr>
-            <a:spLocks noGrp="1"/>
-          </p:cNvSpPr>
-          <p:nvPr>
-            <p:ph idx="1"/>
-          </p:nvPr>
-        </p:nvSpPr>
-        <p:spPr/>
-        <p:txBody>
-          <a:bodyPr/>
-          <a:lstStyle/>
-          <a:p>
-            <a:r>
-              <a:rPr lang="fr-FR" dirty="0"/>
-              <a:t>classification par prompt, few-shot et few-shot dynamique avec FAISS</a:t>
-            </a:r>
-          </a:p>
-        </p:txBody>
-      </p:sp>
-    </p:spTree>
-    <p:extLst>
-      <p:ext uri="{BB962C8B-B14F-4D97-AF65-F5344CB8AC3E}">
-        <p14:creationId xmlns:p14="http://schemas.microsoft.com/office/powerpoint/2010/main" val="2728294113"/>
-      </p:ext>
-    </p:extLst>
-  </p:cSld>
-  <p:clrMapOvr>
-    <a:masterClrMapping/>
-  </p:clrMapOvr>
-</p:sld>
-</file>
-
-<file path=ppt/slides/slide16.xml><?xml version="1.0" encoding="utf-8"?>
+<file path=ppt/slides/slide14.xml><?xml version="1.0" encoding="utf-8"?>
 <p:sld xmlns:a="http://schemas.openxmlformats.org/drawingml/2006/main" xmlns:r="http://schemas.openxmlformats.org/officeDocument/2006/relationships" xmlns:p="http://schemas.openxmlformats.org/presentationml/2006/main">
   <p:cSld>
     <p:spTree>
@@ -9273,10 +9022,10 @@
       </p:grpSpPr>
       <p:pic>
         <p:nvPicPr>
-          <p:cNvPr id="9" name="Image 8">
+          <p:cNvPr id="12" name="Image 11">
             <a:extLst>
               <a:ext uri="{FF2B5EF4-FFF2-40B4-BE49-F238E27FC236}">
-                <a16:creationId xmlns:a16="http://schemas.microsoft.com/office/drawing/2014/main" id="{6A7FBD23-4FB5-4D64-D098-F9BA46CD28AD}"/>
+                <a16:creationId xmlns:a16="http://schemas.microsoft.com/office/drawing/2014/main" id="{5C78883A-0889-A0F2-8521-815369DD8050}"/>
               </a:ext>
             </a:extLst>
           </p:cNvPr>
@@ -9293,8 +9042,8 @@
         </p:blipFill>
         <p:spPr>
           <a:xfrm>
-            <a:off x="648485" y="2558424"/>
-            <a:ext cx="10794027" cy="2673975"/>
+            <a:off x="510128" y="3116463"/>
+            <a:ext cx="11245845" cy="2608079"/>
           </a:xfrm>
           <a:prstGeom prst="rect">
             <a:avLst/>
@@ -9348,8 +9097,8 @@
         </p:nvSpPr>
         <p:spPr>
           <a:xfrm>
-            <a:off x="648486" y="4199860"/>
-            <a:ext cx="10778626" cy="372140"/>
+            <a:off x="534829" y="5389152"/>
+            <a:ext cx="11221144" cy="330200"/>
           </a:xfrm>
           <a:prstGeom prst="rect">
             <a:avLst/>
@@ -9400,7 +9149,7 @@
         </p:nvSpPr>
         <p:spPr>
           <a:xfrm rot="19347141">
-            <a:off x="9226403" y="1623405"/>
+            <a:off x="8227337" y="2208148"/>
             <a:ext cx="2065375" cy="369332"/>
           </a:xfrm>
           <a:prstGeom prst="rect">
@@ -9435,7 +9184,7 @@
         </p:nvSpPr>
         <p:spPr>
           <a:xfrm rot="19347141">
-            <a:off x="8035176" y="1549299"/>
+            <a:off x="7036110" y="2134042"/>
             <a:ext cx="2308576" cy="369332"/>
           </a:xfrm>
           <a:prstGeom prst="rect">
@@ -9469,7 +9218,7 @@
 </p:sld>
 </file>
 
-<file path=ppt/slides/slide17.xml><?xml version="1.0" encoding="utf-8"?>
+<file path=ppt/slides/slide15.xml><?xml version="1.0" encoding="utf-8"?>
 <p:sld xmlns:a="http://schemas.openxmlformats.org/drawingml/2006/main" xmlns:r="http://schemas.openxmlformats.org/officeDocument/2006/relationships" xmlns:p="http://schemas.openxmlformats.org/presentationml/2006/main">
   <p:cSld>
     <p:spTree>
@@ -9492,6 +9241,36 @@
           <a:chExt cx="0" cy="0"/>
         </a:xfrm>
       </p:grpSpPr>
+      <p:pic>
+        <p:nvPicPr>
+          <p:cNvPr id="9" name="Image 8">
+            <a:extLst>
+              <a:ext uri="{FF2B5EF4-FFF2-40B4-BE49-F238E27FC236}">
+                <a16:creationId xmlns:a16="http://schemas.microsoft.com/office/drawing/2014/main" id="{ABC83A6F-F5AD-50A9-7C07-FEDF7E81C669}"/>
+              </a:ext>
+            </a:extLst>
+          </p:cNvPr>
+          <p:cNvPicPr>
+            <a:picLocks noChangeAspect="1"/>
+          </p:cNvPicPr>
+          <p:nvPr/>
+        </p:nvPicPr>
+        <p:blipFill>
+          <a:blip r:embed="rId3"/>
+          <a:stretch>
+            <a:fillRect/>
+          </a:stretch>
+        </p:blipFill>
+        <p:spPr>
+          <a:xfrm>
+            <a:off x="871524" y="2118437"/>
+            <a:ext cx="10666019" cy="3695682"/>
+          </a:xfrm>
+          <a:prstGeom prst="rect">
+            <a:avLst/>
+          </a:prstGeom>
+        </p:spPr>
+      </p:pic>
       <p:sp>
         <p:nvSpPr>
           <p:cNvPr id="2" name="Titre 1">
@@ -9521,36 +9300,58 @@
           </a:p>
         </p:txBody>
       </p:sp>
-      <p:pic>
-        <p:nvPicPr>
-          <p:cNvPr id="6" name="Image 5">
+      <p:sp>
+        <p:nvSpPr>
+          <p:cNvPr id="7" name="Rectangle 6">
             <a:extLst>
               <a:ext uri="{FF2B5EF4-FFF2-40B4-BE49-F238E27FC236}">
-                <a16:creationId xmlns:a16="http://schemas.microsoft.com/office/drawing/2014/main" id="{0AE637B8-8360-2C45-1748-8E33EFD6A7C4}"/>
+                <a16:creationId xmlns:a16="http://schemas.microsoft.com/office/drawing/2014/main" id="{F13D2887-F45F-FA98-46FC-AE8B0336E24F}"/>
               </a:ext>
             </a:extLst>
           </p:cNvPr>
-          <p:cNvPicPr>
-            <a:picLocks noChangeAspect="1"/>
-          </p:cNvPicPr>
+          <p:cNvSpPr/>
           <p:nvPr/>
-        </p:nvPicPr>
-        <p:blipFill>
-          <a:blip r:embed="rId3"/>
-          <a:stretch>
-            <a:fillRect/>
-          </a:stretch>
-        </p:blipFill>
+        </p:nvSpPr>
         <p:spPr>
           <a:xfrm>
-            <a:off x="838200" y="2194755"/>
-            <a:ext cx="10704275" cy="3568092"/>
+            <a:off x="5220586" y="3904370"/>
+            <a:ext cx="6316957" cy="272679"/>
           </a:xfrm>
           <a:prstGeom prst="rect">
             <a:avLst/>
           </a:prstGeom>
+          <a:noFill/>
+          <a:ln w="50800">
+            <a:solidFill>
+              <a:srgbClr val="FF0000"/>
+            </a:solidFill>
+          </a:ln>
         </p:spPr>
-      </p:pic>
+        <p:style>
+          <a:lnRef idx="2">
+            <a:schemeClr val="accent1">
+              <a:shade val="15000"/>
+            </a:schemeClr>
+          </a:lnRef>
+          <a:fillRef idx="1">
+            <a:schemeClr val="accent1"/>
+          </a:fillRef>
+          <a:effectRef idx="0">
+            <a:schemeClr val="accent1"/>
+          </a:effectRef>
+          <a:fontRef idx="minor">
+            <a:schemeClr val="lt1"/>
+          </a:fontRef>
+        </p:style>
+        <p:txBody>
+          <a:bodyPr rtlCol="0" anchor="ctr"/>
+          <a:lstStyle/>
+          <a:p>
+            <a:pPr algn="ctr"/>
+            <a:endParaRPr lang="fr-FR"/>
+          </a:p>
+        </p:txBody>
+      </p:sp>
     </p:spTree>
     <p:extLst>
       <p:ext uri="{BB962C8B-B14F-4D97-AF65-F5344CB8AC3E}">
@@ -9564,7 +9365,7 @@
 </p:sld>
 </file>
 
-<file path=ppt/slides/slide18.xml><?xml version="1.0" encoding="utf-8"?>
+<file path=ppt/slides/slide16.xml><?xml version="1.0" encoding="utf-8"?>
 <p:sld xmlns:a="http://schemas.openxmlformats.org/drawingml/2006/main" xmlns:r="http://schemas.openxmlformats.org/officeDocument/2006/relationships" xmlns:p="http://schemas.openxmlformats.org/presentationml/2006/main">
   <p:cSld>
     <p:spTree>
@@ -9730,7 +9531,7 @@
 </p:sld>
 </file>
 
-<file path=ppt/slides/slide19.xml><?xml version="1.0" encoding="utf-8"?>
+<file path=ppt/slides/slide17.xml><?xml version="1.0" encoding="utf-8"?>
 <p:sld xmlns:a="http://schemas.openxmlformats.org/drawingml/2006/main" xmlns:r="http://schemas.openxmlformats.org/officeDocument/2006/relationships" xmlns:p="http://schemas.openxmlformats.org/presentationml/2006/main">
   <p:cSld>
     <p:spTree>
@@ -11653,227 +11454,7 @@
 </p:sld>
 </file>
 
-<file path=ppt/slides/slide2.xml><?xml version="1.0" encoding="utf-8"?>
-<p:sld xmlns:a="http://schemas.openxmlformats.org/drawingml/2006/main" xmlns:r="http://schemas.openxmlformats.org/officeDocument/2006/relationships" xmlns:p="http://schemas.openxmlformats.org/presentationml/2006/main">
-  <p:cSld>
-    <p:spTree>
-      <p:nvGrpSpPr>
-        <p:cNvPr id="1" name=""/>
-        <p:cNvGrpSpPr/>
-        <p:nvPr/>
-      </p:nvGrpSpPr>
-      <p:grpSpPr>
-        <a:xfrm>
-          <a:off x="0" y="0"/>
-          <a:ext cx="0" cy="0"/>
-          <a:chOff x="0" y="0"/>
-          <a:chExt cx="0" cy="0"/>
-        </a:xfrm>
-      </p:grpSpPr>
-      <p:sp>
-        <p:nvSpPr>
-          <p:cNvPr id="2" name="Titre 1">
-            <a:extLst>
-              <a:ext uri="{FF2B5EF4-FFF2-40B4-BE49-F238E27FC236}">
-                <a16:creationId xmlns:a16="http://schemas.microsoft.com/office/drawing/2014/main" id="{5F5CCCC7-B8DB-ADF3-5AF8-D124C6BC20F4}"/>
-              </a:ext>
-            </a:extLst>
-          </p:cNvPr>
-          <p:cNvSpPr>
-            <a:spLocks noGrp="1"/>
-          </p:cNvSpPr>
-          <p:nvPr>
-            <p:ph type="title"/>
-          </p:nvPr>
-        </p:nvSpPr>
-        <p:spPr/>
-        <p:txBody>
-          <a:bodyPr/>
-          <a:lstStyle/>
-          <a:p>
-            <a:r>
-              <a:rPr lang="fr-FR" dirty="0"/>
-              <a:t>Contexte</a:t>
-            </a:r>
-          </a:p>
-        </p:txBody>
-      </p:sp>
-      <p:sp>
-        <p:nvSpPr>
-          <p:cNvPr id="3" name="Espace réservé du contenu 2">
-            <a:extLst>
-              <a:ext uri="{FF2B5EF4-FFF2-40B4-BE49-F238E27FC236}">
-                <a16:creationId xmlns:a16="http://schemas.microsoft.com/office/drawing/2014/main" id="{CA30B59B-9256-F687-FB0F-F72677E2AC40}"/>
-              </a:ext>
-            </a:extLst>
-          </p:cNvPr>
-          <p:cNvSpPr>
-            <a:spLocks noGrp="1"/>
-          </p:cNvSpPr>
-          <p:nvPr>
-            <p:ph idx="1"/>
-          </p:nvPr>
-        </p:nvSpPr>
-        <p:spPr/>
-        <p:txBody>
-          <a:bodyPr/>
-          <a:lstStyle/>
-          <a:p>
-            <a:r>
-              <a:rPr lang="fr-FR" dirty="0"/>
-              <a:t>Objectif : automatiser le routage des réclamations vers le bon service.</a:t>
-            </a:r>
-          </a:p>
-          <a:p>
-            <a:r>
-              <a:rPr lang="fr-FR" dirty="0"/>
-              <a:t>Approche: comparer un système de classification LLM et ML</a:t>
-            </a:r>
-          </a:p>
-        </p:txBody>
-      </p:sp>
-    </p:spTree>
-    <p:extLst>
-      <p:ext uri="{BB962C8B-B14F-4D97-AF65-F5344CB8AC3E}">
-        <p14:creationId xmlns:p14="http://schemas.microsoft.com/office/powerpoint/2010/main" val="4181197782"/>
-      </p:ext>
-    </p:extLst>
-  </p:cSld>
-  <p:clrMapOvr>
-    <a:masterClrMapping/>
-  </p:clrMapOvr>
-</p:sld>
-</file>
-
-<file path=ppt/slides/slide20.xml><?xml version="1.0" encoding="utf-8"?>
-<p:sld xmlns:a="http://schemas.openxmlformats.org/drawingml/2006/main" xmlns:r="http://schemas.openxmlformats.org/officeDocument/2006/relationships" xmlns:p="http://schemas.openxmlformats.org/presentationml/2006/main">
-  <p:cSld>
-    <p:spTree>
-      <p:nvGrpSpPr>
-        <p:cNvPr id="1" name=""/>
-        <p:cNvGrpSpPr/>
-        <p:nvPr/>
-      </p:nvGrpSpPr>
-      <p:grpSpPr>
-        <a:xfrm>
-          <a:off x="0" y="0"/>
-          <a:ext cx="0" cy="0"/>
-          <a:chOff x="0" y="0"/>
-          <a:chExt cx="0" cy="0"/>
-        </a:xfrm>
-      </p:grpSpPr>
-      <p:sp>
-        <p:nvSpPr>
-          <p:cNvPr id="2" name="Titre 1">
-            <a:extLst>
-              <a:ext uri="{FF2B5EF4-FFF2-40B4-BE49-F238E27FC236}">
-                <a16:creationId xmlns:a16="http://schemas.microsoft.com/office/drawing/2014/main" id="{0F6FF110-9CA5-9068-EFE8-ABB9F02AE7C9}"/>
-              </a:ext>
-            </a:extLst>
-          </p:cNvPr>
-          <p:cNvSpPr>
-            <a:spLocks noGrp="1"/>
-          </p:cNvSpPr>
-          <p:nvPr>
-            <p:ph type="title"/>
-          </p:nvPr>
-        </p:nvSpPr>
-        <p:spPr/>
-        <p:txBody>
-          <a:bodyPr/>
-          <a:lstStyle/>
-          <a:p>
-            <a:r>
-              <a:rPr lang="fr-FR" b="1" dirty="0"/>
-              <a:t>3 modèles</a:t>
-            </a:r>
-            <a:endParaRPr lang="fr-FR" dirty="0"/>
-          </a:p>
-        </p:txBody>
-      </p:sp>
-      <p:sp>
-        <p:nvSpPr>
-          <p:cNvPr id="3" name="Espace réservé du contenu 2">
-            <a:extLst>
-              <a:ext uri="{FF2B5EF4-FFF2-40B4-BE49-F238E27FC236}">
-                <a16:creationId xmlns:a16="http://schemas.microsoft.com/office/drawing/2014/main" id="{5DA09931-DE41-34A4-DD60-0A02DCF135DE}"/>
-              </a:ext>
-            </a:extLst>
-          </p:cNvPr>
-          <p:cNvSpPr>
-            <a:spLocks noGrp="1"/>
-          </p:cNvSpPr>
-          <p:nvPr>
-            <p:ph idx="1"/>
-          </p:nvPr>
-        </p:nvSpPr>
-        <p:spPr/>
-        <p:txBody>
-          <a:bodyPr/>
-          <a:lstStyle/>
-          <a:p>
-            <a:r>
-              <a:rPr lang="fr-FR" b="1" dirty="0"/>
-              <a:t>Modèle 1 : TF-IDF + </a:t>
-            </a:r>
-            <a:r>
-              <a:rPr lang="fr-FR" b="1" dirty="0" err="1"/>
-              <a:t>Logistic</a:t>
-            </a:r>
-            <a:r>
-              <a:rPr lang="fr-FR" b="1" dirty="0"/>
-              <a:t> </a:t>
-            </a:r>
-            <a:r>
-              <a:rPr lang="fr-FR" b="1" dirty="0" err="1"/>
-              <a:t>Regression</a:t>
-            </a:r>
-            <a:endParaRPr lang="fr-FR" b="1" dirty="0"/>
-          </a:p>
-          <a:p>
-            <a:r>
-              <a:rPr lang="fr-FR" b="1" dirty="0"/>
-              <a:t>Modèle 2 : TF-IDF + </a:t>
-            </a:r>
-            <a:r>
-              <a:rPr lang="fr-FR" b="1" dirty="0" err="1"/>
-              <a:t>Linear</a:t>
-            </a:r>
-            <a:r>
-              <a:rPr lang="fr-FR" b="1" dirty="0"/>
-              <a:t> SVM</a:t>
-            </a:r>
-          </a:p>
-          <a:p>
-            <a:r>
-              <a:rPr lang="fr-FR" b="1" dirty="0"/>
-              <a:t>Modèle 3 : TF-IDF + </a:t>
-            </a:r>
-            <a:r>
-              <a:rPr lang="fr-FR" b="1" dirty="0" err="1"/>
-              <a:t>Naive</a:t>
-            </a:r>
-            <a:r>
-              <a:rPr lang="fr-FR" b="1" dirty="0"/>
-              <a:t> Bayes</a:t>
-            </a:r>
-          </a:p>
-        </p:txBody>
-      </p:sp>
-    </p:spTree>
-    <p:extLst>
-      <p:ext uri="{BB962C8B-B14F-4D97-AF65-F5344CB8AC3E}">
-        <p14:creationId xmlns:p14="http://schemas.microsoft.com/office/powerpoint/2010/main" val="3081774306"/>
-      </p:ext>
-    </p:extLst>
-  </p:cSld>
-  <p:clrMapOvr>
-    <a:masterClrMapping/>
-  </p:clrMapOvr>
-</p:sld>
-</file>
-
-<file path=ppt/slides/slide21.xml><?xml version="1.0" encoding="utf-8"?>
+<file path=ppt/slides/slide18.xml><?xml version="1.0" encoding="utf-8"?>
 <p:sld xmlns:a="http://schemas.openxmlformats.org/drawingml/2006/main" xmlns:r="http://schemas.openxmlformats.org/officeDocument/2006/relationships" xmlns:p="http://schemas.openxmlformats.org/presentationml/2006/main">
   <p:cSld>
     <p:spTree>
@@ -11898,10 +11479,10 @@
       </p:grpSpPr>
       <p:pic>
         <p:nvPicPr>
-          <p:cNvPr id="11" name="Image 10">
+          <p:cNvPr id="4" name="Image 3">
             <a:extLst>
               <a:ext uri="{FF2B5EF4-FFF2-40B4-BE49-F238E27FC236}">
-                <a16:creationId xmlns:a16="http://schemas.microsoft.com/office/drawing/2014/main" id="{434DF410-0DD5-2658-039B-4D8E0D7BF2EB}"/>
+                <a16:creationId xmlns:a16="http://schemas.microsoft.com/office/drawing/2014/main" id="{B205D234-2FD5-709D-D155-BAD05717D5F1}"/>
               </a:ext>
             </a:extLst>
           </p:cNvPr>
@@ -11911,15 +11492,15 @@
           <p:nvPr/>
         </p:nvPicPr>
         <p:blipFill>
-          <a:blip r:embed="rId2"/>
+          <a:blip r:embed="rId3"/>
           <a:stretch>
             <a:fillRect/>
           </a:stretch>
         </p:blipFill>
         <p:spPr>
           <a:xfrm>
-            <a:off x="932400" y="2971800"/>
-            <a:ext cx="10778626" cy="1709183"/>
+            <a:off x="647700" y="3147559"/>
+            <a:ext cx="11249990" cy="1549400"/>
           </a:xfrm>
           <a:prstGeom prst="rect">
             <a:avLst/>
@@ -11969,8 +11550,8 @@
         </p:nvSpPr>
         <p:spPr>
           <a:xfrm>
-            <a:off x="932400" y="3858653"/>
-            <a:ext cx="10778626" cy="362469"/>
+            <a:off x="647700" y="3913250"/>
+            <a:ext cx="11249990" cy="362469"/>
           </a:xfrm>
           <a:prstGeom prst="rect">
             <a:avLst/>
@@ -12021,7 +11602,7 @@
         </p:nvSpPr>
         <p:spPr>
           <a:xfrm rot="19347141">
-            <a:off x="8949956" y="2038927"/>
+            <a:off x="8073655" y="2160350"/>
             <a:ext cx="2065375" cy="369332"/>
           </a:xfrm>
           <a:prstGeom prst="rect">
@@ -12056,7 +11637,7 @@
         </p:nvSpPr>
         <p:spPr>
           <a:xfrm rot="19347141">
-            <a:off x="7758729" y="1964821"/>
+            <a:off x="6882428" y="2086244"/>
             <a:ext cx="2308576" cy="369332"/>
           </a:xfrm>
           <a:prstGeom prst="rect">
@@ -12090,7 +11671,7 @@
 </p:sld>
 </file>
 
-<file path=ppt/slides/slide22.xml><?xml version="1.0" encoding="utf-8"?>
+<file path=ppt/slides/slide19.xml><?xml version="1.0" encoding="utf-8"?>
 <p:sld xmlns:a="http://schemas.openxmlformats.org/drawingml/2006/main" xmlns:r="http://schemas.openxmlformats.org/officeDocument/2006/relationships" xmlns:p="http://schemas.openxmlformats.org/presentationml/2006/main">
   <p:cSld>
     <p:spTree>
@@ -12231,7 +11812,99 @@
 </p:sld>
 </file>
 
-<file path=ppt/slides/slide23.xml><?xml version="1.0" encoding="utf-8"?>
+<file path=ppt/slides/slide2.xml><?xml version="1.0" encoding="utf-8"?>
+<p:sld xmlns:a="http://schemas.openxmlformats.org/drawingml/2006/main" xmlns:r="http://schemas.openxmlformats.org/officeDocument/2006/relationships" xmlns:p="http://schemas.openxmlformats.org/presentationml/2006/main">
+  <p:cSld>
+    <p:spTree>
+      <p:nvGrpSpPr>
+        <p:cNvPr id="1" name=""/>
+        <p:cNvGrpSpPr/>
+        <p:nvPr/>
+      </p:nvGrpSpPr>
+      <p:grpSpPr>
+        <a:xfrm>
+          <a:off x="0" y="0"/>
+          <a:ext cx="0" cy="0"/>
+          <a:chOff x="0" y="0"/>
+          <a:chExt cx="0" cy="0"/>
+        </a:xfrm>
+      </p:grpSpPr>
+      <p:sp>
+        <p:nvSpPr>
+          <p:cNvPr id="2" name="Titre 1">
+            <a:extLst>
+              <a:ext uri="{FF2B5EF4-FFF2-40B4-BE49-F238E27FC236}">
+                <a16:creationId xmlns:a16="http://schemas.microsoft.com/office/drawing/2014/main" id="{5F5CCCC7-B8DB-ADF3-5AF8-D124C6BC20F4}"/>
+              </a:ext>
+            </a:extLst>
+          </p:cNvPr>
+          <p:cNvSpPr>
+            <a:spLocks noGrp="1"/>
+          </p:cNvSpPr>
+          <p:nvPr>
+            <p:ph type="title"/>
+          </p:nvPr>
+        </p:nvSpPr>
+        <p:spPr/>
+        <p:txBody>
+          <a:bodyPr/>
+          <a:lstStyle/>
+          <a:p>
+            <a:r>
+              <a:rPr lang="fr-FR" dirty="0"/>
+              <a:t>Contexte</a:t>
+            </a:r>
+          </a:p>
+        </p:txBody>
+      </p:sp>
+      <p:sp>
+        <p:nvSpPr>
+          <p:cNvPr id="3" name="Espace réservé du contenu 2">
+            <a:extLst>
+              <a:ext uri="{FF2B5EF4-FFF2-40B4-BE49-F238E27FC236}">
+                <a16:creationId xmlns:a16="http://schemas.microsoft.com/office/drawing/2014/main" id="{CA30B59B-9256-F687-FB0F-F72677E2AC40}"/>
+              </a:ext>
+            </a:extLst>
+          </p:cNvPr>
+          <p:cNvSpPr>
+            <a:spLocks noGrp="1"/>
+          </p:cNvSpPr>
+          <p:nvPr>
+            <p:ph idx="1"/>
+          </p:nvPr>
+        </p:nvSpPr>
+        <p:spPr/>
+        <p:txBody>
+          <a:bodyPr/>
+          <a:lstStyle/>
+          <a:p>
+            <a:r>
+              <a:rPr lang="fr-FR" dirty="0"/>
+              <a:t>Objectif : automatiser le routage des réclamations vers le bon service.</a:t>
+            </a:r>
+          </a:p>
+          <a:p>
+            <a:r>
+              <a:rPr lang="fr-FR" dirty="0"/>
+              <a:t>Approche: comparer un système de classification LLM et ML</a:t>
+            </a:r>
+          </a:p>
+        </p:txBody>
+      </p:sp>
+    </p:spTree>
+    <p:extLst>
+      <p:ext uri="{BB962C8B-B14F-4D97-AF65-F5344CB8AC3E}">
+        <p14:creationId xmlns:p14="http://schemas.microsoft.com/office/powerpoint/2010/main" val="4181197782"/>
+      </p:ext>
+    </p:extLst>
+  </p:cSld>
+  <p:clrMapOvr>
+    <a:masterClrMapping/>
+  </p:clrMapOvr>
+</p:sld>
+</file>
+
+<file path=ppt/slides/slide20.xml><?xml version="1.0" encoding="utf-8"?>
 <p:sld xmlns:a="http://schemas.openxmlformats.org/drawingml/2006/main" xmlns:r="http://schemas.openxmlformats.org/officeDocument/2006/relationships" xmlns:p="http://schemas.openxmlformats.org/presentationml/2006/main">
   <p:cSld>
     <p:spTree>
@@ -12296,116 +11969,7 @@
 </p:sld>
 </file>
 
-<file path=ppt/slides/slide24.xml><?xml version="1.0" encoding="utf-8"?>
-<p:sld xmlns:a="http://schemas.openxmlformats.org/drawingml/2006/main" xmlns:r="http://schemas.openxmlformats.org/officeDocument/2006/relationships" xmlns:p="http://schemas.openxmlformats.org/presentationml/2006/main">
-  <p:cSld>
-    <p:spTree>
-      <p:nvGrpSpPr>
-        <p:cNvPr id="1" name=""/>
-        <p:cNvGrpSpPr/>
-        <p:nvPr/>
-      </p:nvGrpSpPr>
-      <p:grpSpPr>
-        <a:xfrm>
-          <a:off x="0" y="0"/>
-          <a:ext cx="0" cy="0"/>
-          <a:chOff x="0" y="0"/>
-          <a:chExt cx="0" cy="0"/>
-        </a:xfrm>
-      </p:grpSpPr>
-      <p:sp>
-        <p:nvSpPr>
-          <p:cNvPr id="2" name="Titre 1">
-            <a:extLst>
-              <a:ext uri="{FF2B5EF4-FFF2-40B4-BE49-F238E27FC236}">
-                <a16:creationId xmlns:a16="http://schemas.microsoft.com/office/drawing/2014/main" id="{B159CC3F-35D3-E96B-7DE3-02F914F180AB}"/>
-              </a:ext>
-            </a:extLst>
-          </p:cNvPr>
-          <p:cNvSpPr>
-            <a:spLocks noGrp="1"/>
-          </p:cNvSpPr>
-          <p:nvPr>
-            <p:ph type="title"/>
-          </p:nvPr>
-        </p:nvSpPr>
-        <p:spPr/>
-        <p:txBody>
-          <a:bodyPr/>
-          <a:lstStyle/>
-          <a:p>
-            <a:endParaRPr lang="fr-FR"/>
-          </a:p>
-        </p:txBody>
-      </p:sp>
-      <p:sp>
-        <p:nvSpPr>
-          <p:cNvPr id="3" name="Espace réservé du contenu 2">
-            <a:extLst>
-              <a:ext uri="{FF2B5EF4-FFF2-40B4-BE49-F238E27FC236}">
-                <a16:creationId xmlns:a16="http://schemas.microsoft.com/office/drawing/2014/main" id="{D2FF3E20-34AF-25AD-C08B-D5B595252071}"/>
-              </a:ext>
-            </a:extLst>
-          </p:cNvPr>
-          <p:cNvSpPr>
-            <a:spLocks noGrp="1"/>
-          </p:cNvSpPr>
-          <p:nvPr>
-            <p:ph idx="1"/>
-          </p:nvPr>
-        </p:nvSpPr>
-        <p:spPr/>
-        <p:txBody>
-          <a:bodyPr/>
-          <a:lstStyle/>
-          <a:p>
-            <a:r>
-              <a:rPr lang="fr-FR" dirty="0"/>
-              <a:t>Associer un texte automatiquement en fonction de la réclamation ?</a:t>
-            </a:r>
-          </a:p>
-          <a:p>
-            <a:endParaRPr lang="fr-FR" dirty="0"/>
-          </a:p>
-          <a:p>
-            <a:r>
-              <a:rPr lang="fr-FR" dirty="0"/>
-              <a:t>Le modèle est globalement performant, mais les catégories très minoritaires restent difficiles à prédire.</a:t>
-            </a:r>
-          </a:p>
-          <a:p>
-            <a:endParaRPr lang="fr-FR" dirty="0"/>
-          </a:p>
-          <a:p>
-            <a:r>
-              <a:rPr lang="fr-FR" dirty="0"/>
-              <a:t>Les performances varient fortement selon les catégories. Les catégories majoritaires et sémantiquement bien caractérisées sont correctement identifiées, tandis que les catégories minoritaires présentent un </a:t>
-            </a:r>
-            <a:r>
-              <a:rPr lang="fr-FR" dirty="0" err="1"/>
-              <a:t>recall</a:t>
-            </a:r>
-            <a:r>
-              <a:rPr lang="fr-FR" dirty="0"/>
-              <a:t> plus faible.</a:t>
-            </a:r>
-          </a:p>
-        </p:txBody>
-      </p:sp>
-    </p:spTree>
-    <p:extLst>
-      <p:ext uri="{BB962C8B-B14F-4D97-AF65-F5344CB8AC3E}">
-        <p14:creationId xmlns:p14="http://schemas.microsoft.com/office/powerpoint/2010/main" val="2215893546"/>
-      </p:ext>
-    </p:extLst>
-  </p:cSld>
-  <p:clrMapOvr>
-    <a:masterClrMapping/>
-  </p:clrMapOvr>
-</p:sld>
-</file>
-
-<file path=ppt/slides/slide25.xml><?xml version="1.0" encoding="utf-8"?>
+<file path=ppt/slides/slide21.xml><?xml version="1.0" encoding="utf-8"?>
 <p:sld xmlns:a="http://schemas.openxmlformats.org/drawingml/2006/main" xmlns:r="http://schemas.openxmlformats.org/officeDocument/2006/relationships" xmlns:p="http://schemas.openxmlformats.org/presentationml/2006/main">
   <p:cSld>
     <p:spTree>
@@ -12571,7 +12135,7 @@
 </p:sld>
 </file>
 
-<file path=ppt/slides/slide26.xml><?xml version="1.0" encoding="utf-8"?>
+<file path=ppt/slides/slide22.xml><?xml version="1.0" encoding="utf-8"?>
 <p:sld xmlns:a="http://schemas.openxmlformats.org/drawingml/2006/main" xmlns:r="http://schemas.openxmlformats.org/officeDocument/2006/relationships" xmlns:p="http://schemas.openxmlformats.org/presentationml/2006/main">
   <p:cSld>
     <p:spTree>
@@ -12977,7 +12541,7 @@
               <a:pPr algn="ctr"/>
               <a:r>
                 <a:rPr lang="fr-FR" b="1" dirty="0"/>
-                <a:t>Classification API</a:t>
+                <a:t>API Classification</a:t>
               </a:r>
             </a:p>
           </p:txBody>
@@ -13347,7 +12911,7 @@
 </p:sld>
 </file>
 
-<file path=ppt/slides/slide27.xml><?xml version="1.0" encoding="utf-8"?>
+<file path=ppt/slides/slide23.xml><?xml version="1.0" encoding="utf-8"?>
 <p:sld xmlns:a="http://schemas.openxmlformats.org/drawingml/2006/main" xmlns:r="http://schemas.openxmlformats.org/officeDocument/2006/relationships" xmlns:p="http://schemas.openxmlformats.org/presentationml/2006/main">
   <p:cSld>
     <p:spTree>
@@ -13513,7 +13077,7 @@
 </p:sld>
 </file>
 
-<file path=ppt/slides/slide28.xml><?xml version="1.0" encoding="utf-8"?>
+<file path=ppt/slides/slide24.xml><?xml version="1.0" encoding="utf-8"?>
 <p:sld xmlns:a="http://schemas.openxmlformats.org/drawingml/2006/main" xmlns:r="http://schemas.openxmlformats.org/officeDocument/2006/relationships" xmlns:p="http://schemas.openxmlformats.org/presentationml/2006/main">
   <p:cSld>
     <p:spTree>
@@ -13988,7 +13552,7 @@
               <a:pPr algn="ctr"/>
               <a:r>
                 <a:rPr lang="fr-FR" b="1" dirty="0"/>
-                <a:t>Classification API</a:t>
+                <a:t>API Classification</a:t>
               </a:r>
             </a:p>
           </p:txBody>
@@ -14224,7 +13788,7 @@
 </p:sld>
 </file>
 
-<file path=ppt/slides/slide29.xml><?xml version="1.0" encoding="utf-8"?>
+<file path=ppt/slides/slide25.xml><?xml version="1.0" encoding="utf-8"?>
 <p:sld xmlns:a="http://schemas.openxmlformats.org/drawingml/2006/main" xmlns:r="http://schemas.openxmlformats.org/officeDocument/2006/relationships" xmlns:p="http://schemas.openxmlformats.org/presentationml/2006/main">
   <p:cSld>
     <p:spTree>
@@ -14264,41 +13828,11 @@
           <a:p>
             <a:r>
               <a:rPr lang="fr-FR" dirty="0"/>
-              <a:t>Déploiement ML: Cycle de vie</a:t>
+              <a:t>Cycle de vie ML</a:t>
             </a:r>
           </a:p>
         </p:txBody>
       </p:sp>
-      <p:pic>
-        <p:nvPicPr>
-          <p:cNvPr id="5" name="Image 4">
-            <a:extLst>
-              <a:ext uri="{FF2B5EF4-FFF2-40B4-BE49-F238E27FC236}">
-                <a16:creationId xmlns:a16="http://schemas.microsoft.com/office/drawing/2014/main" id="{BC09F327-368E-8AF5-1B34-20AFE87C8B9F}"/>
-              </a:ext>
-            </a:extLst>
-          </p:cNvPr>
-          <p:cNvPicPr>
-            <a:picLocks noChangeAspect="1"/>
-          </p:cNvPicPr>
-          <p:nvPr/>
-        </p:nvPicPr>
-        <p:blipFill>
-          <a:blip r:embed="rId2"/>
-          <a:stretch>
-            <a:fillRect/>
-          </a:stretch>
-        </p:blipFill>
-        <p:spPr>
-          <a:xfrm>
-            <a:off x="1393688" y="1932623"/>
-            <a:ext cx="3762512" cy="4328715"/>
-          </a:xfrm>
-          <a:prstGeom prst="rect">
-            <a:avLst/>
-          </a:prstGeom>
-        </p:spPr>
-      </p:pic>
       <p:sp>
         <p:nvSpPr>
           <p:cNvPr id="7" name="ZoneTexte 6">
@@ -14313,7 +13847,7 @@
         </p:nvSpPr>
         <p:spPr>
           <a:xfrm>
-            <a:off x="5816600" y="1932622"/>
+            <a:off x="838199" y="1690688"/>
             <a:ext cx="5842000" cy="4401205"/>
           </a:xfrm>
           <a:prstGeom prst="rect">
@@ -14370,6 +13904,693 @@
           </a:p>
         </p:txBody>
       </p:sp>
+      <p:grpSp>
+        <p:nvGrpSpPr>
+          <p:cNvPr id="22" name="Groupe 21">
+            <a:extLst>
+              <a:ext uri="{FF2B5EF4-FFF2-40B4-BE49-F238E27FC236}">
+                <a16:creationId xmlns:a16="http://schemas.microsoft.com/office/drawing/2014/main" id="{C5C27A30-45D9-FFA8-578C-DC09B8CBB6F7}"/>
+              </a:ext>
+            </a:extLst>
+          </p:cNvPr>
+          <p:cNvGrpSpPr/>
+          <p:nvPr/>
+        </p:nvGrpSpPr>
+        <p:grpSpPr>
+          <a:xfrm>
+            <a:off x="7801374" y="895128"/>
+            <a:ext cx="4165600" cy="5778500"/>
+            <a:chOff x="5419681" y="714375"/>
+            <a:chExt cx="4165600" cy="5778500"/>
+          </a:xfrm>
+        </p:grpSpPr>
+        <p:sp>
+          <p:nvSpPr>
+            <p:cNvPr id="6" name="Rectangle 5">
+              <a:extLst>
+                <a:ext uri="{FF2B5EF4-FFF2-40B4-BE49-F238E27FC236}">
+                  <a16:creationId xmlns:a16="http://schemas.microsoft.com/office/drawing/2014/main" id="{D0736048-A567-70CD-5B7C-2DC5137D4C1C}"/>
+                </a:ext>
+              </a:extLst>
+            </p:cNvPr>
+            <p:cNvSpPr/>
+            <p:nvPr/>
+          </p:nvSpPr>
+          <p:spPr>
+            <a:xfrm>
+              <a:off x="5419681" y="714375"/>
+              <a:ext cx="4165600" cy="5778500"/>
+            </a:xfrm>
+            <a:prstGeom prst="rect">
+              <a:avLst/>
+            </a:prstGeom>
+            <a:gradFill>
+              <a:gsLst>
+                <a:gs pos="0">
+                  <a:schemeClr val="accent5">
+                    <a:satMod val="105000"/>
+                    <a:tint val="67000"/>
+                    <a:lumMod val="87000"/>
+                    <a:lumOff val="13000"/>
+                  </a:schemeClr>
+                </a:gs>
+                <a:gs pos="50000">
+                  <a:schemeClr val="accent5">
+                    <a:lumMod val="105000"/>
+                    <a:satMod val="103000"/>
+                    <a:tint val="73000"/>
+                  </a:schemeClr>
+                </a:gs>
+                <a:gs pos="100000">
+                  <a:schemeClr val="accent5">
+                    <a:lumMod val="105000"/>
+                    <a:satMod val="109000"/>
+                    <a:tint val="81000"/>
+                  </a:schemeClr>
+                </a:gs>
+              </a:gsLst>
+            </a:gradFill>
+            <a:ln w="66675" cap="rnd">
+              <a:round/>
+            </a:ln>
+          </p:spPr>
+          <p:style>
+            <a:lnRef idx="1">
+              <a:schemeClr val="accent5"/>
+            </a:lnRef>
+            <a:fillRef idx="2">
+              <a:schemeClr val="accent5"/>
+            </a:fillRef>
+            <a:effectRef idx="1">
+              <a:schemeClr val="accent5"/>
+            </a:effectRef>
+            <a:fontRef idx="minor">
+              <a:schemeClr val="dk1"/>
+            </a:fontRef>
+          </p:style>
+          <p:txBody>
+            <a:bodyPr rtlCol="0" anchor="ctr"/>
+            <a:lstStyle/>
+            <a:p>
+              <a:pPr algn="ctr"/>
+              <a:endParaRPr lang="fr-FR"/>
+            </a:p>
+          </p:txBody>
+        </p:sp>
+        <p:sp>
+          <p:nvSpPr>
+            <p:cNvPr id="8" name="Flèche : droite 7">
+              <a:extLst>
+                <a:ext uri="{FF2B5EF4-FFF2-40B4-BE49-F238E27FC236}">
+                  <a16:creationId xmlns:a16="http://schemas.microsoft.com/office/drawing/2014/main" id="{FDB3FDB6-9E57-0D65-1E84-C7623D600C22}"/>
+                </a:ext>
+              </a:extLst>
+            </p:cNvPr>
+            <p:cNvSpPr/>
+            <p:nvPr/>
+          </p:nvSpPr>
+          <p:spPr>
+            <a:xfrm rot="5400000">
+              <a:off x="7368616" y="1569556"/>
+              <a:ext cx="369330" cy="482578"/>
+            </a:xfrm>
+            <a:prstGeom prst="rightArrow">
+              <a:avLst>
+                <a:gd name="adj1" fmla="val 46639"/>
+                <a:gd name="adj2" fmla="val 39655"/>
+              </a:avLst>
+            </a:prstGeom>
+          </p:spPr>
+          <p:style>
+            <a:lnRef idx="2">
+              <a:schemeClr val="accent1">
+                <a:shade val="15000"/>
+              </a:schemeClr>
+            </a:lnRef>
+            <a:fillRef idx="1">
+              <a:schemeClr val="accent1"/>
+            </a:fillRef>
+            <a:effectRef idx="0">
+              <a:schemeClr val="accent1"/>
+            </a:effectRef>
+            <a:fontRef idx="minor">
+              <a:schemeClr val="lt1"/>
+            </a:fontRef>
+          </p:style>
+          <p:txBody>
+            <a:bodyPr rtlCol="0" anchor="ctr"/>
+            <a:lstStyle/>
+            <a:p>
+              <a:pPr algn="ctr"/>
+              <a:endParaRPr lang="fr-FR"/>
+            </a:p>
+          </p:txBody>
+        </p:sp>
+        <p:sp>
+          <p:nvSpPr>
+            <p:cNvPr id="9" name="ZoneTexte 8">
+              <a:extLst>
+                <a:ext uri="{FF2B5EF4-FFF2-40B4-BE49-F238E27FC236}">
+                  <a16:creationId xmlns:a16="http://schemas.microsoft.com/office/drawing/2014/main" id="{0551EAA3-743F-D3B2-D8F4-4CB78419B054}"/>
+                </a:ext>
+              </a:extLst>
+            </p:cNvPr>
+            <p:cNvSpPr txBox="1"/>
+            <p:nvPr/>
+          </p:nvSpPr>
+          <p:spPr>
+            <a:xfrm>
+              <a:off x="6791281" y="1259025"/>
+              <a:ext cx="1524000" cy="369332"/>
+            </a:xfrm>
+            <a:prstGeom prst="rect">
+              <a:avLst/>
+            </a:prstGeom>
+            <a:noFill/>
+          </p:spPr>
+          <p:txBody>
+            <a:bodyPr wrap="square" rtlCol="0">
+              <a:spAutoFit/>
+            </a:bodyPr>
+            <a:lstStyle/>
+            <a:p>
+              <a:pPr algn="ctr"/>
+              <a:r>
+                <a:rPr lang="fr-FR" b="1" dirty="0"/>
+                <a:t>Production</a:t>
+              </a:r>
+            </a:p>
+          </p:txBody>
+        </p:sp>
+        <p:sp>
+          <p:nvSpPr>
+            <p:cNvPr id="10" name="Flèche : droite 9">
+              <a:extLst>
+                <a:ext uri="{FF2B5EF4-FFF2-40B4-BE49-F238E27FC236}">
+                  <a16:creationId xmlns:a16="http://schemas.microsoft.com/office/drawing/2014/main" id="{173AD24E-01BE-45B3-8C94-92EDC4EE4060}"/>
+                </a:ext>
+              </a:extLst>
+            </p:cNvPr>
+            <p:cNvSpPr/>
+            <p:nvPr/>
+          </p:nvSpPr>
+          <p:spPr>
+            <a:xfrm rot="5400000">
+              <a:off x="7368617" y="2303864"/>
+              <a:ext cx="369329" cy="482578"/>
+            </a:xfrm>
+            <a:prstGeom prst="rightArrow">
+              <a:avLst>
+                <a:gd name="adj1" fmla="val 46639"/>
+                <a:gd name="adj2" fmla="val 39655"/>
+              </a:avLst>
+            </a:prstGeom>
+          </p:spPr>
+          <p:style>
+            <a:lnRef idx="2">
+              <a:schemeClr val="accent1">
+                <a:shade val="15000"/>
+              </a:schemeClr>
+            </a:lnRef>
+            <a:fillRef idx="1">
+              <a:schemeClr val="accent1"/>
+            </a:fillRef>
+            <a:effectRef idx="0">
+              <a:schemeClr val="accent1"/>
+            </a:effectRef>
+            <a:fontRef idx="minor">
+              <a:schemeClr val="lt1"/>
+            </a:fontRef>
+          </p:style>
+          <p:txBody>
+            <a:bodyPr rtlCol="0" anchor="ctr"/>
+            <a:lstStyle/>
+            <a:p>
+              <a:pPr algn="ctr"/>
+              <a:endParaRPr lang="fr-FR"/>
+            </a:p>
+          </p:txBody>
+        </p:sp>
+        <p:sp>
+          <p:nvSpPr>
+            <p:cNvPr id="11" name="ZoneTexte 10">
+              <a:extLst>
+                <a:ext uri="{FF2B5EF4-FFF2-40B4-BE49-F238E27FC236}">
+                  <a16:creationId xmlns:a16="http://schemas.microsoft.com/office/drawing/2014/main" id="{B7DBA189-2A9D-6FC4-F089-02CEA4982E14}"/>
+                </a:ext>
+              </a:extLst>
+            </p:cNvPr>
+            <p:cNvSpPr txBox="1"/>
+            <p:nvPr/>
+          </p:nvSpPr>
+          <p:spPr>
+            <a:xfrm>
+              <a:off x="6791281" y="1993333"/>
+              <a:ext cx="1524000" cy="369332"/>
+            </a:xfrm>
+            <a:prstGeom prst="rect">
+              <a:avLst/>
+            </a:prstGeom>
+            <a:noFill/>
+          </p:spPr>
+          <p:txBody>
+            <a:bodyPr wrap="square" rtlCol="0">
+              <a:spAutoFit/>
+            </a:bodyPr>
+            <a:lstStyle/>
+            <a:p>
+              <a:pPr algn="ctr"/>
+              <a:r>
+                <a:rPr lang="fr-FR" b="1" dirty="0"/>
+                <a:t>Prédictions</a:t>
+              </a:r>
+            </a:p>
+          </p:txBody>
+        </p:sp>
+        <p:sp>
+          <p:nvSpPr>
+            <p:cNvPr id="12" name="ZoneTexte 11">
+              <a:extLst>
+                <a:ext uri="{FF2B5EF4-FFF2-40B4-BE49-F238E27FC236}">
+                  <a16:creationId xmlns:a16="http://schemas.microsoft.com/office/drawing/2014/main" id="{553FA679-779C-E9D1-13BA-43F0D644D90B}"/>
+                </a:ext>
+              </a:extLst>
+            </p:cNvPr>
+            <p:cNvSpPr txBox="1"/>
+            <p:nvPr/>
+          </p:nvSpPr>
+          <p:spPr>
+            <a:xfrm>
+              <a:off x="5703216" y="2727640"/>
+              <a:ext cx="3700130" cy="369332"/>
+            </a:xfrm>
+            <a:prstGeom prst="rect">
+              <a:avLst/>
+            </a:prstGeom>
+            <a:noFill/>
+          </p:spPr>
+          <p:txBody>
+            <a:bodyPr wrap="square">
+              <a:spAutoFit/>
+            </a:bodyPr>
+            <a:lstStyle/>
+            <a:p>
+              <a:pPr algn="ctr"/>
+              <a:r>
+                <a:rPr lang="fr-FR" b="1" dirty="0"/>
+                <a:t>Corrections humaines</a:t>
+              </a:r>
+            </a:p>
+          </p:txBody>
+        </p:sp>
+        <p:sp>
+          <p:nvSpPr>
+            <p:cNvPr id="13" name="Flèche : droite 12">
+              <a:extLst>
+                <a:ext uri="{FF2B5EF4-FFF2-40B4-BE49-F238E27FC236}">
+                  <a16:creationId xmlns:a16="http://schemas.microsoft.com/office/drawing/2014/main" id="{749CF3DA-F183-F0A0-F77C-49B02E6032E7}"/>
+                </a:ext>
+              </a:extLst>
+            </p:cNvPr>
+            <p:cNvSpPr/>
+            <p:nvPr/>
+          </p:nvSpPr>
+          <p:spPr>
+            <a:xfrm rot="5400000">
+              <a:off x="7368616" y="3772478"/>
+              <a:ext cx="369330" cy="482578"/>
+            </a:xfrm>
+            <a:prstGeom prst="rightArrow">
+              <a:avLst>
+                <a:gd name="adj1" fmla="val 46639"/>
+                <a:gd name="adj2" fmla="val 39655"/>
+              </a:avLst>
+            </a:prstGeom>
+          </p:spPr>
+          <p:style>
+            <a:lnRef idx="2">
+              <a:schemeClr val="accent1">
+                <a:shade val="15000"/>
+              </a:schemeClr>
+            </a:lnRef>
+            <a:fillRef idx="1">
+              <a:schemeClr val="accent1"/>
+            </a:fillRef>
+            <a:effectRef idx="0">
+              <a:schemeClr val="accent1"/>
+            </a:effectRef>
+            <a:fontRef idx="minor">
+              <a:schemeClr val="lt1"/>
+            </a:fontRef>
+          </p:style>
+          <p:txBody>
+            <a:bodyPr rtlCol="0" anchor="ctr"/>
+            <a:lstStyle/>
+            <a:p>
+              <a:pPr algn="ctr"/>
+              <a:endParaRPr lang="fr-FR"/>
+            </a:p>
+          </p:txBody>
+        </p:sp>
+        <p:sp>
+          <p:nvSpPr>
+            <p:cNvPr id="14" name="ZoneTexte 13">
+              <a:extLst>
+                <a:ext uri="{FF2B5EF4-FFF2-40B4-BE49-F238E27FC236}">
+                  <a16:creationId xmlns:a16="http://schemas.microsoft.com/office/drawing/2014/main" id="{DBF8D74E-16C5-69D9-6A20-755410B043AC}"/>
+                </a:ext>
+              </a:extLst>
+            </p:cNvPr>
+            <p:cNvSpPr txBox="1"/>
+            <p:nvPr/>
+          </p:nvSpPr>
+          <p:spPr>
+            <a:xfrm>
+              <a:off x="6289637" y="4196255"/>
+              <a:ext cx="2527289" cy="369332"/>
+            </a:xfrm>
+            <a:prstGeom prst="rect">
+              <a:avLst/>
+            </a:prstGeom>
+            <a:noFill/>
+          </p:spPr>
+          <p:txBody>
+            <a:bodyPr wrap="square">
+              <a:spAutoFit/>
+            </a:bodyPr>
+            <a:lstStyle/>
+            <a:p>
+              <a:pPr algn="ctr"/>
+              <a:r>
+                <a:rPr lang="fr-FR" b="1" dirty="0"/>
+                <a:t>Réentrainement</a:t>
+              </a:r>
+            </a:p>
+          </p:txBody>
+        </p:sp>
+        <p:pic>
+          <p:nvPicPr>
+            <p:cNvPr id="15" name="Picture 6" descr="Machine Learning Certified Professional (MLCP)">
+              <a:extLst>
+                <a:ext uri="{FF2B5EF4-FFF2-40B4-BE49-F238E27FC236}">
+                  <a16:creationId xmlns:a16="http://schemas.microsoft.com/office/drawing/2014/main" id="{83E3658E-101F-038A-BC99-872D45292E6F}"/>
+                </a:ext>
+              </a:extLst>
+            </p:cNvPr>
+            <p:cNvPicPr>
+              <a:picLocks noChangeAspect="1" noChangeArrowheads="1"/>
+            </p:cNvPicPr>
+            <p:nvPr/>
+          </p:nvPicPr>
+          <p:blipFill rotWithShape="1">
+            <a:blip r:embed="rId2">
+              <a:extLst>
+                <a:ext uri="{28A0092B-C50C-407E-A947-70E740481C1C}">
+                  <a14:useLocalDpi xmlns:a14="http://schemas.microsoft.com/office/drawing/2010/main" val="0"/>
+                </a:ext>
+              </a:extLst>
+            </a:blip>
+            <a:srcRect l="17312" r="19121"/>
+            <a:stretch>
+              <a:fillRect/>
+            </a:stretch>
+          </p:blipFill>
+          <p:spPr bwMode="auto">
+            <a:xfrm>
+              <a:off x="5524516" y="818927"/>
+              <a:ext cx="1025747" cy="1613675"/>
+            </a:xfrm>
+            <a:prstGeom prst="rect">
+              <a:avLst/>
+            </a:prstGeom>
+            <a:noFill/>
+            <a:extLst>
+              <a:ext uri="{909E8E84-426E-40DD-AFC4-6F175D3DCCD1}">
+                <a14:hiddenFill xmlns:a14="http://schemas.microsoft.com/office/drawing/2010/main">
+                  <a:solidFill>
+                    <a:srgbClr val="FFFFFF"/>
+                  </a:solidFill>
+                </a14:hiddenFill>
+              </a:ext>
+            </a:extLst>
+          </p:spPr>
+        </p:pic>
+        <p:sp>
+          <p:nvSpPr>
+            <p:cNvPr id="16" name="Flèche : droite 15">
+              <a:extLst>
+                <a:ext uri="{FF2B5EF4-FFF2-40B4-BE49-F238E27FC236}">
+                  <a16:creationId xmlns:a16="http://schemas.microsoft.com/office/drawing/2014/main" id="{EFA3270A-17F1-D3A1-AA8E-C39992BE0B9A}"/>
+                </a:ext>
+              </a:extLst>
+            </p:cNvPr>
+            <p:cNvSpPr/>
+            <p:nvPr/>
+          </p:nvSpPr>
+          <p:spPr>
+            <a:xfrm rot="5400000">
+              <a:off x="7368617" y="3038171"/>
+              <a:ext cx="369329" cy="482578"/>
+            </a:xfrm>
+            <a:prstGeom prst="rightArrow">
+              <a:avLst>
+                <a:gd name="adj1" fmla="val 46639"/>
+                <a:gd name="adj2" fmla="val 39655"/>
+              </a:avLst>
+            </a:prstGeom>
+          </p:spPr>
+          <p:style>
+            <a:lnRef idx="2">
+              <a:schemeClr val="accent1">
+                <a:shade val="15000"/>
+              </a:schemeClr>
+            </a:lnRef>
+            <a:fillRef idx="1">
+              <a:schemeClr val="accent1"/>
+            </a:fillRef>
+            <a:effectRef idx="0">
+              <a:schemeClr val="accent1"/>
+            </a:effectRef>
+            <a:fontRef idx="minor">
+              <a:schemeClr val="lt1"/>
+            </a:fontRef>
+          </p:style>
+          <p:txBody>
+            <a:bodyPr rtlCol="0" anchor="ctr"/>
+            <a:lstStyle/>
+            <a:p>
+              <a:pPr algn="ctr"/>
+              <a:endParaRPr lang="fr-FR"/>
+            </a:p>
+          </p:txBody>
+        </p:sp>
+        <p:sp>
+          <p:nvSpPr>
+            <p:cNvPr id="17" name="ZoneTexte 16">
+              <a:extLst>
+                <a:ext uri="{FF2B5EF4-FFF2-40B4-BE49-F238E27FC236}">
+                  <a16:creationId xmlns:a16="http://schemas.microsoft.com/office/drawing/2014/main" id="{904F76B7-6B4C-406B-6C02-6E07D6FD7BC3}"/>
+                </a:ext>
+              </a:extLst>
+            </p:cNvPr>
+            <p:cNvSpPr txBox="1"/>
+            <p:nvPr/>
+          </p:nvSpPr>
+          <p:spPr>
+            <a:xfrm>
+              <a:off x="5521282" y="3461947"/>
+              <a:ext cx="4063999" cy="369332"/>
+            </a:xfrm>
+            <a:prstGeom prst="rect">
+              <a:avLst/>
+            </a:prstGeom>
+            <a:noFill/>
+          </p:spPr>
+          <p:txBody>
+            <a:bodyPr wrap="square">
+              <a:spAutoFit/>
+            </a:bodyPr>
+            <a:lstStyle/>
+            <a:p>
+              <a:pPr algn="ctr"/>
+              <a:r>
+                <a:rPr lang="fr-FR" b="1" dirty="0"/>
+                <a:t>Nouvelles données labellisées</a:t>
+              </a:r>
+            </a:p>
+          </p:txBody>
+        </p:sp>
+        <p:sp>
+          <p:nvSpPr>
+            <p:cNvPr id="18" name="Flèche : droite 17">
+              <a:extLst>
+                <a:ext uri="{FF2B5EF4-FFF2-40B4-BE49-F238E27FC236}">
+                  <a16:creationId xmlns:a16="http://schemas.microsoft.com/office/drawing/2014/main" id="{DA1962EC-3718-CCF6-AF2A-D1DBC1EE04CE}"/>
+                </a:ext>
+              </a:extLst>
+            </p:cNvPr>
+            <p:cNvSpPr/>
+            <p:nvPr/>
+          </p:nvSpPr>
+          <p:spPr>
+            <a:xfrm rot="5400000">
+              <a:off x="7368616" y="4506786"/>
+              <a:ext cx="369330" cy="482578"/>
+            </a:xfrm>
+            <a:prstGeom prst="rightArrow">
+              <a:avLst>
+                <a:gd name="adj1" fmla="val 46639"/>
+                <a:gd name="adj2" fmla="val 39655"/>
+              </a:avLst>
+            </a:prstGeom>
+          </p:spPr>
+          <p:style>
+            <a:lnRef idx="2">
+              <a:schemeClr val="accent1">
+                <a:shade val="15000"/>
+              </a:schemeClr>
+            </a:lnRef>
+            <a:fillRef idx="1">
+              <a:schemeClr val="accent1"/>
+            </a:fillRef>
+            <a:effectRef idx="0">
+              <a:schemeClr val="accent1"/>
+            </a:effectRef>
+            <a:fontRef idx="minor">
+              <a:schemeClr val="lt1"/>
+            </a:fontRef>
+          </p:style>
+          <p:txBody>
+            <a:bodyPr rtlCol="0" anchor="ctr"/>
+            <a:lstStyle/>
+            <a:p>
+              <a:pPr algn="ctr"/>
+              <a:endParaRPr lang="fr-FR"/>
+            </a:p>
+          </p:txBody>
+        </p:sp>
+        <p:sp>
+          <p:nvSpPr>
+            <p:cNvPr id="19" name="ZoneTexte 18">
+              <a:extLst>
+                <a:ext uri="{FF2B5EF4-FFF2-40B4-BE49-F238E27FC236}">
+                  <a16:creationId xmlns:a16="http://schemas.microsoft.com/office/drawing/2014/main" id="{3211E388-0BB7-40EF-B857-042C186286DC}"/>
+                </a:ext>
+              </a:extLst>
+            </p:cNvPr>
+            <p:cNvSpPr txBox="1"/>
+            <p:nvPr/>
+          </p:nvSpPr>
+          <p:spPr>
+            <a:xfrm>
+              <a:off x="6289637" y="4930563"/>
+              <a:ext cx="2527289" cy="369332"/>
+            </a:xfrm>
+            <a:prstGeom prst="rect">
+              <a:avLst/>
+            </a:prstGeom>
+            <a:noFill/>
+          </p:spPr>
+          <p:txBody>
+            <a:bodyPr wrap="square">
+              <a:spAutoFit/>
+            </a:bodyPr>
+            <a:lstStyle/>
+            <a:p>
+              <a:pPr algn="ctr"/>
+              <a:r>
+                <a:rPr lang="fr-FR" b="1" dirty="0"/>
+                <a:t>Validation</a:t>
+              </a:r>
+            </a:p>
+          </p:txBody>
+        </p:sp>
+        <p:sp>
+          <p:nvSpPr>
+            <p:cNvPr id="20" name="Flèche : droite 19">
+              <a:extLst>
+                <a:ext uri="{FF2B5EF4-FFF2-40B4-BE49-F238E27FC236}">
+                  <a16:creationId xmlns:a16="http://schemas.microsoft.com/office/drawing/2014/main" id="{1E8B3C1F-7A9E-5404-79AE-51725BE2823C}"/>
+                </a:ext>
+              </a:extLst>
+            </p:cNvPr>
+            <p:cNvSpPr/>
+            <p:nvPr/>
+          </p:nvSpPr>
+          <p:spPr>
+            <a:xfrm rot="5400000">
+              <a:off x="7368616" y="5241094"/>
+              <a:ext cx="369330" cy="482578"/>
+            </a:xfrm>
+            <a:prstGeom prst="rightArrow">
+              <a:avLst>
+                <a:gd name="adj1" fmla="val 46639"/>
+                <a:gd name="adj2" fmla="val 39655"/>
+              </a:avLst>
+            </a:prstGeom>
+          </p:spPr>
+          <p:style>
+            <a:lnRef idx="2">
+              <a:schemeClr val="accent1">
+                <a:shade val="15000"/>
+              </a:schemeClr>
+            </a:lnRef>
+            <a:fillRef idx="1">
+              <a:schemeClr val="accent1"/>
+            </a:fillRef>
+            <a:effectRef idx="0">
+              <a:schemeClr val="accent1"/>
+            </a:effectRef>
+            <a:fontRef idx="minor">
+              <a:schemeClr val="lt1"/>
+            </a:fontRef>
+          </p:style>
+          <p:txBody>
+            <a:bodyPr rtlCol="0" anchor="ctr"/>
+            <a:lstStyle/>
+            <a:p>
+              <a:pPr algn="ctr"/>
+              <a:endParaRPr lang="fr-FR"/>
+            </a:p>
+          </p:txBody>
+        </p:sp>
+        <p:sp>
+          <p:nvSpPr>
+            <p:cNvPr id="21" name="ZoneTexte 20">
+              <a:extLst>
+                <a:ext uri="{FF2B5EF4-FFF2-40B4-BE49-F238E27FC236}">
+                  <a16:creationId xmlns:a16="http://schemas.microsoft.com/office/drawing/2014/main" id="{2D8926D2-71BA-8956-92AE-63CC5750147F}"/>
+                </a:ext>
+              </a:extLst>
+            </p:cNvPr>
+            <p:cNvSpPr txBox="1"/>
+            <p:nvPr/>
+          </p:nvSpPr>
+          <p:spPr>
+            <a:xfrm>
+              <a:off x="5521282" y="5664876"/>
+              <a:ext cx="4063998" cy="369332"/>
+            </a:xfrm>
+            <a:prstGeom prst="rect">
+              <a:avLst/>
+            </a:prstGeom>
+            <a:noFill/>
+          </p:spPr>
+          <p:txBody>
+            <a:bodyPr wrap="square">
+              <a:spAutoFit/>
+            </a:bodyPr>
+            <a:lstStyle/>
+            <a:p>
+              <a:pPr algn="ctr"/>
+              <a:r>
+                <a:rPr lang="fr-FR" b="1" dirty="0"/>
+                <a:t>Nouvelle version du modèle</a:t>
+              </a:r>
+            </a:p>
+          </p:txBody>
+        </p:sp>
+      </p:grpSp>
     </p:spTree>
     <p:extLst>
       <p:ext uri="{BB962C8B-B14F-4D97-AF65-F5344CB8AC3E}">
@@ -14383,127 +14604,7 @@
 </p:sld>
 </file>
 
-<file path=ppt/slides/slide3.xml><?xml version="1.0" encoding="utf-8"?>
-<p:sld xmlns:a="http://schemas.openxmlformats.org/drawingml/2006/main" xmlns:r="http://schemas.openxmlformats.org/officeDocument/2006/relationships" xmlns:p="http://schemas.openxmlformats.org/presentationml/2006/main">
-  <p:cSld>
-    <p:spTree>
-      <p:nvGrpSpPr>
-        <p:cNvPr id="1" name=""/>
-        <p:cNvGrpSpPr/>
-        <p:nvPr/>
-      </p:nvGrpSpPr>
-      <p:grpSpPr>
-        <a:xfrm>
-          <a:off x="0" y="0"/>
-          <a:ext cx="0" cy="0"/>
-          <a:chOff x="0" y="0"/>
-          <a:chExt cx="0" cy="0"/>
-        </a:xfrm>
-      </p:grpSpPr>
-      <p:sp>
-        <p:nvSpPr>
-          <p:cNvPr id="2" name="Titre 1">
-            <a:extLst>
-              <a:ext uri="{FF2B5EF4-FFF2-40B4-BE49-F238E27FC236}">
-                <a16:creationId xmlns:a16="http://schemas.microsoft.com/office/drawing/2014/main" id="{CA0CB97F-097E-0FEC-42EB-89420D6043A1}"/>
-              </a:ext>
-            </a:extLst>
-          </p:cNvPr>
-          <p:cNvSpPr>
-            <a:spLocks noGrp="1"/>
-          </p:cNvSpPr>
-          <p:nvPr>
-            <p:ph type="title"/>
-          </p:nvPr>
-        </p:nvSpPr>
-        <p:spPr>
-          <a:xfrm>
-            <a:off x="838199" y="365125"/>
-            <a:ext cx="5360581" cy="3824103"/>
-          </a:xfrm>
-        </p:spPr>
-        <p:txBody>
-          <a:bodyPr>
-            <a:normAutofit/>
-          </a:bodyPr>
-          <a:lstStyle/>
-          <a:p>
-            <a:r>
-              <a:rPr lang="fr-FR" sz="6600" dirty="0">
-                <a:solidFill>
-                  <a:schemeClr val="accent1">
-                    <a:lumMod val="75000"/>
-                  </a:schemeClr>
-                </a:solidFill>
-                <a:latin typeface="Segoe UI Black" panose="020B0A02040204020203" pitchFamily="34" charset="0"/>
-                <a:ea typeface="Segoe UI Black" panose="020B0A02040204020203" pitchFamily="34" charset="0"/>
-              </a:rPr>
-              <a:t>Analyse exploratoire des données</a:t>
-            </a:r>
-          </a:p>
-        </p:txBody>
-      </p:sp>
-      <p:pic>
-        <p:nvPicPr>
-          <p:cNvPr id="2050" name="Picture 2" descr="Analyse exploratoire - Icônes ordinateur gratuites">
-            <a:extLst>
-              <a:ext uri="{FF2B5EF4-FFF2-40B4-BE49-F238E27FC236}">
-                <a16:creationId xmlns:a16="http://schemas.microsoft.com/office/drawing/2014/main" id="{AD618C70-2F2B-E7F8-3413-9BB4F19C3E28}"/>
-              </a:ext>
-            </a:extLst>
-          </p:cNvPr>
-          <p:cNvPicPr>
-            <a:picLocks noChangeAspect="1" noChangeArrowheads="1"/>
-          </p:cNvPicPr>
-          <p:nvPr/>
-        </p:nvPicPr>
-        <p:blipFill>
-          <a:blip r:embed="rId2">
-            <a:extLst>
-              <a:ext uri="{28A0092B-C50C-407E-A947-70E740481C1C}">
-                <a14:useLocalDpi xmlns:a14="http://schemas.microsoft.com/office/drawing/2010/main" val="0"/>
-              </a:ext>
-            </a:extLst>
-          </a:blip>
-          <a:srcRect/>
-          <a:stretch>
-            <a:fillRect/>
-          </a:stretch>
-        </p:blipFill>
-        <p:spPr bwMode="auto">
-          <a:xfrm>
-            <a:off x="6976731" y="1554126"/>
-            <a:ext cx="4876800" cy="4876800"/>
-          </a:xfrm>
-          <a:prstGeom prst="rect">
-            <a:avLst/>
-          </a:prstGeom>
-          <a:noFill/>
-          <a:extLst>
-            <a:ext uri="{909E8E84-426E-40DD-AFC4-6F175D3DCCD1}">
-              <a14:hiddenFill xmlns:a14="http://schemas.microsoft.com/office/drawing/2010/main">
-                <a:solidFill>
-                  <a:srgbClr val="FFFFFF"/>
-                </a:solidFill>
-              </a14:hiddenFill>
-            </a:ext>
-          </a:extLst>
-        </p:spPr>
-      </p:pic>
-    </p:spTree>
-    <p:extLst>
-      <p:ext uri="{BB962C8B-B14F-4D97-AF65-F5344CB8AC3E}">
-        <p14:creationId xmlns:p14="http://schemas.microsoft.com/office/powerpoint/2010/main" val="898818486"/>
-      </p:ext>
-    </p:extLst>
-  </p:cSld>
-  <p:clrMapOvr>
-    <a:masterClrMapping/>
-  </p:clrMapOvr>
-</p:sld>
-</file>
-
-<file path=ppt/slides/slide30.xml><?xml version="1.0" encoding="utf-8"?>
+<file path=ppt/slides/slide26.xml><?xml version="1.0" encoding="utf-8"?>
 <p:sld xmlns:a="http://schemas.openxmlformats.org/drawingml/2006/main" xmlns:r="http://schemas.openxmlformats.org/officeDocument/2006/relationships" xmlns:p="http://schemas.openxmlformats.org/presentationml/2006/main">
   <p:cSld>
     <p:spTree>
@@ -14716,7 +14817,7 @@
 </p:sld>
 </file>
 
-<file path=ppt/slides/slide31.xml><?xml version="1.0" encoding="utf-8"?>
+<file path=ppt/slides/slide27.xml><?xml version="1.0" encoding="utf-8"?>
 <p:sld xmlns:a="http://schemas.openxmlformats.org/drawingml/2006/main" xmlns:r="http://schemas.openxmlformats.org/officeDocument/2006/relationships" xmlns:p="http://schemas.openxmlformats.org/presentationml/2006/main">
   <p:cSld>
     <p:spTree>
@@ -14733,79 +14834,6 @@
           <a:chExt cx="0" cy="0"/>
         </a:xfrm>
       </p:grpSpPr>
-      <p:sp>
-        <p:nvSpPr>
-          <p:cNvPr id="26" name="Rectangle 25">
-            <a:extLst>
-              <a:ext uri="{FF2B5EF4-FFF2-40B4-BE49-F238E27FC236}">
-                <a16:creationId xmlns:a16="http://schemas.microsoft.com/office/drawing/2014/main" id="{F1B781DA-5960-F26A-D228-43A56B7F48C5}"/>
-              </a:ext>
-            </a:extLst>
-          </p:cNvPr>
-          <p:cNvSpPr/>
-          <p:nvPr/>
-        </p:nvSpPr>
-        <p:spPr>
-          <a:xfrm>
-            <a:off x="6710608" y="714374"/>
-            <a:ext cx="4165600" cy="5952239"/>
-          </a:xfrm>
-          <a:prstGeom prst="rect">
-            <a:avLst/>
-          </a:prstGeom>
-          <a:gradFill>
-            <a:gsLst>
-              <a:gs pos="0">
-                <a:schemeClr val="accent5">
-                  <a:satMod val="105000"/>
-                  <a:tint val="67000"/>
-                  <a:lumMod val="87000"/>
-                  <a:lumOff val="13000"/>
-                </a:schemeClr>
-              </a:gs>
-              <a:gs pos="50000">
-                <a:schemeClr val="accent5">
-                  <a:lumMod val="105000"/>
-                  <a:satMod val="103000"/>
-                  <a:tint val="73000"/>
-                </a:schemeClr>
-              </a:gs>
-              <a:gs pos="100000">
-                <a:schemeClr val="accent5">
-                  <a:lumMod val="105000"/>
-                  <a:satMod val="109000"/>
-                  <a:tint val="81000"/>
-                </a:schemeClr>
-              </a:gs>
-            </a:gsLst>
-          </a:gradFill>
-          <a:ln w="66675" cap="rnd">
-            <a:round/>
-          </a:ln>
-        </p:spPr>
-        <p:style>
-          <a:lnRef idx="1">
-            <a:schemeClr val="accent5"/>
-          </a:lnRef>
-          <a:fillRef idx="2">
-            <a:schemeClr val="accent5"/>
-          </a:fillRef>
-          <a:effectRef idx="1">
-            <a:schemeClr val="accent5"/>
-          </a:effectRef>
-          <a:fontRef idx="minor">
-            <a:schemeClr val="dk1"/>
-          </a:fontRef>
-        </p:style>
-        <p:txBody>
-          <a:bodyPr rtlCol="0" anchor="ctr"/>
-          <a:lstStyle/>
-          <a:p>
-            <a:pPr algn="ctr"/>
-            <a:endParaRPr lang="fr-FR"/>
-          </a:p>
-        </p:txBody>
-      </p:sp>
       <p:sp>
         <p:nvSpPr>
           <p:cNvPr id="2" name="Titre 1">
@@ -14834,58 +14862,564 @@
           </a:p>
         </p:txBody>
       </p:sp>
-      <p:sp>
-        <p:nvSpPr>
-          <p:cNvPr id="18" name="Losange 17">
+      <p:grpSp>
+        <p:nvGrpSpPr>
+          <p:cNvPr id="37" name="Groupe 36">
             <a:extLst>
               <a:ext uri="{FF2B5EF4-FFF2-40B4-BE49-F238E27FC236}">
-                <a16:creationId xmlns:a16="http://schemas.microsoft.com/office/drawing/2014/main" id="{8B06099F-671E-E735-2836-0155CACC77CC}"/>
+                <a16:creationId xmlns:a16="http://schemas.microsoft.com/office/drawing/2014/main" id="{D92A275C-84EF-3CCB-EECD-99B8DEB25573}"/>
               </a:ext>
             </a:extLst>
           </p:cNvPr>
-          <p:cNvSpPr/>
+          <p:cNvGrpSpPr/>
           <p:nvPr/>
-        </p:nvSpPr>
-        <p:spPr>
+        </p:nvGrpSpPr>
+        <p:grpSpPr>
           <a:xfrm>
-            <a:off x="8246274" y="2897221"/>
-            <a:ext cx="946298" cy="946298"/>
+            <a:off x="7444255" y="618681"/>
+            <a:ext cx="4165600" cy="5952239"/>
+            <a:chOff x="6710608" y="714374"/>
+            <a:chExt cx="4165600" cy="5952239"/>
           </a:xfrm>
-          <a:prstGeom prst="diamond">
-            <a:avLst/>
-          </a:prstGeom>
-        </p:spPr>
-        <p:style>
-          <a:lnRef idx="2">
-            <a:schemeClr val="accent1">
-              <a:shade val="15000"/>
-            </a:schemeClr>
-          </a:lnRef>
-          <a:fillRef idx="1">
-            <a:schemeClr val="accent1"/>
-          </a:fillRef>
-          <a:effectRef idx="0">
-            <a:schemeClr val="accent1"/>
-          </a:effectRef>
-          <a:fontRef idx="minor">
-            <a:schemeClr val="lt1"/>
-          </a:fontRef>
-        </p:style>
-        <p:txBody>
-          <a:bodyPr rtlCol="0" anchor="ctr"/>
-          <a:lstStyle/>
-          <a:p>
-            <a:pPr algn="ctr"/>
-            <a:endParaRPr lang="fr-FR"/>
-          </a:p>
-        </p:txBody>
-      </p:sp>
+        </p:grpSpPr>
+        <p:sp>
+          <p:nvSpPr>
+            <p:cNvPr id="26" name="Rectangle 25">
+              <a:extLst>
+                <a:ext uri="{FF2B5EF4-FFF2-40B4-BE49-F238E27FC236}">
+                  <a16:creationId xmlns:a16="http://schemas.microsoft.com/office/drawing/2014/main" id="{F1B781DA-5960-F26A-D228-43A56B7F48C5}"/>
+                </a:ext>
+              </a:extLst>
+            </p:cNvPr>
+            <p:cNvSpPr/>
+            <p:nvPr/>
+          </p:nvSpPr>
+          <p:spPr>
+            <a:xfrm>
+              <a:off x="6710608" y="714374"/>
+              <a:ext cx="4165600" cy="5952239"/>
+            </a:xfrm>
+            <a:prstGeom prst="rect">
+              <a:avLst/>
+            </a:prstGeom>
+            <a:gradFill>
+              <a:gsLst>
+                <a:gs pos="0">
+                  <a:schemeClr val="accent5">
+                    <a:satMod val="105000"/>
+                    <a:tint val="67000"/>
+                    <a:lumMod val="87000"/>
+                    <a:lumOff val="13000"/>
+                  </a:schemeClr>
+                </a:gs>
+                <a:gs pos="50000">
+                  <a:schemeClr val="accent5">
+                    <a:lumMod val="105000"/>
+                    <a:satMod val="103000"/>
+                    <a:tint val="73000"/>
+                  </a:schemeClr>
+                </a:gs>
+                <a:gs pos="100000">
+                  <a:schemeClr val="accent5">
+                    <a:lumMod val="105000"/>
+                    <a:satMod val="109000"/>
+                    <a:tint val="81000"/>
+                  </a:schemeClr>
+                </a:gs>
+              </a:gsLst>
+            </a:gradFill>
+            <a:ln w="66675" cap="rnd">
+              <a:round/>
+            </a:ln>
+          </p:spPr>
+          <p:style>
+            <a:lnRef idx="1">
+              <a:schemeClr val="accent5"/>
+            </a:lnRef>
+            <a:fillRef idx="2">
+              <a:schemeClr val="accent5"/>
+            </a:fillRef>
+            <a:effectRef idx="1">
+              <a:schemeClr val="accent5"/>
+            </a:effectRef>
+            <a:fontRef idx="minor">
+              <a:schemeClr val="dk1"/>
+            </a:fontRef>
+          </p:style>
+          <p:txBody>
+            <a:bodyPr rtlCol="0" anchor="ctr"/>
+            <a:lstStyle/>
+            <a:p>
+              <a:pPr algn="ctr"/>
+              <a:endParaRPr lang="fr-FR"/>
+            </a:p>
+          </p:txBody>
+        </p:sp>
+        <p:sp>
+          <p:nvSpPr>
+            <p:cNvPr id="18" name="Losange 17">
+              <a:extLst>
+                <a:ext uri="{FF2B5EF4-FFF2-40B4-BE49-F238E27FC236}">
+                  <a16:creationId xmlns:a16="http://schemas.microsoft.com/office/drawing/2014/main" id="{8B06099F-671E-E735-2836-0155CACC77CC}"/>
+                </a:ext>
+              </a:extLst>
+            </p:cNvPr>
+            <p:cNvSpPr/>
+            <p:nvPr/>
+          </p:nvSpPr>
+          <p:spPr>
+            <a:xfrm>
+              <a:off x="8246274" y="2897221"/>
+              <a:ext cx="946298" cy="946298"/>
+            </a:xfrm>
+            <a:prstGeom prst="diamond">
+              <a:avLst/>
+            </a:prstGeom>
+          </p:spPr>
+          <p:style>
+            <a:lnRef idx="2">
+              <a:schemeClr val="accent1">
+                <a:shade val="15000"/>
+              </a:schemeClr>
+            </a:lnRef>
+            <a:fillRef idx="1">
+              <a:schemeClr val="accent1"/>
+            </a:fillRef>
+            <a:effectRef idx="0">
+              <a:schemeClr val="accent1"/>
+            </a:effectRef>
+            <a:fontRef idx="minor">
+              <a:schemeClr val="lt1"/>
+            </a:fontRef>
+          </p:style>
+          <p:txBody>
+            <a:bodyPr rtlCol="0" anchor="ctr"/>
+            <a:lstStyle/>
+            <a:p>
+              <a:pPr algn="ctr"/>
+              <a:endParaRPr lang="fr-FR"/>
+            </a:p>
+          </p:txBody>
+        </p:sp>
+        <p:sp>
+          <p:nvSpPr>
+            <p:cNvPr id="20" name="ZoneTexte 19">
+              <a:extLst>
+                <a:ext uri="{FF2B5EF4-FFF2-40B4-BE49-F238E27FC236}">
+                  <a16:creationId xmlns:a16="http://schemas.microsoft.com/office/drawing/2014/main" id="{899F2090-8B4F-7512-F212-49284C54BCB0}"/>
+                </a:ext>
+              </a:extLst>
+            </p:cNvPr>
+            <p:cNvSpPr txBox="1"/>
+            <p:nvPr/>
+          </p:nvSpPr>
+          <p:spPr>
+            <a:xfrm>
+              <a:off x="7574766" y="2524839"/>
+              <a:ext cx="2284229" cy="369332"/>
+            </a:xfrm>
+            <a:prstGeom prst="rect">
+              <a:avLst/>
+            </a:prstGeom>
+            <a:noFill/>
+          </p:spPr>
+          <p:txBody>
+            <a:bodyPr wrap="square">
+              <a:spAutoFit/>
+            </a:bodyPr>
+            <a:lstStyle/>
+            <a:p>
+              <a:pPr algn="ctr"/>
+              <a:r>
+                <a:rPr lang="fr-FR" dirty="0"/>
+                <a:t>confiance suffisante ?</a:t>
+              </a:r>
+            </a:p>
+          </p:txBody>
+        </p:sp>
+        <p:sp>
+          <p:nvSpPr>
+            <p:cNvPr id="21" name="ZoneTexte 20">
+              <a:extLst>
+                <a:ext uri="{FF2B5EF4-FFF2-40B4-BE49-F238E27FC236}">
+                  <a16:creationId xmlns:a16="http://schemas.microsoft.com/office/drawing/2014/main" id="{BDB84AB1-464E-F09E-2A3A-FE4D05D32C54}"/>
+                </a:ext>
+              </a:extLst>
+            </p:cNvPr>
+            <p:cNvSpPr txBox="1"/>
+            <p:nvPr/>
+          </p:nvSpPr>
+          <p:spPr>
+            <a:xfrm>
+              <a:off x="7787511" y="3943197"/>
+              <a:ext cx="666424" cy="369332"/>
+            </a:xfrm>
+            <a:prstGeom prst="rect">
+              <a:avLst/>
+            </a:prstGeom>
+            <a:noFill/>
+          </p:spPr>
+          <p:txBody>
+            <a:bodyPr wrap="square">
+              <a:spAutoFit/>
+            </a:bodyPr>
+            <a:lstStyle/>
+            <a:p>
+              <a:pPr algn="ctr"/>
+              <a:r>
+                <a:rPr lang="fr-FR" dirty="0"/>
+                <a:t>OUI</a:t>
+              </a:r>
+            </a:p>
+          </p:txBody>
+        </p:sp>
+        <p:sp>
+          <p:nvSpPr>
+            <p:cNvPr id="22" name="ZoneTexte 21">
+              <a:extLst>
+                <a:ext uri="{FF2B5EF4-FFF2-40B4-BE49-F238E27FC236}">
+                  <a16:creationId xmlns:a16="http://schemas.microsoft.com/office/drawing/2014/main" id="{9FF6477D-8BD6-F918-B77F-9D76974097B5}"/>
+                </a:ext>
+              </a:extLst>
+            </p:cNvPr>
+            <p:cNvSpPr txBox="1"/>
+            <p:nvPr/>
+          </p:nvSpPr>
+          <p:spPr>
+            <a:xfrm>
+              <a:off x="9008217" y="3943197"/>
+              <a:ext cx="666424" cy="369332"/>
+            </a:xfrm>
+            <a:prstGeom prst="rect">
+              <a:avLst/>
+            </a:prstGeom>
+            <a:noFill/>
+          </p:spPr>
+          <p:txBody>
+            <a:bodyPr wrap="square">
+              <a:spAutoFit/>
+            </a:bodyPr>
+            <a:lstStyle/>
+            <a:p>
+              <a:pPr algn="ctr"/>
+              <a:r>
+                <a:rPr lang="fr-FR" dirty="0"/>
+                <a:t>NON</a:t>
+              </a:r>
+            </a:p>
+          </p:txBody>
+        </p:sp>
+        <p:pic>
+          <p:nvPicPr>
+            <p:cNvPr id="23" name="Picture 6" descr="Machine Learning Certified Professional (MLCP)">
+              <a:extLst>
+                <a:ext uri="{FF2B5EF4-FFF2-40B4-BE49-F238E27FC236}">
+                  <a16:creationId xmlns:a16="http://schemas.microsoft.com/office/drawing/2014/main" id="{5566884B-6D3F-4459-B2D3-E50E028D89F7}"/>
+                </a:ext>
+              </a:extLst>
+            </p:cNvPr>
+            <p:cNvPicPr>
+              <a:picLocks noChangeAspect="1" noChangeArrowheads="1"/>
+            </p:cNvPicPr>
+            <p:nvPr/>
+          </p:nvPicPr>
+          <p:blipFill rotWithShape="1">
+            <a:blip r:embed="rId3">
+              <a:extLst>
+                <a:ext uri="{28A0092B-C50C-407E-A947-70E740481C1C}">
+                  <a14:useLocalDpi xmlns:a14="http://schemas.microsoft.com/office/drawing/2010/main" val="0"/>
+                </a:ext>
+              </a:extLst>
+            </a:blip>
+            <a:srcRect l="17312" r="19121"/>
+            <a:stretch>
+              <a:fillRect/>
+            </a:stretch>
+          </p:blipFill>
+          <p:spPr bwMode="auto">
+            <a:xfrm>
+              <a:off x="8204008" y="861836"/>
+              <a:ext cx="1025747" cy="1613675"/>
+            </a:xfrm>
+            <a:prstGeom prst="rect">
+              <a:avLst/>
+            </a:prstGeom>
+            <a:noFill/>
+            <a:extLst>
+              <a:ext uri="{909E8E84-426E-40DD-AFC4-6F175D3DCCD1}">
+                <a14:hiddenFill xmlns:a14="http://schemas.microsoft.com/office/drawing/2010/main">
+                  <a:solidFill>
+                    <a:srgbClr val="FFFFFF"/>
+                  </a:solidFill>
+                </a14:hiddenFill>
+              </a:ext>
+            </a:extLst>
+          </p:spPr>
+        </p:pic>
+        <p:pic>
+          <p:nvPicPr>
+            <p:cNvPr id="24" name="Picture 4" descr="LLM or large language model icon for AI website and apps 63132258 Vector  Art at Vecteezy">
+              <a:extLst>
+                <a:ext uri="{FF2B5EF4-FFF2-40B4-BE49-F238E27FC236}">
+                  <a16:creationId xmlns:a16="http://schemas.microsoft.com/office/drawing/2014/main" id="{865DFE6B-5024-1B74-C0C6-B5C18C25B636}"/>
+                </a:ext>
+              </a:extLst>
+            </p:cNvPr>
+            <p:cNvPicPr>
+              <a:picLocks noChangeAspect="1" noChangeArrowheads="1"/>
+            </p:cNvPicPr>
+            <p:nvPr/>
+          </p:nvPicPr>
+          <p:blipFill>
+            <a:blip r:embed="rId4">
+              <a:extLst>
+                <a:ext uri="{28A0092B-C50C-407E-A947-70E740481C1C}">
+                  <a14:useLocalDpi xmlns:a14="http://schemas.microsoft.com/office/drawing/2010/main" val="0"/>
+                </a:ext>
+              </a:extLst>
+            </a:blip>
+            <a:srcRect/>
+            <a:stretch>
+              <a:fillRect/>
+            </a:stretch>
+          </p:blipFill>
+          <p:spPr bwMode="auto">
+            <a:xfrm>
+              <a:off x="8737536" y="4402235"/>
+              <a:ext cx="1207785" cy="1189610"/>
+            </a:xfrm>
+            <a:prstGeom prst="rect">
+              <a:avLst/>
+            </a:prstGeom>
+            <a:noFill/>
+            <a:extLst>
+              <a:ext uri="{909E8E84-426E-40DD-AFC4-6F175D3DCCD1}">
+                <a14:hiddenFill xmlns:a14="http://schemas.microsoft.com/office/drawing/2010/main">
+                  <a:solidFill>
+                    <a:srgbClr val="FFFFFF"/>
+                  </a:solidFill>
+                </a14:hiddenFill>
+              </a:ext>
+            </a:extLst>
+          </p:spPr>
+        </p:pic>
+        <p:cxnSp>
+          <p:nvCxnSpPr>
+            <p:cNvPr id="28" name="Connecteur droit avec flèche 27">
+              <a:extLst>
+                <a:ext uri="{FF2B5EF4-FFF2-40B4-BE49-F238E27FC236}">
+                  <a16:creationId xmlns:a16="http://schemas.microsoft.com/office/drawing/2014/main" id="{759DED2C-D15A-49AF-3944-2F8AF7EAD704}"/>
+                </a:ext>
+              </a:extLst>
+            </p:cNvPr>
+            <p:cNvCxnSpPr>
+              <a:cxnSpLocks/>
+            </p:cNvCxnSpPr>
+            <p:nvPr/>
+          </p:nvCxnSpPr>
+          <p:spPr>
+            <a:xfrm flipH="1">
+              <a:off x="8120723" y="3650137"/>
+              <a:ext cx="233917" cy="233917"/>
+            </a:xfrm>
+            <a:prstGeom prst="straightConnector1">
+              <a:avLst/>
+            </a:prstGeom>
+            <a:ln w="53975">
+              <a:tailEnd type="triangle"/>
+            </a:ln>
+          </p:spPr>
+          <p:style>
+            <a:lnRef idx="1">
+              <a:schemeClr val="accent1"/>
+            </a:lnRef>
+            <a:fillRef idx="0">
+              <a:schemeClr val="accent1"/>
+            </a:fillRef>
+            <a:effectRef idx="0">
+              <a:schemeClr val="accent1"/>
+            </a:effectRef>
+            <a:fontRef idx="minor">
+              <a:schemeClr val="tx1"/>
+            </a:fontRef>
+          </p:style>
+        </p:cxnSp>
+        <p:cxnSp>
+          <p:nvCxnSpPr>
+            <p:cNvPr id="29" name="Connecteur droit avec flèche 28">
+              <a:extLst>
+                <a:ext uri="{FF2B5EF4-FFF2-40B4-BE49-F238E27FC236}">
+                  <a16:creationId xmlns:a16="http://schemas.microsoft.com/office/drawing/2014/main" id="{0D9F5550-C6FE-3850-36FB-3418F948D6BE}"/>
+                </a:ext>
+              </a:extLst>
+            </p:cNvPr>
+            <p:cNvCxnSpPr>
+              <a:cxnSpLocks/>
+            </p:cNvCxnSpPr>
+            <p:nvPr/>
+          </p:nvCxnSpPr>
+          <p:spPr>
+            <a:xfrm>
+              <a:off x="9107512" y="3650137"/>
+              <a:ext cx="233917" cy="233917"/>
+            </a:xfrm>
+            <a:prstGeom prst="straightConnector1">
+              <a:avLst/>
+            </a:prstGeom>
+            <a:ln w="53975">
+              <a:tailEnd type="triangle"/>
+            </a:ln>
+          </p:spPr>
+          <p:style>
+            <a:lnRef idx="1">
+              <a:schemeClr val="accent1"/>
+            </a:lnRef>
+            <a:fillRef idx="0">
+              <a:schemeClr val="accent1"/>
+            </a:fillRef>
+            <a:effectRef idx="0">
+              <a:schemeClr val="accent1"/>
+            </a:effectRef>
+            <a:fontRef idx="minor">
+              <a:schemeClr val="tx1"/>
+            </a:fontRef>
+          </p:style>
+        </p:cxnSp>
+        <p:cxnSp>
+          <p:nvCxnSpPr>
+            <p:cNvPr id="30" name="Connecteur droit avec flèche 29">
+              <a:extLst>
+                <a:ext uri="{FF2B5EF4-FFF2-40B4-BE49-F238E27FC236}">
+                  <a16:creationId xmlns:a16="http://schemas.microsoft.com/office/drawing/2014/main" id="{112D8E29-173A-A22D-65DC-FF222786ABBD}"/>
+                </a:ext>
+              </a:extLst>
+            </p:cNvPr>
+            <p:cNvCxnSpPr>
+              <a:cxnSpLocks/>
+            </p:cNvCxnSpPr>
+            <p:nvPr/>
+          </p:nvCxnSpPr>
+          <p:spPr>
+            <a:xfrm>
+              <a:off x="8120723" y="4353505"/>
+              <a:ext cx="0" cy="1354547"/>
+            </a:xfrm>
+            <a:prstGeom prst="straightConnector1">
+              <a:avLst/>
+            </a:prstGeom>
+            <a:ln w="53975">
+              <a:tailEnd type="triangle"/>
+            </a:ln>
+          </p:spPr>
+          <p:style>
+            <a:lnRef idx="1">
+              <a:schemeClr val="accent1"/>
+            </a:lnRef>
+            <a:fillRef idx="0">
+              <a:schemeClr val="accent1"/>
+            </a:fillRef>
+            <a:effectRef idx="0">
+              <a:schemeClr val="accent1"/>
+            </a:effectRef>
+            <a:fontRef idx="minor">
+              <a:schemeClr val="tx1"/>
+            </a:fontRef>
+          </p:style>
+        </p:cxnSp>
+        <p:sp>
+          <p:nvSpPr>
+            <p:cNvPr id="33" name="Accolade fermante 32">
+              <a:extLst>
+                <a:ext uri="{FF2B5EF4-FFF2-40B4-BE49-F238E27FC236}">
+                  <a16:creationId xmlns:a16="http://schemas.microsoft.com/office/drawing/2014/main" id="{26758E6B-8BBA-AF70-4B66-77F67F7608BC}"/>
+                </a:ext>
+              </a:extLst>
+            </p:cNvPr>
+            <p:cNvSpPr/>
+            <p:nvPr/>
+          </p:nvSpPr>
+          <p:spPr>
+            <a:xfrm rot="5400000">
+              <a:off x="8543946" y="5008745"/>
+              <a:ext cx="345867" cy="1923893"/>
+            </a:xfrm>
+            <a:prstGeom prst="rightBrace">
+              <a:avLst>
+                <a:gd name="adj1" fmla="val 63668"/>
+                <a:gd name="adj2" fmla="val 50000"/>
+              </a:avLst>
+            </a:prstGeom>
+            <a:ln w="53975">
+              <a:tailEnd type="none"/>
+            </a:ln>
+          </p:spPr>
+          <p:style>
+            <a:lnRef idx="1">
+              <a:schemeClr val="accent1"/>
+            </a:lnRef>
+            <a:fillRef idx="0">
+              <a:schemeClr val="accent1"/>
+            </a:fillRef>
+            <a:effectRef idx="0">
+              <a:schemeClr val="accent1"/>
+            </a:effectRef>
+            <a:fontRef idx="minor">
+              <a:schemeClr val="tx1"/>
+            </a:fontRef>
+          </p:style>
+          <p:txBody>
+            <a:bodyPr rtlCol="0" anchor="ctr"/>
+            <a:lstStyle/>
+            <a:p>
+              <a:pPr algn="ctr"/>
+              <a:endParaRPr lang="fr-FR"/>
+            </a:p>
+          </p:txBody>
+        </p:sp>
+        <p:sp>
+          <p:nvSpPr>
+            <p:cNvPr id="35" name="ZoneTexte 34">
+              <a:extLst>
+                <a:ext uri="{FF2B5EF4-FFF2-40B4-BE49-F238E27FC236}">
+                  <a16:creationId xmlns:a16="http://schemas.microsoft.com/office/drawing/2014/main" id="{E2392B02-C9D3-63CB-1ADA-3649A74A2984}"/>
+                </a:ext>
+              </a:extLst>
+            </p:cNvPr>
+            <p:cNvSpPr txBox="1"/>
+            <p:nvPr/>
+          </p:nvSpPr>
+          <p:spPr>
+            <a:xfrm>
+              <a:off x="7930933" y="6172871"/>
+              <a:ext cx="1571892" cy="369332"/>
+            </a:xfrm>
+            <a:prstGeom prst="rect">
+              <a:avLst/>
+            </a:prstGeom>
+            <a:noFill/>
+          </p:spPr>
+          <p:txBody>
+            <a:bodyPr wrap="square">
+              <a:spAutoFit/>
+            </a:bodyPr>
+            <a:lstStyle/>
+            <a:p>
+              <a:pPr algn="ctr"/>
+              <a:r>
+                <a:rPr lang="fr-FR" dirty="0" err="1"/>
+                <a:t>ZenAssist</a:t>
+              </a:r>
+              <a:endParaRPr lang="fr-FR" dirty="0"/>
+            </a:p>
+          </p:txBody>
+        </p:sp>
+      </p:grpSp>
       <p:sp>
         <p:nvSpPr>
-          <p:cNvPr id="20" name="ZoneTexte 19">
+          <p:cNvPr id="36" name="ZoneTexte 35">
             <a:extLst>
               <a:ext uri="{FF2B5EF4-FFF2-40B4-BE49-F238E27FC236}">
-                <a16:creationId xmlns:a16="http://schemas.microsoft.com/office/drawing/2014/main" id="{899F2090-8B4F-7512-F212-49284C54BCB0}"/>
+                <a16:creationId xmlns:a16="http://schemas.microsoft.com/office/drawing/2014/main" id="{F7CF9B3B-403C-7D26-8CC2-5AE325862004}"/>
               </a:ext>
             </a:extLst>
           </p:cNvPr>
@@ -14894,8 +15428,8 @@
         </p:nvSpPr>
         <p:spPr>
           <a:xfrm>
-            <a:off x="7574766" y="2524839"/>
-            <a:ext cx="2284229" cy="369332"/>
+            <a:off x="838199" y="1690688"/>
+            <a:ext cx="5842000" cy="954107"/>
           </a:xfrm>
           <a:prstGeom prst="rect">
             <a:avLst/>
@@ -14908,387 +15442,14 @@
           </a:bodyPr>
           <a:lstStyle/>
           <a:p>
-            <a:pPr algn="ctr"/>
-            <a:r>
-              <a:rPr lang="fr-FR" dirty="0"/>
-              <a:t>confiance suffisante ?</a:t>
-            </a:r>
-          </a:p>
-        </p:txBody>
-      </p:sp>
-      <p:sp>
-        <p:nvSpPr>
-          <p:cNvPr id="21" name="ZoneTexte 20">
-            <a:extLst>
-              <a:ext uri="{FF2B5EF4-FFF2-40B4-BE49-F238E27FC236}">
-                <a16:creationId xmlns:a16="http://schemas.microsoft.com/office/drawing/2014/main" id="{BDB84AB1-464E-F09E-2A3A-FE4D05D32C54}"/>
-              </a:ext>
-            </a:extLst>
-          </p:cNvPr>
-          <p:cNvSpPr txBox="1"/>
-          <p:nvPr/>
-        </p:nvSpPr>
-        <p:spPr>
-          <a:xfrm>
-            <a:off x="7787511" y="3943197"/>
-            <a:ext cx="666424" cy="369332"/>
-          </a:xfrm>
-          <a:prstGeom prst="rect">
-            <a:avLst/>
-          </a:prstGeom>
-          <a:noFill/>
-        </p:spPr>
-        <p:txBody>
-          <a:bodyPr wrap="square">
-            <a:spAutoFit/>
-          </a:bodyPr>
-          <a:lstStyle/>
-          <a:p>
-            <a:pPr algn="ctr"/>
-            <a:r>
-              <a:rPr lang="fr-FR" dirty="0"/>
-              <a:t>OUI</a:t>
-            </a:r>
-          </a:p>
-        </p:txBody>
-      </p:sp>
-      <p:sp>
-        <p:nvSpPr>
-          <p:cNvPr id="22" name="ZoneTexte 21">
-            <a:extLst>
-              <a:ext uri="{FF2B5EF4-FFF2-40B4-BE49-F238E27FC236}">
-                <a16:creationId xmlns:a16="http://schemas.microsoft.com/office/drawing/2014/main" id="{9FF6477D-8BD6-F918-B77F-9D76974097B5}"/>
-              </a:ext>
-            </a:extLst>
-          </p:cNvPr>
-          <p:cNvSpPr txBox="1"/>
-          <p:nvPr/>
-        </p:nvSpPr>
-        <p:spPr>
-          <a:xfrm>
-            <a:off x="9008217" y="3943197"/>
-            <a:ext cx="666424" cy="369332"/>
-          </a:xfrm>
-          <a:prstGeom prst="rect">
-            <a:avLst/>
-          </a:prstGeom>
-          <a:noFill/>
-        </p:spPr>
-        <p:txBody>
-          <a:bodyPr wrap="square">
-            <a:spAutoFit/>
-          </a:bodyPr>
-          <a:lstStyle/>
-          <a:p>
-            <a:pPr algn="ctr"/>
-            <a:r>
-              <a:rPr lang="fr-FR" dirty="0"/>
-              <a:t>NON</a:t>
-            </a:r>
-          </a:p>
-        </p:txBody>
-      </p:sp>
-      <p:pic>
-        <p:nvPicPr>
-          <p:cNvPr id="23" name="Picture 6" descr="Machine Learning Certified Professional (MLCP)">
-            <a:extLst>
-              <a:ext uri="{FF2B5EF4-FFF2-40B4-BE49-F238E27FC236}">
-                <a16:creationId xmlns:a16="http://schemas.microsoft.com/office/drawing/2014/main" id="{5566884B-6D3F-4459-B2D3-E50E028D89F7}"/>
-              </a:ext>
-            </a:extLst>
-          </p:cNvPr>
-          <p:cNvPicPr>
-            <a:picLocks noChangeAspect="1" noChangeArrowheads="1"/>
-          </p:cNvPicPr>
-          <p:nvPr/>
-        </p:nvPicPr>
-        <p:blipFill rotWithShape="1">
-          <a:blip r:embed="rId3">
-            <a:extLst>
-              <a:ext uri="{28A0092B-C50C-407E-A947-70E740481C1C}">
-                <a14:useLocalDpi xmlns:a14="http://schemas.microsoft.com/office/drawing/2010/main" val="0"/>
-              </a:ext>
-            </a:extLst>
-          </a:blip>
-          <a:srcRect l="17312" r="19121"/>
-          <a:stretch>
-            <a:fillRect/>
-          </a:stretch>
-        </p:blipFill>
-        <p:spPr bwMode="auto">
-          <a:xfrm>
-            <a:off x="8204008" y="861836"/>
-            <a:ext cx="1025747" cy="1613675"/>
-          </a:xfrm>
-          <a:prstGeom prst="rect">
-            <a:avLst/>
-          </a:prstGeom>
-          <a:noFill/>
-          <a:extLst>
-            <a:ext uri="{909E8E84-426E-40DD-AFC4-6F175D3DCCD1}">
-              <a14:hiddenFill xmlns:a14="http://schemas.microsoft.com/office/drawing/2010/main">
-                <a:solidFill>
-                  <a:srgbClr val="FFFFFF"/>
-                </a:solidFill>
-              </a14:hiddenFill>
-            </a:ext>
-          </a:extLst>
-        </p:spPr>
-      </p:pic>
-      <p:pic>
-        <p:nvPicPr>
-          <p:cNvPr id="24" name="Picture 4" descr="LLM or large language model icon for AI website and apps 63132258 Vector  Art at Vecteezy">
-            <a:extLst>
-              <a:ext uri="{FF2B5EF4-FFF2-40B4-BE49-F238E27FC236}">
-                <a16:creationId xmlns:a16="http://schemas.microsoft.com/office/drawing/2014/main" id="{865DFE6B-5024-1B74-C0C6-B5C18C25B636}"/>
-              </a:ext>
-            </a:extLst>
-          </p:cNvPr>
-          <p:cNvPicPr>
-            <a:picLocks noChangeAspect="1" noChangeArrowheads="1"/>
-          </p:cNvPicPr>
-          <p:nvPr/>
-        </p:nvPicPr>
-        <p:blipFill>
-          <a:blip r:embed="rId4">
-            <a:extLst>
-              <a:ext uri="{28A0092B-C50C-407E-A947-70E740481C1C}">
-                <a14:useLocalDpi xmlns:a14="http://schemas.microsoft.com/office/drawing/2010/main" val="0"/>
-              </a:ext>
-            </a:extLst>
-          </a:blip>
-          <a:srcRect/>
-          <a:stretch>
-            <a:fillRect/>
-          </a:stretch>
-        </p:blipFill>
-        <p:spPr bwMode="auto">
-          <a:xfrm>
-            <a:off x="8737536" y="4402235"/>
-            <a:ext cx="1207785" cy="1189610"/>
-          </a:xfrm>
-          <a:prstGeom prst="rect">
-            <a:avLst/>
-          </a:prstGeom>
-          <a:noFill/>
-          <a:extLst>
-            <a:ext uri="{909E8E84-426E-40DD-AFC4-6F175D3DCCD1}">
-              <a14:hiddenFill xmlns:a14="http://schemas.microsoft.com/office/drawing/2010/main">
-                <a:solidFill>
-                  <a:srgbClr val="FFFFFF"/>
-                </a:solidFill>
-              </a14:hiddenFill>
-            </a:ext>
-          </a:extLst>
-        </p:spPr>
-      </p:pic>
-      <p:cxnSp>
-        <p:nvCxnSpPr>
-          <p:cNvPr id="28" name="Connecteur droit avec flèche 27">
-            <a:extLst>
-              <a:ext uri="{FF2B5EF4-FFF2-40B4-BE49-F238E27FC236}">
-                <a16:creationId xmlns:a16="http://schemas.microsoft.com/office/drawing/2014/main" id="{759DED2C-D15A-49AF-3944-2F8AF7EAD704}"/>
-              </a:ext>
-            </a:extLst>
-          </p:cNvPr>
-          <p:cNvCxnSpPr>
-            <a:cxnSpLocks/>
-          </p:cNvCxnSpPr>
-          <p:nvPr/>
-        </p:nvCxnSpPr>
-        <p:spPr>
-          <a:xfrm flipH="1">
-            <a:off x="8120723" y="3650137"/>
-            <a:ext cx="233917" cy="233917"/>
-          </a:xfrm>
-          <a:prstGeom prst="straightConnector1">
-            <a:avLst/>
-          </a:prstGeom>
-          <a:ln w="53975">
-            <a:tailEnd type="triangle"/>
-          </a:ln>
-        </p:spPr>
-        <p:style>
-          <a:lnRef idx="1">
-            <a:schemeClr val="accent1"/>
-          </a:lnRef>
-          <a:fillRef idx="0">
-            <a:schemeClr val="accent1"/>
-          </a:fillRef>
-          <a:effectRef idx="0">
-            <a:schemeClr val="accent1"/>
-          </a:effectRef>
-          <a:fontRef idx="minor">
-            <a:schemeClr val="tx1"/>
-          </a:fontRef>
-        </p:style>
-      </p:cxnSp>
-      <p:cxnSp>
-        <p:nvCxnSpPr>
-          <p:cNvPr id="29" name="Connecteur droit avec flèche 28">
-            <a:extLst>
-              <a:ext uri="{FF2B5EF4-FFF2-40B4-BE49-F238E27FC236}">
-                <a16:creationId xmlns:a16="http://schemas.microsoft.com/office/drawing/2014/main" id="{0D9F5550-C6FE-3850-36FB-3418F948D6BE}"/>
-              </a:ext>
-            </a:extLst>
-          </p:cNvPr>
-          <p:cNvCxnSpPr>
-            <a:cxnSpLocks/>
-          </p:cNvCxnSpPr>
-          <p:nvPr/>
-        </p:nvCxnSpPr>
-        <p:spPr>
-          <a:xfrm>
-            <a:off x="9107512" y="3650137"/>
-            <a:ext cx="233917" cy="233917"/>
-          </a:xfrm>
-          <a:prstGeom prst="straightConnector1">
-            <a:avLst/>
-          </a:prstGeom>
-          <a:ln w="53975">
-            <a:tailEnd type="triangle"/>
-          </a:ln>
-        </p:spPr>
-        <p:style>
-          <a:lnRef idx="1">
-            <a:schemeClr val="accent1"/>
-          </a:lnRef>
-          <a:fillRef idx="0">
-            <a:schemeClr val="accent1"/>
-          </a:fillRef>
-          <a:effectRef idx="0">
-            <a:schemeClr val="accent1"/>
-          </a:effectRef>
-          <a:fontRef idx="minor">
-            <a:schemeClr val="tx1"/>
-          </a:fontRef>
-        </p:style>
-      </p:cxnSp>
-      <p:cxnSp>
-        <p:nvCxnSpPr>
-          <p:cNvPr id="30" name="Connecteur droit avec flèche 29">
-            <a:extLst>
-              <a:ext uri="{FF2B5EF4-FFF2-40B4-BE49-F238E27FC236}">
-                <a16:creationId xmlns:a16="http://schemas.microsoft.com/office/drawing/2014/main" id="{112D8E29-173A-A22D-65DC-FF222786ABBD}"/>
-              </a:ext>
-            </a:extLst>
-          </p:cNvPr>
-          <p:cNvCxnSpPr>
-            <a:cxnSpLocks/>
-          </p:cNvCxnSpPr>
-          <p:nvPr/>
-        </p:nvCxnSpPr>
-        <p:spPr>
-          <a:xfrm>
-            <a:off x="8120723" y="4353505"/>
-            <a:ext cx="0" cy="1354547"/>
-          </a:xfrm>
-          <a:prstGeom prst="straightConnector1">
-            <a:avLst/>
-          </a:prstGeom>
-          <a:ln w="53975">
-            <a:tailEnd type="triangle"/>
-          </a:ln>
-        </p:spPr>
-        <p:style>
-          <a:lnRef idx="1">
-            <a:schemeClr val="accent1"/>
-          </a:lnRef>
-          <a:fillRef idx="0">
-            <a:schemeClr val="accent1"/>
-          </a:fillRef>
-          <a:effectRef idx="0">
-            <a:schemeClr val="accent1"/>
-          </a:effectRef>
-          <a:fontRef idx="minor">
-            <a:schemeClr val="tx1"/>
-          </a:fontRef>
-        </p:style>
-      </p:cxnSp>
-      <p:sp>
-        <p:nvSpPr>
-          <p:cNvPr id="33" name="Accolade fermante 32">
-            <a:extLst>
-              <a:ext uri="{FF2B5EF4-FFF2-40B4-BE49-F238E27FC236}">
-                <a16:creationId xmlns:a16="http://schemas.microsoft.com/office/drawing/2014/main" id="{26758E6B-8BBA-AF70-4B66-77F67F7608BC}"/>
-              </a:ext>
-            </a:extLst>
-          </p:cNvPr>
-          <p:cNvSpPr/>
-          <p:nvPr/>
-        </p:nvSpPr>
-        <p:spPr>
-          <a:xfrm rot="5400000">
-            <a:off x="8543946" y="5008745"/>
-            <a:ext cx="345867" cy="1923893"/>
-          </a:xfrm>
-          <a:prstGeom prst="rightBrace">
-            <a:avLst>
-              <a:gd name="adj1" fmla="val 63668"/>
-              <a:gd name="adj2" fmla="val 50000"/>
-            </a:avLst>
-          </a:prstGeom>
-          <a:ln w="53975">
-            <a:tailEnd type="none"/>
-          </a:ln>
-        </p:spPr>
-        <p:style>
-          <a:lnRef idx="1">
-            <a:schemeClr val="accent1"/>
-          </a:lnRef>
-          <a:fillRef idx="0">
-            <a:schemeClr val="accent1"/>
-          </a:fillRef>
-          <a:effectRef idx="0">
-            <a:schemeClr val="accent1"/>
-          </a:effectRef>
-          <a:fontRef idx="minor">
-            <a:schemeClr val="tx1"/>
-          </a:fontRef>
-        </p:style>
-        <p:txBody>
-          <a:bodyPr rtlCol="0" anchor="ctr"/>
-          <a:lstStyle/>
-          <a:p>
-            <a:pPr algn="ctr"/>
-            <a:endParaRPr lang="fr-FR"/>
-          </a:p>
-        </p:txBody>
-      </p:sp>
-      <p:sp>
-        <p:nvSpPr>
-          <p:cNvPr id="35" name="ZoneTexte 34">
-            <a:extLst>
-              <a:ext uri="{FF2B5EF4-FFF2-40B4-BE49-F238E27FC236}">
-                <a16:creationId xmlns:a16="http://schemas.microsoft.com/office/drawing/2014/main" id="{E2392B02-C9D3-63CB-1ADA-3649A74A2984}"/>
-              </a:ext>
-            </a:extLst>
-          </p:cNvPr>
-          <p:cNvSpPr txBox="1"/>
-          <p:nvPr/>
-        </p:nvSpPr>
-        <p:spPr>
-          <a:xfrm>
-            <a:off x="7930933" y="6172871"/>
-            <a:ext cx="1571892" cy="369332"/>
-          </a:xfrm>
-          <a:prstGeom prst="rect">
-            <a:avLst/>
-          </a:prstGeom>
-          <a:noFill/>
-        </p:spPr>
-        <p:txBody>
-          <a:bodyPr wrap="square">
-            <a:spAutoFit/>
-          </a:bodyPr>
-          <a:lstStyle/>
-          <a:p>
-            <a:pPr algn="ctr"/>
-            <a:r>
-              <a:rPr lang="fr-FR" dirty="0" err="1"/>
-              <a:t>ZenAssist</a:t>
-            </a:r>
-            <a:endParaRPr lang="fr-FR" dirty="0"/>
+            <a:pPr marL="457200" indent="-457200">
+              <a:buFont typeface="Arial" panose="020B0604020202020204" pitchFamily="34" charset="0"/>
+              <a:buChar char="•"/>
+            </a:pPr>
+            <a:r>
+              <a:rPr lang="fr-FR" sz="2800" dirty="0"/>
+              <a:t>Réserver l'utilisation du LLM aux cas difficiles.</a:t>
+            </a:r>
           </a:p>
         </p:txBody>
       </p:sp>
@@ -15305,7 +15466,7 @@
 </p:sld>
 </file>
 
-<file path=ppt/slides/slide32.xml><?xml version="1.0" encoding="utf-8"?>
+<file path=ppt/slides/slide28.xml><?xml version="1.0" encoding="utf-8"?>
 <p:sld xmlns:a="http://schemas.openxmlformats.org/drawingml/2006/main" xmlns:r="http://schemas.openxmlformats.org/officeDocument/2006/relationships" xmlns:p="http://schemas.openxmlformats.org/presentationml/2006/main">
   <p:cSld>
     <p:spTree>
@@ -15366,14 +15527,14 @@
             <p:ph idx="1"/>
             <p:extLst>
               <p:ext uri="{D42A27DB-BD31-4B8C-83A1-F6EECF244321}">
-                <p14:modId xmlns:p14="http://schemas.microsoft.com/office/powerpoint/2010/main" val="1758973691"/>
+                <p14:modId xmlns:p14="http://schemas.microsoft.com/office/powerpoint/2010/main" val="4281874336"/>
               </p:ext>
             </p:extLst>
           </p:nvPr>
         </p:nvGraphicFramePr>
         <p:xfrm>
-          <a:off x="838200" y="1690688"/>
-          <a:ext cx="10641864" cy="5091552"/>
+          <a:off x="838200" y="1576179"/>
+          <a:ext cx="10641864" cy="4754412"/>
         </p:xfrm>
         <a:graphic>
           <a:graphicData uri="http://schemas.openxmlformats.org/drawingml/2006/table">
@@ -15404,7 +15565,7 @@
                   </a:extLst>
                 </a:gridCol>
               </a:tblGrid>
-              <a:tr h="424296">
+              <a:tr h="396201">
                 <a:tc>
                   <a:txBody>
                     <a:bodyPr/>
@@ -15414,7 +15575,7 @@
                         <a:buNone/>
                       </a:pPr>
                       <a:r>
-                        <a:rPr lang="fr-FR" sz="1800" b="1" dirty="0"/>
+                        <a:rPr lang="fr-FR" sz="1600" b="1" dirty="0"/>
                         <a:t>Critère</a:t>
                       </a:r>
                     </a:p>
@@ -15430,7 +15591,7 @@
                         <a:buNone/>
                       </a:pPr>
                       <a:r>
-                        <a:rPr lang="fr-FR" sz="1800" b="1" dirty="0"/>
+                        <a:rPr lang="fr-FR" sz="1600" b="1" dirty="0"/>
                         <a:t>ML</a:t>
                       </a:r>
                     </a:p>
@@ -15446,8 +15607,8 @@
                         <a:buNone/>
                       </a:pPr>
                       <a:r>
-                        <a:rPr lang="fr-FR" sz="1800" b="1" dirty="0"/>
-                        <a:t>LLM</a:t>
+                        <a:rPr lang="fr-FR" sz="1600" b="1" dirty="0"/>
+                        <a:t>LLM (Mistral Small)</a:t>
                       </a:r>
                     </a:p>
                   </a:txBody>
@@ -15459,7 +15620,7 @@
                   </a:ext>
                 </a:extLst>
               </a:tr>
-              <a:tr h="424296">
+              <a:tr h="396201">
                 <a:tc>
                   <a:txBody>
                     <a:bodyPr/>
@@ -15469,7 +15630,7 @@
                         <a:buNone/>
                       </a:pPr>
                       <a:r>
-                        <a:rPr lang="fr-FR" sz="1800" b="1" dirty="0"/>
+                        <a:rPr lang="fr-FR" sz="1600" b="1" dirty="0"/>
                         <a:t>Hébergement</a:t>
                       </a:r>
                     </a:p>
@@ -15485,7 +15646,7 @@
                         <a:buNone/>
                       </a:pPr>
                       <a:r>
-                        <a:rPr lang="fr-FR" sz="1800"/>
+                        <a:rPr lang="fr-FR" sz="1600"/>
                         <a:t>Interne/cloud</a:t>
                       </a:r>
                     </a:p>
@@ -15501,8 +15662,8 @@
                         <a:buNone/>
                       </a:pPr>
                       <a:r>
-                        <a:rPr lang="fr-FR" sz="1800" dirty="0"/>
-                        <a:t>API Mistral ou LLM interne</a:t>
+                        <a:rPr lang="fr-FR" sz="1600" dirty="0"/>
+                        <a:t>API Mistral</a:t>
                       </a:r>
                     </a:p>
                   </a:txBody>
@@ -15514,7 +15675,7 @@
                   </a:ext>
                 </a:extLst>
               </a:tr>
-              <a:tr h="424296">
+              <a:tr h="396201">
                 <a:tc>
                   <a:txBody>
                     <a:bodyPr/>
@@ -15524,7 +15685,7 @@
                         <a:buNone/>
                       </a:pPr>
                       <a:r>
-                        <a:rPr lang="fr-FR" sz="1800" b="1"/>
+                        <a:rPr lang="fr-FR" sz="1600" b="1"/>
                         <a:t>Latence</a:t>
                       </a:r>
                     </a:p>
@@ -15540,7 +15701,7 @@
                         <a:buNone/>
                       </a:pPr>
                       <a:r>
-                        <a:rPr lang="fr-FR" sz="1800"/>
+                        <a:rPr lang="fr-FR" sz="1600"/>
                         <a:t>Très faible</a:t>
                       </a:r>
                     </a:p>
@@ -15556,8 +15717,8 @@
                         <a:buNone/>
                       </a:pPr>
                       <a:r>
-                        <a:rPr lang="fr-FR" sz="1800"/>
-                        <a:t>Plus élevée</a:t>
+                        <a:rPr lang="fr-FR" sz="1600" dirty="0"/>
+                        <a:t>Elevée</a:t>
                       </a:r>
                     </a:p>
                   </a:txBody>
@@ -15569,7 +15730,7 @@
                   </a:ext>
                 </a:extLst>
               </a:tr>
-              <a:tr h="424296">
+              <a:tr h="396201">
                 <a:tc>
                   <a:txBody>
                     <a:bodyPr/>
@@ -15579,8 +15740,8 @@
                         <a:buNone/>
                       </a:pPr>
                       <a:r>
-                        <a:rPr lang="fr-FR" sz="1800" b="1" dirty="0"/>
-                        <a:t>Coût par requête</a:t>
+                        <a:rPr lang="fr-FR" sz="1600" b="1" dirty="0"/>
+                        <a:t>Coût pour 1000 requêtes</a:t>
                       </a:r>
                     </a:p>
                   </a:txBody>
@@ -15591,11 +15752,25 @@
                     <a:bodyPr/>
                     <a:lstStyle/>
                     <a:p>
-                      <a:pPr>
+                      <a:pPr marL="0" marR="0" lvl="0" indent="0" algn="l" defTabSz="914400" rtl="0" eaLnBrk="1" fontAlgn="auto" latinLnBrk="0" hangingPunct="1">
+                        <a:lnSpc>
+                          <a:spcPct val="100000"/>
+                        </a:lnSpc>
+                        <a:spcBef>
+                          <a:spcPts val="0"/>
+                        </a:spcBef>
+                        <a:spcAft>
+                          <a:spcPts val="0"/>
+                        </a:spcAft>
+                        <a:buClrTx/>
+                        <a:buSzTx/>
+                        <a:buFontTx/>
                         <a:buNone/>
+                        <a:tabLst/>
+                        <a:defRPr/>
                       </a:pPr>
                       <a:r>
-                        <a:rPr lang="fr-FR" sz="1800"/>
+                        <a:rPr lang="fr-FR" sz="1600" dirty="0"/>
                         <a:t>Très faible</a:t>
                       </a:r>
                     </a:p>
@@ -15611,8 +15786,8 @@
                         <a:buNone/>
                       </a:pPr>
                       <a:r>
-                        <a:rPr lang="fr-FR" sz="1800"/>
-                        <a:t>Coût API</a:t>
+                        <a:rPr lang="fr-FR" sz="1600" dirty="0"/>
+                        <a:t>~ 0,54 $ - (~4,58 $ medium)</a:t>
                       </a:r>
                     </a:p>
                   </a:txBody>
@@ -15624,7 +15799,7 @@
                   </a:ext>
                 </a:extLst>
               </a:tr>
-              <a:tr h="424296">
+              <a:tr h="396201">
                 <a:tc>
                   <a:txBody>
                     <a:bodyPr/>
@@ -15634,7 +15809,67 @@
                         <a:buNone/>
                       </a:pPr>
                       <a:r>
-                        <a:rPr lang="fr-FR" sz="1800" b="1" dirty="0"/>
+                        <a:rPr lang="fr-FR" sz="1600" b="1" dirty="0"/>
+                        <a:t>Taux traitement heure</a:t>
+                      </a:r>
+                      <a:r>
+                        <a:rPr lang="fr-FR" sz="1600" dirty="0"/>
+                        <a:t> (synchrone)</a:t>
+                      </a:r>
+                      <a:endParaRPr lang="fr-FR" sz="1600" b="1" dirty="0"/>
+                    </a:p>
+                  </a:txBody>
+                  <a:tcPr marL="77702" marR="77702" marT="38851" marB="38851" anchor="ctr"/>
+                </a:tc>
+                <a:tc>
+                  <a:txBody>
+                    <a:bodyPr/>
+                    <a:lstStyle/>
+                    <a:p>
+                      <a:pPr>
+                        <a:buNone/>
+                      </a:pPr>
+                      <a:r>
+                        <a:rPr lang="fr-FR" sz="1600" dirty="0"/>
+                        <a:t>~ 3 600 000 requêtes / h</a:t>
+                      </a:r>
+                    </a:p>
+                  </a:txBody>
+                  <a:tcPr marL="77702" marR="77702" marT="38851" marB="38851" anchor="ctr"/>
+                </a:tc>
+                <a:tc>
+                  <a:txBody>
+                    <a:bodyPr/>
+                    <a:lstStyle/>
+                    <a:p>
+                      <a:pPr>
+                        <a:buNone/>
+                      </a:pPr>
+                      <a:r>
+                        <a:rPr lang="fr-FR" sz="1600" dirty="0"/>
+                        <a:t>~ 1 000 requêtes / h - (650 / h medium)</a:t>
+                      </a:r>
+                    </a:p>
+                  </a:txBody>
+                  <a:tcPr marL="77702" marR="77702" marT="38851" marB="38851" anchor="ctr"/>
+                </a:tc>
+                <a:extLst>
+                  <a:ext uri="{0D108BD9-81ED-4DB2-BD59-A6C34878D82A}">
+                    <a16:rowId xmlns:a16="http://schemas.microsoft.com/office/drawing/2014/main" val="1219782378"/>
+                  </a:ext>
+                </a:extLst>
+              </a:tr>
+              <a:tr h="396201">
+                <a:tc>
+                  <a:txBody>
+                    <a:bodyPr/>
+                    <a:lstStyle/>
+                    <a:p>
+                      <a:pPr>
+                        <a:buNone/>
+                      </a:pPr>
+                      <a:r>
+                        <a:rPr lang="fr-FR" sz="1600" b="1" dirty="0"/>
                         <a:t>Internet nécessaire</a:t>
                       </a:r>
                     </a:p>
@@ -15650,7 +15885,7 @@
                         <a:buNone/>
                       </a:pPr>
                       <a:r>
-                        <a:rPr lang="fr-FR" sz="1800"/>
+                        <a:rPr lang="fr-FR" sz="1600"/>
                         <a:t>Non</a:t>
                       </a:r>
                     </a:p>
@@ -15666,8 +15901,8 @@
                         <a:buNone/>
                       </a:pPr>
                       <a:r>
-                        <a:rPr lang="fr-FR" sz="1800"/>
-                        <a:t>Oui si API externe</a:t>
+                        <a:rPr lang="fr-FR" sz="1600" dirty="0"/>
+                        <a:t>Oui</a:t>
                       </a:r>
                     </a:p>
                   </a:txBody>
@@ -15679,7 +15914,7 @@
                   </a:ext>
                 </a:extLst>
               </a:tr>
-              <a:tr h="424296">
+              <a:tr h="396201">
                 <a:tc>
                   <a:txBody>
                     <a:bodyPr/>
@@ -15689,7 +15924,7 @@
                         <a:buNone/>
                       </a:pPr>
                       <a:r>
-                        <a:rPr lang="fr-FR" sz="1800" b="1" dirty="0"/>
+                        <a:rPr lang="fr-FR" sz="1600" b="1" dirty="0"/>
                         <a:t>Mise à jour</a:t>
                       </a:r>
                     </a:p>
@@ -15705,8 +15940,8 @@
                         <a:buNone/>
                       </a:pPr>
                       <a:r>
-                        <a:rPr lang="fr-FR" sz="1800"/>
-                        <a:t>Réentraînement</a:t>
+                        <a:rPr lang="fr-FR" sz="1600" dirty="0"/>
+                        <a:t>Réentraînement modèle</a:t>
                       </a:r>
                     </a:p>
                   </a:txBody>
@@ -15721,8 +15956,12 @@
                         <a:buNone/>
                       </a:pPr>
                       <a:r>
-                        <a:rPr lang="fr-FR" sz="1800"/>
-                        <a:t>Prompt/RAG/modèle</a:t>
+                        <a:rPr lang="fr-FR" sz="1600" dirty="0" err="1"/>
+                        <a:t>MaJ</a:t>
+                      </a:r>
+                      <a:r>
+                        <a:rPr lang="fr-FR" sz="1600" dirty="0"/>
+                        <a:t> Prompt/RAG/modèle</a:t>
                       </a:r>
                     </a:p>
                   </a:txBody>
@@ -15734,7 +15973,7 @@
                   </a:ext>
                 </a:extLst>
               </a:tr>
-              <a:tr h="424296">
+              <a:tr h="396201">
                 <a:tc>
                   <a:txBody>
                     <a:bodyPr/>
@@ -15744,7 +15983,7 @@
                         <a:buNone/>
                       </a:pPr>
                       <a:r>
-                        <a:rPr lang="fr-FR" sz="1800" b="1" dirty="0"/>
+                        <a:rPr lang="fr-FR" sz="1600" b="1" dirty="0"/>
                         <a:t>Données envoyées à un tiers</a:t>
                       </a:r>
                     </a:p>
@@ -15760,8 +15999,8 @@
                         <a:buNone/>
                       </a:pPr>
                       <a:r>
-                        <a:rPr lang="fr-FR" sz="1800"/>
-                        <a:t>Non nécessaire</a:t>
+                        <a:rPr lang="fr-FR" sz="1600" dirty="0"/>
+                        <a:t>Non</a:t>
                       </a:r>
                     </a:p>
                   </a:txBody>
@@ -15776,8 +16015,8 @@
                         <a:buNone/>
                       </a:pPr>
                       <a:r>
-                        <a:rPr lang="fr-FR" sz="1800"/>
-                        <a:t>Oui avec API externe</a:t>
+                        <a:rPr lang="fr-FR" sz="1600" dirty="0"/>
+                        <a:t>Oui</a:t>
                       </a:r>
                     </a:p>
                   </a:txBody>
@@ -15789,7 +16028,7 @@
                   </a:ext>
                 </a:extLst>
               </a:tr>
-              <a:tr h="424296">
+              <a:tr h="396201">
                 <a:tc>
                   <a:txBody>
                     <a:bodyPr/>
@@ -15799,7 +16038,7 @@
                         <a:buNone/>
                       </a:pPr>
                       <a:r>
-                        <a:rPr lang="fr-FR" sz="1800" b="1" dirty="0"/>
+                        <a:rPr lang="fr-FR" sz="1600" b="1" dirty="0"/>
                         <a:t>Monitoring</a:t>
                       </a:r>
                     </a:p>
@@ -15815,7 +16054,7 @@
                         <a:buNone/>
                       </a:pPr>
                       <a:r>
-                        <a:rPr lang="fr-FR" sz="1800"/>
+                        <a:rPr lang="fr-FR" sz="1600"/>
                         <a:t>Classique</a:t>
                       </a:r>
                     </a:p>
@@ -15831,7 +16070,7 @@
                         <a:buNone/>
                       </a:pPr>
                       <a:r>
-                        <a:rPr lang="fr-FR" sz="1800"/>
+                        <a:rPr lang="fr-FR" sz="1600"/>
                         <a:t>Classique + coûts/tokens</a:t>
                       </a:r>
                     </a:p>
@@ -15844,7 +16083,7 @@
                   </a:ext>
                 </a:extLst>
               </a:tr>
-              <a:tr h="424296">
+              <a:tr h="396201">
                 <a:tc>
                   <a:txBody>
                     <a:bodyPr/>
@@ -15854,7 +16093,7 @@
                         <a:buNone/>
                       </a:pPr>
                       <a:r>
-                        <a:rPr lang="fr-FR" sz="1800" b="1" dirty="0"/>
+                        <a:rPr lang="fr-FR" sz="1600" b="1" dirty="0"/>
                         <a:t>Scalabilité</a:t>
                       </a:r>
                     </a:p>
@@ -15870,7 +16109,7 @@
                         <a:buNone/>
                       </a:pPr>
                       <a:r>
-                        <a:rPr lang="fr-FR" sz="1800"/>
+                        <a:rPr lang="fr-FR" sz="1600"/>
                         <a:t>Très facile</a:t>
                       </a:r>
                     </a:p>
@@ -15886,7 +16125,7 @@
                         <a:buNone/>
                       </a:pPr>
                       <a:r>
-                        <a:rPr lang="fr-FR" sz="1800"/>
+                        <a:rPr lang="fr-FR" sz="1600"/>
                         <a:t>Facile mais coûteuse</a:t>
                       </a:r>
                     </a:p>
@@ -15899,7 +16138,7 @@
                   </a:ext>
                 </a:extLst>
               </a:tr>
-              <a:tr h="424296">
+              <a:tr h="396201">
                 <a:tc>
                   <a:txBody>
                     <a:bodyPr/>
@@ -15909,7 +16148,7 @@
                         <a:buNone/>
                       </a:pPr>
                       <a:r>
-                        <a:rPr lang="fr-FR" sz="1800" b="1" dirty="0"/>
+                        <a:rPr lang="fr-FR" sz="1600" b="1" dirty="0"/>
                         <a:t>Maintenance</a:t>
                       </a:r>
                     </a:p>
@@ -15925,7 +16164,7 @@
                         <a:buNone/>
                       </a:pPr>
                       <a:r>
-                        <a:rPr lang="fr-FR" sz="1800"/>
+                        <a:rPr lang="fr-FR" sz="1600"/>
                         <a:t>Modèle à réentraîner</a:t>
                       </a:r>
                     </a:p>
@@ -15941,7 +16180,7 @@
                         <a:buNone/>
                       </a:pPr>
                       <a:r>
-                        <a:rPr lang="fr-FR" sz="1800" dirty="0"/>
+                        <a:rPr lang="fr-FR" sz="1600" dirty="0"/>
                         <a:t>Prompt + RAG + modèle</a:t>
                       </a:r>
                     </a:p>
@@ -15954,7 +16193,7 @@
                   </a:ext>
                 </a:extLst>
               </a:tr>
-              <a:tr h="424296">
+              <a:tr h="396201">
                 <a:tc>
                   <a:txBody>
                     <a:bodyPr/>
@@ -15964,7 +16203,7 @@
                         <a:buNone/>
                       </a:pPr>
                       <a:r>
-                        <a:rPr lang="fr-FR" sz="1800" b="1" dirty="0"/>
+                        <a:rPr lang="fr-FR" sz="1600" b="1" dirty="0"/>
                         <a:t>Dépendance fournisseur</a:t>
                       </a:r>
                     </a:p>
@@ -15980,7 +16219,7 @@
                         <a:buNone/>
                       </a:pPr>
                       <a:r>
-                        <a:rPr lang="fr-FR" sz="1800"/>
+                        <a:rPr lang="fr-FR" sz="1600" dirty="0"/>
                         <a:t>Faible</a:t>
                       </a:r>
                     </a:p>
@@ -15996,8 +16235,8 @@
                         <a:buNone/>
                       </a:pPr>
                       <a:r>
-                        <a:rPr lang="fr-FR" sz="1800" dirty="0"/>
-                        <a:t>Forte si API</a:t>
+                        <a:rPr lang="fr-FR" sz="1600" dirty="0"/>
+                        <a:t>Forte</a:t>
                       </a:r>
                     </a:p>
                   </a:txBody>
@@ -16006,61 +16245,6 @@
                 <a:extLst>
                   <a:ext uri="{0D108BD9-81ED-4DB2-BD59-A6C34878D82A}">
                     <a16:rowId xmlns:a16="http://schemas.microsoft.com/office/drawing/2014/main" val="2933167915"/>
-                  </a:ext>
-                </a:extLst>
-              </a:tr>
-              <a:tr h="424296">
-                <a:tc>
-                  <a:txBody>
-                    <a:bodyPr/>
-                    <a:lstStyle/>
-                    <a:p>
-                      <a:pPr>
-                        <a:buNone/>
-                      </a:pPr>
-                      <a:r>
-                        <a:rPr lang="fr-FR" sz="1800" b="1" dirty="0"/>
-                        <a:t>Taux traitement heure</a:t>
-                      </a:r>
-                    </a:p>
-                  </a:txBody>
-                  <a:tcPr marL="77702" marR="77702" marT="38851" marB="38851" anchor="ctr"/>
-                </a:tc>
-                <a:tc>
-                  <a:txBody>
-                    <a:bodyPr/>
-                    <a:lstStyle/>
-                    <a:p>
-                      <a:pPr>
-                        <a:buNone/>
-                      </a:pPr>
-                      <a:r>
-                        <a:rPr lang="fr-FR" sz="1800" dirty="0"/>
-                        <a:t>~ 3 600 000 / h</a:t>
-                      </a:r>
-                    </a:p>
-                  </a:txBody>
-                  <a:tcPr marL="77702" marR="77702" marT="38851" marB="38851" anchor="ctr"/>
-                </a:tc>
-                <a:tc>
-                  <a:txBody>
-                    <a:bodyPr/>
-                    <a:lstStyle/>
-                    <a:p>
-                      <a:pPr>
-                        <a:buNone/>
-                      </a:pPr>
-                      <a:r>
-                        <a:rPr lang="fr-FR" sz="1800" dirty="0"/>
-                        <a:t>~ 1 000 / h</a:t>
-                      </a:r>
-                    </a:p>
-                  </a:txBody>
-                  <a:tcPr marL="77702" marR="77702" marT="38851" marB="38851" anchor="ctr"/>
-                </a:tc>
-                <a:extLst>
-                  <a:ext uri="{0D108BD9-81ED-4DB2-BD59-A6C34878D82A}">
-                    <a16:rowId xmlns:a16="http://schemas.microsoft.com/office/drawing/2014/main" val="4164165054"/>
                   </a:ext>
                 </a:extLst>
               </a:tr>
@@ -16081,7 +16265,7 @@
 </p:sld>
 </file>
 
-<file path=ppt/slides/slide4.xml><?xml version="1.0" encoding="utf-8"?>
+<file path=ppt/slides/slide29.xml><?xml version="1.0" encoding="utf-8"?>
 <p:sld xmlns:a="http://schemas.openxmlformats.org/drawingml/2006/main" xmlns:r="http://schemas.openxmlformats.org/officeDocument/2006/relationships" xmlns:p="http://schemas.openxmlformats.org/presentationml/2006/main">
   <p:cSld>
     <p:spTree>
@@ -16103,7 +16287,7 @@
           <p:cNvPr id="2" name="Titre 1">
             <a:extLst>
               <a:ext uri="{FF2B5EF4-FFF2-40B4-BE49-F238E27FC236}">
-                <a16:creationId xmlns:a16="http://schemas.microsoft.com/office/drawing/2014/main" id="{8910DBAC-37BB-75D7-2882-262E7BA33E4B}"/>
+                <a16:creationId xmlns:a16="http://schemas.microsoft.com/office/drawing/2014/main" id="{B159CC3F-35D3-E96B-7DE3-02F914F180AB}"/>
               </a:ext>
             </a:extLst>
           </p:cNvPr>
@@ -16119,11 +16303,7 @@
           <a:bodyPr/>
           <a:lstStyle/>
           <a:p>
-            <a:r>
-              <a:rPr lang="fr-FR" dirty="0" err="1"/>
-              <a:t>DataFrame</a:t>
-            </a:r>
-            <a:endParaRPr lang="fr-FR" dirty="0"/>
+            <a:endParaRPr lang="fr-FR"/>
           </a:p>
         </p:txBody>
       </p:sp>
@@ -16132,7 +16312,7 @@
           <p:cNvPr id="3" name="Espace réservé du contenu 2">
             <a:extLst>
               <a:ext uri="{FF2B5EF4-FFF2-40B4-BE49-F238E27FC236}">
-                <a16:creationId xmlns:a16="http://schemas.microsoft.com/office/drawing/2014/main" id="{292EE8EB-E893-A438-5DC8-BD9508881520}"/>
+                <a16:creationId xmlns:a16="http://schemas.microsoft.com/office/drawing/2014/main" id="{D2FF3E20-34AF-25AD-C08B-D5B595252071}"/>
               </a:ext>
             </a:extLst>
           </p:cNvPr>
@@ -16145,182 +16325,56 @@
         </p:nvSpPr>
         <p:spPr/>
         <p:txBody>
-          <a:bodyPr/>
-          <a:lstStyle/>
-          <a:p>
-            <a:pPr marL="0" indent="0">
-              <a:buNone/>
-            </a:pPr>
-            <a:r>
-              <a:rPr lang="fr-FR" dirty="0"/>
-              <a:t>Consumer Claim = Réclamation client (VARIABLE)</a:t>
-            </a:r>
-          </a:p>
-          <a:p>
-            <a:pPr marL="0" indent="0">
-              <a:buNone/>
-            </a:pPr>
-            <a:r>
-              <a:rPr lang="fr-FR" dirty="0"/>
-              <a:t>Tag = Etiquette associée (CIBLE)</a:t>
-            </a:r>
-          </a:p>
-        </p:txBody>
-      </p:sp>
-      <p:sp>
-        <p:nvSpPr>
-          <p:cNvPr id="5" name="ZoneTexte 4">
-            <a:extLst>
-              <a:ext uri="{FF2B5EF4-FFF2-40B4-BE49-F238E27FC236}">
-                <a16:creationId xmlns:a16="http://schemas.microsoft.com/office/drawing/2014/main" id="{39743E58-9FE0-56DE-C92A-659BCB89C84F}"/>
-              </a:ext>
-            </a:extLst>
-          </p:cNvPr>
-          <p:cNvSpPr txBox="1"/>
-          <p:nvPr/>
-        </p:nvSpPr>
-        <p:spPr>
-          <a:xfrm>
-            <a:off x="7833537" y="544652"/>
-            <a:ext cx="4074929" cy="5632311"/>
-          </a:xfrm>
-          <a:prstGeom prst="rect">
-            <a:avLst/>
-          </a:prstGeom>
-          <a:noFill/>
-        </p:spPr>
-        <p:txBody>
-          <a:bodyPr wrap="square">
-            <a:spAutoFit/>
+          <a:bodyPr>
+            <a:normAutofit fontScale="92500" lnSpcReduction="10000"/>
           </a:bodyPr>
           <a:lstStyle/>
           <a:p>
             <a:r>
               <a:rPr lang="fr-FR" dirty="0"/>
-              <a:t>Très intéressantes</a:t>
-            </a:r>
+              <a:t>Associer un texte automatiquement en fonction de la réclamation pour étendre la surface de prise en charge</a:t>
+            </a:r>
+          </a:p>
+          <a:p>
+            <a:endParaRPr lang="fr-FR" dirty="0"/>
           </a:p>
           <a:p>
             <a:r>
               <a:rPr lang="fr-FR" dirty="0"/>
-              <a:t>------------------</a:t>
-            </a:r>
-          </a:p>
-          <a:p>
+              <a:t>Le modèle est globalement performant, mais les catégories très minoritaires restent difficiles à prédire. La catégorie « </a:t>
+            </a:r>
+            <a:r>
+              <a:rPr lang="fr-FR" dirty="0" err="1"/>
+              <a:t>Other</a:t>
+            </a:r>
             <a:r>
               <a:rPr lang="fr-FR" dirty="0"/>
-              <a:t>Tag</a:t>
-            </a:r>
-          </a:p>
-          <a:p>
+              <a:t> </a:t>
+            </a:r>
             <a:r>
               <a:rPr lang="fr-FR" dirty="0" err="1"/>
-              <a:t>Company</a:t>
-            </a:r>
+              <a:t>financial</a:t>
+            </a:r>
+            <a:r>
+              <a:rPr lang="fr-FR" dirty="0"/>
+              <a:t> service » est trop vague</a:t>
+            </a:r>
+          </a:p>
+          <a:p>
             <a:endParaRPr lang="fr-FR" dirty="0"/>
           </a:p>
           <a:p>
             <a:r>
               <a:rPr lang="fr-FR" dirty="0"/>
-              <a:t>Date </a:t>
+              <a:t>Les performances varient fortement selon les catégories. Les catégories majoritaires et sémantiquement bien caractérisées sont correctement identifiées, tandis que les catégories minoritaires présentent un </a:t>
             </a:r>
             <a:r>
               <a:rPr lang="fr-FR" dirty="0" err="1"/>
-              <a:t>received</a:t>
-            </a:r>
-            <a:endParaRPr lang="fr-FR" dirty="0"/>
-          </a:p>
-          <a:p>
-            <a:r>
-              <a:rPr lang="fr-FR" dirty="0" err="1"/>
-              <a:t>Submitted</a:t>
+              <a:t>recall</a:t>
             </a:r>
             <a:r>
               <a:rPr lang="fr-FR" dirty="0"/>
-              <a:t> via</a:t>
-            </a:r>
-          </a:p>
-          <a:p>
-            <a:endParaRPr lang="fr-FR" dirty="0"/>
-          </a:p>
-          <a:p>
-            <a:r>
-              <a:rPr lang="fr-FR" dirty="0"/>
-              <a:t>Intéressantes</a:t>
-            </a:r>
-          </a:p>
-          <a:p>
-            <a:r>
-              <a:rPr lang="fr-FR" dirty="0"/>
-              <a:t>-------------</a:t>
-            </a:r>
-          </a:p>
-          <a:p>
-            <a:r>
-              <a:rPr lang="fr-FR" dirty="0"/>
-              <a:t>Tags</a:t>
-            </a:r>
-          </a:p>
-          <a:p>
-            <a:r>
-              <a:rPr lang="fr-FR" dirty="0"/>
-              <a:t>State</a:t>
-            </a:r>
-          </a:p>
-          <a:p>
-            <a:endParaRPr lang="fr-FR" dirty="0"/>
-          </a:p>
-          <a:p>
-            <a:r>
-              <a:rPr lang="fr-FR" dirty="0"/>
-              <a:t>Potentiellement intéressantes</a:t>
-            </a:r>
-          </a:p>
-          <a:p>
-            <a:r>
-              <a:rPr lang="fr-FR" dirty="0"/>
-              <a:t>-----------------------------</a:t>
-            </a:r>
-          </a:p>
-          <a:p>
-            <a:r>
-              <a:rPr lang="fr-FR" dirty="0"/>
-              <a:t>ZIP code</a:t>
-            </a:r>
-          </a:p>
-          <a:p>
-            <a:r>
-              <a:rPr lang="fr-FR" dirty="0"/>
-              <a:t>Consumer consent </a:t>
-            </a:r>
-            <a:r>
-              <a:rPr lang="fr-FR" dirty="0" err="1"/>
-              <a:t>provided</a:t>
-            </a:r>
-            <a:r>
-              <a:rPr lang="fr-FR" dirty="0"/>
-              <a:t>?</a:t>
-            </a:r>
-          </a:p>
-          <a:p>
-            <a:endParaRPr lang="fr-FR" dirty="0"/>
-          </a:p>
-          <a:p>
-            <a:r>
-              <a:rPr lang="fr-FR" dirty="0"/>
-              <a:t>À supprimer</a:t>
-            </a:r>
-          </a:p>
-          <a:p>
-            <a:r>
-              <a:rPr lang="fr-FR" dirty="0"/>
-              <a:t>-----------</a:t>
-            </a:r>
-          </a:p>
-          <a:p>
-            <a:r>
-              <a:rPr lang="fr-FR" dirty="0"/>
-              <a:t>Complaint ID</a:t>
+              <a:t> plus faible.</a:t>
             </a:r>
           </a:p>
         </p:txBody>
@@ -16328,7 +16382,7 @@
     </p:spTree>
     <p:extLst>
       <p:ext uri="{BB962C8B-B14F-4D97-AF65-F5344CB8AC3E}">
-        <p14:creationId xmlns:p14="http://schemas.microsoft.com/office/powerpoint/2010/main" val="364819160"/>
+        <p14:creationId xmlns:p14="http://schemas.microsoft.com/office/powerpoint/2010/main" val="2215893546"/>
       </p:ext>
     </p:extLst>
   </p:cSld>
@@ -16338,7 +16392,204 @@
 </p:sld>
 </file>
 
-<file path=ppt/slides/slide5.xml><?xml version="1.0" encoding="utf-8"?>
+<file path=ppt/slides/slide3.xml><?xml version="1.0" encoding="utf-8"?>
+<p:sld xmlns:a="http://schemas.openxmlformats.org/drawingml/2006/main" xmlns:r="http://schemas.openxmlformats.org/officeDocument/2006/relationships" xmlns:p="http://schemas.openxmlformats.org/presentationml/2006/main">
+  <p:cSld>
+    <p:spTree>
+      <p:nvGrpSpPr>
+        <p:cNvPr id="1" name=""/>
+        <p:cNvGrpSpPr/>
+        <p:nvPr/>
+      </p:nvGrpSpPr>
+      <p:grpSpPr>
+        <a:xfrm>
+          <a:off x="0" y="0"/>
+          <a:ext cx="0" cy="0"/>
+          <a:chOff x="0" y="0"/>
+          <a:chExt cx="0" cy="0"/>
+        </a:xfrm>
+      </p:grpSpPr>
+      <p:sp>
+        <p:nvSpPr>
+          <p:cNvPr id="2" name="Titre 1">
+            <a:extLst>
+              <a:ext uri="{FF2B5EF4-FFF2-40B4-BE49-F238E27FC236}">
+                <a16:creationId xmlns:a16="http://schemas.microsoft.com/office/drawing/2014/main" id="{CA0CB97F-097E-0FEC-42EB-89420D6043A1}"/>
+              </a:ext>
+            </a:extLst>
+          </p:cNvPr>
+          <p:cNvSpPr>
+            <a:spLocks noGrp="1"/>
+          </p:cNvSpPr>
+          <p:nvPr>
+            <p:ph type="title"/>
+          </p:nvPr>
+        </p:nvSpPr>
+        <p:spPr>
+          <a:xfrm>
+            <a:off x="838199" y="365125"/>
+            <a:ext cx="5360581" cy="3824103"/>
+          </a:xfrm>
+        </p:spPr>
+        <p:txBody>
+          <a:bodyPr>
+            <a:normAutofit/>
+          </a:bodyPr>
+          <a:lstStyle/>
+          <a:p>
+            <a:r>
+              <a:rPr lang="fr-FR" sz="6600" dirty="0">
+                <a:solidFill>
+                  <a:schemeClr val="accent1">
+                    <a:lumMod val="75000"/>
+                  </a:schemeClr>
+                </a:solidFill>
+                <a:latin typeface="Segoe UI Black" panose="020B0A02040204020203" pitchFamily="34" charset="0"/>
+                <a:ea typeface="Segoe UI Black" panose="020B0A02040204020203" pitchFamily="34" charset="0"/>
+              </a:rPr>
+              <a:t>Analyse exploratoire des données</a:t>
+            </a:r>
+          </a:p>
+        </p:txBody>
+      </p:sp>
+      <p:pic>
+        <p:nvPicPr>
+          <p:cNvPr id="2050" name="Picture 2" descr="Analyse exploratoire - Icônes ordinateur gratuites">
+            <a:extLst>
+              <a:ext uri="{FF2B5EF4-FFF2-40B4-BE49-F238E27FC236}">
+                <a16:creationId xmlns:a16="http://schemas.microsoft.com/office/drawing/2014/main" id="{AD618C70-2F2B-E7F8-3413-9BB4F19C3E28}"/>
+              </a:ext>
+            </a:extLst>
+          </p:cNvPr>
+          <p:cNvPicPr>
+            <a:picLocks noChangeAspect="1" noChangeArrowheads="1"/>
+          </p:cNvPicPr>
+          <p:nvPr/>
+        </p:nvPicPr>
+        <p:blipFill>
+          <a:blip r:embed="rId2">
+            <a:extLst>
+              <a:ext uri="{28A0092B-C50C-407E-A947-70E740481C1C}">
+                <a14:useLocalDpi xmlns:a14="http://schemas.microsoft.com/office/drawing/2010/main" val="0"/>
+              </a:ext>
+            </a:extLst>
+          </a:blip>
+          <a:srcRect/>
+          <a:stretch>
+            <a:fillRect/>
+          </a:stretch>
+        </p:blipFill>
+        <p:spPr bwMode="auto">
+          <a:xfrm>
+            <a:off x="6976731" y="1554126"/>
+            <a:ext cx="4876800" cy="4876800"/>
+          </a:xfrm>
+          <a:prstGeom prst="rect">
+            <a:avLst/>
+          </a:prstGeom>
+          <a:noFill/>
+          <a:extLst>
+            <a:ext uri="{909E8E84-426E-40DD-AFC4-6F175D3DCCD1}">
+              <a14:hiddenFill xmlns:a14="http://schemas.microsoft.com/office/drawing/2010/main">
+                <a:solidFill>
+                  <a:srgbClr val="FFFFFF"/>
+                </a:solidFill>
+              </a14:hiddenFill>
+            </a:ext>
+          </a:extLst>
+        </p:spPr>
+      </p:pic>
+    </p:spTree>
+    <p:extLst>
+      <p:ext uri="{BB962C8B-B14F-4D97-AF65-F5344CB8AC3E}">
+        <p14:creationId xmlns:p14="http://schemas.microsoft.com/office/powerpoint/2010/main" val="898818486"/>
+      </p:ext>
+    </p:extLst>
+  </p:cSld>
+  <p:clrMapOvr>
+    <a:masterClrMapping/>
+  </p:clrMapOvr>
+</p:sld>
+</file>
+
+<file path=ppt/slides/slide30.xml><?xml version="1.0" encoding="utf-8"?>
+<p:sld xmlns:a="http://schemas.openxmlformats.org/drawingml/2006/main" xmlns:r="http://schemas.openxmlformats.org/officeDocument/2006/relationships" xmlns:p="http://schemas.openxmlformats.org/presentationml/2006/main">
+  <p:cSld>
+    <p:spTree>
+      <p:nvGrpSpPr>
+        <p:cNvPr id="1" name=""/>
+        <p:cNvGrpSpPr/>
+        <p:nvPr/>
+      </p:nvGrpSpPr>
+      <p:grpSpPr>
+        <a:xfrm>
+          <a:off x="0" y="0"/>
+          <a:ext cx="0" cy="0"/>
+          <a:chOff x="0" y="0"/>
+          <a:chExt cx="0" cy="0"/>
+        </a:xfrm>
+      </p:grpSpPr>
+      <p:pic>
+        <p:nvPicPr>
+          <p:cNvPr id="2050" name="Picture 2" descr="merci – Simple Slide">
+            <a:extLst>
+              <a:ext uri="{FF2B5EF4-FFF2-40B4-BE49-F238E27FC236}">
+                <a16:creationId xmlns:a16="http://schemas.microsoft.com/office/drawing/2014/main" id="{BB5EE8A3-759E-0507-EF57-72BF1F193F56}"/>
+              </a:ext>
+            </a:extLst>
+          </p:cNvPr>
+          <p:cNvPicPr>
+            <a:picLocks noChangeAspect="1" noChangeArrowheads="1"/>
+          </p:cNvPicPr>
+          <p:nvPr/>
+        </p:nvPicPr>
+        <p:blipFill>
+          <a:blip r:embed="rId2">
+            <a:extLst>
+              <a:ext uri="{28A0092B-C50C-407E-A947-70E740481C1C}">
+                <a14:useLocalDpi xmlns:a14="http://schemas.microsoft.com/office/drawing/2010/main" val="0"/>
+              </a:ext>
+            </a:extLst>
+          </a:blip>
+          <a:srcRect/>
+          <a:stretch>
+            <a:fillRect/>
+          </a:stretch>
+        </p:blipFill>
+        <p:spPr bwMode="auto">
+          <a:xfrm>
+            <a:off x="3990975" y="2814638"/>
+            <a:ext cx="4210050" cy="1228725"/>
+          </a:xfrm>
+          <a:prstGeom prst="rect">
+            <a:avLst/>
+          </a:prstGeom>
+          <a:noFill/>
+          <a:extLst>
+            <a:ext uri="{909E8E84-426E-40DD-AFC4-6F175D3DCCD1}">
+              <a14:hiddenFill xmlns:a14="http://schemas.microsoft.com/office/drawing/2010/main">
+                <a:solidFill>
+                  <a:srgbClr val="FFFFFF"/>
+                </a:solidFill>
+              </a14:hiddenFill>
+            </a:ext>
+          </a:extLst>
+        </p:spPr>
+      </p:pic>
+    </p:spTree>
+    <p:extLst>
+      <p:ext uri="{BB962C8B-B14F-4D97-AF65-F5344CB8AC3E}">
+        <p14:creationId xmlns:p14="http://schemas.microsoft.com/office/powerpoint/2010/main" val="988253673"/>
+      </p:ext>
+    </p:extLst>
+  </p:cSld>
+  <p:clrMapOvr>
+    <a:masterClrMapping/>
+  </p:clrMapOvr>
+</p:sld>
+</file>
+
+<file path=ppt/slides/slide4.xml><?xml version="1.0" encoding="utf-8"?>
 <p:sld xmlns:a="http://schemas.openxmlformats.org/drawingml/2006/main" xmlns:r="http://schemas.openxmlformats.org/officeDocument/2006/relationships" xmlns:p="http://schemas.openxmlformats.org/presentationml/2006/main">
   <p:cSld>
     <p:spTree>
@@ -16573,7 +16824,7 @@
 </p:sld>
 </file>
 
-<file path=ppt/slides/slide6.xml><?xml version="1.0" encoding="utf-8"?>
+<file path=ppt/slides/slide5.xml><?xml version="1.0" encoding="utf-8"?>
 <p:sld xmlns:a="http://schemas.openxmlformats.org/drawingml/2006/main" xmlns:r="http://schemas.openxmlformats.org/officeDocument/2006/relationships" xmlns:p="http://schemas.openxmlformats.org/presentationml/2006/main">
   <p:cSld>
     <p:spTree>
@@ -16614,16 +16865,6 @@
           <a:lstStyle/>
           <a:p>
             <a:r>
-              <a:rPr lang="fr-FR" b="1" dirty="0">
-                <a:solidFill>
-                  <a:sysClr val="windowText" lastClr="000000"/>
-                </a:solidFill>
-              </a:rPr>
-              <a:t>Certaines catégories sont des sous ensembles d’autres catégories pouvant prêter à confusion</a:t>
-            </a:r>
-          </a:p>
-          <a:p>
-            <a:r>
               <a:rPr lang="fr-FR" dirty="0"/>
               <a:t>Les </a:t>
             </a:r>
@@ -16746,7 +16987,7 @@
 </p:sld>
 </file>
 
-<file path=ppt/slides/slide7.xml><?xml version="1.0" encoding="utf-8"?>
+<file path=ppt/slides/slide6.xml><?xml version="1.0" encoding="utf-8"?>
 <p:sld xmlns:a="http://schemas.openxmlformats.org/drawingml/2006/main" xmlns:r="http://schemas.openxmlformats.org/officeDocument/2006/relationships" xmlns:p="http://schemas.openxmlformats.org/presentationml/2006/main">
   <p:cSld>
     <p:spTree>
@@ -17637,7 +17878,7 @@
 </p:sld>
 </file>
 
-<file path=ppt/slides/slide8.xml><?xml version="1.0" encoding="utf-8"?>
+<file path=ppt/slides/slide7.xml><?xml version="1.0" encoding="utf-8"?>
 <p:sld xmlns:a="http://schemas.openxmlformats.org/drawingml/2006/main" xmlns:r="http://schemas.openxmlformats.org/officeDocument/2006/relationships" xmlns:p="http://schemas.openxmlformats.org/presentationml/2006/main">
   <p:cSld>
     <p:spTree>
@@ -18336,7 +18577,7 @@
 </p:sld>
 </file>
 
-<file path=ppt/slides/slide9.xml><?xml version="1.0" encoding="utf-8"?>
+<file path=ppt/slides/slide8.xml><?xml version="1.0" encoding="utf-8"?>
 <p:sld xmlns:a="http://schemas.openxmlformats.org/drawingml/2006/main" xmlns:r="http://schemas.openxmlformats.org/officeDocument/2006/relationships" xmlns:p="http://schemas.openxmlformats.org/presentationml/2006/main">
   <p:cSld>
     <p:spTree>
@@ -18398,7 +18639,7 @@
           <p:nvPr>
             <p:extLst>
               <p:ext uri="{D42A27DB-BD31-4B8C-83A1-F6EECF244321}">
-                <p14:modId xmlns:p14="http://schemas.microsoft.com/office/powerpoint/2010/main" val="2329270293"/>
+                <p14:modId xmlns:p14="http://schemas.microsoft.com/office/powerpoint/2010/main" val="371030456"/>
               </p:ext>
             </p:extLst>
           </p:nvPr>
@@ -18740,15 +18981,15 @@
                         <a:buNone/>
                       </a:pPr>
                       <a:r>
-                        <a:rPr lang="fr-FR" sz="1800" b="0" u="none" strike="noStrike">
+                        <a:rPr lang="fr-FR" sz="1800" b="0" u="none" strike="noStrike" dirty="0">
                           <a:solidFill>
                             <a:schemeClr val="bg1"/>
                           </a:solidFill>
                           <a:effectLst/>
                         </a:rPr>
-                        <a:t>un déséquilibre très important des classes. </a:t>
+                        <a:t>Déséquilibre très important des classes. </a:t>
                       </a:r>
-                      <a:endParaRPr lang="fr-FR" sz="1800" b="0" i="0" u="none" strike="noStrike">
+                      <a:endParaRPr lang="fr-FR" sz="1800" b="0" i="0" u="none" strike="noStrike" dirty="0">
                         <a:solidFill>
                           <a:schemeClr val="bg1"/>
                         </a:solidFill>
@@ -19004,7 +19245,7 @@
                           </a:solidFill>
                           <a:effectLst/>
                         </a:rPr>
-                        <a:t>Oui: Uniquement </a:t>
+                        <a:t>Oui: Seul « </a:t>
                       </a:r>
                       <a:r>
                         <a:rPr lang="fr-FR" sz="1800" b="0" u="none" strike="noStrike" dirty="0" err="1">
@@ -19022,7 +19263,16 @@
                           </a:solidFill>
                           <a:effectLst/>
                         </a:rPr>
-                        <a:t> via Web renseigne un texte (et seulement 40%)</a:t>
+                        <a:t> via Web » renseigne du texte </a:t>
+                      </a:r>
+                      <a:r>
+                        <a:rPr lang="fr-FR" sz="1400" b="0" u="none" strike="noStrike" dirty="0">
+                          <a:solidFill>
+                            <a:schemeClr val="bg1"/>
+                          </a:solidFill>
+                          <a:effectLst/>
+                        </a:rPr>
+                        <a:t>(et pour seulement 40%)</a:t>
                       </a:r>
                       <a:endParaRPr lang="fr-FR" sz="1800" b="0" i="0" u="none" strike="noStrike" dirty="0">
                         <a:solidFill>
@@ -19163,15 +19413,24 @@
                         <a:buNone/>
                       </a:pPr>
                       <a:r>
-                        <a:rPr lang="fr-FR" sz="1800" b="0" u="none" strike="noStrike">
+                        <a:rPr lang="fr-FR" sz="1800" b="0" u="none" strike="noStrike" dirty="0">
                           <a:solidFill>
                             <a:schemeClr val="bg1"/>
                           </a:solidFill>
                           <a:effectLst/>
                         </a:rPr>
-                        <a:t>Oui: 99% des textes renseignés définissent Consent provided</a:t>
+                        <a:t>Oui: 99% des textes renseignés définissent Consent </a:t>
                       </a:r>
-                      <a:endParaRPr lang="fr-FR" sz="1800" b="0" i="0" u="none" strike="noStrike">
+                      <a:r>
+                        <a:rPr lang="fr-FR" sz="1800" b="0" u="none" strike="noStrike" dirty="0" err="1">
+                          <a:solidFill>
+                            <a:schemeClr val="bg1"/>
+                          </a:solidFill>
+                          <a:effectLst/>
+                        </a:rPr>
+                        <a:t>provided</a:t>
+                      </a:r>
+                      <a:endParaRPr lang="fr-FR" sz="1800" b="0" i="0" u="none" strike="noStrike" dirty="0">
                         <a:solidFill>
                           <a:schemeClr val="bg1"/>
                         </a:solidFill>
@@ -19427,7 +19686,7 @@
                           </a:solidFill>
                           <a:effectLst/>
                         </a:rPr>
-                        <a:t>Oui: 16,619 (~1%)</a:t>
+                        <a:t>Oui: 16,619 (~4% des réclamations)</a:t>
                       </a:r>
                       <a:endParaRPr lang="fr-FR" sz="1800" b="0" i="0" u="none" strike="noStrike" dirty="0">
                         <a:solidFill>
@@ -19487,6 +19746,202 @@
     <p:extLst>
       <p:ext uri="{BB962C8B-B14F-4D97-AF65-F5344CB8AC3E}">
         <p14:creationId xmlns:p14="http://schemas.microsoft.com/office/powerpoint/2010/main" val="1848606062"/>
+      </p:ext>
+    </p:extLst>
+  </p:cSld>
+  <p:clrMapOvr>
+    <a:masterClrMapping/>
+  </p:clrMapOvr>
+</p:sld>
+</file>
+
+<file path=ppt/slides/slide9.xml><?xml version="1.0" encoding="utf-8"?>
+<p:sld xmlns:a="http://schemas.openxmlformats.org/drawingml/2006/main" xmlns:r="http://schemas.openxmlformats.org/officeDocument/2006/relationships" xmlns:p="http://schemas.openxmlformats.org/presentationml/2006/main">
+  <p:cSld>
+    <p:spTree>
+      <p:nvGrpSpPr>
+        <p:cNvPr id="1" name=""/>
+        <p:cNvGrpSpPr/>
+        <p:nvPr/>
+      </p:nvGrpSpPr>
+      <p:grpSpPr>
+        <a:xfrm>
+          <a:off x="0" y="0"/>
+          <a:ext cx="0" cy="0"/>
+          <a:chOff x="0" y="0"/>
+          <a:chExt cx="0" cy="0"/>
+        </a:xfrm>
+      </p:grpSpPr>
+      <p:sp>
+        <p:nvSpPr>
+          <p:cNvPr id="2" name="Titre 1">
+            <a:extLst>
+              <a:ext uri="{FF2B5EF4-FFF2-40B4-BE49-F238E27FC236}">
+                <a16:creationId xmlns:a16="http://schemas.microsoft.com/office/drawing/2014/main" id="{7E387BAE-1479-8FE5-7C51-ACB6677BCFD6}"/>
+              </a:ext>
+            </a:extLst>
+          </p:cNvPr>
+          <p:cNvSpPr>
+            <a:spLocks noGrp="1"/>
+          </p:cNvSpPr>
+          <p:nvPr>
+            <p:ph type="title"/>
+          </p:nvPr>
+        </p:nvSpPr>
+        <p:spPr/>
+        <p:txBody>
+          <a:bodyPr/>
+          <a:lstStyle/>
+          <a:p>
+            <a:r>
+              <a:rPr lang="fr-FR" dirty="0"/>
+              <a:t>Split train / test</a:t>
+            </a:r>
+          </a:p>
+        </p:txBody>
+      </p:sp>
+      <p:sp>
+        <p:nvSpPr>
+          <p:cNvPr id="5" name="ZoneTexte 4">
+            <a:extLst>
+              <a:ext uri="{FF2B5EF4-FFF2-40B4-BE49-F238E27FC236}">
+                <a16:creationId xmlns:a16="http://schemas.microsoft.com/office/drawing/2014/main" id="{079386C9-9156-2BDB-6415-CF3DD948EB0C}"/>
+              </a:ext>
+            </a:extLst>
+          </p:cNvPr>
+          <p:cNvSpPr txBox="1"/>
+          <p:nvPr/>
+        </p:nvSpPr>
+        <p:spPr>
+          <a:xfrm>
+            <a:off x="5257800" y="2109584"/>
+            <a:ext cx="6096000" cy="3970318"/>
+          </a:xfrm>
+          <a:prstGeom prst="rect">
+            <a:avLst/>
+          </a:prstGeom>
+          <a:noFill/>
+        </p:spPr>
+        <p:txBody>
+          <a:bodyPr wrap="square">
+            <a:spAutoFit/>
+          </a:bodyPr>
+          <a:lstStyle/>
+          <a:p>
+            <a:pPr marL="457200" indent="-457200">
+              <a:buFont typeface="Arial" panose="020B0604020202020204" pitchFamily="34" charset="0"/>
+              <a:buChar char="•"/>
+            </a:pPr>
+            <a:r>
+              <a:rPr lang="fr-FR" sz="2800" b="1" dirty="0"/>
+              <a:t>20 % des données pour le test</a:t>
+            </a:r>
+          </a:p>
+          <a:p>
+            <a:pPr lvl="2"/>
+            <a:r>
+              <a:rPr lang="fr-FR" sz="2800" dirty="0"/>
+              <a:t>=&gt; 76 700 réclamations</a:t>
+            </a:r>
+          </a:p>
+          <a:p>
+            <a:pPr marL="457200" indent="-457200">
+              <a:buFont typeface="Arial" panose="020B0604020202020204" pitchFamily="34" charset="0"/>
+              <a:buChar char="•"/>
+            </a:pPr>
+            <a:r>
+              <a:rPr lang="fr-FR" sz="2800" b="1" dirty="0"/>
+              <a:t>80 % restants pour l'entraînement</a:t>
+            </a:r>
+          </a:p>
+          <a:p>
+            <a:pPr marL="1200150" lvl="2" indent="-285750">
+              <a:buFont typeface="Symbol" panose="05050102010706020507" pitchFamily="18" charset="2"/>
+              <a:buChar char="Þ"/>
+            </a:pPr>
+            <a:r>
+              <a:rPr lang="fr-FR" sz="2800" dirty="0"/>
+              <a:t>306 800 réclamations</a:t>
+            </a:r>
+          </a:p>
+          <a:p>
+            <a:pPr marL="457200" indent="-457200">
+              <a:buFont typeface="Arial" panose="020B0604020202020204" pitchFamily="34" charset="0"/>
+              <a:buChar char="•"/>
+            </a:pPr>
+            <a:r>
+              <a:rPr lang="fr-FR" sz="2800" b="1" dirty="0"/>
+              <a:t>Tirage aléatoire avec </a:t>
+            </a:r>
+            <a:r>
+              <a:rPr lang="fr-FR" sz="2800" b="1" dirty="0" err="1"/>
+              <a:t>seed</a:t>
+            </a:r>
+            <a:r>
+              <a:rPr lang="fr-FR" sz="2800" b="1" dirty="0"/>
+              <a:t> pour reproduire l'expérience</a:t>
+            </a:r>
+          </a:p>
+          <a:p>
+            <a:pPr marL="457200" indent="-457200">
+              <a:buFont typeface="Arial" panose="020B0604020202020204" pitchFamily="34" charset="0"/>
+              <a:buChar char="•"/>
+            </a:pPr>
+            <a:r>
+              <a:rPr lang="fr-FR" sz="2800" b="1" dirty="0"/>
+              <a:t>Conserve</a:t>
+            </a:r>
+            <a:r>
+              <a:rPr lang="fr-FR" sz="2800" dirty="0"/>
+              <a:t> </a:t>
+            </a:r>
+            <a:r>
+              <a:rPr lang="fr-FR" sz="2800" b="1" dirty="0"/>
+              <a:t>les mêmes proportions de chaque catégorie dans le train et dans le test</a:t>
+            </a:r>
+          </a:p>
+        </p:txBody>
+      </p:sp>
+      <p:pic>
+        <p:nvPicPr>
+          <p:cNvPr id="7" name="Image 6">
+            <a:extLst>
+              <a:ext uri="{FF2B5EF4-FFF2-40B4-BE49-F238E27FC236}">
+                <a16:creationId xmlns:a16="http://schemas.microsoft.com/office/drawing/2014/main" id="{091D3656-2410-C07C-A500-B61473E9B9FC}"/>
+              </a:ext>
+            </a:extLst>
+          </p:cNvPr>
+          <p:cNvPicPr>
+            <a:picLocks noChangeAspect="1"/>
+          </p:cNvPicPr>
+          <p:nvPr/>
+        </p:nvPicPr>
+        <p:blipFill>
+          <a:blip r:embed="rId3">
+            <a:extLst>
+              <a:ext uri="{28A0092B-C50C-407E-A947-70E740481C1C}">
+                <a14:useLocalDpi xmlns:a14="http://schemas.microsoft.com/office/drawing/2010/main" val="0"/>
+              </a:ext>
+            </a:extLst>
+          </a:blip>
+          <a:stretch>
+            <a:fillRect/>
+          </a:stretch>
+        </p:blipFill>
+        <p:spPr>
+          <a:xfrm>
+            <a:off x="546100" y="1918280"/>
+            <a:ext cx="4419600" cy="4352925"/>
+          </a:xfrm>
+          <a:prstGeom prst="rect">
+            <a:avLst/>
+          </a:prstGeom>
+        </p:spPr>
+      </p:pic>
+    </p:spTree>
+    <p:extLst>
+      <p:ext uri="{BB962C8B-B14F-4D97-AF65-F5344CB8AC3E}">
+        <p14:creationId xmlns:p14="http://schemas.microsoft.com/office/powerpoint/2010/main" val="2948858361"/>
       </p:ext>
     </p:extLst>
   </p:cSld>

--- a/Présentation.pptx
+++ b/Présentation.pptx
@@ -5,7 +5,7 @@
     <p:sldMasterId id="2147483648" r:id="rId1"/>
   </p:sldMasterIdLst>
   <p:notesMasterIdLst>
-    <p:notesMasterId r:id="rId32"/>
+    <p:notesMasterId r:id="rId31"/>
   </p:notesMasterIdLst>
   <p:sldIdLst>
     <p:sldId id="259" r:id="rId2"/>
@@ -27,17 +27,16 @@
     <p:sldId id="273" r:id="rId18"/>
     <p:sldId id="275" r:id="rId19"/>
     <p:sldId id="279" r:id="rId20"/>
-    <p:sldId id="277" r:id="rId21"/>
-    <p:sldId id="283" r:id="rId22"/>
-    <p:sldId id="284" r:id="rId23"/>
-    <p:sldId id="281" r:id="rId24"/>
-    <p:sldId id="282" r:id="rId25"/>
-    <p:sldId id="285" r:id="rId26"/>
-    <p:sldId id="286" r:id="rId27"/>
-    <p:sldId id="287" r:id="rId28"/>
-    <p:sldId id="288" r:id="rId29"/>
-    <p:sldId id="276" r:id="rId30"/>
-    <p:sldId id="290" r:id="rId31"/>
+    <p:sldId id="283" r:id="rId21"/>
+    <p:sldId id="284" r:id="rId22"/>
+    <p:sldId id="281" r:id="rId23"/>
+    <p:sldId id="282" r:id="rId24"/>
+    <p:sldId id="285" r:id="rId25"/>
+    <p:sldId id="286" r:id="rId26"/>
+    <p:sldId id="287" r:id="rId27"/>
+    <p:sldId id="288" r:id="rId28"/>
+    <p:sldId id="276" r:id="rId29"/>
+    <p:sldId id="290" r:id="rId30"/>
   </p:sldIdLst>
   <p:sldSz cx="12192000" cy="6858000"/>
   <p:notesSz cx="6858000" cy="9144000"/>
@@ -226,7 +225,7 @@
           <a:p>
             <a:fld id="{707E1AE0-F169-4B04-AC31-32DDA66614B2}" type="datetimeFigureOut">
               <a:rPr lang="fr-FR" smtClean="0"/>
-              <a:t>25/08/2026</a:t>
+              <a:t>27/08/2026</a:t>
             </a:fld>
             <a:endParaRPr lang="fr-FR"/>
           </a:p>
@@ -1267,7 +1266,7 @@
           <a:p>
             <a:fld id="{4734364E-57BD-44F2-A53B-320C3BD2F0CA}" type="slidenum">
               <a:rPr lang="fr-FR" smtClean="0"/>
-              <a:t>22</a:t>
+              <a:t>21</a:t>
             </a:fld>
             <a:endParaRPr lang="fr-FR"/>
           </a:p>
@@ -1351,7 +1350,7 @@
           <a:p>
             <a:fld id="{4734364E-57BD-44F2-A53B-320C3BD2F0CA}" type="slidenum">
               <a:rPr lang="fr-FR" smtClean="0"/>
-              <a:t>24</a:t>
+              <a:t>23</a:t>
             </a:fld>
             <a:endParaRPr lang="fr-FR"/>
           </a:p>
@@ -1438,7 +1437,7 @@
           <a:p>
             <a:fld id="{4734364E-57BD-44F2-A53B-320C3BD2F0CA}" type="slidenum">
               <a:rPr lang="fr-FR" smtClean="0"/>
-              <a:t>27</a:t>
+              <a:t>26</a:t>
             </a:fld>
             <a:endParaRPr lang="fr-FR"/>
           </a:p>
@@ -1522,7 +1521,7 @@
           <a:p>
             <a:fld id="{4734364E-57BD-44F2-A53B-320C3BD2F0CA}" type="slidenum">
               <a:rPr lang="fr-FR" smtClean="0"/>
-              <a:t>28</a:t>
+              <a:t>27</a:t>
             </a:fld>
             <a:endParaRPr lang="fr-FR"/>
           </a:p>
@@ -1831,7 +1830,7 @@
           <a:p>
             <a:r>
               <a:rPr lang="fr-FR" dirty="0"/>
-              <a:t>Le nombre de textes associés à plusieurs catégories est donc seulement : 164 = 152 + 11 + 1</a:t>
+              <a:t>Le nombre de textes associés à plusieurs catégories est de seulement : 164 = 152 + 11 + 1</a:t>
             </a:r>
           </a:p>
           <a:p>
@@ -2909,7 +2908,7 @@
           <a:p>
             <a:fld id="{D61BD361-66C9-484E-B214-6DC7693ABA43}" type="datetimeFigureOut">
               <a:rPr lang="fr-FR" smtClean="0"/>
-              <a:t>25/08/2026</a:t>
+              <a:t>27/08/2026</a:t>
             </a:fld>
             <a:endParaRPr lang="fr-FR"/>
           </a:p>
@@ -3107,7 +3106,7 @@
           <a:p>
             <a:fld id="{D61BD361-66C9-484E-B214-6DC7693ABA43}" type="datetimeFigureOut">
               <a:rPr lang="fr-FR" smtClean="0"/>
-              <a:t>25/08/2026</a:t>
+              <a:t>27/08/2026</a:t>
             </a:fld>
             <a:endParaRPr lang="fr-FR"/>
           </a:p>
@@ -3315,7 +3314,7 @@
           <a:p>
             <a:fld id="{D61BD361-66C9-484E-B214-6DC7693ABA43}" type="datetimeFigureOut">
               <a:rPr lang="fr-FR" smtClean="0"/>
-              <a:t>25/08/2026</a:t>
+              <a:t>27/08/2026</a:t>
             </a:fld>
             <a:endParaRPr lang="fr-FR"/>
           </a:p>
@@ -3513,7 +3512,7 @@
           <a:p>
             <a:fld id="{D61BD361-66C9-484E-B214-6DC7693ABA43}" type="datetimeFigureOut">
               <a:rPr lang="fr-FR" smtClean="0"/>
-              <a:t>25/08/2026</a:t>
+              <a:t>27/08/2026</a:t>
             </a:fld>
             <a:endParaRPr lang="fr-FR"/>
           </a:p>
@@ -3788,7 +3787,7 @@
           <a:p>
             <a:fld id="{D61BD361-66C9-484E-B214-6DC7693ABA43}" type="datetimeFigureOut">
               <a:rPr lang="fr-FR" smtClean="0"/>
-              <a:t>25/08/2026</a:t>
+              <a:t>27/08/2026</a:t>
             </a:fld>
             <a:endParaRPr lang="fr-FR"/>
           </a:p>
@@ -4053,7 +4052,7 @@
           <a:p>
             <a:fld id="{D61BD361-66C9-484E-B214-6DC7693ABA43}" type="datetimeFigureOut">
               <a:rPr lang="fr-FR" smtClean="0"/>
-              <a:t>25/08/2026</a:t>
+              <a:t>27/08/2026</a:t>
             </a:fld>
             <a:endParaRPr lang="fr-FR"/>
           </a:p>
@@ -4465,7 +4464,7 @@
           <a:p>
             <a:fld id="{D61BD361-66C9-484E-B214-6DC7693ABA43}" type="datetimeFigureOut">
               <a:rPr lang="fr-FR" smtClean="0"/>
-              <a:t>25/08/2026</a:t>
+              <a:t>27/08/2026</a:t>
             </a:fld>
             <a:endParaRPr lang="fr-FR"/>
           </a:p>
@@ -4606,7 +4605,7 @@
           <a:p>
             <a:fld id="{D61BD361-66C9-484E-B214-6DC7693ABA43}" type="datetimeFigureOut">
               <a:rPr lang="fr-FR" smtClean="0"/>
-              <a:t>25/08/2026</a:t>
+              <a:t>27/08/2026</a:t>
             </a:fld>
             <a:endParaRPr lang="fr-FR"/>
           </a:p>
@@ -4719,7 +4718,7 @@
           <a:p>
             <a:fld id="{D61BD361-66C9-484E-B214-6DC7693ABA43}" type="datetimeFigureOut">
               <a:rPr lang="fr-FR" smtClean="0"/>
-              <a:t>25/08/2026</a:t>
+              <a:t>27/08/2026</a:t>
             </a:fld>
             <a:endParaRPr lang="fr-FR"/>
           </a:p>
@@ -5030,7 +5029,7 @@
           <a:p>
             <a:fld id="{D61BD361-66C9-484E-B214-6DC7693ABA43}" type="datetimeFigureOut">
               <a:rPr lang="fr-FR" smtClean="0"/>
-              <a:t>25/08/2026</a:t>
+              <a:t>27/08/2026</a:t>
             </a:fld>
             <a:endParaRPr lang="fr-FR"/>
           </a:p>
@@ -5318,7 +5317,7 @@
           <a:p>
             <a:fld id="{D61BD361-66C9-484E-B214-6DC7693ABA43}" type="datetimeFigureOut">
               <a:rPr lang="fr-FR" smtClean="0"/>
-              <a:t>25/08/2026</a:t>
+              <a:t>27/08/2026</a:t>
             </a:fld>
             <a:endParaRPr lang="fr-FR"/>
           </a:p>
@@ -5559,7 +5558,7 @@
           <a:p>
             <a:fld id="{D61BD361-66C9-484E-B214-6DC7693ABA43}" type="datetimeFigureOut">
               <a:rPr lang="fr-FR" smtClean="0"/>
-              <a:t>25/08/2026</a:t>
+              <a:t>27/08/2026</a:t>
             </a:fld>
             <a:endParaRPr lang="fr-FR"/>
           </a:p>
@@ -8528,7 +8527,7 @@
                   </a:schemeClr>
                 </a:solidFill>
               </a:rPr>
-              <a:t>Jeu d’entrainement filtré (~80,000 lignes)</a:t>
+              <a:t>Jeu d’entrainement filtré (~300,000 lignes)</a:t>
             </a:r>
           </a:p>
         </p:txBody>
@@ -9022,10 +9021,10 @@
       </p:grpSpPr>
       <p:pic>
         <p:nvPicPr>
-          <p:cNvPr id="12" name="Image 11">
+          <p:cNvPr id="3" name="Image 2">
             <a:extLst>
               <a:ext uri="{FF2B5EF4-FFF2-40B4-BE49-F238E27FC236}">
-                <a16:creationId xmlns:a16="http://schemas.microsoft.com/office/drawing/2014/main" id="{5C78883A-0889-A0F2-8521-815369DD8050}"/>
+                <a16:creationId xmlns:a16="http://schemas.microsoft.com/office/drawing/2014/main" id="{4A931B94-C1FB-9BE2-3281-36826804F21F}"/>
               </a:ext>
             </a:extLst>
           </p:cNvPr>
@@ -9042,8 +9041,8 @@
         </p:blipFill>
         <p:spPr>
           <a:xfrm>
-            <a:off x="510128" y="3116463"/>
-            <a:ext cx="11245845" cy="2608079"/>
+            <a:off x="534829" y="3286636"/>
+            <a:ext cx="11221144" cy="2409311"/>
           </a:xfrm>
           <a:prstGeom prst="rect">
             <a:avLst/>
@@ -9097,7 +9096,7 @@
         </p:nvSpPr>
         <p:spPr>
           <a:xfrm>
-            <a:off x="534829" y="5389152"/>
+            <a:off x="534829" y="5379102"/>
             <a:ext cx="11221144" cy="330200"/>
           </a:xfrm>
           <a:prstGeom prst="rect">
@@ -9243,10 +9242,10 @@
       </p:grpSpPr>
       <p:pic>
         <p:nvPicPr>
-          <p:cNvPr id="9" name="Image 8">
+          <p:cNvPr id="5" name="Image 4">
             <a:extLst>
               <a:ext uri="{FF2B5EF4-FFF2-40B4-BE49-F238E27FC236}">
-                <a16:creationId xmlns:a16="http://schemas.microsoft.com/office/drawing/2014/main" id="{ABC83A6F-F5AD-50A9-7C07-FEDF7E81C669}"/>
+                <a16:creationId xmlns:a16="http://schemas.microsoft.com/office/drawing/2014/main" id="{BD780736-8801-047C-7DC4-7DE42C1265A2}"/>
               </a:ext>
             </a:extLst>
           </p:cNvPr>
@@ -9263,8 +9262,8 @@
         </p:blipFill>
         <p:spPr>
           <a:xfrm>
-            <a:off x="871524" y="2118437"/>
-            <a:ext cx="10666019" cy="3695682"/>
+            <a:off x="689928" y="2150344"/>
+            <a:ext cx="10847615" cy="3659294"/>
           </a:xfrm>
           <a:prstGeom prst="rect">
             <a:avLst/>
@@ -9314,7 +9313,163 @@
         </p:nvSpPr>
         <p:spPr>
           <a:xfrm>
-            <a:off x="5220586" y="3904370"/>
+            <a:off x="5220586" y="3924466"/>
+            <a:ext cx="6316957" cy="272679"/>
+          </a:xfrm>
+          <a:prstGeom prst="rect">
+            <a:avLst/>
+          </a:prstGeom>
+          <a:noFill/>
+          <a:ln w="50800">
+            <a:solidFill>
+              <a:srgbClr val="FF0000"/>
+            </a:solidFill>
+          </a:ln>
+        </p:spPr>
+        <p:style>
+          <a:lnRef idx="2">
+            <a:schemeClr val="accent1">
+              <a:shade val="15000"/>
+            </a:schemeClr>
+          </a:lnRef>
+          <a:fillRef idx="1">
+            <a:schemeClr val="accent1"/>
+          </a:fillRef>
+          <a:effectRef idx="0">
+            <a:schemeClr val="accent1"/>
+          </a:effectRef>
+          <a:fontRef idx="minor">
+            <a:schemeClr val="lt1"/>
+          </a:fontRef>
+        </p:style>
+        <p:txBody>
+          <a:bodyPr rtlCol="0" anchor="ctr"/>
+          <a:lstStyle/>
+          <a:p>
+            <a:pPr algn="ctr"/>
+            <a:endParaRPr lang="fr-FR"/>
+          </a:p>
+        </p:txBody>
+      </p:sp>
+      <p:sp>
+        <p:nvSpPr>
+          <p:cNvPr id="3" name="Rectangle 2">
+            <a:extLst>
+              <a:ext uri="{FF2B5EF4-FFF2-40B4-BE49-F238E27FC236}">
+                <a16:creationId xmlns:a16="http://schemas.microsoft.com/office/drawing/2014/main" id="{4221B556-AA0A-275F-2A33-BD76597E0D63}"/>
+              </a:ext>
+            </a:extLst>
+          </p:cNvPr>
+          <p:cNvSpPr/>
+          <p:nvPr/>
+        </p:nvSpPr>
+        <p:spPr>
+          <a:xfrm>
+            <a:off x="3958523" y="4167001"/>
+            <a:ext cx="7579020" cy="272679"/>
+          </a:xfrm>
+          <a:prstGeom prst="rect">
+            <a:avLst/>
+          </a:prstGeom>
+          <a:noFill/>
+          <a:ln w="50800">
+            <a:solidFill>
+              <a:srgbClr val="FF0000"/>
+            </a:solidFill>
+          </a:ln>
+        </p:spPr>
+        <p:style>
+          <a:lnRef idx="2">
+            <a:schemeClr val="accent1">
+              <a:shade val="15000"/>
+            </a:schemeClr>
+          </a:lnRef>
+          <a:fillRef idx="1">
+            <a:schemeClr val="accent1"/>
+          </a:fillRef>
+          <a:effectRef idx="0">
+            <a:schemeClr val="accent1"/>
+          </a:effectRef>
+          <a:fontRef idx="minor">
+            <a:schemeClr val="lt1"/>
+          </a:fontRef>
+        </p:style>
+        <p:txBody>
+          <a:bodyPr rtlCol="0" anchor="ctr"/>
+          <a:lstStyle/>
+          <a:p>
+            <a:pPr algn="ctr"/>
+            <a:endParaRPr lang="fr-FR"/>
+          </a:p>
+        </p:txBody>
+      </p:sp>
+      <p:sp>
+        <p:nvSpPr>
+          <p:cNvPr id="6" name="Rectangle 5">
+            <a:extLst>
+              <a:ext uri="{FF2B5EF4-FFF2-40B4-BE49-F238E27FC236}">
+                <a16:creationId xmlns:a16="http://schemas.microsoft.com/office/drawing/2014/main" id="{58778992-C07D-2345-98DA-A9C15EACBD98}"/>
+              </a:ext>
+            </a:extLst>
+          </p:cNvPr>
+          <p:cNvSpPr/>
+          <p:nvPr/>
+        </p:nvSpPr>
+        <p:spPr>
+          <a:xfrm>
+            <a:off x="5220586" y="4616609"/>
+            <a:ext cx="6316957" cy="272679"/>
+          </a:xfrm>
+          <a:prstGeom prst="rect">
+            <a:avLst/>
+          </a:prstGeom>
+          <a:noFill/>
+          <a:ln w="50800">
+            <a:solidFill>
+              <a:srgbClr val="FF0000"/>
+            </a:solidFill>
+          </a:ln>
+        </p:spPr>
+        <p:style>
+          <a:lnRef idx="2">
+            <a:schemeClr val="accent1">
+              <a:shade val="15000"/>
+            </a:schemeClr>
+          </a:lnRef>
+          <a:fillRef idx="1">
+            <a:schemeClr val="accent1"/>
+          </a:fillRef>
+          <a:effectRef idx="0">
+            <a:schemeClr val="accent1"/>
+          </a:effectRef>
+          <a:fontRef idx="minor">
+            <a:schemeClr val="lt1"/>
+          </a:fontRef>
+        </p:style>
+        <p:txBody>
+          <a:bodyPr rtlCol="0" anchor="ctr"/>
+          <a:lstStyle/>
+          <a:p>
+            <a:pPr algn="ctr"/>
+            <a:endParaRPr lang="fr-FR"/>
+          </a:p>
+        </p:txBody>
+      </p:sp>
+      <p:sp>
+        <p:nvSpPr>
+          <p:cNvPr id="8" name="Rectangle 7">
+            <a:extLst>
+              <a:ext uri="{FF2B5EF4-FFF2-40B4-BE49-F238E27FC236}">
+                <a16:creationId xmlns:a16="http://schemas.microsoft.com/office/drawing/2014/main" id="{7933F423-DEB6-9128-EF17-CCCB4FE59618}"/>
+              </a:ext>
+            </a:extLst>
+          </p:cNvPr>
+          <p:cNvSpPr/>
+          <p:nvPr/>
+        </p:nvSpPr>
+        <p:spPr>
+          <a:xfrm>
+            <a:off x="5220586" y="3272564"/>
             <a:ext cx="6316957" cy="272679"/>
           </a:xfrm>
           <a:prstGeom prst="rect">
@@ -10979,7 +11134,7 @@
                   </a:schemeClr>
                 </a:solidFill>
               </a:rPr>
-              <a:t>Jeu d’entrainement filtré (~80,000 lignes)</a:t>
+              <a:t>Jeu d’entrainement filtré (~300,000 lignes)</a:t>
             </a:r>
           </a:p>
         </p:txBody>
@@ -11479,10 +11634,10 @@
       </p:grpSpPr>
       <p:pic>
         <p:nvPicPr>
-          <p:cNvPr id="4" name="Image 3">
+          <p:cNvPr id="10" name="Image 9">
             <a:extLst>
               <a:ext uri="{FF2B5EF4-FFF2-40B4-BE49-F238E27FC236}">
-                <a16:creationId xmlns:a16="http://schemas.microsoft.com/office/drawing/2014/main" id="{B205D234-2FD5-709D-D155-BAD05717D5F1}"/>
+                <a16:creationId xmlns:a16="http://schemas.microsoft.com/office/drawing/2014/main" id="{152356CF-B318-DB1A-C1C0-96749DB341E6}"/>
               </a:ext>
             </a:extLst>
           </p:cNvPr>
@@ -11499,8 +11654,8 @@
         </p:blipFill>
         <p:spPr>
           <a:xfrm>
-            <a:off x="647700" y="3147559"/>
-            <a:ext cx="11249990" cy="1549400"/>
+            <a:off x="647698" y="3153513"/>
+            <a:ext cx="11249991" cy="1458332"/>
           </a:xfrm>
           <a:prstGeom prst="rect">
             <a:avLst/>
@@ -11688,6 +11843,36 @@
           <a:chExt cx="0" cy="0"/>
         </a:xfrm>
       </p:grpSpPr>
+      <p:pic>
+        <p:nvPicPr>
+          <p:cNvPr id="10" name="Image 9">
+            <a:extLst>
+              <a:ext uri="{FF2B5EF4-FFF2-40B4-BE49-F238E27FC236}">
+                <a16:creationId xmlns:a16="http://schemas.microsoft.com/office/drawing/2014/main" id="{C97F0851-CA3A-FD32-89BC-A8D747A4D0D9}"/>
+              </a:ext>
+            </a:extLst>
+          </p:cNvPr>
+          <p:cNvPicPr>
+            <a:picLocks noChangeAspect="1"/>
+          </p:cNvPicPr>
+          <p:nvPr/>
+        </p:nvPicPr>
+        <p:blipFill>
+          <a:blip r:embed="rId3"/>
+          <a:stretch>
+            <a:fillRect/>
+          </a:stretch>
+        </p:blipFill>
+        <p:spPr>
+          <a:xfrm>
+            <a:off x="408275" y="2240196"/>
+            <a:ext cx="11371477" cy="3874076"/>
+          </a:xfrm>
+          <a:prstGeom prst="rect">
+            <a:avLst/>
+          </a:prstGeom>
+        </p:spPr>
+      </p:pic>
       <p:sp>
         <p:nvSpPr>
           <p:cNvPr id="2" name="Titre 1">
@@ -11717,36 +11902,6 @@
           </a:p>
         </p:txBody>
       </p:sp>
-      <p:pic>
-        <p:nvPicPr>
-          <p:cNvPr id="5" name="Image 4">
-            <a:extLst>
-              <a:ext uri="{FF2B5EF4-FFF2-40B4-BE49-F238E27FC236}">
-                <a16:creationId xmlns:a16="http://schemas.microsoft.com/office/drawing/2014/main" id="{ADB599FC-2416-F3A6-BD73-B56BD2785B0A}"/>
-              </a:ext>
-            </a:extLst>
-          </p:cNvPr>
-          <p:cNvPicPr>
-            <a:picLocks noChangeAspect="1"/>
-          </p:cNvPicPr>
-          <p:nvPr/>
-        </p:nvPicPr>
-        <p:blipFill>
-          <a:blip r:embed="rId3"/>
-          <a:stretch>
-            <a:fillRect/>
-          </a:stretch>
-        </p:blipFill>
-        <p:spPr>
-          <a:xfrm>
-            <a:off x="647699" y="2262188"/>
-            <a:ext cx="11091861" cy="3914775"/>
-          </a:xfrm>
-          <a:prstGeom prst="rect">
-            <a:avLst/>
-          </a:prstGeom>
-        </p:spPr>
-      </p:pic>
       <p:sp>
         <p:nvSpPr>
           <p:cNvPr id="3" name="Rectangle 2">
@@ -11763,6 +11918,110 @@
           <a:xfrm>
             <a:off x="5422603" y="4129199"/>
             <a:ext cx="6316957" cy="272679"/>
+          </a:xfrm>
+          <a:prstGeom prst="rect">
+            <a:avLst/>
+          </a:prstGeom>
+          <a:noFill/>
+          <a:ln w="50800">
+            <a:solidFill>
+              <a:srgbClr val="FF0000"/>
+            </a:solidFill>
+          </a:ln>
+        </p:spPr>
+        <p:style>
+          <a:lnRef idx="2">
+            <a:schemeClr val="accent1">
+              <a:shade val="15000"/>
+            </a:schemeClr>
+          </a:lnRef>
+          <a:fillRef idx="1">
+            <a:schemeClr val="accent1"/>
+          </a:fillRef>
+          <a:effectRef idx="0">
+            <a:schemeClr val="accent1"/>
+          </a:effectRef>
+          <a:fontRef idx="minor">
+            <a:schemeClr val="lt1"/>
+          </a:fontRef>
+        </p:style>
+        <p:txBody>
+          <a:bodyPr rtlCol="0" anchor="ctr"/>
+          <a:lstStyle/>
+          <a:p>
+            <a:pPr algn="ctr"/>
+            <a:endParaRPr lang="fr-FR"/>
+          </a:p>
+        </p:txBody>
+      </p:sp>
+      <p:sp>
+        <p:nvSpPr>
+          <p:cNvPr id="7" name="Rectangle 6">
+            <a:extLst>
+              <a:ext uri="{FF2B5EF4-FFF2-40B4-BE49-F238E27FC236}">
+                <a16:creationId xmlns:a16="http://schemas.microsoft.com/office/drawing/2014/main" id="{2019B489-7C8A-0548-F993-D87381E8A52E}"/>
+              </a:ext>
+            </a:extLst>
+          </p:cNvPr>
+          <p:cNvSpPr/>
+          <p:nvPr/>
+        </p:nvSpPr>
+        <p:spPr>
+          <a:xfrm>
+            <a:off x="5462795" y="4856976"/>
+            <a:ext cx="6316957" cy="272679"/>
+          </a:xfrm>
+          <a:prstGeom prst="rect">
+            <a:avLst/>
+          </a:prstGeom>
+          <a:noFill/>
+          <a:ln w="50800">
+            <a:solidFill>
+              <a:srgbClr val="FF0000"/>
+            </a:solidFill>
+          </a:ln>
+        </p:spPr>
+        <p:style>
+          <a:lnRef idx="2">
+            <a:schemeClr val="accent1">
+              <a:shade val="15000"/>
+            </a:schemeClr>
+          </a:lnRef>
+          <a:fillRef idx="1">
+            <a:schemeClr val="accent1"/>
+          </a:fillRef>
+          <a:effectRef idx="0">
+            <a:schemeClr val="accent1"/>
+          </a:effectRef>
+          <a:fontRef idx="minor">
+            <a:schemeClr val="lt1"/>
+          </a:fontRef>
+        </p:style>
+        <p:txBody>
+          <a:bodyPr rtlCol="0" anchor="ctr"/>
+          <a:lstStyle/>
+          <a:p>
+            <a:pPr algn="ctr"/>
+            <a:endParaRPr lang="fr-FR"/>
+          </a:p>
+        </p:txBody>
+      </p:sp>
+      <p:sp>
+        <p:nvSpPr>
+          <p:cNvPr id="8" name="Rectangle 7">
+            <a:extLst>
+              <a:ext uri="{FF2B5EF4-FFF2-40B4-BE49-F238E27FC236}">
+                <a16:creationId xmlns:a16="http://schemas.microsoft.com/office/drawing/2014/main" id="{6F9A7C73-A802-E626-1CCF-7AD01CC2E515}"/>
+              </a:ext>
+            </a:extLst>
+          </p:cNvPr>
+          <p:cNvSpPr/>
+          <p:nvPr/>
+        </p:nvSpPr>
+        <p:spPr>
+          <a:xfrm>
+            <a:off x="3786395" y="4401878"/>
+            <a:ext cx="7993357" cy="236794"/>
           </a:xfrm>
           <a:prstGeom prst="rect">
             <a:avLst/>
@@ -11905,71 +12164,6 @@
 </file>
 
 <file path=ppt/slides/slide20.xml><?xml version="1.0" encoding="utf-8"?>
-<p:sld xmlns:a="http://schemas.openxmlformats.org/drawingml/2006/main" xmlns:r="http://schemas.openxmlformats.org/officeDocument/2006/relationships" xmlns:p="http://schemas.openxmlformats.org/presentationml/2006/main">
-  <p:cSld>
-    <p:spTree>
-      <p:nvGrpSpPr>
-        <p:cNvPr id="1" name=""/>
-        <p:cNvGrpSpPr/>
-        <p:nvPr/>
-      </p:nvGrpSpPr>
-      <p:grpSpPr>
-        <a:xfrm>
-          <a:off x="0" y="0"/>
-          <a:ext cx="0" cy="0"/>
-          <a:chOff x="0" y="0"/>
-          <a:chExt cx="0" cy="0"/>
-        </a:xfrm>
-      </p:grpSpPr>
-      <p:pic>
-        <p:nvPicPr>
-          <p:cNvPr id="5" name="Espace réservé du contenu 4">
-            <a:extLst>
-              <a:ext uri="{FF2B5EF4-FFF2-40B4-BE49-F238E27FC236}">
-                <a16:creationId xmlns:a16="http://schemas.microsoft.com/office/drawing/2014/main" id="{3C04EB1A-7718-2E9C-C37B-EAF79173E90B}"/>
-              </a:ext>
-            </a:extLst>
-          </p:cNvPr>
-          <p:cNvPicPr>
-            <a:picLocks noGrp="1" noChangeAspect="1"/>
-          </p:cNvPicPr>
-          <p:nvPr>
-            <p:ph idx="1"/>
-          </p:nvPr>
-        </p:nvPicPr>
-        <p:blipFill>
-          <a:blip r:embed="rId2">
-            <a:extLst>
-              <a:ext uri="{28A0092B-C50C-407E-A947-70E740481C1C}">
-                <a14:useLocalDpi xmlns:a14="http://schemas.microsoft.com/office/drawing/2010/main" val="0"/>
-              </a:ext>
-            </a:extLst>
-          </a:blip>
-          <a:stretch>
-            <a:fillRect/>
-          </a:stretch>
-        </p:blipFill>
-        <p:spPr>
-          <a:xfrm>
-            <a:off x="4072270" y="142686"/>
-            <a:ext cx="7125665" cy="6572628"/>
-          </a:xfrm>
-        </p:spPr>
-      </p:pic>
-    </p:spTree>
-    <p:extLst>
-      <p:ext uri="{BB962C8B-B14F-4D97-AF65-F5344CB8AC3E}">
-        <p14:creationId xmlns:p14="http://schemas.microsoft.com/office/powerpoint/2010/main" val="2187063204"/>
-      </p:ext>
-    </p:extLst>
-  </p:cSld>
-  <p:clrMapOvr>
-    <a:masterClrMapping/>
-  </p:clrMapOvr>
-</p:sld>
-</file>
-
-<file path=ppt/slides/slide21.xml><?xml version="1.0" encoding="utf-8"?>
 <p:sld xmlns:a="http://schemas.openxmlformats.org/drawingml/2006/main" xmlns:r="http://schemas.openxmlformats.org/officeDocument/2006/relationships" xmlns:p="http://schemas.openxmlformats.org/presentationml/2006/main">
   <p:cSld>
     <p:spTree>
@@ -12135,7 +12329,7 @@
 </p:sld>
 </file>
 
-<file path=ppt/slides/slide22.xml><?xml version="1.0" encoding="utf-8"?>
+<file path=ppt/slides/slide21.xml><?xml version="1.0" encoding="utf-8"?>
 <p:sld xmlns:a="http://schemas.openxmlformats.org/drawingml/2006/main" xmlns:r="http://schemas.openxmlformats.org/officeDocument/2006/relationships" xmlns:p="http://schemas.openxmlformats.org/presentationml/2006/main">
   <p:cSld>
     <p:spTree>
@@ -12911,7 +13105,7 @@
 </p:sld>
 </file>
 
-<file path=ppt/slides/slide23.xml><?xml version="1.0" encoding="utf-8"?>
+<file path=ppt/slides/slide22.xml><?xml version="1.0" encoding="utf-8"?>
 <p:sld xmlns:a="http://schemas.openxmlformats.org/drawingml/2006/main" xmlns:r="http://schemas.openxmlformats.org/officeDocument/2006/relationships" xmlns:p="http://schemas.openxmlformats.org/presentationml/2006/main">
   <p:cSld>
     <p:spTree>
@@ -13077,7 +13271,7 @@
 </p:sld>
 </file>
 
-<file path=ppt/slides/slide24.xml><?xml version="1.0" encoding="utf-8"?>
+<file path=ppt/slides/slide23.xml><?xml version="1.0" encoding="utf-8"?>
 <p:sld xmlns:a="http://schemas.openxmlformats.org/drawingml/2006/main" xmlns:r="http://schemas.openxmlformats.org/officeDocument/2006/relationships" xmlns:p="http://schemas.openxmlformats.org/presentationml/2006/main">
   <p:cSld>
     <p:spTree>
@@ -13788,7 +13982,7 @@
 </p:sld>
 </file>
 
-<file path=ppt/slides/slide25.xml><?xml version="1.0" encoding="utf-8"?>
+<file path=ppt/slides/slide24.xml><?xml version="1.0" encoding="utf-8"?>
 <p:sld xmlns:a="http://schemas.openxmlformats.org/drawingml/2006/main" xmlns:r="http://schemas.openxmlformats.org/officeDocument/2006/relationships" xmlns:p="http://schemas.openxmlformats.org/presentationml/2006/main">
   <p:cSld>
     <p:spTree>
@@ -14604,7 +14798,7 @@
 </p:sld>
 </file>
 
-<file path=ppt/slides/slide26.xml><?xml version="1.0" encoding="utf-8"?>
+<file path=ppt/slides/slide25.xml><?xml version="1.0" encoding="utf-8"?>
 <p:sld xmlns:a="http://schemas.openxmlformats.org/drawingml/2006/main" xmlns:r="http://schemas.openxmlformats.org/officeDocument/2006/relationships" xmlns:p="http://schemas.openxmlformats.org/presentationml/2006/main">
   <p:cSld>
     <p:spTree>
@@ -14817,7 +15011,7 @@
 </p:sld>
 </file>
 
-<file path=ppt/slides/slide27.xml><?xml version="1.0" encoding="utf-8"?>
+<file path=ppt/slides/slide26.xml><?xml version="1.0" encoding="utf-8"?>
 <p:sld xmlns:a="http://schemas.openxmlformats.org/drawingml/2006/main" xmlns:r="http://schemas.openxmlformats.org/officeDocument/2006/relationships" xmlns:p="http://schemas.openxmlformats.org/presentationml/2006/main">
   <p:cSld>
     <p:spTree>
@@ -15466,7 +15660,7 @@
 </p:sld>
 </file>
 
-<file path=ppt/slides/slide28.xml><?xml version="1.0" encoding="utf-8"?>
+<file path=ppt/slides/slide27.xml><?xml version="1.0" encoding="utf-8"?>
 <p:sld xmlns:a="http://schemas.openxmlformats.org/drawingml/2006/main" xmlns:r="http://schemas.openxmlformats.org/officeDocument/2006/relationships" xmlns:p="http://schemas.openxmlformats.org/presentationml/2006/main">
   <p:cSld>
     <p:spTree>
@@ -15527,7 +15721,7 @@
             <p:ph idx="1"/>
             <p:extLst>
               <p:ext uri="{D42A27DB-BD31-4B8C-83A1-F6EECF244321}">
-                <p14:modId xmlns:p14="http://schemas.microsoft.com/office/powerpoint/2010/main" val="4281874336"/>
+                <p14:modId xmlns:p14="http://schemas.microsoft.com/office/powerpoint/2010/main" val="2286044339"/>
               </p:ext>
             </p:extLst>
           </p:nvPr>
@@ -15685,8 +15879,8 @@
                         <a:buNone/>
                       </a:pPr>
                       <a:r>
-                        <a:rPr lang="fr-FR" sz="1600" b="1"/>
-                        <a:t>Latence</a:t>
+                        <a:rPr lang="fr-FR" sz="1600" b="1" dirty="0"/>
+                        <a:t>Taux erreurs</a:t>
                       </a:r>
                     </a:p>
                   </a:txBody>
@@ -15701,9 +15895,18 @@
                         <a:buNone/>
                       </a:pPr>
                       <a:r>
-                        <a:rPr lang="fr-FR" sz="1600"/>
-                        <a:t>Très faible</a:t>
+                        <a:rPr lang="fr-FR" sz="1800" b="0" i="0" kern="1200" dirty="0">
+                          <a:solidFill>
+                            <a:schemeClr val="dk1"/>
+                          </a:solidFill>
+                          <a:effectLst/>
+                          <a:latin typeface="+mn-lt"/>
+                          <a:ea typeface="+mn-ea"/>
+                          <a:cs typeface="+mn-cs"/>
+                        </a:rPr>
+                        <a:t>15.04%</a:t>
                       </a:r>
+                      <a:endParaRPr lang="fr-FR" sz="1600" dirty="0"/>
                     </a:p>
                   </a:txBody>
                   <a:tcPr marL="77702" marR="77702" marT="38851" marB="38851" anchor="ctr"/>
@@ -15718,7 +15921,7 @@
                       </a:pPr>
                       <a:r>
                         <a:rPr lang="fr-FR" sz="1600" dirty="0"/>
-                        <a:t>Elevée</a:t>
+                        <a:t>XXXXXXXXXX</a:t>
                       </a:r>
                     </a:p>
                   </a:txBody>
@@ -15787,7 +15990,7 @@
                       </a:pPr>
                       <a:r>
                         <a:rPr lang="fr-FR" sz="1600" dirty="0"/>
-                        <a:t>~ 0,54 $ - (~4,58 $ medium)</a:t>
+                        <a:t>~ 0,54 $</a:t>
                       </a:r>
                     </a:p>
                   </a:txBody>
@@ -15847,7 +16050,7 @@
                       </a:pPr>
                       <a:r>
                         <a:rPr lang="fr-FR" sz="1600" dirty="0"/>
-                        <a:t>~ 1 000 requêtes / h - (650 / h medium)</a:t>
+                        <a:t>~ 1 000 requêtes / h</a:t>
                       </a:r>
                     </a:p>
                   </a:txBody>
@@ -16265,7 +16468,7 @@
 </p:sld>
 </file>
 
-<file path=ppt/slides/slide29.xml><?xml version="1.0" encoding="utf-8"?>
+<file path=ppt/slides/slide28.xml><?xml version="1.0" encoding="utf-8"?>
 <p:sld xmlns:a="http://schemas.openxmlformats.org/drawingml/2006/main" xmlns:r="http://schemas.openxmlformats.org/officeDocument/2006/relationships" xmlns:p="http://schemas.openxmlformats.org/presentationml/2006/main">
   <p:cSld>
     <p:spTree>
@@ -16303,7 +16506,10 @@
           <a:bodyPr/>
           <a:lstStyle/>
           <a:p>
-            <a:endParaRPr lang="fr-FR"/>
+            <a:r>
+              <a:rPr lang="fr-FR" dirty="0"/>
+              <a:t>En résumé</a:t>
+            </a:r>
           </a:p>
         </p:txBody>
       </p:sp>
@@ -16326,7 +16532,7 @@
         <p:spPr/>
         <p:txBody>
           <a:bodyPr>
-            <a:normAutofit fontScale="92500" lnSpcReduction="10000"/>
+            <a:normAutofit fontScale="85000" lnSpcReduction="20000"/>
           </a:bodyPr>
           <a:lstStyle/>
           <a:p>
@@ -16366,15 +16572,52 @@
           <a:p>
             <a:r>
               <a:rPr lang="fr-FR" dirty="0"/>
-              <a:t>Les performances varient fortement selon les catégories. Les catégories majoritaires et sémantiquement bien caractérisées sont correctement identifiées, tandis que les catégories minoritaires présentent un </a:t>
+              <a:t>Certains textes mal classés peuvent faire l’objet d’une interprétation différente. Le modèle peut apprendre « Consumer Loan » à partir d'exemples qui, selon le contenu, semblent relever de « </a:t>
             </a:r>
             <a:r>
               <a:rPr lang="fr-FR" dirty="0" err="1"/>
-              <a:t>recall</a:t>
+              <a:t>Vehicle</a:t>
             </a:r>
             <a:r>
               <a:rPr lang="fr-FR" dirty="0"/>
-              <a:t> plus faible.</a:t>
+              <a:t> </a:t>
+            </a:r>
+            <a:r>
+              <a:rPr lang="fr-FR" dirty="0" err="1"/>
+              <a:t>loan</a:t>
+            </a:r>
+            <a:r>
+              <a:rPr lang="fr-FR" dirty="0"/>
+              <a:t> or </a:t>
+            </a:r>
+            <a:r>
+              <a:rPr lang="fr-FR" dirty="0" err="1"/>
+              <a:t>lease</a:t>
+            </a:r>
+            <a:r>
+              <a:rPr lang="fr-FR" dirty="0"/>
+              <a:t> ».</a:t>
+            </a:r>
+          </a:p>
+          <a:p>
+            <a:endParaRPr lang="fr-FR" dirty="0"/>
+          </a:p>
+          <a:p>
+            <a:r>
+              <a:rPr lang="fr-FR" dirty="0" err="1"/>
+              <a:t>CalibratedClassifierCV</a:t>
+            </a:r>
+            <a:r>
+              <a:rPr lang="fr-FR" dirty="0"/>
+              <a:t> peut être utilisé comme base de </a:t>
+            </a:r>
+            <a:r>
+              <a:rPr lang="fr-FR" dirty="0" err="1"/>
+              <a:t>scoring</a:t>
+            </a:r>
+            <a:r>
+              <a:rPr lang="fr-FR" dirty="0"/>
+              <a:t> pour la confiance d’une prédiction. Si le score est trop bas, envisager une autre méthode de classification</a:t>
             </a:r>
           </a:p>
         </p:txBody>
@@ -16392,127 +16635,7 @@
 </p:sld>
 </file>
 
-<file path=ppt/slides/slide3.xml><?xml version="1.0" encoding="utf-8"?>
-<p:sld xmlns:a="http://schemas.openxmlformats.org/drawingml/2006/main" xmlns:r="http://schemas.openxmlformats.org/officeDocument/2006/relationships" xmlns:p="http://schemas.openxmlformats.org/presentationml/2006/main">
-  <p:cSld>
-    <p:spTree>
-      <p:nvGrpSpPr>
-        <p:cNvPr id="1" name=""/>
-        <p:cNvGrpSpPr/>
-        <p:nvPr/>
-      </p:nvGrpSpPr>
-      <p:grpSpPr>
-        <a:xfrm>
-          <a:off x="0" y="0"/>
-          <a:ext cx="0" cy="0"/>
-          <a:chOff x="0" y="0"/>
-          <a:chExt cx="0" cy="0"/>
-        </a:xfrm>
-      </p:grpSpPr>
-      <p:sp>
-        <p:nvSpPr>
-          <p:cNvPr id="2" name="Titre 1">
-            <a:extLst>
-              <a:ext uri="{FF2B5EF4-FFF2-40B4-BE49-F238E27FC236}">
-                <a16:creationId xmlns:a16="http://schemas.microsoft.com/office/drawing/2014/main" id="{CA0CB97F-097E-0FEC-42EB-89420D6043A1}"/>
-              </a:ext>
-            </a:extLst>
-          </p:cNvPr>
-          <p:cNvSpPr>
-            <a:spLocks noGrp="1"/>
-          </p:cNvSpPr>
-          <p:nvPr>
-            <p:ph type="title"/>
-          </p:nvPr>
-        </p:nvSpPr>
-        <p:spPr>
-          <a:xfrm>
-            <a:off x="838199" y="365125"/>
-            <a:ext cx="5360581" cy="3824103"/>
-          </a:xfrm>
-        </p:spPr>
-        <p:txBody>
-          <a:bodyPr>
-            <a:normAutofit/>
-          </a:bodyPr>
-          <a:lstStyle/>
-          <a:p>
-            <a:r>
-              <a:rPr lang="fr-FR" sz="6600" dirty="0">
-                <a:solidFill>
-                  <a:schemeClr val="accent1">
-                    <a:lumMod val="75000"/>
-                  </a:schemeClr>
-                </a:solidFill>
-                <a:latin typeface="Segoe UI Black" panose="020B0A02040204020203" pitchFamily="34" charset="0"/>
-                <a:ea typeface="Segoe UI Black" panose="020B0A02040204020203" pitchFamily="34" charset="0"/>
-              </a:rPr>
-              <a:t>Analyse exploratoire des données</a:t>
-            </a:r>
-          </a:p>
-        </p:txBody>
-      </p:sp>
-      <p:pic>
-        <p:nvPicPr>
-          <p:cNvPr id="2050" name="Picture 2" descr="Analyse exploratoire - Icônes ordinateur gratuites">
-            <a:extLst>
-              <a:ext uri="{FF2B5EF4-FFF2-40B4-BE49-F238E27FC236}">
-                <a16:creationId xmlns:a16="http://schemas.microsoft.com/office/drawing/2014/main" id="{AD618C70-2F2B-E7F8-3413-9BB4F19C3E28}"/>
-              </a:ext>
-            </a:extLst>
-          </p:cNvPr>
-          <p:cNvPicPr>
-            <a:picLocks noChangeAspect="1" noChangeArrowheads="1"/>
-          </p:cNvPicPr>
-          <p:nvPr/>
-        </p:nvPicPr>
-        <p:blipFill>
-          <a:blip r:embed="rId2">
-            <a:extLst>
-              <a:ext uri="{28A0092B-C50C-407E-A947-70E740481C1C}">
-                <a14:useLocalDpi xmlns:a14="http://schemas.microsoft.com/office/drawing/2010/main" val="0"/>
-              </a:ext>
-            </a:extLst>
-          </a:blip>
-          <a:srcRect/>
-          <a:stretch>
-            <a:fillRect/>
-          </a:stretch>
-        </p:blipFill>
-        <p:spPr bwMode="auto">
-          <a:xfrm>
-            <a:off x="6976731" y="1554126"/>
-            <a:ext cx="4876800" cy="4876800"/>
-          </a:xfrm>
-          <a:prstGeom prst="rect">
-            <a:avLst/>
-          </a:prstGeom>
-          <a:noFill/>
-          <a:extLst>
-            <a:ext uri="{909E8E84-426E-40DD-AFC4-6F175D3DCCD1}">
-              <a14:hiddenFill xmlns:a14="http://schemas.microsoft.com/office/drawing/2010/main">
-                <a:solidFill>
-                  <a:srgbClr val="FFFFFF"/>
-                </a:solidFill>
-              </a14:hiddenFill>
-            </a:ext>
-          </a:extLst>
-        </p:spPr>
-      </p:pic>
-    </p:spTree>
-    <p:extLst>
-      <p:ext uri="{BB962C8B-B14F-4D97-AF65-F5344CB8AC3E}">
-        <p14:creationId xmlns:p14="http://schemas.microsoft.com/office/powerpoint/2010/main" val="898818486"/>
-      </p:ext>
-    </p:extLst>
-  </p:cSld>
-  <p:clrMapOvr>
-    <a:masterClrMapping/>
-  </p:clrMapOvr>
-</p:sld>
-</file>
-
-<file path=ppt/slides/slide30.xml><?xml version="1.0" encoding="utf-8"?>
+<file path=ppt/slides/slide29.xml><?xml version="1.0" encoding="utf-8"?>
 <p:sld xmlns:a="http://schemas.openxmlformats.org/drawingml/2006/main" xmlns:r="http://schemas.openxmlformats.org/officeDocument/2006/relationships" xmlns:p="http://schemas.openxmlformats.org/presentationml/2006/main">
   <p:cSld>
     <p:spTree>
@@ -16580,6 +16703,126 @@
     <p:extLst>
       <p:ext uri="{BB962C8B-B14F-4D97-AF65-F5344CB8AC3E}">
         <p14:creationId xmlns:p14="http://schemas.microsoft.com/office/powerpoint/2010/main" val="988253673"/>
+      </p:ext>
+    </p:extLst>
+  </p:cSld>
+  <p:clrMapOvr>
+    <a:masterClrMapping/>
+  </p:clrMapOvr>
+</p:sld>
+</file>
+
+<file path=ppt/slides/slide3.xml><?xml version="1.0" encoding="utf-8"?>
+<p:sld xmlns:a="http://schemas.openxmlformats.org/drawingml/2006/main" xmlns:r="http://schemas.openxmlformats.org/officeDocument/2006/relationships" xmlns:p="http://schemas.openxmlformats.org/presentationml/2006/main">
+  <p:cSld>
+    <p:spTree>
+      <p:nvGrpSpPr>
+        <p:cNvPr id="1" name=""/>
+        <p:cNvGrpSpPr/>
+        <p:nvPr/>
+      </p:nvGrpSpPr>
+      <p:grpSpPr>
+        <a:xfrm>
+          <a:off x="0" y="0"/>
+          <a:ext cx="0" cy="0"/>
+          <a:chOff x="0" y="0"/>
+          <a:chExt cx="0" cy="0"/>
+        </a:xfrm>
+      </p:grpSpPr>
+      <p:sp>
+        <p:nvSpPr>
+          <p:cNvPr id="2" name="Titre 1">
+            <a:extLst>
+              <a:ext uri="{FF2B5EF4-FFF2-40B4-BE49-F238E27FC236}">
+                <a16:creationId xmlns:a16="http://schemas.microsoft.com/office/drawing/2014/main" id="{CA0CB97F-097E-0FEC-42EB-89420D6043A1}"/>
+              </a:ext>
+            </a:extLst>
+          </p:cNvPr>
+          <p:cNvSpPr>
+            <a:spLocks noGrp="1"/>
+          </p:cNvSpPr>
+          <p:nvPr>
+            <p:ph type="title"/>
+          </p:nvPr>
+        </p:nvSpPr>
+        <p:spPr>
+          <a:xfrm>
+            <a:off x="838199" y="365125"/>
+            <a:ext cx="5360581" cy="3824103"/>
+          </a:xfrm>
+        </p:spPr>
+        <p:txBody>
+          <a:bodyPr>
+            <a:normAutofit/>
+          </a:bodyPr>
+          <a:lstStyle/>
+          <a:p>
+            <a:r>
+              <a:rPr lang="fr-FR" sz="6600" dirty="0">
+                <a:solidFill>
+                  <a:schemeClr val="accent1">
+                    <a:lumMod val="75000"/>
+                  </a:schemeClr>
+                </a:solidFill>
+                <a:latin typeface="Segoe UI Black" panose="020B0A02040204020203" pitchFamily="34" charset="0"/>
+                <a:ea typeface="Segoe UI Black" panose="020B0A02040204020203" pitchFamily="34" charset="0"/>
+              </a:rPr>
+              <a:t>Analyse exploratoire des données</a:t>
+            </a:r>
+          </a:p>
+        </p:txBody>
+      </p:sp>
+      <p:pic>
+        <p:nvPicPr>
+          <p:cNvPr id="2050" name="Picture 2" descr="Analyse exploratoire - Icônes ordinateur gratuites">
+            <a:extLst>
+              <a:ext uri="{FF2B5EF4-FFF2-40B4-BE49-F238E27FC236}">
+                <a16:creationId xmlns:a16="http://schemas.microsoft.com/office/drawing/2014/main" id="{AD618C70-2F2B-E7F8-3413-9BB4F19C3E28}"/>
+              </a:ext>
+            </a:extLst>
+          </p:cNvPr>
+          <p:cNvPicPr>
+            <a:picLocks noChangeAspect="1" noChangeArrowheads="1"/>
+          </p:cNvPicPr>
+          <p:nvPr/>
+        </p:nvPicPr>
+        <p:blipFill>
+          <a:blip r:embed="rId2">
+            <a:extLst>
+              <a:ext uri="{28A0092B-C50C-407E-A947-70E740481C1C}">
+                <a14:useLocalDpi xmlns:a14="http://schemas.microsoft.com/office/drawing/2010/main" val="0"/>
+              </a:ext>
+            </a:extLst>
+          </a:blip>
+          <a:srcRect/>
+          <a:stretch>
+            <a:fillRect/>
+          </a:stretch>
+        </p:blipFill>
+        <p:spPr bwMode="auto">
+          <a:xfrm>
+            <a:off x="6976731" y="1554126"/>
+            <a:ext cx="4876800" cy="4876800"/>
+          </a:xfrm>
+          <a:prstGeom prst="rect">
+            <a:avLst/>
+          </a:prstGeom>
+          <a:noFill/>
+          <a:extLst>
+            <a:ext uri="{909E8E84-426E-40DD-AFC4-6F175D3DCCD1}">
+              <a14:hiddenFill xmlns:a14="http://schemas.microsoft.com/office/drawing/2010/main">
+                <a:solidFill>
+                  <a:srgbClr val="FFFFFF"/>
+                </a:solidFill>
+              </a14:hiddenFill>
+            </a:ext>
+          </a:extLst>
+        </p:spPr>
+      </p:pic>
+    </p:spTree>
+    <p:extLst>
+      <p:ext uri="{BB962C8B-B14F-4D97-AF65-F5344CB8AC3E}">
+        <p14:creationId xmlns:p14="http://schemas.microsoft.com/office/powerpoint/2010/main" val="898818486"/>
       </p:ext>
     </p:extLst>
   </p:cSld>
@@ -16642,7 +16885,7 @@
           <a:p>
             <a:r>
               <a:rPr lang="fr-FR" dirty="0"/>
-              <a:t>Valeurs manquantes dans la variable </a:t>
+              <a:t>70% Valeurs manquantes dans la variable </a:t>
             </a:r>
             <a:r>
               <a:rPr lang="fr-FR" i="1" dirty="0">
@@ -16696,13 +16939,7 @@
           <a:p>
             <a:r>
               <a:rPr lang="fr-FR" dirty="0"/>
-              <a:t>Les valeurs manquantes semblent donc potentiellement structurelles plutôt qu'aléatoires</a:t>
-            </a:r>
-          </a:p>
-          <a:p>
-            <a:r>
-              <a:rPr lang="fr-FR" dirty="0"/>
-              <a:t>70% des valeurs sont manquantes</a:t>
+              <a:t>Les valeurs manquantes semblent structurelles plutôt qu'aléatoires</a:t>
             </a:r>
           </a:p>
           <a:p>
@@ -16863,6 +17100,12 @@
             <a:normAutofit/>
           </a:bodyPr>
           <a:lstStyle/>
+          <a:p>
+            <a:r>
+              <a:rPr lang="fr-FR" dirty="0"/>
+              <a:t>Ambiguïté dans la nomenclature des classes</a:t>
+            </a:r>
+          </a:p>
           <a:p>
             <a:r>
               <a:rPr lang="fr-FR" dirty="0"/>
@@ -18920,7 +19163,7 @@
                         <a:buNone/>
                       </a:pPr>
                       <a:r>
-                        <a:rPr lang="fr-FR" sz="1800" b="0" u="none" strike="noStrike">
+                        <a:rPr lang="fr-FR" sz="1800" b="0" u="none" strike="noStrike" dirty="0">
                           <a:solidFill>
                             <a:schemeClr val="bg1"/>
                           </a:solidFill>
@@ -18928,7 +19171,7 @@
                         </a:rPr>
                         <a:t>quelle est la répartition des catégories ?</a:t>
                       </a:r>
-                      <a:endParaRPr lang="fr-FR" sz="1800" b="0" i="0" u="none" strike="noStrike">
+                      <a:endParaRPr lang="fr-FR" sz="1800" b="0" i="0" u="none" strike="noStrike" dirty="0">
                         <a:solidFill>
                           <a:schemeClr val="bg1"/>
                         </a:solidFill>
@@ -19049,7 +19292,7 @@
                         <a:buNone/>
                       </a:pPr>
                       <a:r>
-                        <a:rPr lang="fr-FR" sz="1800" b="0" u="none" strike="noStrike">
+                        <a:rPr lang="fr-FR" sz="1800" b="0" u="none" strike="noStrike" dirty="0">
                           <a:solidFill>
                             <a:schemeClr val="bg1"/>
                           </a:solidFill>
@@ -19057,7 +19300,7 @@
                         </a:rPr>
                         <a:t>quelle proportion de Consumer Claim est manquante ?</a:t>
                       </a:r>
-                      <a:endParaRPr lang="fr-FR" sz="1800" b="0" i="0" u="none" strike="noStrike">
+                      <a:endParaRPr lang="fr-FR" sz="1800" b="0" i="0" u="none" strike="noStrike" dirty="0">
                         <a:solidFill>
                           <a:schemeClr val="bg1"/>
                         </a:solidFill>
@@ -19178,15 +19421,33 @@
                         <a:buNone/>
                       </a:pPr>
                       <a:r>
-                        <a:rPr lang="fr-FR" sz="1800" b="0" u="none" strike="noStrike">
+                        <a:rPr lang="fr-FR" sz="1800" b="0" u="none" strike="noStrike" dirty="0">
                           <a:solidFill>
                             <a:schemeClr val="bg1"/>
                           </a:solidFill>
                           <a:effectLst/>
                         </a:rPr>
-                        <a:t>les valeurs manquantes dépendent-elles de Submitted via ?</a:t>
+                        <a:t>les valeurs manquantes dépendent-elles de </a:t>
                       </a:r>
-                      <a:endParaRPr lang="fr-FR" sz="1800" b="0" i="0" u="none" strike="noStrike">
+                      <a:r>
+                        <a:rPr lang="fr-FR" sz="1800" b="0" u="none" strike="noStrike" dirty="0" err="1">
+                          <a:solidFill>
+                            <a:schemeClr val="bg1"/>
+                          </a:solidFill>
+                          <a:effectLst/>
+                        </a:rPr>
+                        <a:t>Submitted</a:t>
+                      </a:r>
+                      <a:r>
+                        <a:rPr lang="fr-FR" sz="1800" b="0" u="none" strike="noStrike" dirty="0">
+                          <a:solidFill>
+                            <a:schemeClr val="bg1"/>
+                          </a:solidFill>
+                          <a:effectLst/>
+                        </a:rPr>
+                        <a:t> via ?</a:t>
+                      </a:r>
+                      <a:endParaRPr lang="fr-FR" sz="1800" b="0" i="0" u="none" strike="noStrike" dirty="0">
                         <a:solidFill>
                           <a:schemeClr val="bg1"/>
                         </a:solidFill>
@@ -19551,7 +19812,7 @@
                         <a:buNone/>
                       </a:pPr>
                       <a:r>
-                        <a:rPr lang="fr-FR" sz="1800" b="0" u="none" strike="noStrike">
+                        <a:rPr lang="fr-FR" sz="1800" b="0" u="none" strike="noStrike" dirty="0">
                           <a:solidFill>
                             <a:schemeClr val="bg1"/>
                           </a:solidFill>
@@ -19559,7 +19820,7 @@
                         </a:rPr>
                         <a:t>Une réclamation renseignée contient en moyenne environ 1 082 caractères.</a:t>
                       </a:r>
-                      <a:endParaRPr lang="fr-FR" sz="1800" b="0" i="0" u="none" strike="noStrike">
+                      <a:endParaRPr lang="fr-FR" sz="1800" b="0" i="0" u="none" strike="noStrike" dirty="0">
                         <a:solidFill>
                           <a:schemeClr val="bg1"/>
                         </a:solidFill>
